--- a/research/insurtech-2026/保險科技服務優先順序_主管精簡版.pptx
+++ b/research/insurtech-2026/保險科技服務優先順序_主管精簡版.pptx
@@ -16,6 +16,7 @@
     <p:sldId id="256" r:id="rId17"/>
     <p:sldId id="257" r:id="rId18"/>
     <p:sldId id="258" r:id="rId19"/>
+    <p:sldId id="259" r:id="rId20"/>
   </p:sldIdLst>
   <p:sldSz cx="12192000" cy="6858000"/>
   <p:notesSz cx="6858000" cy="9144000"/>
@@ -47069,6 +47070,2639 @@
 </file>
 
 <file path=ppt/slides/slide3.xml><?xml version="1.0" encoding="utf-8"?>
+<p:sld xmlns:a="http://schemas.openxmlformats.org/drawingml/2006/main" xmlns:p="http://schemas.openxmlformats.org/presentationml/2006/main" xmlns:r="http://schemas.openxmlformats.org/officeDocument/2006/relationships">
+  <p:cSld>
+    <p:spTree>
+      <p:nvGrpSpPr>
+        <p:cNvPr id="1" name=""/>
+        <p:cNvGrpSpPr/>
+        <p:nvPr/>
+      </p:nvGrpSpPr>
+      <p:grpSpPr/>
+      <p:sp>
+        <p:nvSpPr>
+          <p:cNvPr id="2" name="Title 1"/>
+          <p:cNvSpPr>
+            <a:spLocks noGrp="1"/>
+          </p:cNvSpPr>
+          <p:nvPr>
+            <p:ph type="title"/>
+          </p:nvPr>
+        </p:nvSpPr>
+        <p:spPr/>
+        <p:txBody>
+          <a:bodyPr/>
+          <a:lstStyle/>
+          <a:p>
+            <a:r>
+              <a:rPr sz="2000">
+                <a:latin typeface="Microsoft JhengHei"/>
+              </a:rPr>
+              <a:t>MBB 與四大都在推代理型 AI 藍圖或平台；我們的空間在在地確信、IFRS 17 資料與駐點人力</a:t>
+            </a:r>
+          </a:p>
+        </p:txBody>
+      </p:sp>
+      <p:sp>
+        <p:nvSpPr>
+          <p:cNvPr id="3" name="Rectangle 2"/>
+          <p:cNvSpPr/>
+          <p:nvPr/>
+        </p:nvSpPr>
+        <p:spPr>
+          <a:xfrm>
+            <a:off x="411480" y="1280160"/>
+            <a:ext cx="1289304" cy="347472"/>
+          </a:xfrm>
+          <a:prstGeom prst="rect">
+            <a:avLst/>
+          </a:prstGeom>
+          <a:solidFill>
+            <a:srgbClr val="FD5108"/>
+          </a:solidFill>
+          <a:ln>
+            <a:noFill/>
+          </a:ln>
+          <a:effectLst/>
+        </p:spPr>
+        <p:style>
+          <a:lnRef idx="1">
+            <a:schemeClr val="accent1"/>
+          </a:lnRef>
+          <a:fillRef idx="3">
+            <a:schemeClr val="accent1"/>
+          </a:fillRef>
+          <a:effectRef idx="2">
+            <a:schemeClr val="accent1"/>
+          </a:effectRef>
+          <a:fontRef idx="minor">
+            <a:schemeClr val="lt1"/>
+          </a:fontRef>
+        </p:style>
+        <p:txBody>
+          <a:bodyPr rtlCol="0" anchor="ctr" wrap="square" lIns="73152" rIns="73152" tIns="73152" bIns="73152"/>
+          <a:lstStyle/>
+          <a:p>
+            <a:pPr algn="l">
+              <a:spcAft>
+                <a:spcPts val="200"/>
+              </a:spcAft>
+            </a:pPr>
+            <a:r>
+              <a:rPr sz="1100" b="1">
+                <a:solidFill>
+                  <a:srgbClr val="FFFFFF"/>
+                </a:solidFill>
+                <a:latin typeface="Microsoft JhengHei"/>
+              </a:rPr>
+              <a:t>機構</a:t>
+            </a:r>
+          </a:p>
+        </p:txBody>
+      </p:sp>
+      <p:sp>
+        <p:nvSpPr>
+          <p:cNvPr id="4" name="Rectangle 3"/>
+          <p:cNvSpPr/>
+          <p:nvPr/>
+        </p:nvSpPr>
+        <p:spPr>
+          <a:xfrm>
+            <a:off x="1737360" y="1280160"/>
+            <a:ext cx="4169663" cy="347472"/>
+          </a:xfrm>
+          <a:prstGeom prst="rect">
+            <a:avLst/>
+          </a:prstGeom>
+          <a:solidFill>
+            <a:srgbClr val="FD5108"/>
+          </a:solidFill>
+          <a:ln>
+            <a:noFill/>
+          </a:ln>
+          <a:effectLst/>
+        </p:spPr>
+        <p:style>
+          <a:lnRef idx="1">
+            <a:schemeClr val="accent1"/>
+          </a:lnRef>
+          <a:fillRef idx="3">
+            <a:schemeClr val="accent1"/>
+          </a:fillRef>
+          <a:effectRef idx="2">
+            <a:schemeClr val="accent1"/>
+          </a:effectRef>
+          <a:fontRef idx="minor">
+            <a:schemeClr val="lt1"/>
+          </a:fontRef>
+        </p:style>
+        <p:txBody>
+          <a:bodyPr rtlCol="0" anchor="ctr" wrap="square" lIns="73152" rIns="73152" tIns="73152" bIns="73152"/>
+          <a:lstStyle/>
+          <a:p>
+            <a:pPr algn="l">
+              <a:spcAft>
+                <a:spcPts val="200"/>
+              </a:spcAft>
+            </a:pPr>
+            <a:r>
+              <a:rPr sz="1100" b="1">
+                <a:solidFill>
+                  <a:srgbClr val="FFFFFF"/>
+                </a:solidFill>
+                <a:latin typeface="Microsoft JhengHei"/>
+              </a:rPr>
+              <a:t>保險 AI 主力產品／方法</a:t>
+            </a:r>
+          </a:p>
+        </p:txBody>
+      </p:sp>
+      <p:sp>
+        <p:nvSpPr>
+          <p:cNvPr id="5" name="Rectangle 4"/>
+          <p:cNvSpPr/>
+          <p:nvPr/>
+        </p:nvSpPr>
+        <p:spPr>
+          <a:xfrm>
+            <a:off x="5943600" y="1280160"/>
+            <a:ext cx="1837943" cy="347472"/>
+          </a:xfrm>
+          <a:prstGeom prst="rect">
+            <a:avLst/>
+          </a:prstGeom>
+          <a:solidFill>
+            <a:srgbClr val="FD5108"/>
+          </a:solidFill>
+          <a:ln>
+            <a:noFill/>
+          </a:ln>
+          <a:effectLst/>
+        </p:spPr>
+        <p:style>
+          <a:lnRef idx="1">
+            <a:schemeClr val="accent1"/>
+          </a:lnRef>
+          <a:fillRef idx="3">
+            <a:schemeClr val="accent1"/>
+          </a:fillRef>
+          <a:effectRef idx="2">
+            <a:schemeClr val="accent1"/>
+          </a:effectRef>
+          <a:fontRef idx="minor">
+            <a:schemeClr val="lt1"/>
+          </a:fontRef>
+        </p:style>
+        <p:txBody>
+          <a:bodyPr rtlCol="0" anchor="ctr" wrap="square" lIns="73152" rIns="73152" tIns="73152" bIns="73152"/>
+          <a:lstStyle/>
+          <a:p>
+            <a:pPr algn="l">
+              <a:spcAft>
+                <a:spcPts val="200"/>
+              </a:spcAft>
+            </a:pPr>
+            <a:r>
+              <a:rPr sz="1100" b="1">
+                <a:solidFill>
+                  <a:srgbClr val="FFFFFF"/>
+                </a:solidFill>
+                <a:latin typeface="Microsoft JhengHei"/>
+              </a:rPr>
+              <a:t>主攻</a:t>
+            </a:r>
+          </a:p>
+        </p:txBody>
+      </p:sp>
+      <p:sp>
+        <p:nvSpPr>
+          <p:cNvPr id="6" name="Rectangle 5"/>
+          <p:cNvSpPr/>
+          <p:nvPr/>
+        </p:nvSpPr>
+        <p:spPr>
+          <a:xfrm>
+            <a:off x="7818120" y="1280160"/>
+            <a:ext cx="2478024" cy="347472"/>
+          </a:xfrm>
+          <a:prstGeom prst="rect">
+            <a:avLst/>
+          </a:prstGeom>
+          <a:solidFill>
+            <a:srgbClr val="FD5108"/>
+          </a:solidFill>
+          <a:ln>
+            <a:noFill/>
+          </a:ln>
+          <a:effectLst/>
+        </p:spPr>
+        <p:style>
+          <a:lnRef idx="1">
+            <a:schemeClr val="accent1"/>
+          </a:lnRef>
+          <a:fillRef idx="3">
+            <a:schemeClr val="accent1"/>
+          </a:fillRef>
+          <a:effectRef idx="2">
+            <a:schemeClr val="accent1"/>
+          </a:effectRef>
+          <a:fontRef idx="minor">
+            <a:schemeClr val="lt1"/>
+          </a:fontRef>
+        </p:style>
+        <p:txBody>
+          <a:bodyPr rtlCol="0" anchor="ctr" wrap="square" lIns="73152" rIns="73152" tIns="73152" bIns="73152"/>
+          <a:lstStyle/>
+          <a:p>
+            <a:pPr algn="l">
+              <a:spcAft>
+                <a:spcPts val="200"/>
+              </a:spcAft>
+            </a:pPr>
+            <a:r>
+              <a:rPr sz="1100" b="1">
+                <a:solidFill>
+                  <a:srgbClr val="FFFFFF"/>
+                </a:solidFill>
+                <a:latin typeface="Microsoft JhengHei"/>
+              </a:rPr>
+              <a:t>可能侷限（推論）</a:t>
+            </a:r>
+          </a:p>
+        </p:txBody>
+      </p:sp>
+      <p:sp>
+        <p:nvSpPr>
+          <p:cNvPr id="7" name="Rectangle 6"/>
+          <p:cNvSpPr/>
+          <p:nvPr/>
+        </p:nvSpPr>
+        <p:spPr>
+          <a:xfrm>
+            <a:off x="10332720" y="1280160"/>
+            <a:ext cx="1426464" cy="347472"/>
+          </a:xfrm>
+          <a:prstGeom prst="rect">
+            <a:avLst/>
+          </a:prstGeom>
+          <a:solidFill>
+            <a:srgbClr val="FD5108"/>
+          </a:solidFill>
+          <a:ln>
+            <a:noFill/>
+          </a:ln>
+          <a:effectLst/>
+        </p:spPr>
+        <p:style>
+          <a:lnRef idx="1">
+            <a:schemeClr val="accent1"/>
+          </a:lnRef>
+          <a:fillRef idx="3">
+            <a:schemeClr val="accent1"/>
+          </a:fillRef>
+          <a:effectRef idx="2">
+            <a:schemeClr val="accent1"/>
+          </a:effectRef>
+          <a:fontRef idx="minor">
+            <a:schemeClr val="lt1"/>
+          </a:fontRef>
+        </p:style>
+        <p:txBody>
+          <a:bodyPr rtlCol="0" anchor="ctr" wrap="square" lIns="73152" rIns="73152" tIns="73152" bIns="73152"/>
+          <a:lstStyle/>
+          <a:p>
+            <a:pPr algn="l">
+              <a:spcAft>
+                <a:spcPts val="200"/>
+              </a:spcAft>
+            </a:pPr>
+            <a:r>
+              <a:rPr sz="1100" b="1">
+                <a:solidFill>
+                  <a:srgbClr val="FFFFFF"/>
+                </a:solidFill>
+                <a:latin typeface="Microsoft JhengHei"/>
+              </a:rPr>
+              <a:t>官網／原文</a:t>
+            </a:r>
+          </a:p>
+        </p:txBody>
+      </p:sp>
+      <p:sp>
+        <p:nvSpPr>
+          <p:cNvPr id="8" name="Rectangle 7"/>
+          <p:cNvSpPr/>
+          <p:nvPr/>
+        </p:nvSpPr>
+        <p:spPr>
+          <a:xfrm>
+            <a:off x="411480" y="1664207"/>
+            <a:ext cx="1289304" cy="566928"/>
+          </a:xfrm>
+          <a:prstGeom prst="rect">
+            <a:avLst/>
+          </a:prstGeom>
+          <a:solidFill>
+            <a:srgbClr val="F3F3F3"/>
+          </a:solidFill>
+          <a:ln>
+            <a:noFill/>
+          </a:ln>
+          <a:effectLst/>
+        </p:spPr>
+        <p:style>
+          <a:lnRef idx="1">
+            <a:schemeClr val="accent1"/>
+          </a:lnRef>
+          <a:fillRef idx="3">
+            <a:schemeClr val="accent1"/>
+          </a:fillRef>
+          <a:effectRef idx="2">
+            <a:schemeClr val="accent1"/>
+          </a:effectRef>
+          <a:fontRef idx="minor">
+            <a:schemeClr val="lt1"/>
+          </a:fontRef>
+        </p:style>
+        <p:txBody>
+          <a:bodyPr rtlCol="0" anchor="ctr" wrap="square" lIns="64008" rIns="64008" tIns="64008" bIns="64008"/>
+          <a:lstStyle/>
+          <a:p>
+            <a:pPr algn="l">
+              <a:spcAft>
+                <a:spcPts val="200"/>
+              </a:spcAft>
+            </a:pPr>
+            <a:r>
+              <a:rPr sz="1150" b="1">
+                <a:solidFill>
+                  <a:srgbClr val="1E1E1E"/>
+                </a:solidFill>
+                <a:latin typeface="Microsoft JhengHei"/>
+              </a:rPr>
+              <a:t>McKinsey</a:t>
+            </a:r>
+          </a:p>
+          <a:p>
+            <a:pPr algn="l">
+              <a:spcAft>
+                <a:spcPts val="200"/>
+              </a:spcAft>
+            </a:pPr>
+            <a:r>
+              <a:rPr sz="900" b="0">
+                <a:solidFill>
+                  <a:srgbClr val="6B6B6B"/>
+                </a:solidFill>
+                <a:latin typeface="Microsoft JhengHei"/>
+              </a:rPr>
+              <a:t>MBB</a:t>
+            </a:r>
+          </a:p>
+        </p:txBody>
+      </p:sp>
+      <p:sp>
+        <p:nvSpPr>
+          <p:cNvPr id="9" name="Rectangle 8"/>
+          <p:cNvSpPr/>
+          <p:nvPr/>
+        </p:nvSpPr>
+        <p:spPr>
+          <a:xfrm>
+            <a:off x="1737360" y="1664207"/>
+            <a:ext cx="4169663" cy="566928"/>
+          </a:xfrm>
+          <a:prstGeom prst="rect">
+            <a:avLst/>
+          </a:prstGeom>
+          <a:solidFill>
+            <a:srgbClr val="F3F3F3"/>
+          </a:solidFill>
+          <a:ln>
+            <a:noFill/>
+          </a:ln>
+          <a:effectLst/>
+        </p:spPr>
+        <p:style>
+          <a:lnRef idx="1">
+            <a:schemeClr val="accent1"/>
+          </a:lnRef>
+          <a:fillRef idx="3">
+            <a:schemeClr val="accent1"/>
+          </a:fillRef>
+          <a:effectRef idx="2">
+            <a:schemeClr val="accent1"/>
+          </a:effectRef>
+          <a:fontRef idx="minor">
+            <a:schemeClr val="lt1"/>
+          </a:fontRef>
+        </p:style>
+        <p:txBody>
+          <a:bodyPr rtlCol="0" anchor="ctr" wrap="square" lIns="64008" rIns="64008" tIns="64008" bIns="64008"/>
+          <a:lstStyle/>
+          <a:p>
+            <a:pPr algn="l">
+              <a:spcAft>
+                <a:spcPts val="200"/>
+              </a:spcAft>
+            </a:pPr>
+            <a:r>
+              <a:rPr sz="1000" b="0">
+                <a:solidFill>
+                  <a:srgbClr val="1E1E1E"/>
+                </a:solidFill>
+                <a:latin typeface="Microsoft JhengHei"/>
+              </a:rPr>
+              <a:t>核保作業系統 UWOS：45 項能力、6 大領域；代理型 AI 核心現代化（原子化代理能力庫）</a:t>
+            </a:r>
+          </a:p>
+        </p:txBody>
+      </p:sp>
+      <p:sp>
+        <p:nvSpPr>
+          <p:cNvPr id="10" name="Rectangle 9"/>
+          <p:cNvSpPr/>
+          <p:nvPr/>
+        </p:nvSpPr>
+        <p:spPr>
+          <a:xfrm>
+            <a:off x="5943600" y="1664207"/>
+            <a:ext cx="1837943" cy="566928"/>
+          </a:xfrm>
+          <a:prstGeom prst="rect">
+            <a:avLst/>
+          </a:prstGeom>
+          <a:solidFill>
+            <a:srgbClr val="F3F3F3"/>
+          </a:solidFill>
+          <a:ln>
+            <a:noFill/>
+          </a:ln>
+          <a:effectLst/>
+        </p:spPr>
+        <p:style>
+          <a:lnRef idx="1">
+            <a:schemeClr val="accent1"/>
+          </a:lnRef>
+          <a:fillRef idx="3">
+            <a:schemeClr val="accent1"/>
+          </a:fillRef>
+          <a:effectRef idx="2">
+            <a:schemeClr val="accent1"/>
+          </a:effectRef>
+          <a:fontRef idx="minor">
+            <a:schemeClr val="lt1"/>
+          </a:fontRef>
+        </p:style>
+        <p:txBody>
+          <a:bodyPr rtlCol="0" anchor="ctr" wrap="square" lIns="64008" rIns="64008" tIns="64008" bIns="64008"/>
+          <a:lstStyle/>
+          <a:p>
+            <a:pPr algn="l">
+              <a:spcAft>
+                <a:spcPts val="200"/>
+              </a:spcAft>
+            </a:pPr>
+            <a:r>
+              <a:rPr sz="1000" b="0">
+                <a:solidFill>
+                  <a:srgbClr val="1E1E1E"/>
+                </a:solidFill>
+                <a:latin typeface="Microsoft JhengHei"/>
+              </a:rPr>
+              <a:t>商業與專業險核保、核心重寫</a:t>
+            </a:r>
+          </a:p>
+        </p:txBody>
+      </p:sp>
+      <p:sp>
+        <p:nvSpPr>
+          <p:cNvPr id="11" name="Rectangle 10"/>
+          <p:cNvSpPr/>
+          <p:nvPr/>
+        </p:nvSpPr>
+        <p:spPr>
+          <a:xfrm>
+            <a:off x="7818120" y="1664207"/>
+            <a:ext cx="2478024" cy="566928"/>
+          </a:xfrm>
+          <a:prstGeom prst="rect">
+            <a:avLst/>
+          </a:prstGeom>
+          <a:solidFill>
+            <a:srgbClr val="F3F3F3"/>
+          </a:solidFill>
+          <a:ln>
+            <a:noFill/>
+          </a:ln>
+          <a:effectLst/>
+        </p:spPr>
+        <p:style>
+          <a:lnRef idx="1">
+            <a:schemeClr val="accent1"/>
+          </a:lnRef>
+          <a:fillRef idx="3">
+            <a:schemeClr val="accent1"/>
+          </a:fillRef>
+          <a:effectRef idx="2">
+            <a:schemeClr val="accent1"/>
+          </a:effectRef>
+          <a:fontRef idx="minor">
+            <a:schemeClr val="lt1"/>
+          </a:fontRef>
+        </p:style>
+        <p:txBody>
+          <a:bodyPr rtlCol="0" anchor="ctr" wrap="square" lIns="64008" rIns="64008" tIns="64008" bIns="64008"/>
+          <a:lstStyle/>
+          <a:p>
+            <a:pPr algn="l">
+              <a:spcAft>
+                <a:spcPts val="200"/>
+              </a:spcAft>
+            </a:pPr>
+            <a:r>
+              <a:rPr sz="1000" b="0">
+                <a:solidFill>
+                  <a:srgbClr val="1E1E1E"/>
+                </a:solidFill>
+                <a:latin typeface="Microsoft JhengHei"/>
+              </a:rPr>
+              <a:t>在台缺在地法規確信與長期駐點人力</a:t>
+            </a:r>
+          </a:p>
+        </p:txBody>
+      </p:sp>
+      <p:sp>
+        <p:nvSpPr>
+          <p:cNvPr id="12" name="Rectangle 11"/>
+          <p:cNvSpPr/>
+          <p:nvPr/>
+        </p:nvSpPr>
+        <p:spPr>
+          <a:xfrm>
+            <a:off x="10332720" y="1664207"/>
+            <a:ext cx="1426464" cy="566928"/>
+          </a:xfrm>
+          <a:prstGeom prst="rect">
+            <a:avLst/>
+          </a:prstGeom>
+          <a:solidFill>
+            <a:srgbClr val="F3F3F3"/>
+          </a:solidFill>
+          <a:ln>
+            <a:noFill/>
+          </a:ln>
+          <a:effectLst/>
+        </p:spPr>
+        <p:style>
+          <a:lnRef idx="1">
+            <a:schemeClr val="accent1"/>
+          </a:lnRef>
+          <a:fillRef idx="3">
+            <a:schemeClr val="accent1"/>
+          </a:fillRef>
+          <a:effectRef idx="2">
+            <a:schemeClr val="accent1"/>
+          </a:effectRef>
+          <a:fontRef idx="minor">
+            <a:schemeClr val="lt1"/>
+          </a:fontRef>
+        </p:style>
+        <p:txBody>
+          <a:bodyPr rtlCol="0" anchor="ctr" wrap="square" lIns="64008" rIns="64008" tIns="64008" bIns="64008"/>
+          <a:lstStyle/>
+          <a:p>
+            <a:pPr algn="l">
+              <a:spcAft>
+                <a:spcPts val="200"/>
+              </a:spcAft>
+            </a:pPr>
+            <a:r>
+              <a:rPr sz="950" b="0" u="sng">
+                <a:solidFill>
+                  <a:srgbClr val="1F5FBF"/>
+                </a:solidFill>
+                <a:latin typeface="Microsoft JhengHei"/>
+                <a:hlinkClick r:id="rId2"/>
+              </a:rPr>
+              <a:t>UWOS</a:t>
+            </a:r>
+          </a:p>
+          <a:p>
+            <a:pPr algn="l">
+              <a:spcAft>
+                <a:spcPts val="200"/>
+              </a:spcAft>
+            </a:pPr>
+            <a:r>
+              <a:rPr sz="950" b="0" u="sng">
+                <a:solidFill>
+                  <a:srgbClr val="1F5FBF"/>
+                </a:solidFill>
+                <a:latin typeface="Microsoft JhengHei"/>
+                <a:hlinkClick r:id="rId3"/>
+              </a:rPr>
+              <a:t>核心現代化</a:t>
+            </a:r>
+          </a:p>
+        </p:txBody>
+      </p:sp>
+      <p:sp>
+        <p:nvSpPr>
+          <p:cNvPr id="13" name="Rectangle 12"/>
+          <p:cNvSpPr/>
+          <p:nvPr/>
+        </p:nvSpPr>
+        <p:spPr>
+          <a:xfrm>
+            <a:off x="411480" y="2267712"/>
+            <a:ext cx="1289304" cy="566928"/>
+          </a:xfrm>
+          <a:prstGeom prst="rect">
+            <a:avLst/>
+          </a:prstGeom>
+          <a:solidFill>
+            <a:srgbClr val="FFFFFF"/>
+          </a:solidFill>
+          <a:ln>
+            <a:noFill/>
+          </a:ln>
+          <a:effectLst/>
+        </p:spPr>
+        <p:style>
+          <a:lnRef idx="1">
+            <a:schemeClr val="accent1"/>
+          </a:lnRef>
+          <a:fillRef idx="3">
+            <a:schemeClr val="accent1"/>
+          </a:fillRef>
+          <a:effectRef idx="2">
+            <a:schemeClr val="accent1"/>
+          </a:effectRef>
+          <a:fontRef idx="minor">
+            <a:schemeClr val="lt1"/>
+          </a:fontRef>
+        </p:style>
+        <p:txBody>
+          <a:bodyPr rtlCol="0" anchor="ctr" wrap="square" lIns="64008" rIns="64008" tIns="64008" bIns="64008"/>
+          <a:lstStyle/>
+          <a:p>
+            <a:pPr algn="l">
+              <a:spcAft>
+                <a:spcPts val="200"/>
+              </a:spcAft>
+            </a:pPr>
+            <a:r>
+              <a:rPr sz="1150" b="1">
+                <a:solidFill>
+                  <a:srgbClr val="1E1E1E"/>
+                </a:solidFill>
+                <a:latin typeface="Microsoft JhengHei"/>
+              </a:rPr>
+              <a:t>BCG</a:t>
+            </a:r>
+          </a:p>
+          <a:p>
+            <a:pPr algn="l">
+              <a:spcAft>
+                <a:spcPts val="200"/>
+              </a:spcAft>
+            </a:pPr>
+            <a:r>
+              <a:rPr sz="900" b="0">
+                <a:solidFill>
+                  <a:srgbClr val="6B6B6B"/>
+                </a:solidFill>
+                <a:latin typeface="Microsoft JhengHei"/>
+              </a:rPr>
+              <a:t>MBB</a:t>
+            </a:r>
+          </a:p>
+        </p:txBody>
+      </p:sp>
+      <p:sp>
+        <p:nvSpPr>
+          <p:cNvPr id="14" name="Rectangle 13"/>
+          <p:cNvSpPr/>
+          <p:nvPr/>
+        </p:nvSpPr>
+        <p:spPr>
+          <a:xfrm>
+            <a:off x="1737360" y="2267712"/>
+            <a:ext cx="4169663" cy="566928"/>
+          </a:xfrm>
+          <a:prstGeom prst="rect">
+            <a:avLst/>
+          </a:prstGeom>
+          <a:solidFill>
+            <a:srgbClr val="FFFFFF"/>
+          </a:solidFill>
+          <a:ln>
+            <a:noFill/>
+          </a:ln>
+          <a:effectLst/>
+        </p:spPr>
+        <p:style>
+          <a:lnRef idx="1">
+            <a:schemeClr val="accent1"/>
+          </a:lnRef>
+          <a:fillRef idx="3">
+            <a:schemeClr val="accent1"/>
+          </a:fillRef>
+          <a:effectRef idx="2">
+            <a:schemeClr val="accent1"/>
+          </a:effectRef>
+          <a:fontRef idx="minor">
+            <a:schemeClr val="lt1"/>
+          </a:fontRef>
+        </p:style>
+        <p:txBody>
+          <a:bodyPr rtlCol="0" anchor="ctr" wrap="square" lIns="64008" rIns="64008" tIns="64008" bIns="64008"/>
+          <a:lstStyle/>
+          <a:p>
+            <a:pPr algn="l">
+              <a:spcAft>
+                <a:spcPts val="200"/>
+              </a:spcAft>
+            </a:pPr>
+            <a:r>
+              <a:rPr sz="1000" b="0">
+                <a:solidFill>
+                  <a:srgbClr val="1E1E1E"/>
+                </a:solidFill>
+                <a:latin typeface="Microsoft JhengHei"/>
+              </a:rPr>
+              <a:t>「AI-First 產險公司」三階段藍圖；亞太保險代理型 AI 白皮書（資源 70% 放在人與變革）</a:t>
+            </a:r>
+          </a:p>
+        </p:txBody>
+      </p:sp>
+      <p:sp>
+        <p:nvSpPr>
+          <p:cNvPr id="15" name="Rectangle 14"/>
+          <p:cNvSpPr/>
+          <p:nvPr/>
+        </p:nvSpPr>
+        <p:spPr>
+          <a:xfrm>
+            <a:off x="5943600" y="2267712"/>
+            <a:ext cx="1837943" cy="566928"/>
+          </a:xfrm>
+          <a:prstGeom prst="rect">
+            <a:avLst/>
+          </a:prstGeom>
+          <a:solidFill>
+            <a:srgbClr val="FFFFFF"/>
+          </a:solidFill>
+          <a:ln>
+            <a:noFill/>
+          </a:ln>
+          <a:effectLst/>
+        </p:spPr>
+        <p:style>
+          <a:lnRef idx="1">
+            <a:schemeClr val="accent1"/>
+          </a:lnRef>
+          <a:fillRef idx="3">
+            <a:schemeClr val="accent1"/>
+          </a:fillRef>
+          <a:effectRef idx="2">
+            <a:schemeClr val="accent1"/>
+          </a:effectRef>
+          <a:fontRef idx="minor">
+            <a:schemeClr val="lt1"/>
+          </a:fontRef>
+        </p:style>
+        <p:txBody>
+          <a:bodyPr rtlCol="0" anchor="ctr" wrap="square" lIns="64008" rIns="64008" tIns="64008" bIns="64008"/>
+          <a:lstStyle/>
+          <a:p>
+            <a:pPr algn="l">
+              <a:spcAft>
+                <a:spcPts val="200"/>
+              </a:spcAft>
+            </a:pPr>
+            <a:r>
+              <a:rPr sz="1000" b="0">
+                <a:solidFill>
+                  <a:srgbClr val="1E1E1E"/>
+                </a:solidFill>
+                <a:latin typeface="Microsoft JhengHei"/>
+              </a:rPr>
+              <a:t>策略藍圖、組織變革</a:t>
+            </a:r>
+          </a:p>
+        </p:txBody>
+      </p:sp>
+      <p:sp>
+        <p:nvSpPr>
+          <p:cNvPr id="16" name="Rectangle 15"/>
+          <p:cNvSpPr/>
+          <p:nvPr/>
+        </p:nvSpPr>
+        <p:spPr>
+          <a:xfrm>
+            <a:off x="7818120" y="2267712"/>
+            <a:ext cx="2478024" cy="566928"/>
+          </a:xfrm>
+          <a:prstGeom prst="rect">
+            <a:avLst/>
+          </a:prstGeom>
+          <a:solidFill>
+            <a:srgbClr val="FFFFFF"/>
+          </a:solidFill>
+          <a:ln>
+            <a:noFill/>
+          </a:ln>
+          <a:effectLst/>
+        </p:spPr>
+        <p:style>
+          <a:lnRef idx="1">
+            <a:schemeClr val="accent1"/>
+          </a:lnRef>
+          <a:fillRef idx="3">
+            <a:schemeClr val="accent1"/>
+          </a:fillRef>
+          <a:effectRef idx="2">
+            <a:schemeClr val="accent1"/>
+          </a:effectRef>
+          <a:fontRef idx="minor">
+            <a:schemeClr val="lt1"/>
+          </a:fontRef>
+        </p:style>
+        <p:txBody>
+          <a:bodyPr rtlCol="0" anchor="ctr" wrap="square" lIns="64008" rIns="64008" tIns="64008" bIns="64008"/>
+          <a:lstStyle/>
+          <a:p>
+            <a:pPr algn="l">
+              <a:spcAft>
+                <a:spcPts val="200"/>
+              </a:spcAft>
+            </a:pPr>
+            <a:r>
+              <a:rPr sz="1000" b="0">
+                <a:solidFill>
+                  <a:srgbClr val="1E1E1E"/>
+                </a:solidFill>
+                <a:latin typeface="Microsoft JhengHei"/>
+              </a:rPr>
+              <a:t>偏策略與變革設計，系統落地多需另找夥伴</a:t>
+            </a:r>
+          </a:p>
+        </p:txBody>
+      </p:sp>
+      <p:sp>
+        <p:nvSpPr>
+          <p:cNvPr id="17" name="Rectangle 16"/>
+          <p:cNvSpPr/>
+          <p:nvPr/>
+        </p:nvSpPr>
+        <p:spPr>
+          <a:xfrm>
+            <a:off x="10332720" y="2267712"/>
+            <a:ext cx="1426464" cy="566928"/>
+          </a:xfrm>
+          <a:prstGeom prst="rect">
+            <a:avLst/>
+          </a:prstGeom>
+          <a:solidFill>
+            <a:srgbClr val="FFFFFF"/>
+          </a:solidFill>
+          <a:ln>
+            <a:noFill/>
+          </a:ln>
+          <a:effectLst/>
+        </p:spPr>
+        <p:style>
+          <a:lnRef idx="1">
+            <a:schemeClr val="accent1"/>
+          </a:lnRef>
+          <a:fillRef idx="3">
+            <a:schemeClr val="accent1"/>
+          </a:fillRef>
+          <a:effectRef idx="2">
+            <a:schemeClr val="accent1"/>
+          </a:effectRef>
+          <a:fontRef idx="minor">
+            <a:schemeClr val="lt1"/>
+          </a:fontRef>
+        </p:style>
+        <p:txBody>
+          <a:bodyPr rtlCol="0" anchor="ctr" wrap="square" lIns="64008" rIns="64008" tIns="64008" bIns="64008"/>
+          <a:lstStyle/>
+          <a:p>
+            <a:pPr algn="l">
+              <a:spcAft>
+                <a:spcPts val="200"/>
+              </a:spcAft>
+            </a:pPr>
+            <a:r>
+              <a:rPr sz="950" b="0" u="sng">
+                <a:solidFill>
+                  <a:srgbClr val="1F5FBF"/>
+                </a:solidFill>
+                <a:latin typeface="Microsoft JhengHei"/>
+                <a:hlinkClick r:id="rId4"/>
+              </a:rPr>
+              <a:t>亞太白皮書</a:t>
+            </a:r>
+          </a:p>
+          <a:p>
+            <a:pPr algn="l">
+              <a:spcAft>
+                <a:spcPts val="200"/>
+              </a:spcAft>
+            </a:pPr>
+            <a:r>
+              <a:rPr sz="950" b="0" u="sng">
+                <a:solidFill>
+                  <a:srgbClr val="1F5FBF"/>
+                </a:solidFill>
+                <a:latin typeface="Microsoft JhengHei"/>
+                <a:hlinkClick r:id="rId5"/>
+              </a:rPr>
+              <a:t>產險藍圖</a:t>
+            </a:r>
+          </a:p>
+        </p:txBody>
+      </p:sp>
+      <p:sp>
+        <p:nvSpPr>
+          <p:cNvPr id="18" name="Rectangle 17"/>
+          <p:cNvSpPr/>
+          <p:nvPr/>
+        </p:nvSpPr>
+        <p:spPr>
+          <a:xfrm>
+            <a:off x="411480" y="2871215"/>
+            <a:ext cx="1289304" cy="566928"/>
+          </a:xfrm>
+          <a:prstGeom prst="rect">
+            <a:avLst/>
+          </a:prstGeom>
+          <a:solidFill>
+            <a:srgbClr val="F3F3F3"/>
+          </a:solidFill>
+          <a:ln>
+            <a:noFill/>
+          </a:ln>
+          <a:effectLst/>
+        </p:spPr>
+        <p:style>
+          <a:lnRef idx="1">
+            <a:schemeClr val="accent1"/>
+          </a:lnRef>
+          <a:fillRef idx="3">
+            <a:schemeClr val="accent1"/>
+          </a:fillRef>
+          <a:effectRef idx="2">
+            <a:schemeClr val="accent1"/>
+          </a:effectRef>
+          <a:fontRef idx="minor">
+            <a:schemeClr val="lt1"/>
+          </a:fontRef>
+        </p:style>
+        <p:txBody>
+          <a:bodyPr rtlCol="0" anchor="ctr" wrap="square" lIns="64008" rIns="64008" tIns="64008" bIns="64008"/>
+          <a:lstStyle/>
+          <a:p>
+            <a:pPr algn="l">
+              <a:spcAft>
+                <a:spcPts val="200"/>
+              </a:spcAft>
+            </a:pPr>
+            <a:r>
+              <a:rPr sz="1150" b="1">
+                <a:solidFill>
+                  <a:srgbClr val="1E1E1E"/>
+                </a:solidFill>
+                <a:latin typeface="Microsoft JhengHei"/>
+              </a:rPr>
+              <a:t>Bain</a:t>
+            </a:r>
+          </a:p>
+          <a:p>
+            <a:pPr algn="l">
+              <a:spcAft>
+                <a:spcPts val="200"/>
+              </a:spcAft>
+            </a:pPr>
+            <a:r>
+              <a:rPr sz="900" b="0">
+                <a:solidFill>
+                  <a:srgbClr val="6B6B6B"/>
+                </a:solidFill>
+                <a:latin typeface="Microsoft JhengHei"/>
+              </a:rPr>
+              <a:t>MBB</a:t>
+            </a:r>
+          </a:p>
+        </p:txBody>
+      </p:sp>
+      <p:sp>
+        <p:nvSpPr>
+          <p:cNvPr id="19" name="Rectangle 18"/>
+          <p:cNvSpPr/>
+          <p:nvPr/>
+        </p:nvSpPr>
+        <p:spPr>
+          <a:xfrm>
+            <a:off x="1737360" y="2871215"/>
+            <a:ext cx="4169663" cy="566928"/>
+          </a:xfrm>
+          <a:prstGeom prst="rect">
+            <a:avLst/>
+          </a:prstGeom>
+          <a:solidFill>
+            <a:srgbClr val="F3F3F3"/>
+          </a:solidFill>
+          <a:ln>
+            <a:noFill/>
+          </a:ln>
+          <a:effectLst/>
+        </p:spPr>
+        <p:style>
+          <a:lnRef idx="1">
+            <a:schemeClr val="accent1"/>
+          </a:lnRef>
+          <a:fillRef idx="3">
+            <a:schemeClr val="accent1"/>
+          </a:fillRef>
+          <a:effectRef idx="2">
+            <a:schemeClr val="accent1"/>
+          </a:effectRef>
+          <a:fontRef idx="minor">
+            <a:schemeClr val="lt1"/>
+          </a:fontRef>
+        </p:style>
+        <p:txBody>
+          <a:bodyPr rtlCol="0" anchor="ctr" wrap="square" lIns="64008" rIns="64008" tIns="64008" bIns="64008"/>
+          <a:lstStyle/>
+          <a:p>
+            <a:pPr algn="l">
+              <a:spcAft>
+                <a:spcPts val="200"/>
+              </a:spcAft>
+            </a:pPr>
+            <a:r>
+              <a:rPr sz="1000" b="0">
+                <a:solidFill>
+                  <a:srgbClr val="1E1E1E"/>
+                </a:solidFill>
+                <a:latin typeface="Microsoft JhengHei"/>
+              </a:rPr>
+              <a:t>亞太保險公司以 AI 重塑理賠與客服案例；保險通路 GenAI 年效益逾 500 億美元（2024）</a:t>
+            </a:r>
+          </a:p>
+        </p:txBody>
+      </p:sp>
+      <p:sp>
+        <p:nvSpPr>
+          <p:cNvPr id="20" name="Rectangle 19"/>
+          <p:cNvSpPr/>
+          <p:nvPr/>
+        </p:nvSpPr>
+        <p:spPr>
+          <a:xfrm>
+            <a:off x="5943600" y="2871215"/>
+            <a:ext cx="1837943" cy="566928"/>
+          </a:xfrm>
+          <a:prstGeom prst="rect">
+            <a:avLst/>
+          </a:prstGeom>
+          <a:solidFill>
+            <a:srgbClr val="F3F3F3"/>
+          </a:solidFill>
+          <a:ln>
+            <a:noFill/>
+          </a:ln>
+          <a:effectLst/>
+        </p:spPr>
+        <p:style>
+          <a:lnRef idx="1">
+            <a:schemeClr val="accent1"/>
+          </a:lnRef>
+          <a:fillRef idx="3">
+            <a:schemeClr val="accent1"/>
+          </a:fillRef>
+          <a:effectRef idx="2">
+            <a:schemeClr val="accent1"/>
+          </a:effectRef>
+          <a:fontRef idx="minor">
+            <a:schemeClr val="lt1"/>
+          </a:fontRef>
+        </p:style>
+        <p:txBody>
+          <a:bodyPr rtlCol="0" anchor="ctr" wrap="square" lIns="64008" rIns="64008" tIns="64008" bIns="64008"/>
+          <a:lstStyle/>
+          <a:p>
+            <a:pPr algn="l">
+              <a:spcAft>
+                <a:spcPts val="200"/>
+              </a:spcAft>
+            </a:pPr>
+            <a:r>
+              <a:rPr sz="1000" b="0">
+                <a:solidFill>
+                  <a:srgbClr val="1E1E1E"/>
+                </a:solidFill>
+                <a:latin typeface="Microsoft JhengHei"/>
+              </a:rPr>
+              <a:t>理賠、客服、通路</a:t>
+            </a:r>
+          </a:p>
+        </p:txBody>
+      </p:sp>
+      <p:sp>
+        <p:nvSpPr>
+          <p:cNvPr id="21" name="Rectangle 20"/>
+          <p:cNvSpPr/>
+          <p:nvPr/>
+        </p:nvSpPr>
+        <p:spPr>
+          <a:xfrm>
+            <a:off x="7818120" y="2871215"/>
+            <a:ext cx="2478024" cy="566928"/>
+          </a:xfrm>
+          <a:prstGeom prst="rect">
+            <a:avLst/>
+          </a:prstGeom>
+          <a:solidFill>
+            <a:srgbClr val="F3F3F3"/>
+          </a:solidFill>
+          <a:ln>
+            <a:noFill/>
+          </a:ln>
+          <a:effectLst/>
+        </p:spPr>
+        <p:style>
+          <a:lnRef idx="1">
+            <a:schemeClr val="accent1"/>
+          </a:lnRef>
+          <a:fillRef idx="3">
+            <a:schemeClr val="accent1"/>
+          </a:fillRef>
+          <a:effectRef idx="2">
+            <a:schemeClr val="accent1"/>
+          </a:effectRef>
+          <a:fontRef idx="minor">
+            <a:schemeClr val="lt1"/>
+          </a:fontRef>
+        </p:style>
+        <p:txBody>
+          <a:bodyPr rtlCol="0" anchor="ctr" wrap="square" lIns="64008" rIns="64008" tIns="64008" bIns="64008"/>
+          <a:lstStyle/>
+          <a:p>
+            <a:pPr algn="l">
+              <a:spcAft>
+                <a:spcPts val="200"/>
+              </a:spcAft>
+            </a:pPr>
+            <a:r>
+              <a:rPr sz="1000" b="0">
+                <a:solidFill>
+                  <a:srgbClr val="1E1E1E"/>
+                </a:solidFill>
+                <a:latin typeface="Microsoft JhengHei"/>
+              </a:rPr>
+              <a:t>在台交付規模較小，大型核心導入人力有限</a:t>
+            </a:r>
+          </a:p>
+        </p:txBody>
+      </p:sp>
+      <p:sp>
+        <p:nvSpPr>
+          <p:cNvPr id="22" name="Rectangle 21"/>
+          <p:cNvSpPr/>
+          <p:nvPr/>
+        </p:nvSpPr>
+        <p:spPr>
+          <a:xfrm>
+            <a:off x="10332720" y="2871215"/>
+            <a:ext cx="1426464" cy="566928"/>
+          </a:xfrm>
+          <a:prstGeom prst="rect">
+            <a:avLst/>
+          </a:prstGeom>
+          <a:solidFill>
+            <a:srgbClr val="F3F3F3"/>
+          </a:solidFill>
+          <a:ln>
+            <a:noFill/>
+          </a:ln>
+          <a:effectLst/>
+        </p:spPr>
+        <p:style>
+          <a:lnRef idx="1">
+            <a:schemeClr val="accent1"/>
+          </a:lnRef>
+          <a:fillRef idx="3">
+            <a:schemeClr val="accent1"/>
+          </a:fillRef>
+          <a:effectRef idx="2">
+            <a:schemeClr val="accent1"/>
+          </a:effectRef>
+          <a:fontRef idx="minor">
+            <a:schemeClr val="lt1"/>
+          </a:fontRef>
+        </p:style>
+        <p:txBody>
+          <a:bodyPr rtlCol="0" anchor="ctr" wrap="square" lIns="64008" rIns="64008" tIns="64008" bIns="64008"/>
+          <a:lstStyle/>
+          <a:p>
+            <a:pPr algn="l">
+              <a:spcAft>
+                <a:spcPts val="200"/>
+              </a:spcAft>
+            </a:pPr>
+            <a:r>
+              <a:rPr sz="950" b="0" u="sng">
+                <a:solidFill>
+                  <a:srgbClr val="1F5FBF"/>
+                </a:solidFill>
+                <a:latin typeface="Microsoft JhengHei"/>
+                <a:hlinkClick r:id="rId6"/>
+              </a:rPr>
+              <a:t>案例</a:t>
+            </a:r>
+          </a:p>
+          <a:p>
+            <a:pPr algn="l">
+              <a:spcAft>
+                <a:spcPts val="200"/>
+              </a:spcAft>
+            </a:pPr>
+            <a:r>
+              <a:rPr sz="950" b="0" u="sng">
+                <a:solidFill>
+                  <a:srgbClr val="1F5FBF"/>
+                </a:solidFill>
+                <a:latin typeface="Microsoft JhengHei"/>
+                <a:hlinkClick r:id="rId7"/>
+              </a:rPr>
+              <a:t>通路研究</a:t>
+            </a:r>
+          </a:p>
+        </p:txBody>
+      </p:sp>
+      <p:cxnSp>
+        <p:nvCxnSpPr>
+          <p:cNvPr id="23" name="Connector 22"/>
+          <p:cNvCxnSpPr/>
+          <p:nvPr/>
+        </p:nvCxnSpPr>
+        <p:spPr>
+          <a:xfrm>
+            <a:off x="411480" y="3456432"/>
+            <a:ext cx="11384280" cy="0"/>
+          </a:xfrm>
+          <a:prstGeom prst="line">
+            <a:avLst/>
+          </a:prstGeom>
+          <a:ln w="19050">
+            <a:solidFill>
+              <a:srgbClr val="FD5108"/>
+            </a:solidFill>
+          </a:ln>
+        </p:spPr>
+        <p:style>
+          <a:lnRef idx="2">
+            <a:schemeClr val="accent1"/>
+          </a:lnRef>
+          <a:fillRef idx="0">
+            <a:schemeClr val="accent1"/>
+          </a:fillRef>
+          <a:effectRef idx="1">
+            <a:schemeClr val="accent1"/>
+          </a:effectRef>
+          <a:fontRef idx="minor">
+            <a:schemeClr val="tx1"/>
+          </a:fontRef>
+        </p:style>
+      </p:cxnSp>
+      <p:sp>
+        <p:nvSpPr>
+          <p:cNvPr id="24" name="Rectangle 23"/>
+          <p:cNvSpPr/>
+          <p:nvPr/>
+        </p:nvSpPr>
+        <p:spPr>
+          <a:xfrm>
+            <a:off x="411480" y="3474720"/>
+            <a:ext cx="1289304" cy="566928"/>
+          </a:xfrm>
+          <a:prstGeom prst="rect">
+            <a:avLst/>
+          </a:prstGeom>
+          <a:solidFill>
+            <a:srgbClr val="FFFFFF"/>
+          </a:solidFill>
+          <a:ln>
+            <a:noFill/>
+          </a:ln>
+          <a:effectLst/>
+        </p:spPr>
+        <p:style>
+          <a:lnRef idx="1">
+            <a:schemeClr val="accent1"/>
+          </a:lnRef>
+          <a:fillRef idx="3">
+            <a:schemeClr val="accent1"/>
+          </a:fillRef>
+          <a:effectRef idx="2">
+            <a:schemeClr val="accent1"/>
+          </a:effectRef>
+          <a:fontRef idx="minor">
+            <a:schemeClr val="lt1"/>
+          </a:fontRef>
+        </p:style>
+        <p:txBody>
+          <a:bodyPr rtlCol="0" anchor="ctr" wrap="square" lIns="64008" rIns="64008" tIns="64008" bIns="64008"/>
+          <a:lstStyle/>
+          <a:p>
+            <a:pPr algn="l">
+              <a:spcAft>
+                <a:spcPts val="200"/>
+              </a:spcAft>
+            </a:pPr>
+            <a:r>
+              <a:rPr sz="1150" b="1">
+                <a:solidFill>
+                  <a:srgbClr val="1E1E1E"/>
+                </a:solidFill>
+                <a:latin typeface="Microsoft JhengHei"/>
+              </a:rPr>
+              <a:t>Deloitte</a:t>
+            </a:r>
+          </a:p>
+          <a:p>
+            <a:pPr algn="l">
+              <a:spcAft>
+                <a:spcPts val="200"/>
+              </a:spcAft>
+            </a:pPr>
+            <a:r>
+              <a:rPr sz="900" b="0">
+                <a:solidFill>
+                  <a:srgbClr val="6B6B6B"/>
+                </a:solidFill>
+                <a:latin typeface="Microsoft JhengHei"/>
+              </a:rPr>
+              <a:t>四大</a:t>
+            </a:r>
+          </a:p>
+        </p:txBody>
+      </p:sp>
+      <p:sp>
+        <p:nvSpPr>
+          <p:cNvPr id="25" name="Rectangle 24"/>
+          <p:cNvSpPr/>
+          <p:nvPr/>
+        </p:nvSpPr>
+        <p:spPr>
+          <a:xfrm>
+            <a:off x="1737360" y="3474720"/>
+            <a:ext cx="4169663" cy="566928"/>
+          </a:xfrm>
+          <a:prstGeom prst="rect">
+            <a:avLst/>
+          </a:prstGeom>
+          <a:solidFill>
+            <a:srgbClr val="FFFFFF"/>
+          </a:solidFill>
+          <a:ln>
+            <a:noFill/>
+          </a:ln>
+          <a:effectLst/>
+        </p:spPr>
+        <p:style>
+          <a:lnRef idx="1">
+            <a:schemeClr val="accent1"/>
+          </a:lnRef>
+          <a:fillRef idx="3">
+            <a:schemeClr val="accent1"/>
+          </a:fillRef>
+          <a:effectRef idx="2">
+            <a:schemeClr val="accent1"/>
+          </a:effectRef>
+          <a:fontRef idx="minor">
+            <a:schemeClr val="lt1"/>
+          </a:fontRef>
+        </p:style>
+        <p:txBody>
+          <a:bodyPr rtlCol="0" anchor="ctr" wrap="square" lIns="64008" rIns="64008" tIns="64008" bIns="64008"/>
+          <a:lstStyle/>
+          <a:p>
+            <a:pPr algn="l">
+              <a:spcAft>
+                <a:spcPts val="200"/>
+              </a:spcAft>
+            </a:pPr>
+            <a:r>
+              <a:rPr sz="1000" b="0">
+                <a:solidFill>
+                  <a:srgbClr val="1E1E1E"/>
+                </a:solidFill>
+                <a:latin typeface="Microsoft JhengHei"/>
+              </a:rPr>
+              <a:t>Agentic AI Blueprint for Insurance：產險／壽險分類，評估→設計→試點→規模化，預建＋客製代理</a:t>
+            </a:r>
+          </a:p>
+        </p:txBody>
+      </p:sp>
+      <p:sp>
+        <p:nvSpPr>
+          <p:cNvPr id="26" name="Rectangle 25"/>
+          <p:cNvSpPr/>
+          <p:nvPr/>
+        </p:nvSpPr>
+        <p:spPr>
+          <a:xfrm>
+            <a:off x="5943600" y="3474720"/>
+            <a:ext cx="1837943" cy="566928"/>
+          </a:xfrm>
+          <a:prstGeom prst="rect">
+            <a:avLst/>
+          </a:prstGeom>
+          <a:solidFill>
+            <a:srgbClr val="FFFFFF"/>
+          </a:solidFill>
+          <a:ln>
+            <a:noFill/>
+          </a:ln>
+          <a:effectLst/>
+        </p:spPr>
+        <p:style>
+          <a:lnRef idx="1">
+            <a:schemeClr val="accent1"/>
+          </a:lnRef>
+          <a:fillRef idx="3">
+            <a:schemeClr val="accent1"/>
+          </a:fillRef>
+          <a:effectRef idx="2">
+            <a:schemeClr val="accent1"/>
+          </a:effectRef>
+          <a:fontRef idx="minor">
+            <a:schemeClr val="lt1"/>
+          </a:fontRef>
+        </p:style>
+        <p:txBody>
+          <a:bodyPr rtlCol="0" anchor="ctr" wrap="square" lIns="64008" rIns="64008" tIns="64008" bIns="64008"/>
+          <a:lstStyle/>
+          <a:p>
+            <a:pPr algn="l">
+              <a:spcAft>
+                <a:spcPts val="200"/>
+              </a:spcAft>
+            </a:pPr>
+            <a:r>
+              <a:rPr sz="1000" b="0">
+                <a:solidFill>
+                  <a:srgbClr val="1E1E1E"/>
+                </a:solidFill>
+                <a:latin typeface="Microsoft JhengHei"/>
+              </a:rPr>
+              <a:t>全價值鏈代理型 AI 轉型</a:t>
+            </a:r>
+          </a:p>
+        </p:txBody>
+      </p:sp>
+      <p:sp>
+        <p:nvSpPr>
+          <p:cNvPr id="27" name="Rectangle 26"/>
+          <p:cNvSpPr/>
+          <p:nvPr/>
+        </p:nvSpPr>
+        <p:spPr>
+          <a:xfrm>
+            <a:off x="7818120" y="3474720"/>
+            <a:ext cx="2478024" cy="566928"/>
+          </a:xfrm>
+          <a:prstGeom prst="rect">
+            <a:avLst/>
+          </a:prstGeom>
+          <a:solidFill>
+            <a:srgbClr val="FFFFFF"/>
+          </a:solidFill>
+          <a:ln>
+            <a:noFill/>
+          </a:ln>
+          <a:effectLst/>
+        </p:spPr>
+        <p:style>
+          <a:lnRef idx="1">
+            <a:schemeClr val="accent1"/>
+          </a:lnRef>
+          <a:fillRef idx="3">
+            <a:schemeClr val="accent1"/>
+          </a:fillRef>
+          <a:effectRef idx="2">
+            <a:schemeClr val="accent1"/>
+          </a:effectRef>
+          <a:fontRef idx="minor">
+            <a:schemeClr val="lt1"/>
+          </a:fontRef>
+        </p:style>
+        <p:txBody>
+          <a:bodyPr rtlCol="0" anchor="ctr" wrap="square" lIns="64008" rIns="64008" tIns="64008" bIns="64008"/>
+          <a:lstStyle/>
+          <a:p>
+            <a:pPr algn="l">
+              <a:spcAft>
+                <a:spcPts val="200"/>
+              </a:spcAft>
+            </a:pPr>
+            <a:r>
+              <a:rPr sz="1000" b="0">
+                <a:solidFill>
+                  <a:srgbClr val="1E1E1E"/>
+                </a:solidFill>
+                <a:latin typeface="Microsoft JhengHei"/>
+              </a:rPr>
+              <a:t>預建代理套到台灣客製化舊核心與繁中條款需調適</a:t>
+            </a:r>
+          </a:p>
+        </p:txBody>
+      </p:sp>
+      <p:sp>
+        <p:nvSpPr>
+          <p:cNvPr id="28" name="Rectangle 27"/>
+          <p:cNvSpPr/>
+          <p:nvPr/>
+        </p:nvSpPr>
+        <p:spPr>
+          <a:xfrm>
+            <a:off x="10332720" y="3474720"/>
+            <a:ext cx="1426464" cy="566928"/>
+          </a:xfrm>
+          <a:prstGeom prst="rect">
+            <a:avLst/>
+          </a:prstGeom>
+          <a:solidFill>
+            <a:srgbClr val="FFFFFF"/>
+          </a:solidFill>
+          <a:ln>
+            <a:noFill/>
+          </a:ln>
+          <a:effectLst/>
+        </p:spPr>
+        <p:style>
+          <a:lnRef idx="1">
+            <a:schemeClr val="accent1"/>
+          </a:lnRef>
+          <a:fillRef idx="3">
+            <a:schemeClr val="accent1"/>
+          </a:fillRef>
+          <a:effectRef idx="2">
+            <a:schemeClr val="accent1"/>
+          </a:effectRef>
+          <a:fontRef idx="minor">
+            <a:schemeClr val="lt1"/>
+          </a:fontRef>
+        </p:style>
+        <p:txBody>
+          <a:bodyPr rtlCol="0" anchor="ctr" wrap="square" lIns="64008" rIns="64008" tIns="64008" bIns="64008"/>
+          <a:lstStyle/>
+          <a:p>
+            <a:pPr algn="l">
+              <a:spcAft>
+                <a:spcPts val="200"/>
+              </a:spcAft>
+            </a:pPr>
+            <a:r>
+              <a:rPr sz="950" b="0" u="sng">
+                <a:solidFill>
+                  <a:srgbClr val="1F5FBF"/>
+                </a:solidFill>
+                <a:latin typeface="Microsoft JhengHei"/>
+                <a:hlinkClick r:id="rId8"/>
+              </a:rPr>
+              <a:t>Blueprint</a:t>
+            </a:r>
+          </a:p>
+          <a:p>
+            <a:pPr algn="l">
+              <a:spcAft>
+                <a:spcPts val="200"/>
+              </a:spcAft>
+            </a:pPr>
+            <a:r>
+              <a:rPr sz="950" b="0" u="sng">
+                <a:solidFill>
+                  <a:srgbClr val="1F5FBF"/>
+                </a:solidFill>
+                <a:latin typeface="Microsoft JhengHei"/>
+                <a:hlinkClick r:id="rId9"/>
+              </a:rPr>
+              <a:t>亞太壽險</a:t>
+            </a:r>
+          </a:p>
+        </p:txBody>
+      </p:sp>
+      <p:sp>
+        <p:nvSpPr>
+          <p:cNvPr id="29" name="Rectangle 28"/>
+          <p:cNvSpPr/>
+          <p:nvPr/>
+        </p:nvSpPr>
+        <p:spPr>
+          <a:xfrm>
+            <a:off x="411480" y="4078224"/>
+            <a:ext cx="1289304" cy="566928"/>
+          </a:xfrm>
+          <a:prstGeom prst="rect">
+            <a:avLst/>
+          </a:prstGeom>
+          <a:solidFill>
+            <a:srgbClr val="F3F3F3"/>
+          </a:solidFill>
+          <a:ln>
+            <a:noFill/>
+          </a:ln>
+          <a:effectLst/>
+        </p:spPr>
+        <p:style>
+          <a:lnRef idx="1">
+            <a:schemeClr val="accent1"/>
+          </a:lnRef>
+          <a:fillRef idx="3">
+            <a:schemeClr val="accent1"/>
+          </a:fillRef>
+          <a:effectRef idx="2">
+            <a:schemeClr val="accent1"/>
+          </a:effectRef>
+          <a:fontRef idx="minor">
+            <a:schemeClr val="lt1"/>
+          </a:fontRef>
+        </p:style>
+        <p:txBody>
+          <a:bodyPr rtlCol="0" anchor="ctr" wrap="square" lIns="64008" rIns="64008" tIns="64008" bIns="64008"/>
+          <a:lstStyle/>
+          <a:p>
+            <a:pPr algn="l">
+              <a:spcAft>
+                <a:spcPts val="200"/>
+              </a:spcAft>
+            </a:pPr>
+            <a:r>
+              <a:rPr sz="1150" b="1">
+                <a:solidFill>
+                  <a:srgbClr val="1E1E1E"/>
+                </a:solidFill>
+                <a:latin typeface="Microsoft JhengHei"/>
+              </a:rPr>
+              <a:t>EY</a:t>
+            </a:r>
+          </a:p>
+          <a:p>
+            <a:pPr algn="l">
+              <a:spcAft>
+                <a:spcPts val="200"/>
+              </a:spcAft>
+            </a:pPr>
+            <a:r>
+              <a:rPr sz="900" b="0">
+                <a:solidFill>
+                  <a:srgbClr val="6B6B6B"/>
+                </a:solidFill>
+                <a:latin typeface="Microsoft JhengHei"/>
+              </a:rPr>
+              <a:t>四大</a:t>
+            </a:r>
+          </a:p>
+        </p:txBody>
+      </p:sp>
+      <p:sp>
+        <p:nvSpPr>
+          <p:cNvPr id="30" name="Rectangle 29"/>
+          <p:cNvSpPr/>
+          <p:nvPr/>
+        </p:nvSpPr>
+        <p:spPr>
+          <a:xfrm>
+            <a:off x="1737360" y="4078224"/>
+            <a:ext cx="4169663" cy="566928"/>
+          </a:xfrm>
+          <a:prstGeom prst="rect">
+            <a:avLst/>
+          </a:prstGeom>
+          <a:solidFill>
+            <a:srgbClr val="F3F3F3"/>
+          </a:solidFill>
+          <a:ln>
+            <a:noFill/>
+          </a:ln>
+          <a:effectLst/>
+        </p:spPr>
+        <p:style>
+          <a:lnRef idx="1">
+            <a:schemeClr val="accent1"/>
+          </a:lnRef>
+          <a:fillRef idx="3">
+            <a:schemeClr val="accent1"/>
+          </a:fillRef>
+          <a:effectRef idx="2">
+            <a:schemeClr val="accent1"/>
+          </a:effectRef>
+          <a:fontRef idx="minor">
+            <a:schemeClr val="lt1"/>
+          </a:fontRef>
+        </p:style>
+        <p:txBody>
+          <a:bodyPr rtlCol="0" anchor="ctr" wrap="square" lIns="64008" rIns="64008" tIns="64008" bIns="64008"/>
+          <a:lstStyle/>
+          <a:p>
+            <a:pPr algn="l">
+              <a:spcAft>
+                <a:spcPts val="200"/>
+              </a:spcAft>
+            </a:pPr>
+            <a:r>
+              <a:rPr sz="1000" b="0">
+                <a:solidFill>
+                  <a:srgbClr val="1E1E1E"/>
+                </a:solidFill>
+                <a:latin typeface="Microsoft JhengHei"/>
+              </a:rPr>
+              <a:t>EY Nexus for Insurance：雲原生平台，快速推出新商品與品牌，串接 650+ 保險科技</a:t>
+            </a:r>
+          </a:p>
+        </p:txBody>
+      </p:sp>
+      <p:sp>
+        <p:nvSpPr>
+          <p:cNvPr id="31" name="Rectangle 30"/>
+          <p:cNvSpPr/>
+          <p:nvPr/>
+        </p:nvSpPr>
+        <p:spPr>
+          <a:xfrm>
+            <a:off x="5943600" y="4078224"/>
+            <a:ext cx="1837943" cy="566928"/>
+          </a:xfrm>
+          <a:prstGeom prst="rect">
+            <a:avLst/>
+          </a:prstGeom>
+          <a:solidFill>
+            <a:srgbClr val="F3F3F3"/>
+          </a:solidFill>
+          <a:ln>
+            <a:noFill/>
+          </a:ln>
+          <a:effectLst/>
+        </p:spPr>
+        <p:style>
+          <a:lnRef idx="1">
+            <a:schemeClr val="accent1"/>
+          </a:lnRef>
+          <a:fillRef idx="3">
+            <a:schemeClr val="accent1"/>
+          </a:fillRef>
+          <a:effectRef idx="2">
+            <a:schemeClr val="accent1"/>
+          </a:effectRef>
+          <a:fontRef idx="minor">
+            <a:schemeClr val="lt1"/>
+          </a:fontRef>
+        </p:style>
+        <p:txBody>
+          <a:bodyPr rtlCol="0" anchor="ctr" wrap="square" lIns="64008" rIns="64008" tIns="64008" bIns="64008"/>
+          <a:lstStyle/>
+          <a:p>
+            <a:pPr algn="l">
+              <a:spcAft>
+                <a:spcPts val="200"/>
+              </a:spcAft>
+            </a:pPr>
+            <a:r>
+              <a:rPr sz="1000" b="0">
+                <a:solidFill>
+                  <a:srgbClr val="1E1E1E"/>
+                </a:solidFill>
+                <a:latin typeface="Microsoft JhengHei"/>
+              </a:rPr>
+              <a:t>新商品、嵌入式通路、核心延伸</a:t>
+            </a:r>
+          </a:p>
+        </p:txBody>
+      </p:sp>
+      <p:sp>
+        <p:nvSpPr>
+          <p:cNvPr id="32" name="Rectangle 31"/>
+          <p:cNvSpPr/>
+          <p:nvPr/>
+        </p:nvSpPr>
+        <p:spPr>
+          <a:xfrm>
+            <a:off x="7818120" y="4078224"/>
+            <a:ext cx="2478024" cy="566928"/>
+          </a:xfrm>
+          <a:prstGeom prst="rect">
+            <a:avLst/>
+          </a:prstGeom>
+          <a:solidFill>
+            <a:srgbClr val="F3F3F3"/>
+          </a:solidFill>
+          <a:ln>
+            <a:noFill/>
+          </a:ln>
+          <a:effectLst/>
+        </p:spPr>
+        <p:style>
+          <a:lnRef idx="1">
+            <a:schemeClr val="accent1"/>
+          </a:lnRef>
+          <a:fillRef idx="3">
+            <a:schemeClr val="accent1"/>
+          </a:fillRef>
+          <a:effectRef idx="2">
+            <a:schemeClr val="accent1"/>
+          </a:effectRef>
+          <a:fontRef idx="minor">
+            <a:schemeClr val="lt1"/>
+          </a:fontRef>
+        </p:style>
+        <p:txBody>
+          <a:bodyPr rtlCol="0" anchor="ctr" wrap="square" lIns="64008" rIns="64008" tIns="64008" bIns="64008"/>
+          <a:lstStyle/>
+          <a:p>
+            <a:pPr algn="l">
+              <a:spcAft>
+                <a:spcPts val="200"/>
+              </a:spcAft>
+            </a:pPr>
+            <a:r>
+              <a:rPr sz="1000" b="0">
+                <a:solidFill>
+                  <a:srgbClr val="1E1E1E"/>
+                </a:solidFill>
+                <a:latin typeface="Microsoft JhengHei"/>
+              </a:rPr>
+              <a:t>偏新業務上線，舊核心遷移與 IFRS 17 整合難只靠平台</a:t>
+            </a:r>
+          </a:p>
+        </p:txBody>
+      </p:sp>
+      <p:sp>
+        <p:nvSpPr>
+          <p:cNvPr id="33" name="Rectangle 32"/>
+          <p:cNvSpPr/>
+          <p:nvPr/>
+        </p:nvSpPr>
+        <p:spPr>
+          <a:xfrm>
+            <a:off x="10332720" y="4078224"/>
+            <a:ext cx="1426464" cy="566928"/>
+          </a:xfrm>
+          <a:prstGeom prst="rect">
+            <a:avLst/>
+          </a:prstGeom>
+          <a:solidFill>
+            <a:srgbClr val="F3F3F3"/>
+          </a:solidFill>
+          <a:ln>
+            <a:noFill/>
+          </a:ln>
+          <a:effectLst/>
+        </p:spPr>
+        <p:style>
+          <a:lnRef idx="1">
+            <a:schemeClr val="accent1"/>
+          </a:lnRef>
+          <a:fillRef idx="3">
+            <a:schemeClr val="accent1"/>
+          </a:fillRef>
+          <a:effectRef idx="2">
+            <a:schemeClr val="accent1"/>
+          </a:effectRef>
+          <a:fontRef idx="minor">
+            <a:schemeClr val="lt1"/>
+          </a:fontRef>
+        </p:style>
+        <p:txBody>
+          <a:bodyPr rtlCol="0" anchor="ctr" wrap="square" lIns="64008" rIns="64008" tIns="64008" bIns="64008"/>
+          <a:lstStyle/>
+          <a:p>
+            <a:pPr algn="l">
+              <a:spcAft>
+                <a:spcPts val="200"/>
+              </a:spcAft>
+            </a:pPr>
+            <a:r>
+              <a:rPr sz="950" b="0" u="sng">
+                <a:solidFill>
+                  <a:srgbClr val="1F5FBF"/>
+                </a:solidFill>
+                <a:latin typeface="Microsoft JhengHei"/>
+                <a:hlinkClick r:id="rId10"/>
+              </a:rPr>
+              <a:t>Nexus</a:t>
+            </a:r>
+          </a:p>
+        </p:txBody>
+      </p:sp>
+      <p:sp>
+        <p:nvSpPr>
+          <p:cNvPr id="34" name="Rectangle 33"/>
+          <p:cNvSpPr/>
+          <p:nvPr/>
+        </p:nvSpPr>
+        <p:spPr>
+          <a:xfrm>
+            <a:off x="411480" y="4681728"/>
+            <a:ext cx="1289304" cy="566928"/>
+          </a:xfrm>
+          <a:prstGeom prst="rect">
+            <a:avLst/>
+          </a:prstGeom>
+          <a:solidFill>
+            <a:srgbClr val="FFFFFF"/>
+          </a:solidFill>
+          <a:ln>
+            <a:noFill/>
+          </a:ln>
+          <a:effectLst/>
+        </p:spPr>
+        <p:style>
+          <a:lnRef idx="1">
+            <a:schemeClr val="accent1"/>
+          </a:lnRef>
+          <a:fillRef idx="3">
+            <a:schemeClr val="accent1"/>
+          </a:fillRef>
+          <a:effectRef idx="2">
+            <a:schemeClr val="accent1"/>
+          </a:effectRef>
+          <a:fontRef idx="minor">
+            <a:schemeClr val="lt1"/>
+          </a:fontRef>
+        </p:style>
+        <p:txBody>
+          <a:bodyPr rtlCol="0" anchor="ctr" wrap="square" lIns="64008" rIns="64008" tIns="64008" bIns="64008"/>
+          <a:lstStyle/>
+          <a:p>
+            <a:pPr algn="l">
+              <a:spcAft>
+                <a:spcPts val="200"/>
+              </a:spcAft>
+            </a:pPr>
+            <a:r>
+              <a:rPr sz="1150" b="1">
+                <a:solidFill>
+                  <a:srgbClr val="1E1E1E"/>
+                </a:solidFill>
+                <a:latin typeface="Microsoft JhengHei"/>
+              </a:rPr>
+              <a:t>KPMG</a:t>
+            </a:r>
+          </a:p>
+          <a:p>
+            <a:pPr algn="l">
+              <a:spcAft>
+                <a:spcPts val="200"/>
+              </a:spcAft>
+            </a:pPr>
+            <a:r>
+              <a:rPr sz="900" b="0">
+                <a:solidFill>
+                  <a:srgbClr val="6B6B6B"/>
+                </a:solidFill>
+                <a:latin typeface="Microsoft JhengHei"/>
+              </a:rPr>
+              <a:t>四大</a:t>
+            </a:r>
+          </a:p>
+        </p:txBody>
+      </p:sp>
+      <p:sp>
+        <p:nvSpPr>
+          <p:cNvPr id="35" name="Rectangle 34"/>
+          <p:cNvSpPr/>
+          <p:nvPr/>
+        </p:nvSpPr>
+        <p:spPr>
+          <a:xfrm>
+            <a:off x="1737360" y="4681728"/>
+            <a:ext cx="4169663" cy="566928"/>
+          </a:xfrm>
+          <a:prstGeom prst="rect">
+            <a:avLst/>
+          </a:prstGeom>
+          <a:solidFill>
+            <a:srgbClr val="FFFFFF"/>
+          </a:solidFill>
+          <a:ln>
+            <a:noFill/>
+          </a:ln>
+          <a:effectLst/>
+        </p:spPr>
+        <p:style>
+          <a:lnRef idx="1">
+            <a:schemeClr val="accent1"/>
+          </a:lnRef>
+          <a:fillRef idx="3">
+            <a:schemeClr val="accent1"/>
+          </a:fillRef>
+          <a:effectRef idx="2">
+            <a:schemeClr val="accent1"/>
+          </a:effectRef>
+          <a:fontRef idx="minor">
+            <a:schemeClr val="lt1"/>
+          </a:fontRef>
+        </p:style>
+        <p:txBody>
+          <a:bodyPr rtlCol="0" anchor="ctr" wrap="square" lIns="64008" rIns="64008" tIns="64008" bIns="64008"/>
+          <a:lstStyle/>
+          <a:p>
+            <a:pPr algn="l">
+              <a:spcAft>
+                <a:spcPts val="200"/>
+              </a:spcAft>
+            </a:pPr>
+            <a:r>
+              <a:rPr sz="1000" b="0">
+                <a:solidFill>
+                  <a:srgbClr val="1E1E1E"/>
+                </a:solidFill>
+                <a:latin typeface="Microsoft JhengHei"/>
+              </a:rPr>
+              <a:t>Intelligent Insurance：AI 價值三階段導入；Trusted AI 十大支柱治理框架</a:t>
+            </a:r>
+          </a:p>
+        </p:txBody>
+      </p:sp>
+      <p:sp>
+        <p:nvSpPr>
+          <p:cNvPr id="36" name="Rectangle 35"/>
+          <p:cNvSpPr/>
+          <p:nvPr/>
+        </p:nvSpPr>
+        <p:spPr>
+          <a:xfrm>
+            <a:off x="5943600" y="4681728"/>
+            <a:ext cx="1837943" cy="566928"/>
+          </a:xfrm>
+          <a:prstGeom prst="rect">
+            <a:avLst/>
+          </a:prstGeom>
+          <a:solidFill>
+            <a:srgbClr val="FFFFFF"/>
+          </a:solidFill>
+          <a:ln>
+            <a:noFill/>
+          </a:ln>
+          <a:effectLst/>
+        </p:spPr>
+        <p:style>
+          <a:lnRef idx="1">
+            <a:schemeClr val="accent1"/>
+          </a:lnRef>
+          <a:fillRef idx="3">
+            <a:schemeClr val="accent1"/>
+          </a:fillRef>
+          <a:effectRef idx="2">
+            <a:schemeClr val="accent1"/>
+          </a:effectRef>
+          <a:fontRef idx="minor">
+            <a:schemeClr val="lt1"/>
+          </a:fontRef>
+        </p:style>
+        <p:txBody>
+          <a:bodyPr rtlCol="0" anchor="ctr" wrap="square" lIns="64008" rIns="64008" tIns="64008" bIns="64008"/>
+          <a:lstStyle/>
+          <a:p>
+            <a:pPr algn="l">
+              <a:spcAft>
+                <a:spcPts val="200"/>
+              </a:spcAft>
+            </a:pPr>
+            <a:r>
+              <a:rPr sz="1000" b="0">
+                <a:solidFill>
+                  <a:srgbClr val="1E1E1E"/>
+                </a:solidFill>
+                <a:latin typeface="Microsoft JhengHei"/>
+              </a:rPr>
+              <a:t>AI 導入路徑與治理</a:t>
+            </a:r>
+          </a:p>
+        </p:txBody>
+      </p:sp>
+      <p:sp>
+        <p:nvSpPr>
+          <p:cNvPr id="37" name="Rectangle 36"/>
+          <p:cNvSpPr/>
+          <p:nvPr/>
+        </p:nvSpPr>
+        <p:spPr>
+          <a:xfrm>
+            <a:off x="7818120" y="4681728"/>
+            <a:ext cx="2478024" cy="566928"/>
+          </a:xfrm>
+          <a:prstGeom prst="rect">
+            <a:avLst/>
+          </a:prstGeom>
+          <a:solidFill>
+            <a:srgbClr val="FFFFFF"/>
+          </a:solidFill>
+          <a:ln>
+            <a:noFill/>
+          </a:ln>
+          <a:effectLst/>
+        </p:spPr>
+        <p:style>
+          <a:lnRef idx="1">
+            <a:schemeClr val="accent1"/>
+          </a:lnRef>
+          <a:fillRef idx="3">
+            <a:schemeClr val="accent1"/>
+          </a:fillRef>
+          <a:effectRef idx="2">
+            <a:schemeClr val="accent1"/>
+          </a:effectRef>
+          <a:fontRef idx="minor">
+            <a:schemeClr val="lt1"/>
+          </a:fontRef>
+        </p:style>
+        <p:txBody>
+          <a:bodyPr rtlCol="0" anchor="ctr" wrap="square" lIns="64008" rIns="64008" tIns="64008" bIns="64008"/>
+          <a:lstStyle/>
+          <a:p>
+            <a:pPr algn="l">
+              <a:spcAft>
+                <a:spcPts val="200"/>
+              </a:spcAft>
+            </a:pPr>
+            <a:r>
+              <a:rPr sz="1000" b="0">
+                <a:solidFill>
+                  <a:srgbClr val="1E1E1E"/>
+                </a:solidFill>
+                <a:latin typeface="Microsoft JhengHei"/>
+              </a:rPr>
+              <a:t>公開資料未見保險專屬代理型產品</a:t>
+            </a:r>
+          </a:p>
+        </p:txBody>
+      </p:sp>
+      <p:sp>
+        <p:nvSpPr>
+          <p:cNvPr id="38" name="Rectangle 37"/>
+          <p:cNvSpPr/>
+          <p:nvPr/>
+        </p:nvSpPr>
+        <p:spPr>
+          <a:xfrm>
+            <a:off x="10332720" y="4681728"/>
+            <a:ext cx="1426464" cy="566928"/>
+          </a:xfrm>
+          <a:prstGeom prst="rect">
+            <a:avLst/>
+          </a:prstGeom>
+          <a:solidFill>
+            <a:srgbClr val="FFFFFF"/>
+          </a:solidFill>
+          <a:ln>
+            <a:noFill/>
+          </a:ln>
+          <a:effectLst/>
+        </p:spPr>
+        <p:style>
+          <a:lnRef idx="1">
+            <a:schemeClr val="accent1"/>
+          </a:lnRef>
+          <a:fillRef idx="3">
+            <a:schemeClr val="accent1"/>
+          </a:fillRef>
+          <a:effectRef idx="2">
+            <a:schemeClr val="accent1"/>
+          </a:effectRef>
+          <a:fontRef idx="minor">
+            <a:schemeClr val="lt1"/>
+          </a:fontRef>
+        </p:style>
+        <p:txBody>
+          <a:bodyPr rtlCol="0" anchor="ctr" wrap="square" lIns="64008" rIns="64008" tIns="64008" bIns="64008"/>
+          <a:lstStyle/>
+          <a:p>
+            <a:pPr algn="l">
+              <a:spcAft>
+                <a:spcPts val="200"/>
+              </a:spcAft>
+            </a:pPr>
+            <a:r>
+              <a:rPr sz="950" b="0" u="sng">
+                <a:solidFill>
+                  <a:srgbClr val="1F5FBF"/>
+                </a:solidFill>
+                <a:latin typeface="Microsoft JhengHei"/>
+                <a:hlinkClick r:id="rId11"/>
+              </a:rPr>
+              <a:t>Intelligent Insurance</a:t>
+            </a:r>
+          </a:p>
+          <a:p>
+            <a:pPr algn="l">
+              <a:spcAft>
+                <a:spcPts val="200"/>
+              </a:spcAft>
+            </a:pPr>
+            <a:r>
+              <a:rPr sz="950" b="0" u="sng">
+                <a:solidFill>
+                  <a:srgbClr val="1F5FBF"/>
+                </a:solidFill>
+                <a:latin typeface="Microsoft JhengHei"/>
+                <a:hlinkClick r:id="rId12"/>
+              </a:rPr>
+              <a:t>Trusted AI</a:t>
+            </a:r>
+          </a:p>
+        </p:txBody>
+      </p:sp>
+      <p:sp>
+        <p:nvSpPr>
+          <p:cNvPr id="39" name="Rectangle 38"/>
+          <p:cNvSpPr/>
+          <p:nvPr/>
+        </p:nvSpPr>
+        <p:spPr>
+          <a:xfrm>
+            <a:off x="411480" y="5285231"/>
+            <a:ext cx="1289304" cy="566928"/>
+          </a:xfrm>
+          <a:prstGeom prst="rect">
+            <a:avLst/>
+          </a:prstGeom>
+          <a:solidFill>
+            <a:srgbClr val="FFE8D4"/>
+          </a:solidFill>
+          <a:ln>
+            <a:noFill/>
+          </a:ln>
+          <a:effectLst/>
+        </p:spPr>
+        <p:style>
+          <a:lnRef idx="1">
+            <a:schemeClr val="accent1"/>
+          </a:lnRef>
+          <a:fillRef idx="3">
+            <a:schemeClr val="accent1"/>
+          </a:fillRef>
+          <a:effectRef idx="2">
+            <a:schemeClr val="accent1"/>
+          </a:effectRef>
+          <a:fontRef idx="minor">
+            <a:schemeClr val="lt1"/>
+          </a:fontRef>
+        </p:style>
+        <p:txBody>
+          <a:bodyPr rtlCol="0" anchor="ctr" wrap="square" lIns="64008" rIns="64008" tIns="64008" bIns="64008"/>
+          <a:lstStyle/>
+          <a:p>
+            <a:pPr algn="l">
+              <a:spcAft>
+                <a:spcPts val="200"/>
+              </a:spcAft>
+            </a:pPr>
+            <a:r>
+              <a:rPr sz="1150" b="1">
+                <a:solidFill>
+                  <a:srgbClr val="FD5108"/>
+                </a:solidFill>
+                <a:latin typeface="Microsoft JhengHei"/>
+              </a:rPr>
+              <a:t>PwC（所內）</a:t>
+            </a:r>
+          </a:p>
+          <a:p>
+            <a:pPr algn="l">
+              <a:spcAft>
+                <a:spcPts val="200"/>
+              </a:spcAft>
+            </a:pPr>
+            <a:r>
+              <a:rPr sz="900" b="0">
+                <a:solidFill>
+                  <a:srgbClr val="6B6B6B"/>
+                </a:solidFill>
+                <a:latin typeface="Microsoft JhengHei"/>
+              </a:rPr>
+              <a:t>四大</a:t>
+            </a:r>
+          </a:p>
+        </p:txBody>
+      </p:sp>
+      <p:sp>
+        <p:nvSpPr>
+          <p:cNvPr id="40" name="Rectangle 39"/>
+          <p:cNvSpPr/>
+          <p:nvPr/>
+        </p:nvSpPr>
+        <p:spPr>
+          <a:xfrm>
+            <a:off x="1737360" y="5285231"/>
+            <a:ext cx="4169663" cy="566928"/>
+          </a:xfrm>
+          <a:prstGeom prst="rect">
+            <a:avLst/>
+          </a:prstGeom>
+          <a:solidFill>
+            <a:srgbClr val="FFE8D4"/>
+          </a:solidFill>
+          <a:ln>
+            <a:noFill/>
+          </a:ln>
+          <a:effectLst/>
+        </p:spPr>
+        <p:style>
+          <a:lnRef idx="1">
+            <a:schemeClr val="accent1"/>
+          </a:lnRef>
+          <a:fillRef idx="3">
+            <a:schemeClr val="accent1"/>
+          </a:fillRef>
+          <a:effectRef idx="2">
+            <a:schemeClr val="accent1"/>
+          </a:effectRef>
+          <a:fontRef idx="minor">
+            <a:schemeClr val="lt1"/>
+          </a:fontRef>
+        </p:style>
+        <p:txBody>
+          <a:bodyPr rtlCol="0" anchor="ctr" wrap="square" lIns="64008" rIns="64008" tIns="64008" bIns="64008"/>
+          <a:lstStyle/>
+          <a:p>
+            <a:pPr algn="l">
+              <a:spcAft>
+                <a:spcPts val="200"/>
+              </a:spcAft>
+            </a:pPr>
+            <a:r>
+              <a:rPr sz="1000" b="0">
+                <a:solidFill>
+                  <a:srgbClr val="1E1E1E"/>
+                </a:solidFill>
+                <a:latin typeface="Microsoft JhengHei"/>
+              </a:rPr>
+              <a:t>Agent OS 代理編排平台（跨廠商串接、權限控管、監督儀表板）；IFRS 17／TW-ICS 與 AI 治理服務</a:t>
+            </a:r>
+          </a:p>
+        </p:txBody>
+      </p:sp>
+      <p:sp>
+        <p:nvSpPr>
+          <p:cNvPr id="41" name="Rectangle 40"/>
+          <p:cNvSpPr/>
+          <p:nvPr/>
+        </p:nvSpPr>
+        <p:spPr>
+          <a:xfrm>
+            <a:off x="5943600" y="5285231"/>
+            <a:ext cx="1837943" cy="566928"/>
+          </a:xfrm>
+          <a:prstGeom prst="rect">
+            <a:avLst/>
+          </a:prstGeom>
+          <a:solidFill>
+            <a:srgbClr val="FFE8D4"/>
+          </a:solidFill>
+          <a:ln>
+            <a:noFill/>
+          </a:ln>
+          <a:effectLst/>
+        </p:spPr>
+        <p:style>
+          <a:lnRef idx="1">
+            <a:schemeClr val="accent1"/>
+          </a:lnRef>
+          <a:fillRef idx="3">
+            <a:schemeClr val="accent1"/>
+          </a:fillRef>
+          <a:effectRef idx="2">
+            <a:schemeClr val="accent1"/>
+          </a:effectRef>
+          <a:fontRef idx="minor">
+            <a:schemeClr val="lt1"/>
+          </a:fontRef>
+        </p:style>
+        <p:txBody>
+          <a:bodyPr rtlCol="0" anchor="ctr" wrap="square" lIns="64008" rIns="64008" tIns="64008" bIns="64008"/>
+          <a:lstStyle/>
+          <a:p>
+            <a:pPr algn="l">
+              <a:spcAft>
+                <a:spcPts val="200"/>
+              </a:spcAft>
+            </a:pPr>
+            <a:r>
+              <a:rPr sz="1000" b="0">
+                <a:solidFill>
+                  <a:srgbClr val="1E1E1E"/>
+                </a:solidFill>
+                <a:latin typeface="Microsoft JhengHei"/>
+              </a:rPr>
+              <a:t>治理＋財務資料＋落地</a:t>
+            </a:r>
+          </a:p>
+        </p:txBody>
+      </p:sp>
+      <p:sp>
+        <p:nvSpPr>
+          <p:cNvPr id="42" name="Rectangle 41"/>
+          <p:cNvSpPr/>
+          <p:nvPr/>
+        </p:nvSpPr>
+        <p:spPr>
+          <a:xfrm>
+            <a:off x="7818120" y="5285231"/>
+            <a:ext cx="2478024" cy="566928"/>
+          </a:xfrm>
+          <a:prstGeom prst="rect">
+            <a:avLst/>
+          </a:prstGeom>
+          <a:solidFill>
+            <a:srgbClr val="FFE8D4"/>
+          </a:solidFill>
+          <a:ln>
+            <a:noFill/>
+          </a:ln>
+          <a:effectLst/>
+        </p:spPr>
+        <p:style>
+          <a:lnRef idx="1">
+            <a:schemeClr val="accent1"/>
+          </a:lnRef>
+          <a:fillRef idx="3">
+            <a:schemeClr val="accent1"/>
+          </a:fillRef>
+          <a:effectRef idx="2">
+            <a:schemeClr val="accent1"/>
+          </a:effectRef>
+          <a:fontRef idx="minor">
+            <a:schemeClr val="lt1"/>
+          </a:fontRef>
+        </p:style>
+        <p:txBody>
+          <a:bodyPr rtlCol="0" anchor="ctr" wrap="square" lIns="64008" rIns="64008" tIns="64008" bIns="64008"/>
+          <a:lstStyle/>
+          <a:p>
+            <a:pPr algn="l">
+              <a:spcAft>
+                <a:spcPts val="200"/>
+              </a:spcAft>
+            </a:pPr>
+            <a:r>
+              <a:rPr sz="1000" b="0">
+                <a:solidFill>
+                  <a:srgbClr val="1E1E1E"/>
+                </a:solidFill>
+                <a:latin typeface="Microsoft JhengHei"/>
+              </a:rPr>
+              <a:t>可協作：把 Agent OS 與確信能力帶進第一波服務包</a:t>
+            </a:r>
+          </a:p>
+        </p:txBody>
+      </p:sp>
+      <p:sp>
+        <p:nvSpPr>
+          <p:cNvPr id="43" name="Rectangle 42"/>
+          <p:cNvSpPr/>
+          <p:nvPr/>
+        </p:nvSpPr>
+        <p:spPr>
+          <a:xfrm>
+            <a:off x="10332720" y="5285231"/>
+            <a:ext cx="1426464" cy="566928"/>
+          </a:xfrm>
+          <a:prstGeom prst="rect">
+            <a:avLst/>
+          </a:prstGeom>
+          <a:solidFill>
+            <a:srgbClr val="FFE8D4"/>
+          </a:solidFill>
+          <a:ln>
+            <a:noFill/>
+          </a:ln>
+          <a:effectLst/>
+        </p:spPr>
+        <p:style>
+          <a:lnRef idx="1">
+            <a:schemeClr val="accent1"/>
+          </a:lnRef>
+          <a:fillRef idx="3">
+            <a:schemeClr val="accent1"/>
+          </a:fillRef>
+          <a:effectRef idx="2">
+            <a:schemeClr val="accent1"/>
+          </a:effectRef>
+          <a:fontRef idx="minor">
+            <a:schemeClr val="lt1"/>
+          </a:fontRef>
+        </p:style>
+        <p:txBody>
+          <a:bodyPr rtlCol="0" anchor="ctr" wrap="square" lIns="64008" rIns="64008" tIns="64008" bIns="64008"/>
+          <a:lstStyle/>
+          <a:p>
+            <a:pPr algn="l">
+              <a:spcAft>
+                <a:spcPts val="200"/>
+              </a:spcAft>
+            </a:pPr>
+            <a:r>
+              <a:rPr sz="950" b="0" u="sng">
+                <a:solidFill>
+                  <a:srgbClr val="1F5FBF"/>
+                </a:solidFill>
+                <a:latin typeface="Microsoft JhengHei"/>
+                <a:hlinkClick r:id="rId13"/>
+              </a:rPr>
+              <a:t>Agent OS</a:t>
+            </a:r>
+          </a:p>
+          <a:p>
+            <a:pPr algn="l">
+              <a:spcAft>
+                <a:spcPts val="200"/>
+              </a:spcAft>
+            </a:pPr>
+            <a:r>
+              <a:rPr sz="950" b="0" u="sng">
+                <a:solidFill>
+                  <a:srgbClr val="1F5FBF"/>
+                </a:solidFill>
+                <a:latin typeface="Microsoft JhengHei"/>
+                <a:hlinkClick r:id="rId14"/>
+              </a:rPr>
+              <a:t>IFRS 17</a:t>
+            </a:r>
+          </a:p>
+        </p:txBody>
+      </p:sp>
+      <p:sp>
+        <p:nvSpPr>
+          <p:cNvPr id="44" name="Rectangle 43"/>
+          <p:cNvSpPr/>
+          <p:nvPr/>
+        </p:nvSpPr>
+        <p:spPr>
+          <a:xfrm>
+            <a:off x="411480" y="5925312"/>
+            <a:ext cx="11384280" cy="274320"/>
+          </a:xfrm>
+          <a:prstGeom prst="rect">
+            <a:avLst/>
+          </a:prstGeom>
+          <a:noFill/>
+          <a:ln>
+            <a:noFill/>
+          </a:ln>
+          <a:effectLst/>
+        </p:spPr>
+        <p:style>
+          <a:lnRef idx="1">
+            <a:schemeClr val="accent1"/>
+          </a:lnRef>
+          <a:fillRef idx="3">
+            <a:schemeClr val="accent1"/>
+          </a:fillRef>
+          <a:effectRef idx="2">
+            <a:schemeClr val="accent1"/>
+          </a:effectRef>
+          <a:fontRef idx="minor">
+            <a:schemeClr val="lt1"/>
+          </a:fontRef>
+        </p:style>
+        <p:txBody>
+          <a:bodyPr rtlCol="0" anchor="t" wrap="square" lIns="54864" rIns="54864" tIns="54864" bIns="54864"/>
+          <a:lstStyle/>
+          <a:p>
+            <a:pPr algn="l">
+              <a:spcAft>
+                <a:spcPts val="200"/>
+              </a:spcAft>
+            </a:pPr>
+            <a:r>
+              <a:rPr sz="900" b="0">
+                <a:solidFill>
+                  <a:srgbClr val="6B6B6B"/>
+                </a:solidFill>
+                <a:latin typeface="Microsoft JhengHei"/>
+              </a:rPr>
+              <a:t>「可能侷限」為依公開資料的推論，僅供內部討論，對外勿點名競爭者。點選右欄可開啟各機構官網或原文。</a:t>
+            </a:r>
+          </a:p>
+        </p:txBody>
+      </p:sp>
+    </p:spTree>
+  </p:cSld>
+  <p:clrMapOvr>
+    <a:masterClrMapping/>
+  </p:clrMapOvr>
+</p:sld>
+</file>
+
+<file path=ppt/slides/slide4.xml><?xml version="1.0" encoding="utf-8"?>
 <p:sld xmlns:a="http://schemas.openxmlformats.org/drawingml/2006/main" xmlns:p="http://schemas.openxmlformats.org/presentationml/2006/main" xmlns:r="http://schemas.openxmlformats.org/officeDocument/2006/relationships">
   <p:cSld>
     <p:spTree>

--- a/research/insurtech-2026/保險科技服務優先順序_主管精簡版.pptx
+++ b/research/insurtech-2026/保險科技服務優先順序_主管精簡版.pptx
@@ -16,7 +16,6 @@
     <p:sldId id="256" r:id="rId17"/>
     <p:sldId id="257" r:id="rId18"/>
     <p:sldId id="258" r:id="rId19"/>
-    <p:sldId id="259" r:id="rId20"/>
   </p:sldIdLst>
   <p:sldSz cx="12192000" cy="6858000"/>
   <p:notesSz cx="6858000" cy="9144000"/>
@@ -49690,2071 +49689,6 @@
                 <a:latin typeface="Microsoft JhengHei"/>
               </a:rPr>
               <a:t>「可能侷限」為依公開資料的推論，僅供內部討論，對外勿點名競爭者。點選右欄可開啟各機構官網或原文。</a:t>
-            </a:r>
-          </a:p>
-        </p:txBody>
-      </p:sp>
-    </p:spTree>
-  </p:cSld>
-  <p:clrMapOvr>
-    <a:masterClrMapping/>
-  </p:clrMapOvr>
-</p:sld>
-</file>
-
-<file path=ppt/slides/slide4.xml><?xml version="1.0" encoding="utf-8"?>
-<p:sld xmlns:a="http://schemas.openxmlformats.org/drawingml/2006/main" xmlns:p="http://schemas.openxmlformats.org/presentationml/2006/main" xmlns:r="http://schemas.openxmlformats.org/officeDocument/2006/relationships">
-  <p:cSld>
-    <p:spTree>
-      <p:nvGrpSpPr>
-        <p:cNvPr id="1" name=""/>
-        <p:cNvGrpSpPr/>
-        <p:nvPr/>
-      </p:nvGrpSpPr>
-      <p:grpSpPr/>
-      <p:sp>
-        <p:nvSpPr>
-          <p:cNvPr id="2" name="Title 1"/>
-          <p:cNvSpPr>
-            <a:spLocks noGrp="1"/>
-          </p:cNvSpPr>
-          <p:nvPr>
-            <p:ph type="title"/>
-          </p:nvPr>
-        </p:nvSpPr>
-        <p:spPr/>
-        <p:txBody>
-          <a:bodyPr/>
-          <a:lstStyle/>
-          <a:p>
-            <a:r>
-              <a:rPr sz="2000">
-                <a:latin typeface="Microsoft JhengHei"/>
-              </a:rPr>
-              <a:t>90 天內把兩項服務包做成可銷售的提案，今天請決定四件事</a:t>
-            </a:r>
-          </a:p>
-        </p:txBody>
-      </p:sp>
-      <p:sp>
-        <p:nvSpPr>
-          <p:cNvPr id="3" name="Rectangle 2"/>
-          <p:cNvSpPr/>
-          <p:nvPr/>
-        </p:nvSpPr>
-        <p:spPr>
-          <a:xfrm>
-            <a:off x="1600200" y="1280160"/>
-            <a:ext cx="3343656" cy="384048"/>
-          </a:xfrm>
-          <a:prstGeom prst="rect">
-            <a:avLst/>
-          </a:prstGeom>
-          <a:solidFill>
-            <a:srgbClr val="1E1E1E"/>
-          </a:solidFill>
-          <a:ln>
-            <a:noFill/>
-          </a:ln>
-          <a:effectLst/>
-        </p:spPr>
-        <p:style>
-          <a:lnRef idx="1">
-            <a:schemeClr val="accent1"/>
-          </a:lnRef>
-          <a:fillRef idx="3">
-            <a:schemeClr val="accent1"/>
-          </a:fillRef>
-          <a:effectRef idx="2">
-            <a:schemeClr val="accent1"/>
-          </a:effectRef>
-          <a:fontRef idx="minor">
-            <a:schemeClr val="lt1"/>
-          </a:fontRef>
-        </p:style>
-        <p:txBody>
-          <a:bodyPr rtlCol="0" anchor="ctr" wrap="square" lIns="54864" rIns="54864" tIns="54864" bIns="54864"/>
-          <a:lstStyle/>
-          <a:p>
-            <a:pPr algn="ctr">
-              <a:spcAft>
-                <a:spcPts val="200"/>
-              </a:spcAft>
-            </a:pPr>
-            <a:r>
-              <a:rPr sz="1200" b="1">
-                <a:solidFill>
-                  <a:srgbClr val="FFFFFF"/>
-                </a:solidFill>
-                <a:latin typeface="Microsoft JhengHei"/>
-              </a:rPr>
-              <a:t>第 1–4 週｜打包</a:t>
-            </a:r>
-          </a:p>
-        </p:txBody>
-      </p:sp>
-      <p:sp>
-        <p:nvSpPr>
-          <p:cNvPr id="4" name="Rectangle 3"/>
-          <p:cNvSpPr/>
-          <p:nvPr/>
-        </p:nvSpPr>
-        <p:spPr>
-          <a:xfrm>
-            <a:off x="4998720" y="1280160"/>
-            <a:ext cx="3343656" cy="384048"/>
-          </a:xfrm>
-          <a:prstGeom prst="rect">
-            <a:avLst/>
-          </a:prstGeom>
-          <a:solidFill>
-            <a:srgbClr val="1E1E1E"/>
-          </a:solidFill>
-          <a:ln>
-            <a:noFill/>
-          </a:ln>
-          <a:effectLst/>
-        </p:spPr>
-        <p:style>
-          <a:lnRef idx="1">
-            <a:schemeClr val="accent1"/>
-          </a:lnRef>
-          <a:fillRef idx="3">
-            <a:schemeClr val="accent1"/>
-          </a:fillRef>
-          <a:effectRef idx="2">
-            <a:schemeClr val="accent1"/>
-          </a:effectRef>
-          <a:fontRef idx="minor">
-            <a:schemeClr val="lt1"/>
-          </a:fontRef>
-        </p:style>
-        <p:txBody>
-          <a:bodyPr rtlCol="0" anchor="ctr" wrap="square" lIns="54864" rIns="54864" tIns="54864" bIns="54864"/>
-          <a:lstStyle/>
-          <a:p>
-            <a:pPr algn="ctr">
-              <a:spcAft>
-                <a:spcPts val="200"/>
-              </a:spcAft>
-            </a:pPr>
-            <a:r>
-              <a:rPr sz="1200" b="1">
-                <a:solidFill>
-                  <a:srgbClr val="FFFFFF"/>
-                </a:solidFill>
-                <a:latin typeface="Microsoft JhengHei"/>
-              </a:rPr>
-              <a:t>第 5–8 週｜驗證</a:t>
-            </a:r>
-          </a:p>
-        </p:txBody>
-      </p:sp>
-      <p:sp>
-        <p:nvSpPr>
-          <p:cNvPr id="5" name="Rectangle 4"/>
-          <p:cNvSpPr/>
-          <p:nvPr/>
-        </p:nvSpPr>
-        <p:spPr>
-          <a:xfrm>
-            <a:off x="8397240" y="1280160"/>
-            <a:ext cx="3343656" cy="384048"/>
-          </a:xfrm>
-          <a:prstGeom prst="rect">
-            <a:avLst/>
-          </a:prstGeom>
-          <a:solidFill>
-            <a:srgbClr val="1E1E1E"/>
-          </a:solidFill>
-          <a:ln>
-            <a:noFill/>
-          </a:ln>
-          <a:effectLst/>
-        </p:spPr>
-        <p:style>
-          <a:lnRef idx="1">
-            <a:schemeClr val="accent1"/>
-          </a:lnRef>
-          <a:fillRef idx="3">
-            <a:schemeClr val="accent1"/>
-          </a:fillRef>
-          <a:effectRef idx="2">
-            <a:schemeClr val="accent1"/>
-          </a:effectRef>
-          <a:fontRef idx="minor">
-            <a:schemeClr val="lt1"/>
-          </a:fontRef>
-        </p:style>
-        <p:txBody>
-          <a:bodyPr rtlCol="0" anchor="ctr" wrap="square" lIns="54864" rIns="54864" tIns="54864" bIns="54864"/>
-          <a:lstStyle/>
-          <a:p>
-            <a:pPr algn="ctr">
-              <a:spcAft>
-                <a:spcPts val="200"/>
-              </a:spcAft>
-            </a:pPr>
-            <a:r>
-              <a:rPr sz="1200" b="1">
-                <a:solidFill>
-                  <a:srgbClr val="FFFFFF"/>
-                </a:solidFill>
-                <a:latin typeface="Microsoft JhengHei"/>
-              </a:rPr>
-              <a:t>第 9–12 週｜開賣</a:t>
-            </a:r>
-          </a:p>
-        </p:txBody>
-      </p:sp>
-      <p:sp>
-        <p:nvSpPr>
-          <p:cNvPr id="6" name="Rectangle 5"/>
-          <p:cNvSpPr/>
-          <p:nvPr/>
-        </p:nvSpPr>
-        <p:spPr>
-          <a:xfrm>
-            <a:off x="411480" y="1737360"/>
-            <a:ext cx="1133856" cy="548640"/>
-          </a:xfrm>
-          <a:prstGeom prst="rect">
-            <a:avLst/>
-          </a:prstGeom>
-          <a:solidFill>
-            <a:srgbClr val="F3F3F3"/>
-          </a:solidFill>
-          <a:ln>
-            <a:noFill/>
-          </a:ln>
-          <a:effectLst/>
-        </p:spPr>
-        <p:style>
-          <a:lnRef idx="1">
-            <a:schemeClr val="accent1"/>
-          </a:lnRef>
-          <a:fillRef idx="3">
-            <a:schemeClr val="accent1"/>
-          </a:fillRef>
-          <a:effectRef idx="2">
-            <a:schemeClr val="accent1"/>
-          </a:effectRef>
-          <a:fontRef idx="minor">
-            <a:schemeClr val="lt1"/>
-          </a:fontRef>
-        </p:style>
-        <p:txBody>
-          <a:bodyPr rtlCol="0" anchor="ctr" wrap="square" lIns="73152" rIns="73152" tIns="73152" bIns="73152"/>
-          <a:lstStyle/>
-          <a:p>
-            <a:pPr algn="l">
-              <a:spcAft>
-                <a:spcPts val="200"/>
-              </a:spcAft>
-            </a:pPr>
-            <a:r>
-              <a:rPr sz="1200" b="1">
-                <a:solidFill>
-                  <a:srgbClr val="FD5108"/>
-                </a:solidFill>
-                <a:latin typeface="Microsoft JhengHei"/>
-              </a:rPr>
-              <a:t>① IFRS 17</a:t>
-            </a:r>
-          </a:p>
-        </p:txBody>
-      </p:sp>
-      <p:sp>
-        <p:nvSpPr>
-          <p:cNvPr id="7" name="Rectangle 6"/>
-          <p:cNvSpPr/>
-          <p:nvPr/>
-        </p:nvSpPr>
-        <p:spPr>
-          <a:xfrm>
-            <a:off x="1600200" y="1737360"/>
-            <a:ext cx="3343656" cy="548640"/>
-          </a:xfrm>
-          <a:prstGeom prst="rect">
-            <a:avLst/>
-          </a:prstGeom>
-          <a:solidFill>
-            <a:srgbClr val="FFE8D4"/>
-          </a:solidFill>
-          <a:ln>
-            <a:noFill/>
-          </a:ln>
-          <a:effectLst/>
-        </p:spPr>
-        <p:style>
-          <a:lnRef idx="1">
-            <a:schemeClr val="accent1"/>
-          </a:lnRef>
-          <a:fillRef idx="3">
-            <a:schemeClr val="accent1"/>
-          </a:fillRef>
-          <a:effectRef idx="2">
-            <a:schemeClr val="accent1"/>
-          </a:effectRef>
-          <a:fontRef idx="minor">
-            <a:schemeClr val="lt1"/>
-          </a:fontRef>
-        </p:style>
-        <p:txBody>
-          <a:bodyPr rtlCol="0" anchor="ctr" wrap="square" tIns="91440" bIns="91440"/>
-          <a:lstStyle/>
-          <a:p>
-            <a:pPr algn="l">
-              <a:spcAft>
-                <a:spcPts val="200"/>
-              </a:spcAft>
-            </a:pPr>
-            <a:r>
-              <a:rPr sz="1100" b="0">
-                <a:solidFill>
-                  <a:srgbClr val="1E1E1E"/>
-                </a:solidFill>
-                <a:latin typeface="Microsoft JhengHei"/>
-              </a:rPr>
-              <a:t>服務一頁紙、首案範圍與報價區間</a:t>
-            </a:r>
-          </a:p>
-        </p:txBody>
-      </p:sp>
-      <p:sp>
-        <p:nvSpPr>
-          <p:cNvPr id="8" name="Rectangle 7"/>
-          <p:cNvSpPr/>
-          <p:nvPr/>
-        </p:nvSpPr>
-        <p:spPr>
-          <a:xfrm>
-            <a:off x="4998720" y="1737360"/>
-            <a:ext cx="3343656" cy="548640"/>
-          </a:xfrm>
-          <a:prstGeom prst="rect">
-            <a:avLst/>
-          </a:prstGeom>
-          <a:solidFill>
-            <a:srgbClr val="FFE8D4"/>
-          </a:solidFill>
-          <a:ln>
-            <a:noFill/>
-          </a:ln>
-          <a:effectLst/>
-        </p:spPr>
-        <p:style>
-          <a:lnRef idx="1">
-            <a:schemeClr val="accent1"/>
-          </a:lnRef>
-          <a:fillRef idx="3">
-            <a:schemeClr val="accent1"/>
-          </a:fillRef>
-          <a:effectRef idx="2">
-            <a:schemeClr val="accent1"/>
-          </a:effectRef>
-          <a:fontRef idx="minor">
-            <a:schemeClr val="lt1"/>
-          </a:fontRef>
-        </p:style>
-        <p:txBody>
-          <a:bodyPr rtlCol="0" anchor="ctr" wrap="square" tIns="91440" bIns="91440"/>
-          <a:lstStyle/>
-          <a:p>
-            <a:pPr algn="l">
-              <a:spcAft>
-                <a:spcPts val="200"/>
-              </a:spcAft>
-            </a:pPr>
-            <a:r>
-              <a:rPr sz="1100" b="0">
-                <a:solidFill>
-                  <a:srgbClr val="1E1E1E"/>
-                </a:solidFill>
-                <a:latin typeface="Microsoft JhengHei"/>
-              </a:rPr>
-              <a:t>與所內 IFRS 17 團隊確認分工、選目標客戶</a:t>
-            </a:r>
-          </a:p>
-        </p:txBody>
-      </p:sp>
-      <p:sp>
-        <p:nvSpPr>
-          <p:cNvPr id="9" name="Rectangle 8"/>
-          <p:cNvSpPr/>
-          <p:nvPr/>
-        </p:nvSpPr>
-        <p:spPr>
-          <a:xfrm>
-            <a:off x="8397240" y="1737360"/>
-            <a:ext cx="3343656" cy="548640"/>
-          </a:xfrm>
-          <a:prstGeom prst="rect">
-            <a:avLst/>
-          </a:prstGeom>
-          <a:solidFill>
-            <a:srgbClr val="FFE8D4"/>
-          </a:solidFill>
-          <a:ln>
-            <a:noFill/>
-          </a:ln>
-          <a:effectLst/>
-        </p:spPr>
-        <p:style>
-          <a:lnRef idx="1">
-            <a:schemeClr val="accent1"/>
-          </a:lnRef>
-          <a:fillRef idx="3">
-            <a:schemeClr val="accent1"/>
-          </a:fillRef>
-          <a:effectRef idx="2">
-            <a:schemeClr val="accent1"/>
-          </a:effectRef>
-          <a:fontRef idx="minor">
-            <a:schemeClr val="lt1"/>
-          </a:fontRef>
-        </p:style>
-        <p:txBody>
-          <a:bodyPr rtlCol="0" anchor="ctr" wrap="square" tIns="91440" bIns="91440"/>
-          <a:lstStyle/>
-          <a:p>
-            <a:pPr algn="l">
-              <a:spcAft>
-                <a:spcPts val="200"/>
-              </a:spcAft>
-            </a:pPr>
-            <a:r>
-              <a:rPr sz="1100" b="0">
-                <a:solidFill>
-                  <a:srgbClr val="1E1E1E"/>
-                </a:solidFill>
-                <a:latin typeface="Microsoft JhengHei"/>
-              </a:rPr>
-              <a:t>客戶對談、首案建議書</a:t>
-            </a:r>
-          </a:p>
-        </p:txBody>
-      </p:sp>
-      <p:sp>
-        <p:nvSpPr>
-          <p:cNvPr id="10" name="Rectangle 9"/>
-          <p:cNvSpPr/>
-          <p:nvPr/>
-        </p:nvSpPr>
-        <p:spPr>
-          <a:xfrm>
-            <a:off x="411480" y="2359152"/>
-            <a:ext cx="1133856" cy="548640"/>
-          </a:xfrm>
-          <a:prstGeom prst="rect">
-            <a:avLst/>
-          </a:prstGeom>
-          <a:solidFill>
-            <a:srgbClr val="F3F3F3"/>
-          </a:solidFill>
-          <a:ln>
-            <a:noFill/>
-          </a:ln>
-          <a:effectLst/>
-        </p:spPr>
-        <p:style>
-          <a:lnRef idx="1">
-            <a:schemeClr val="accent1"/>
-          </a:lnRef>
-          <a:fillRef idx="3">
-            <a:schemeClr val="accent1"/>
-          </a:fillRef>
-          <a:effectRef idx="2">
-            <a:schemeClr val="accent1"/>
-          </a:effectRef>
-          <a:fontRef idx="minor">
-            <a:schemeClr val="lt1"/>
-          </a:fontRef>
-        </p:style>
-        <p:txBody>
-          <a:bodyPr rtlCol="0" anchor="ctr" wrap="square" lIns="73152" rIns="73152" tIns="73152" bIns="73152"/>
-          <a:lstStyle/>
-          <a:p>
-            <a:pPr algn="l">
-              <a:spcAft>
-                <a:spcPts val="200"/>
-              </a:spcAft>
-            </a:pPr>
-            <a:r>
-              <a:rPr sz="1200" b="1">
-                <a:solidFill>
-                  <a:srgbClr val="FD5108"/>
-                </a:solidFill>
-                <a:latin typeface="Microsoft JhengHei"/>
-              </a:rPr>
-              <a:t>② AI 治理</a:t>
-            </a:r>
-          </a:p>
-        </p:txBody>
-      </p:sp>
-      <p:sp>
-        <p:nvSpPr>
-          <p:cNvPr id="11" name="Rectangle 10"/>
-          <p:cNvSpPr/>
-          <p:nvPr/>
-        </p:nvSpPr>
-        <p:spPr>
-          <a:xfrm>
-            <a:off x="1600200" y="2359152"/>
-            <a:ext cx="3343656" cy="548640"/>
-          </a:xfrm>
-          <a:prstGeom prst="rect">
-            <a:avLst/>
-          </a:prstGeom>
-          <a:solidFill>
-            <a:srgbClr val="FFE8D4"/>
-          </a:solidFill>
-          <a:ln>
-            <a:noFill/>
-          </a:ln>
-          <a:effectLst/>
-        </p:spPr>
-        <p:style>
-          <a:lnRef idx="1">
-            <a:schemeClr val="accent1"/>
-          </a:lnRef>
-          <a:fillRef idx="3">
-            <a:schemeClr val="accent1"/>
-          </a:fillRef>
-          <a:effectRef idx="2">
-            <a:schemeClr val="accent1"/>
-          </a:effectRef>
-          <a:fontRef idx="minor">
-            <a:schemeClr val="lt1"/>
-          </a:fontRef>
-        </p:style>
-        <p:txBody>
-          <a:bodyPr rtlCol="0" anchor="ctr" wrap="square" tIns="91440" bIns="91440"/>
-          <a:lstStyle/>
-          <a:p>
-            <a:pPr algn="l">
-              <a:spcAft>
-                <a:spcPts val="200"/>
-              </a:spcAft>
-            </a:pPr>
-            <a:r>
-              <a:rPr sz="1100" b="0">
-                <a:solidFill>
-                  <a:srgbClr val="1E1E1E"/>
-                </a:solidFill>
-                <a:latin typeface="Microsoft JhengHei"/>
-              </a:rPr>
-              <a:t>健檢方法與 AI 清冊範本</a:t>
-            </a:r>
-          </a:p>
-        </p:txBody>
-      </p:sp>
-      <p:sp>
-        <p:nvSpPr>
-          <p:cNvPr id="12" name="Rectangle 11"/>
-          <p:cNvSpPr/>
-          <p:nvPr/>
-        </p:nvSpPr>
-        <p:spPr>
-          <a:xfrm>
-            <a:off x="4998720" y="2359152"/>
-            <a:ext cx="3343656" cy="548640"/>
-          </a:xfrm>
-          <a:prstGeom prst="rect">
-            <a:avLst/>
-          </a:prstGeom>
-          <a:solidFill>
-            <a:srgbClr val="FFE8D4"/>
-          </a:solidFill>
-          <a:ln>
-            <a:noFill/>
-          </a:ln>
-          <a:effectLst/>
-        </p:spPr>
-        <p:style>
-          <a:lnRef idx="1">
-            <a:schemeClr val="accent1"/>
-          </a:lnRef>
-          <a:fillRef idx="3">
-            <a:schemeClr val="accent1"/>
-          </a:fillRef>
-          <a:effectRef idx="2">
-            <a:schemeClr val="accent1"/>
-          </a:effectRef>
-          <a:fontRef idx="minor">
-            <a:schemeClr val="lt1"/>
-          </a:fontRef>
-        </p:style>
-        <p:txBody>
-          <a:bodyPr rtlCol="0" anchor="ctr" wrap="square" tIns="91440" bIns="91440"/>
-          <a:lstStyle/>
-          <a:p>
-            <a:pPr algn="l">
-              <a:spcAft>
-                <a:spcPts val="200"/>
-              </a:spcAft>
-            </a:pPr>
-            <a:r>
-              <a:rPr sz="1100" b="0">
-                <a:solidFill>
-                  <a:srgbClr val="1E1E1E"/>
-                </a:solidFill>
-                <a:latin typeface="Microsoft JhengHei"/>
-              </a:rPr>
-              <a:t>R&amp;Q 獨立性確認、內部試做</a:t>
-            </a:r>
-          </a:p>
-        </p:txBody>
-      </p:sp>
-      <p:sp>
-        <p:nvSpPr>
-          <p:cNvPr id="13" name="Rectangle 12"/>
-          <p:cNvSpPr/>
-          <p:nvPr/>
-        </p:nvSpPr>
-        <p:spPr>
-          <a:xfrm>
-            <a:off x="8397240" y="2359152"/>
-            <a:ext cx="3343656" cy="548640"/>
-          </a:xfrm>
-          <a:prstGeom prst="rect">
-            <a:avLst/>
-          </a:prstGeom>
-          <a:solidFill>
-            <a:srgbClr val="FFE8D4"/>
-          </a:solidFill>
-          <a:ln>
-            <a:noFill/>
-          </a:ln>
-          <a:effectLst/>
-        </p:spPr>
-        <p:style>
-          <a:lnRef idx="1">
-            <a:schemeClr val="accent1"/>
-          </a:lnRef>
-          <a:fillRef idx="3">
-            <a:schemeClr val="accent1"/>
-          </a:fillRef>
-          <a:effectRef idx="2">
-            <a:schemeClr val="accent1"/>
-          </a:effectRef>
-          <a:fontRef idx="minor">
-            <a:schemeClr val="lt1"/>
-          </a:fontRef>
-        </p:style>
-        <p:txBody>
-          <a:bodyPr rtlCol="0" anchor="ctr" wrap="square" tIns="91440" bIns="91440"/>
-          <a:lstStyle/>
-          <a:p>
-            <a:pPr algn="l">
-              <a:spcAft>
-                <a:spcPts val="200"/>
-              </a:spcAft>
-            </a:pPr>
-            <a:r>
-              <a:rPr sz="1100" b="0">
-                <a:solidFill>
-                  <a:srgbClr val="1E1E1E"/>
-                </a:solidFill>
-                <a:latin typeface="Microsoft JhengHei"/>
-              </a:rPr>
-              <a:t>客戶對談、首案建議書</a:t>
-            </a:r>
-          </a:p>
-        </p:txBody>
-      </p:sp>
-      <p:sp>
-        <p:nvSpPr>
-          <p:cNvPr id="14" name="Rectangle 13"/>
-          <p:cNvSpPr/>
-          <p:nvPr/>
-        </p:nvSpPr>
-        <p:spPr>
-          <a:xfrm>
-            <a:off x="411480" y="3108960"/>
-            <a:ext cx="7498079" cy="384048"/>
-          </a:xfrm>
-          <a:prstGeom prst="rect">
-            <a:avLst/>
-          </a:prstGeom>
-          <a:solidFill>
-            <a:srgbClr val="FD5108"/>
-          </a:solidFill>
-          <a:ln>
-            <a:noFill/>
-          </a:ln>
-          <a:effectLst/>
-        </p:spPr>
-        <p:style>
-          <a:lnRef idx="1">
-            <a:schemeClr val="accent1"/>
-          </a:lnRef>
-          <a:fillRef idx="3">
-            <a:schemeClr val="accent1"/>
-          </a:fillRef>
-          <a:effectRef idx="2">
-            <a:schemeClr val="accent1"/>
-          </a:effectRef>
-          <a:fontRef idx="minor">
-            <a:schemeClr val="lt1"/>
-          </a:fontRef>
-        </p:style>
-        <p:txBody>
-          <a:bodyPr rtlCol="0" anchor="ctr" wrap="square" lIns="54864" rIns="54864" tIns="54864" bIns="54864"/>
-          <a:lstStyle/>
-          <a:p>
-            <a:pPr algn="l">
-              <a:spcAft>
-                <a:spcPts val="200"/>
-              </a:spcAft>
-            </a:pPr>
-            <a:r>
-              <a:rPr sz="1300" b="1">
-                <a:solidFill>
-                  <a:srgbClr val="FFFFFF"/>
-                </a:solidFill>
-                <a:latin typeface="Microsoft JhengHei"/>
-              </a:rPr>
-              <a:t>今天請決定</a:t>
-            </a:r>
-          </a:p>
-        </p:txBody>
-      </p:sp>
-      <p:sp>
-        <p:nvSpPr>
-          <p:cNvPr id="15" name="Oval 14"/>
-          <p:cNvSpPr/>
-          <p:nvPr/>
-        </p:nvSpPr>
-        <p:spPr>
-          <a:xfrm>
-            <a:off x="457200" y="3657600"/>
-            <a:ext cx="384048" cy="384048"/>
-          </a:xfrm>
-          <a:prstGeom prst="ellipse">
-            <a:avLst/>
-          </a:prstGeom>
-          <a:solidFill>
-            <a:srgbClr val="FD5108"/>
-          </a:solidFill>
-          <a:ln>
-            <a:noFill/>
-          </a:ln>
-          <a:effectLst/>
-        </p:spPr>
-        <p:style>
-          <a:lnRef idx="1">
-            <a:schemeClr val="accent1"/>
-          </a:lnRef>
-          <a:fillRef idx="3">
-            <a:schemeClr val="accent1"/>
-          </a:fillRef>
-          <a:effectRef idx="2">
-            <a:schemeClr val="accent1"/>
-          </a:effectRef>
-          <a:fontRef idx="minor">
-            <a:schemeClr val="lt1"/>
-          </a:fontRef>
-        </p:style>
-        <p:txBody>
-          <a:bodyPr rtlCol="0" anchor="ctr" lIns="0" rIns="0" tIns="0" bIns="0"/>
-          <a:lstStyle/>
-          <a:p>
-            <a:pPr algn="ctr"/>
-            <a:r>
-              <a:rPr sz="1200" b="1">
-                <a:solidFill>
-                  <a:srgbClr val="FFFFFF"/>
-                </a:solidFill>
-                <a:latin typeface="Microsoft JhengHei"/>
-              </a:rPr>
-              <a:t>1</a:t>
-            </a:r>
-          </a:p>
-        </p:txBody>
-      </p:sp>
-      <p:sp>
-        <p:nvSpPr>
-          <p:cNvPr id="16" name="Rectangle 15"/>
-          <p:cNvSpPr/>
-          <p:nvPr/>
-        </p:nvSpPr>
-        <p:spPr>
-          <a:xfrm>
-            <a:off x="960120" y="3566160"/>
-            <a:ext cx="2148840" cy="530352"/>
-          </a:xfrm>
-          <a:prstGeom prst="rect">
-            <a:avLst/>
-          </a:prstGeom>
-          <a:solidFill>
-            <a:srgbClr val="F3F3F3"/>
-          </a:solidFill>
-          <a:ln>
-            <a:noFill/>
-          </a:ln>
-          <a:effectLst/>
-        </p:spPr>
-        <p:style>
-          <a:lnRef idx="1">
-            <a:schemeClr val="accent1"/>
-          </a:lnRef>
-          <a:fillRef idx="3">
-            <a:schemeClr val="accent1"/>
-          </a:fillRef>
-          <a:effectRef idx="2">
-            <a:schemeClr val="accent1"/>
-          </a:effectRef>
-          <a:fontRef idx="minor">
-            <a:schemeClr val="lt1"/>
-          </a:fontRef>
-        </p:style>
-        <p:txBody>
-          <a:bodyPr rtlCol="0" anchor="ctr" wrap="square" lIns="73152" rIns="73152" tIns="73152" bIns="73152"/>
-          <a:lstStyle/>
-          <a:p>
-            <a:pPr algn="l">
-              <a:spcAft>
-                <a:spcPts val="200"/>
-              </a:spcAft>
-            </a:pPr>
-            <a:r>
-              <a:rPr sz="1150" b="1">
-                <a:solidFill>
-                  <a:srgbClr val="1E1E1E"/>
-                </a:solidFill>
-                <a:latin typeface="Microsoft JhengHei"/>
-              </a:rPr>
-              <a:t>第一波推哪兩項服務</a:t>
-            </a:r>
-          </a:p>
-        </p:txBody>
-      </p:sp>
-      <p:sp>
-        <p:nvSpPr>
-          <p:cNvPr id="17" name="Rectangle 16"/>
-          <p:cNvSpPr/>
-          <p:nvPr/>
-        </p:nvSpPr>
-        <p:spPr>
-          <a:xfrm>
-            <a:off x="3154680" y="3566160"/>
-            <a:ext cx="3886200" cy="530352"/>
-          </a:xfrm>
-          <a:prstGeom prst="rect">
-            <a:avLst/>
-          </a:prstGeom>
-          <a:solidFill>
-            <a:srgbClr val="FFE8D4"/>
-          </a:solidFill>
-          <a:ln>
-            <a:noFill/>
-          </a:ln>
-          <a:effectLst/>
-        </p:spPr>
-        <p:style>
-          <a:lnRef idx="1">
-            <a:schemeClr val="accent1"/>
-          </a:lnRef>
-          <a:fillRef idx="3">
-            <a:schemeClr val="accent1"/>
-          </a:fillRef>
-          <a:effectRef idx="2">
-            <a:schemeClr val="accent1"/>
-          </a:effectRef>
-          <a:fontRef idx="minor">
-            <a:schemeClr val="lt1"/>
-          </a:fontRef>
-        </p:style>
-        <p:txBody>
-          <a:bodyPr rtlCol="0" anchor="ctr" wrap="square" lIns="73152" rIns="73152" tIns="73152" bIns="73152"/>
-          <a:lstStyle/>
-          <a:p>
-            <a:pPr algn="l">
-              <a:spcAft>
-                <a:spcPts val="200"/>
-              </a:spcAft>
-            </a:pPr>
-            <a:r>
-              <a:rPr sz="1100" b="0">
-                <a:solidFill>
-                  <a:srgbClr val="1E1E1E"/>
-                </a:solidFill>
-                <a:latin typeface="Microsoft JhengHei"/>
-              </a:rPr>
-              <a:t>IFRS 17／TW-ICS 後財務轉型、AI 清冊與模型驗證健檢</a:t>
-            </a:r>
-          </a:p>
-        </p:txBody>
-      </p:sp>
-      <p:sp>
-        <p:nvSpPr>
-          <p:cNvPr id="18" name="Rectangle 17"/>
-          <p:cNvSpPr/>
-          <p:nvPr/>
-        </p:nvSpPr>
-        <p:spPr>
-          <a:xfrm>
-            <a:off x="7086600" y="3566160"/>
-            <a:ext cx="822960" cy="530352"/>
-          </a:xfrm>
-          <a:prstGeom prst="rect">
-            <a:avLst/>
-          </a:prstGeom>
-          <a:solidFill>
-            <a:srgbClr val="F3F3F3"/>
-          </a:solidFill>
-          <a:ln>
-            <a:noFill/>
-          </a:ln>
-          <a:effectLst/>
-        </p:spPr>
-        <p:style>
-          <a:lnRef idx="1">
-            <a:schemeClr val="accent1"/>
-          </a:lnRef>
-          <a:fillRef idx="3">
-            <a:schemeClr val="accent1"/>
-          </a:fillRef>
-          <a:effectRef idx="2">
-            <a:schemeClr val="accent1"/>
-          </a:effectRef>
-          <a:fontRef idx="minor">
-            <a:schemeClr val="lt1"/>
-          </a:fontRef>
-        </p:style>
-        <p:txBody>
-          <a:bodyPr rtlCol="0" anchor="ctr" wrap="square" lIns="36576" rIns="36576" tIns="36576" bIns="36576"/>
-          <a:lstStyle/>
-          <a:p>
-            <a:pPr algn="ctr">
-              <a:spcAft>
-                <a:spcPts val="200"/>
-              </a:spcAft>
-            </a:pPr>
-            <a:r>
-              <a:rPr sz="1100" b="1">
-                <a:solidFill>
-                  <a:srgbClr val="FD5108"/>
-                </a:solidFill>
-                <a:latin typeface="Microsoft JhengHei"/>
-              </a:rPr>
-              <a:t>今天</a:t>
-            </a:r>
-          </a:p>
-        </p:txBody>
-      </p:sp>
-      <p:sp>
-        <p:nvSpPr>
-          <p:cNvPr id="19" name="Oval 18"/>
-          <p:cNvSpPr/>
-          <p:nvPr/>
-        </p:nvSpPr>
-        <p:spPr>
-          <a:xfrm>
-            <a:off x="457200" y="4261103"/>
-            <a:ext cx="384048" cy="384048"/>
-          </a:xfrm>
-          <a:prstGeom prst="ellipse">
-            <a:avLst/>
-          </a:prstGeom>
-          <a:solidFill>
-            <a:srgbClr val="FD5108"/>
-          </a:solidFill>
-          <a:ln>
-            <a:noFill/>
-          </a:ln>
-          <a:effectLst/>
-        </p:spPr>
-        <p:style>
-          <a:lnRef idx="1">
-            <a:schemeClr val="accent1"/>
-          </a:lnRef>
-          <a:fillRef idx="3">
-            <a:schemeClr val="accent1"/>
-          </a:fillRef>
-          <a:effectRef idx="2">
-            <a:schemeClr val="accent1"/>
-          </a:effectRef>
-          <a:fontRef idx="minor">
-            <a:schemeClr val="lt1"/>
-          </a:fontRef>
-        </p:style>
-        <p:txBody>
-          <a:bodyPr rtlCol="0" anchor="ctr" lIns="0" rIns="0" tIns="0" bIns="0"/>
-          <a:lstStyle/>
-          <a:p>
-            <a:pPr algn="ctr"/>
-            <a:r>
-              <a:rPr sz="1200" b="1">
-                <a:solidFill>
-                  <a:srgbClr val="FFFFFF"/>
-                </a:solidFill>
-                <a:latin typeface="Microsoft JhengHei"/>
-              </a:rPr>
-              <a:t>2</a:t>
-            </a:r>
-          </a:p>
-        </p:txBody>
-      </p:sp>
-      <p:sp>
-        <p:nvSpPr>
-          <p:cNvPr id="20" name="Rectangle 19"/>
-          <p:cNvSpPr/>
-          <p:nvPr/>
-        </p:nvSpPr>
-        <p:spPr>
-          <a:xfrm>
-            <a:off x="960120" y="4169663"/>
-            <a:ext cx="2148840" cy="530352"/>
-          </a:xfrm>
-          <a:prstGeom prst="rect">
-            <a:avLst/>
-          </a:prstGeom>
-          <a:solidFill>
-            <a:srgbClr val="F3F3F3"/>
-          </a:solidFill>
-          <a:ln>
-            <a:noFill/>
-          </a:ln>
-          <a:effectLst/>
-        </p:spPr>
-        <p:style>
-          <a:lnRef idx="1">
-            <a:schemeClr val="accent1"/>
-          </a:lnRef>
-          <a:fillRef idx="3">
-            <a:schemeClr val="accent1"/>
-          </a:fillRef>
-          <a:effectRef idx="2">
-            <a:schemeClr val="accent1"/>
-          </a:effectRef>
-          <a:fontRef idx="minor">
-            <a:schemeClr val="lt1"/>
-          </a:fontRef>
-        </p:style>
-        <p:txBody>
-          <a:bodyPr rtlCol="0" anchor="ctr" wrap="square" lIns="73152" rIns="73152" tIns="73152" bIns="73152"/>
-          <a:lstStyle/>
-          <a:p>
-            <a:pPr algn="l">
-              <a:spcAft>
-                <a:spcPts val="200"/>
-              </a:spcAft>
-            </a:pPr>
-            <a:r>
-              <a:rPr sz="1150" b="1">
-                <a:solidFill>
-                  <a:srgbClr val="1E1E1E"/>
-                </a:solidFill>
-                <a:latin typeface="Microsoft JhengHei"/>
-              </a:rPr>
-              <a:t>每項服務包的負責人</a:t>
-            </a:r>
-          </a:p>
-        </p:txBody>
-      </p:sp>
-      <p:sp>
-        <p:nvSpPr>
-          <p:cNvPr id="21" name="Rectangle 20"/>
-          <p:cNvSpPr/>
-          <p:nvPr/>
-        </p:nvSpPr>
-        <p:spPr>
-          <a:xfrm>
-            <a:off x="3154680" y="4169663"/>
-            <a:ext cx="3886200" cy="530352"/>
-          </a:xfrm>
-          <a:prstGeom prst="rect">
-            <a:avLst/>
-          </a:prstGeom>
-          <a:solidFill>
-            <a:srgbClr val="FFE8D4"/>
-          </a:solidFill>
-          <a:ln>
-            <a:noFill/>
-          </a:ln>
-          <a:effectLst/>
-        </p:spPr>
-        <p:style>
-          <a:lnRef idx="1">
-            <a:schemeClr val="accent1"/>
-          </a:lnRef>
-          <a:fillRef idx="3">
-            <a:schemeClr val="accent1"/>
-          </a:fillRef>
-          <a:effectRef idx="2">
-            <a:schemeClr val="accent1"/>
-          </a:effectRef>
-          <a:fontRef idx="minor">
-            <a:schemeClr val="lt1"/>
-          </a:fontRef>
-        </p:style>
-        <p:txBody>
-          <a:bodyPr rtlCol="0" anchor="ctr" wrap="square" lIns="73152" rIns="73152" tIns="73152" bIns="73152"/>
-          <a:lstStyle/>
-          <a:p>
-            <a:pPr algn="l">
-              <a:spcAft>
-                <a:spcPts val="200"/>
-              </a:spcAft>
-            </a:pPr>
-            <a:r>
-              <a:rPr sz="1100" b="0">
-                <a:solidFill>
-                  <a:srgbClr val="1E1E1E"/>
-                </a:solidFill>
-                <a:latin typeface="Microsoft JhengHei"/>
-              </a:rPr>
-              <a:t>各 1 位負責人＋1 位支援；第 1 週找 R&amp;Q 確認獨立性</a:t>
-            </a:r>
-          </a:p>
-        </p:txBody>
-      </p:sp>
-      <p:sp>
-        <p:nvSpPr>
-          <p:cNvPr id="22" name="Rectangle 21"/>
-          <p:cNvSpPr/>
-          <p:nvPr/>
-        </p:nvSpPr>
-        <p:spPr>
-          <a:xfrm>
-            <a:off x="7086600" y="4169663"/>
-            <a:ext cx="822960" cy="530352"/>
-          </a:xfrm>
-          <a:prstGeom prst="rect">
-            <a:avLst/>
-          </a:prstGeom>
-          <a:solidFill>
-            <a:srgbClr val="F3F3F3"/>
-          </a:solidFill>
-          <a:ln>
-            <a:noFill/>
-          </a:ln>
-          <a:effectLst/>
-        </p:spPr>
-        <p:style>
-          <a:lnRef idx="1">
-            <a:schemeClr val="accent1"/>
-          </a:lnRef>
-          <a:fillRef idx="3">
-            <a:schemeClr val="accent1"/>
-          </a:fillRef>
-          <a:effectRef idx="2">
-            <a:schemeClr val="accent1"/>
-          </a:effectRef>
-          <a:fontRef idx="minor">
-            <a:schemeClr val="lt1"/>
-          </a:fontRef>
-        </p:style>
-        <p:txBody>
-          <a:bodyPr rtlCol="0" anchor="ctr" wrap="square" lIns="36576" rIns="36576" tIns="36576" bIns="36576"/>
-          <a:lstStyle/>
-          <a:p>
-            <a:pPr algn="ctr">
-              <a:spcAft>
-                <a:spcPts val="200"/>
-              </a:spcAft>
-            </a:pPr>
-            <a:r>
-              <a:rPr sz="1100" b="1">
-                <a:solidFill>
-                  <a:srgbClr val="FD5108"/>
-                </a:solidFill>
-                <a:latin typeface="Microsoft JhengHei"/>
-              </a:rPr>
-              <a:t>今天</a:t>
-            </a:r>
-          </a:p>
-        </p:txBody>
-      </p:sp>
-      <p:sp>
-        <p:nvSpPr>
-          <p:cNvPr id="23" name="Oval 22"/>
-          <p:cNvSpPr/>
-          <p:nvPr/>
-        </p:nvSpPr>
-        <p:spPr>
-          <a:xfrm>
-            <a:off x="457200" y="4864607"/>
-            <a:ext cx="384048" cy="384048"/>
-          </a:xfrm>
-          <a:prstGeom prst="ellipse">
-            <a:avLst/>
-          </a:prstGeom>
-          <a:solidFill>
-            <a:srgbClr val="FD5108"/>
-          </a:solidFill>
-          <a:ln>
-            <a:noFill/>
-          </a:ln>
-          <a:effectLst/>
-        </p:spPr>
-        <p:style>
-          <a:lnRef idx="1">
-            <a:schemeClr val="accent1"/>
-          </a:lnRef>
-          <a:fillRef idx="3">
-            <a:schemeClr val="accent1"/>
-          </a:fillRef>
-          <a:effectRef idx="2">
-            <a:schemeClr val="accent1"/>
-          </a:effectRef>
-          <a:fontRef idx="minor">
-            <a:schemeClr val="lt1"/>
-          </a:fontRef>
-        </p:style>
-        <p:txBody>
-          <a:bodyPr rtlCol="0" anchor="ctr" lIns="0" rIns="0" tIns="0" bIns="0"/>
-          <a:lstStyle/>
-          <a:p>
-            <a:pPr algn="ctr"/>
-            <a:r>
-              <a:rPr sz="1200" b="1">
-                <a:solidFill>
-                  <a:srgbClr val="FFFFFF"/>
-                </a:solidFill>
-                <a:latin typeface="Microsoft JhengHei"/>
-              </a:rPr>
-              <a:t>3</a:t>
-            </a:r>
-          </a:p>
-        </p:txBody>
-      </p:sp>
-      <p:sp>
-        <p:nvSpPr>
-          <p:cNvPr id="24" name="Rectangle 23"/>
-          <p:cNvSpPr/>
-          <p:nvPr/>
-        </p:nvSpPr>
-        <p:spPr>
-          <a:xfrm>
-            <a:off x="960120" y="4773168"/>
-            <a:ext cx="2148840" cy="530352"/>
-          </a:xfrm>
-          <a:prstGeom prst="rect">
-            <a:avLst/>
-          </a:prstGeom>
-          <a:solidFill>
-            <a:srgbClr val="F3F3F3"/>
-          </a:solidFill>
-          <a:ln>
-            <a:noFill/>
-          </a:ln>
-          <a:effectLst/>
-        </p:spPr>
-        <p:style>
-          <a:lnRef idx="1">
-            <a:schemeClr val="accent1"/>
-          </a:lnRef>
-          <a:fillRef idx="3">
-            <a:schemeClr val="accent1"/>
-          </a:fillRef>
-          <a:effectRef idx="2">
-            <a:schemeClr val="accent1"/>
-          </a:effectRef>
-          <a:fontRef idx="minor">
-            <a:schemeClr val="lt1"/>
-          </a:fontRef>
-        </p:style>
-        <p:txBody>
-          <a:bodyPr rtlCol="0" anchor="ctr" wrap="square" lIns="73152" rIns="73152" tIns="73152" bIns="73152"/>
-          <a:lstStyle/>
-          <a:p>
-            <a:pPr algn="l">
-              <a:spcAft>
-                <a:spcPts val="200"/>
-              </a:spcAft>
-            </a:pPr>
-            <a:r>
-              <a:rPr sz="1150" b="1">
-                <a:solidFill>
-                  <a:srgbClr val="1E1E1E"/>
-                </a:solidFill>
-                <a:latin typeface="Microsoft JhengHei"/>
-              </a:rPr>
-              <a:t>90 天計畫與檢查點</a:t>
-            </a:r>
-          </a:p>
-        </p:txBody>
-      </p:sp>
-      <p:sp>
-        <p:nvSpPr>
-          <p:cNvPr id="25" name="Rectangle 24"/>
-          <p:cNvSpPr/>
-          <p:nvPr/>
-        </p:nvSpPr>
-        <p:spPr>
-          <a:xfrm>
-            <a:off x="3154680" y="4773168"/>
-            <a:ext cx="3886200" cy="530352"/>
-          </a:xfrm>
-          <a:prstGeom prst="rect">
-            <a:avLst/>
-          </a:prstGeom>
-          <a:solidFill>
-            <a:srgbClr val="FFE8D4"/>
-          </a:solidFill>
-          <a:ln>
-            <a:noFill/>
-          </a:ln>
-          <a:effectLst/>
-        </p:spPr>
-        <p:style>
-          <a:lnRef idx="1">
-            <a:schemeClr val="accent1"/>
-          </a:lnRef>
-          <a:fillRef idx="3">
-            <a:schemeClr val="accent1"/>
-          </a:fillRef>
-          <a:effectRef idx="2">
-            <a:schemeClr val="accent1"/>
-          </a:effectRef>
-          <a:fontRef idx="minor">
-            <a:schemeClr val="lt1"/>
-          </a:fontRef>
-        </p:style>
-        <p:txBody>
-          <a:bodyPr rtlCol="0" anchor="ctr" wrap="square" lIns="73152" rIns="73152" tIns="73152" bIns="73152"/>
-          <a:lstStyle/>
-          <a:p>
-            <a:pPr algn="l">
-              <a:spcAft>
-                <a:spcPts val="200"/>
-              </a:spcAft>
-            </a:pPr>
-            <a:r>
-              <a:rPr sz="1100" b="0">
-                <a:solidFill>
-                  <a:srgbClr val="1E1E1E"/>
-                </a:solidFill>
-                <a:latin typeface="Microsoft JhengHei"/>
-              </a:rPr>
-              <a:t>第 4、8、12 週各一次，每次 30 分鐘</a:t>
-            </a:r>
-          </a:p>
-        </p:txBody>
-      </p:sp>
-      <p:sp>
-        <p:nvSpPr>
-          <p:cNvPr id="26" name="Rectangle 25"/>
-          <p:cNvSpPr/>
-          <p:nvPr/>
-        </p:nvSpPr>
-        <p:spPr>
-          <a:xfrm>
-            <a:off x="7086600" y="4773168"/>
-            <a:ext cx="822960" cy="530352"/>
-          </a:xfrm>
-          <a:prstGeom prst="rect">
-            <a:avLst/>
-          </a:prstGeom>
-          <a:solidFill>
-            <a:srgbClr val="F3F3F3"/>
-          </a:solidFill>
-          <a:ln>
-            <a:noFill/>
-          </a:ln>
-          <a:effectLst/>
-        </p:spPr>
-        <p:style>
-          <a:lnRef idx="1">
-            <a:schemeClr val="accent1"/>
-          </a:lnRef>
-          <a:fillRef idx="3">
-            <a:schemeClr val="accent1"/>
-          </a:fillRef>
-          <a:effectRef idx="2">
-            <a:schemeClr val="accent1"/>
-          </a:effectRef>
-          <a:fontRef idx="minor">
-            <a:schemeClr val="lt1"/>
-          </a:fontRef>
-        </p:style>
-        <p:txBody>
-          <a:bodyPr rtlCol="0" anchor="ctr" wrap="square" lIns="36576" rIns="36576" tIns="36576" bIns="36576"/>
-          <a:lstStyle/>
-          <a:p>
-            <a:pPr algn="ctr">
-              <a:spcAft>
-                <a:spcPts val="200"/>
-              </a:spcAft>
-            </a:pPr>
-            <a:r>
-              <a:rPr sz="1100" b="1">
-                <a:solidFill>
-                  <a:srgbClr val="FD5108"/>
-                </a:solidFill>
-                <a:latin typeface="Microsoft JhengHei"/>
-              </a:rPr>
-              <a:t>第 1 週</a:t>
-            </a:r>
-          </a:p>
-        </p:txBody>
-      </p:sp>
-      <p:sp>
-        <p:nvSpPr>
-          <p:cNvPr id="27" name="Oval 26"/>
-          <p:cNvSpPr/>
-          <p:nvPr/>
-        </p:nvSpPr>
-        <p:spPr>
-          <a:xfrm>
-            <a:off x="457200" y="5468112"/>
-            <a:ext cx="384048" cy="384048"/>
-          </a:xfrm>
-          <a:prstGeom prst="ellipse">
-            <a:avLst/>
-          </a:prstGeom>
-          <a:solidFill>
-            <a:srgbClr val="FD5108"/>
-          </a:solidFill>
-          <a:ln>
-            <a:noFill/>
-          </a:ln>
-          <a:effectLst/>
-        </p:spPr>
-        <p:style>
-          <a:lnRef idx="1">
-            <a:schemeClr val="accent1"/>
-          </a:lnRef>
-          <a:fillRef idx="3">
-            <a:schemeClr val="accent1"/>
-          </a:fillRef>
-          <a:effectRef idx="2">
-            <a:schemeClr val="accent1"/>
-          </a:effectRef>
-          <a:fontRef idx="minor">
-            <a:schemeClr val="lt1"/>
-          </a:fontRef>
-        </p:style>
-        <p:txBody>
-          <a:bodyPr rtlCol="0" anchor="ctr" lIns="0" rIns="0" tIns="0" bIns="0"/>
-          <a:lstStyle/>
-          <a:p>
-            <a:pPr algn="ctr"/>
-            <a:r>
-              <a:rPr sz="1200" b="1">
-                <a:solidFill>
-                  <a:srgbClr val="FFFFFF"/>
-                </a:solidFill>
-                <a:latin typeface="Microsoft JhengHei"/>
-              </a:rPr>
-              <a:t>4</a:t>
-            </a:r>
-          </a:p>
-        </p:txBody>
-      </p:sp>
-      <p:sp>
-        <p:nvSpPr>
-          <p:cNvPr id="28" name="Rectangle 27"/>
-          <p:cNvSpPr/>
-          <p:nvPr/>
-        </p:nvSpPr>
-        <p:spPr>
-          <a:xfrm>
-            <a:off x="960120" y="5376672"/>
-            <a:ext cx="2148840" cy="530352"/>
-          </a:xfrm>
-          <a:prstGeom prst="rect">
-            <a:avLst/>
-          </a:prstGeom>
-          <a:solidFill>
-            <a:srgbClr val="F3F3F3"/>
-          </a:solidFill>
-          <a:ln>
-            <a:noFill/>
-          </a:ln>
-          <a:effectLst/>
-        </p:spPr>
-        <p:style>
-          <a:lnRef idx="1">
-            <a:schemeClr val="accent1"/>
-          </a:lnRef>
-          <a:fillRef idx="3">
-            <a:schemeClr val="accent1"/>
-          </a:fillRef>
-          <a:effectRef idx="2">
-            <a:schemeClr val="accent1"/>
-          </a:effectRef>
-          <a:fontRef idx="minor">
-            <a:schemeClr val="lt1"/>
-          </a:fontRef>
-        </p:style>
-        <p:txBody>
-          <a:bodyPr rtlCol="0" anchor="ctr" wrap="square" lIns="73152" rIns="73152" tIns="73152" bIns="73152"/>
-          <a:lstStyle/>
-          <a:p>
-            <a:pPr algn="l">
-              <a:spcAft>
-                <a:spcPts val="200"/>
-              </a:spcAft>
-            </a:pPr>
-            <a:r>
-              <a:rPr sz="1150" b="1">
-                <a:solidFill>
-                  <a:srgbClr val="1E1E1E"/>
-                </a:solidFill>
-                <a:latin typeface="Microsoft JhengHei"/>
-              </a:rPr>
-              <a:t>研討會 AI 短片主題</a:t>
-            </a:r>
-          </a:p>
-        </p:txBody>
-      </p:sp>
-      <p:sp>
-        <p:nvSpPr>
-          <p:cNvPr id="29" name="Rectangle 28"/>
-          <p:cNvSpPr/>
-          <p:nvPr/>
-        </p:nvSpPr>
-        <p:spPr>
-          <a:xfrm>
-            <a:off x="3154680" y="5376672"/>
-            <a:ext cx="3886200" cy="530352"/>
-          </a:xfrm>
-          <a:prstGeom prst="rect">
-            <a:avLst/>
-          </a:prstGeom>
-          <a:solidFill>
-            <a:srgbClr val="FFE8D4"/>
-          </a:solidFill>
-          <a:ln>
-            <a:noFill/>
-          </a:ln>
-          <a:effectLst/>
-        </p:spPr>
-        <p:style>
-          <a:lnRef idx="1">
-            <a:schemeClr val="accent1"/>
-          </a:lnRef>
-          <a:fillRef idx="3">
-            <a:schemeClr val="accent1"/>
-          </a:fillRef>
-          <a:effectRef idx="2">
-            <a:schemeClr val="accent1"/>
-          </a:effectRef>
-          <a:fontRef idx="minor">
-            <a:schemeClr val="lt1"/>
-          </a:fontRef>
-        </p:style>
-        <p:txBody>
-          <a:bodyPr rtlCol="0" anchor="ctr" wrap="square" lIns="73152" rIns="73152" tIns="73152" bIns="73152"/>
-          <a:lstStyle/>
-          <a:p>
-            <a:pPr algn="l">
-              <a:spcAft>
-                <a:spcPts val="200"/>
-              </a:spcAft>
-            </a:pPr>
-            <a:r>
-              <a:rPr sz="1100" b="0">
-                <a:solidFill>
-                  <a:srgbClr val="1E1E1E"/>
-                </a:solidFill>
-                <a:latin typeface="Microsoft JhengHei"/>
-              </a:rPr>
-              <a:t>以第一波服務為主題</a:t>
-            </a:r>
-          </a:p>
-        </p:txBody>
-      </p:sp>
-      <p:sp>
-        <p:nvSpPr>
-          <p:cNvPr id="30" name="Rectangle 29"/>
-          <p:cNvSpPr/>
-          <p:nvPr/>
-        </p:nvSpPr>
-        <p:spPr>
-          <a:xfrm>
-            <a:off x="7086600" y="5376672"/>
-            <a:ext cx="822960" cy="530352"/>
-          </a:xfrm>
-          <a:prstGeom prst="rect">
-            <a:avLst/>
-          </a:prstGeom>
-          <a:solidFill>
-            <a:srgbClr val="F3F3F3"/>
-          </a:solidFill>
-          <a:ln>
-            <a:noFill/>
-          </a:ln>
-          <a:effectLst/>
-        </p:spPr>
-        <p:style>
-          <a:lnRef idx="1">
-            <a:schemeClr val="accent1"/>
-          </a:lnRef>
-          <a:fillRef idx="3">
-            <a:schemeClr val="accent1"/>
-          </a:fillRef>
-          <a:effectRef idx="2">
-            <a:schemeClr val="accent1"/>
-          </a:effectRef>
-          <a:fontRef idx="minor">
-            <a:schemeClr val="lt1"/>
-          </a:fontRef>
-        </p:style>
-        <p:txBody>
-          <a:bodyPr rtlCol="0" anchor="ctr" wrap="square" lIns="36576" rIns="36576" tIns="36576" bIns="36576"/>
-          <a:lstStyle/>
-          <a:p>
-            <a:pPr algn="ctr">
-              <a:spcAft>
-                <a:spcPts val="200"/>
-              </a:spcAft>
-            </a:pPr>
-            <a:r>
-              <a:rPr sz="1100" b="1">
-                <a:solidFill>
-                  <a:srgbClr val="FD5108"/>
-                </a:solidFill>
-                <a:latin typeface="Microsoft JhengHei"/>
-              </a:rPr>
-              <a:t>第 2 週</a:t>
-            </a:r>
-          </a:p>
-        </p:txBody>
-      </p:sp>
-      <p:sp>
-        <p:nvSpPr>
-          <p:cNvPr id="31" name="Rectangle 30"/>
-          <p:cNvSpPr/>
-          <p:nvPr/>
-        </p:nvSpPr>
-        <p:spPr>
-          <a:xfrm>
-            <a:off x="8138160" y="3108960"/>
-            <a:ext cx="3657600" cy="384048"/>
-          </a:xfrm>
-          <a:prstGeom prst="rect">
-            <a:avLst/>
-          </a:prstGeom>
-          <a:solidFill>
-            <a:srgbClr val="1E1E1E"/>
-          </a:solidFill>
-          <a:ln>
-            <a:noFill/>
-          </a:ln>
-          <a:effectLst/>
-        </p:spPr>
-        <p:style>
-          <a:lnRef idx="1">
-            <a:schemeClr val="accent1"/>
-          </a:lnRef>
-          <a:fillRef idx="3">
-            <a:schemeClr val="accent1"/>
-          </a:fillRef>
-          <a:effectRef idx="2">
-            <a:schemeClr val="accent1"/>
-          </a:effectRef>
-          <a:fontRef idx="minor">
-            <a:schemeClr val="lt1"/>
-          </a:fontRef>
-        </p:style>
-        <p:txBody>
-          <a:bodyPr rtlCol="0" anchor="ctr" wrap="square" lIns="54864" rIns="54864" tIns="54864" bIns="54864"/>
-          <a:lstStyle/>
-          <a:p>
-            <a:pPr algn="l">
-              <a:spcAft>
-                <a:spcPts val="200"/>
-              </a:spcAft>
-            </a:pPr>
-            <a:r>
-              <a:rPr sz="1300" b="1">
-                <a:solidFill>
-                  <a:srgbClr val="FFFFFF"/>
-                </a:solidFill>
-                <a:latin typeface="Microsoft JhengHei"/>
-              </a:rPr>
-              <a:t>使用前注意</a:t>
-            </a:r>
-          </a:p>
-        </p:txBody>
-      </p:sp>
-      <p:sp>
-        <p:nvSpPr>
-          <p:cNvPr id="32" name="Rectangle 31"/>
-          <p:cNvSpPr/>
-          <p:nvPr/>
-        </p:nvSpPr>
-        <p:spPr>
-          <a:xfrm>
-            <a:off x="8138160" y="3566160"/>
-            <a:ext cx="3657600" cy="530352"/>
-          </a:xfrm>
-          <a:prstGeom prst="rect">
-            <a:avLst/>
-          </a:prstGeom>
-          <a:solidFill>
-            <a:srgbClr val="F3F3F3"/>
-          </a:solidFill>
-          <a:ln>
-            <a:noFill/>
-          </a:ln>
-          <a:effectLst/>
-        </p:spPr>
-        <p:style>
-          <a:lnRef idx="1">
-            <a:schemeClr val="accent1"/>
-          </a:lnRef>
-          <a:fillRef idx="3">
-            <a:schemeClr val="accent1"/>
-          </a:fillRef>
-          <a:effectRef idx="2">
-            <a:schemeClr val="accent1"/>
-          </a:effectRef>
-          <a:fontRef idx="minor">
-            <a:schemeClr val="lt1"/>
-          </a:fontRef>
-        </p:style>
-        <p:txBody>
-          <a:bodyPr rtlCol="0" anchor="ctr" wrap="square" tIns="91440" bIns="91440"/>
-          <a:lstStyle/>
-          <a:p>
-            <a:pPr algn="l">
-              <a:spcAft>
-                <a:spcPts val="200"/>
-              </a:spcAft>
-            </a:pPr>
-            <a:r>
-              <a:rPr sz="1050" b="1">
-                <a:solidFill>
-                  <a:srgbClr val="1E1E1E"/>
-                </a:solidFill>
-                <a:latin typeface="Microsoft JhengHei"/>
-              </a:rPr>
-              <a:t>數字核對　</a:t>
-            </a:r>
-            <a:r>
-              <a:rPr sz="1050" b="0">
-                <a:solidFill>
-                  <a:srgbClr val="1E1E1E"/>
-                </a:solidFill>
-                <a:latin typeface="Microsoft JhengHei"/>
-              </a:rPr>
-              <a:t>對外引用前回原文確認；95% 為跨產業數字</a:t>
-            </a:r>
-          </a:p>
-        </p:txBody>
-      </p:sp>
-      <p:sp>
-        <p:nvSpPr>
-          <p:cNvPr id="33" name="Rectangle 32"/>
-          <p:cNvSpPr/>
-          <p:nvPr/>
-        </p:nvSpPr>
-        <p:spPr>
-          <a:xfrm>
-            <a:off x="8138160" y="4169663"/>
-            <a:ext cx="3657600" cy="530352"/>
-          </a:xfrm>
-          <a:prstGeom prst="rect">
-            <a:avLst/>
-          </a:prstGeom>
-          <a:solidFill>
-            <a:srgbClr val="F3F3F3"/>
-          </a:solidFill>
-          <a:ln>
-            <a:noFill/>
-          </a:ln>
-          <a:effectLst/>
-        </p:spPr>
-        <p:style>
-          <a:lnRef idx="1">
-            <a:schemeClr val="accent1"/>
-          </a:lnRef>
-          <a:fillRef idx="3">
-            <a:schemeClr val="accent1"/>
-          </a:fillRef>
-          <a:effectRef idx="2">
-            <a:schemeClr val="accent1"/>
-          </a:effectRef>
-          <a:fontRef idx="minor">
-            <a:schemeClr val="lt1"/>
-          </a:fontRef>
-        </p:style>
-        <p:txBody>
-          <a:bodyPr rtlCol="0" anchor="ctr" wrap="square" tIns="91440" bIns="91440"/>
-          <a:lstStyle/>
-          <a:p>
-            <a:pPr algn="l">
-              <a:spcAft>
-                <a:spcPts val="200"/>
-              </a:spcAft>
-            </a:pPr>
-            <a:r>
-              <a:rPr sz="1050" b="1">
-                <a:solidFill>
-                  <a:srgbClr val="1E1E1E"/>
-                </a:solidFill>
-                <a:latin typeface="Microsoft JhengHei"/>
-              </a:rPr>
-              <a:t>獨立性　</a:t>
-            </a:r>
-            <a:r>
-              <a:rPr sz="1050" b="0">
-                <a:solidFill>
-                  <a:srgbClr val="1E1E1E"/>
-                </a:solidFill>
-                <a:latin typeface="Microsoft JhengHei"/>
-              </a:rPr>
-              <a:t>AI 治理健檢與 IFRS 17 顧問碰到審計客戶時，先與 R&amp;Q 確認</a:t>
-            </a:r>
-          </a:p>
-        </p:txBody>
-      </p:sp>
-      <p:sp>
-        <p:nvSpPr>
-          <p:cNvPr id="34" name="Rectangle 33"/>
-          <p:cNvSpPr/>
-          <p:nvPr/>
-        </p:nvSpPr>
-        <p:spPr>
-          <a:xfrm>
-            <a:off x="8138160" y="4773168"/>
-            <a:ext cx="3657600" cy="530352"/>
-          </a:xfrm>
-          <a:prstGeom prst="rect">
-            <a:avLst/>
-          </a:prstGeom>
-          <a:solidFill>
-            <a:srgbClr val="F3F3F3"/>
-          </a:solidFill>
-          <a:ln>
-            <a:noFill/>
-          </a:ln>
-          <a:effectLst/>
-        </p:spPr>
-        <p:style>
-          <a:lnRef idx="1">
-            <a:schemeClr val="accent1"/>
-          </a:lnRef>
-          <a:fillRef idx="3">
-            <a:schemeClr val="accent1"/>
-          </a:fillRef>
-          <a:effectRef idx="2">
-            <a:schemeClr val="accent1"/>
-          </a:effectRef>
-          <a:fontRef idx="minor">
-            <a:schemeClr val="lt1"/>
-          </a:fontRef>
-        </p:style>
-        <p:txBody>
-          <a:bodyPr rtlCol="0" anchor="ctr" wrap="square" tIns="91440" bIns="91440"/>
-          <a:lstStyle/>
-          <a:p>
-            <a:pPr algn="l">
-              <a:spcAft>
-                <a:spcPts val="200"/>
-              </a:spcAft>
-            </a:pPr>
-            <a:r>
-              <a:rPr sz="1050" b="1">
-                <a:solidFill>
-                  <a:srgbClr val="1E1E1E"/>
-                </a:solidFill>
-                <a:latin typeface="Microsoft JhengHei"/>
-              </a:rPr>
-              <a:t>對外不點名　</a:t>
-            </a:r>
-            <a:r>
-              <a:rPr sz="1050" b="0">
-                <a:solidFill>
-                  <a:srgbClr val="1E1E1E"/>
-                </a:solidFill>
-                <a:latin typeface="Microsoft JhengHei"/>
-              </a:rPr>
-              <a:t>研究中的同業與競爭者僅供內部討論</a:t>
-            </a:r>
-          </a:p>
-        </p:txBody>
-      </p:sp>
-      <p:sp>
-        <p:nvSpPr>
-          <p:cNvPr id="35" name="Rectangle 34"/>
-          <p:cNvSpPr/>
-          <p:nvPr/>
-        </p:nvSpPr>
-        <p:spPr>
-          <a:xfrm>
-            <a:off x="8138160" y="5376672"/>
-            <a:ext cx="3657600" cy="530352"/>
-          </a:xfrm>
-          <a:prstGeom prst="rect">
-            <a:avLst/>
-          </a:prstGeom>
-          <a:solidFill>
-            <a:srgbClr val="F3F3F3"/>
-          </a:solidFill>
-          <a:ln>
-            <a:noFill/>
-          </a:ln>
-          <a:effectLst/>
-        </p:spPr>
-        <p:style>
-          <a:lnRef idx="1">
-            <a:schemeClr val="accent1"/>
-          </a:lnRef>
-          <a:fillRef idx="3">
-            <a:schemeClr val="accent1"/>
-          </a:fillRef>
-          <a:effectRef idx="2">
-            <a:schemeClr val="accent1"/>
-          </a:effectRef>
-          <a:fontRef idx="minor">
-            <a:schemeClr val="lt1"/>
-          </a:fontRef>
-        </p:style>
-        <p:txBody>
-          <a:bodyPr rtlCol="0" anchor="ctr" wrap="square" tIns="91440" bIns="91440"/>
-          <a:lstStyle/>
-          <a:p>
-            <a:pPr algn="l">
-              <a:spcAft>
-                <a:spcPts val="200"/>
-              </a:spcAft>
-            </a:pPr>
-            <a:r>
-              <a:rPr sz="1050" b="1">
-                <a:solidFill>
-                  <a:srgbClr val="1E1E1E"/>
-                </a:solidFill>
-                <a:latin typeface="Microsoft JhengHei"/>
-              </a:rPr>
-              <a:t>完整版　</a:t>
-            </a:r>
-            <a:r>
-              <a:rPr sz="1050" b="0">
-                <a:solidFill>
-                  <a:srgbClr val="1E1E1E"/>
-                </a:solidFill>
-                <a:latin typeface="Microsoft JhengHei"/>
-              </a:rPr>
-              <a:t>24 頁會議簡報含問題樹、矩陣與風險</a:t>
-            </a:r>
-          </a:p>
-        </p:txBody>
-      </p:sp>
-      <p:sp>
-        <p:nvSpPr>
-          <p:cNvPr id="36" name="Rectangle 35"/>
-          <p:cNvSpPr/>
-          <p:nvPr/>
-        </p:nvSpPr>
-        <p:spPr>
-          <a:xfrm>
-            <a:off x="411480" y="6053328"/>
-            <a:ext cx="11384280" cy="384048"/>
-          </a:xfrm>
-          <a:prstGeom prst="rect">
-            <a:avLst/>
-          </a:prstGeom>
-          <a:noFill/>
-          <a:ln>
-            <a:noFill/>
-          </a:ln>
-          <a:effectLst/>
-        </p:spPr>
-        <p:style>
-          <a:lnRef idx="1">
-            <a:schemeClr val="accent1"/>
-          </a:lnRef>
-          <a:fillRef idx="3">
-            <a:schemeClr val="accent1"/>
-          </a:fillRef>
-          <a:effectRef idx="2">
-            <a:schemeClr val="accent1"/>
-          </a:effectRef>
-          <a:fontRef idx="minor">
-            <a:schemeClr val="lt1"/>
-          </a:fontRef>
-        </p:style>
-        <p:txBody>
-          <a:bodyPr rtlCol="0" anchor="t" wrap="square" lIns="27432" rIns="27432" tIns="27432" bIns="27432"/>
-          <a:lstStyle/>
-          <a:p>
-            <a:pPr algn="l">
-              <a:spcAft>
-                <a:spcPts val="200"/>
-              </a:spcAft>
-            </a:pPr>
-            <a:r>
-              <a:rPr sz="900" b="1">
-                <a:solidFill>
-                  <a:srgbClr val="6B6B6B"/>
-                </a:solidFill>
-                <a:latin typeface="Microsoft JhengHei"/>
-              </a:rPr>
-              <a:t>來源：</a:t>
-            </a:r>
-            <a:r>
-              <a:rPr sz="900" b="0" u="sng">
-                <a:solidFill>
-                  <a:srgbClr val="1F5FBF"/>
-                </a:solidFill>
-                <a:latin typeface="Microsoft JhengHei"/>
-                <a:hlinkClick r:id="rId2"/>
-              </a:rPr>
-              <a:t>McKinsey：代理型 AI 核心現代化</a:t>
-            </a:r>
-            <a:r>
-              <a:rPr sz="900" b="0">
-                <a:solidFill>
-                  <a:srgbClr val="6B6B6B"/>
-                </a:solidFill>
-                <a:latin typeface="Microsoft JhengHei"/>
-              </a:rPr>
-              <a:t>　</a:t>
-            </a:r>
-            <a:r>
-              <a:rPr sz="900" b="0" u="sng">
-                <a:solidFill>
-                  <a:srgbClr val="1F5FBF"/>
-                </a:solidFill>
-                <a:latin typeface="Microsoft JhengHei"/>
-                <a:hlinkClick r:id="rId3"/>
-              </a:rPr>
-              <a:t>Deloitte：亞太壽險規模化代理型 AI</a:t>
-            </a:r>
-            <a:r>
-              <a:rPr sz="900" b="0">
-                <a:solidFill>
-                  <a:srgbClr val="6B6B6B"/>
-                </a:solidFill>
-                <a:latin typeface="Microsoft JhengHei"/>
-              </a:rPr>
-              <a:t>　</a:t>
-            </a:r>
-            <a:r>
-              <a:rPr sz="900" b="0" u="sng">
-                <a:solidFill>
-                  <a:srgbClr val="1F5FBF"/>
-                </a:solidFill>
-                <a:latin typeface="Microsoft JhengHei"/>
-                <a:hlinkClick r:id="rId4"/>
-              </a:rPr>
-              <a:t>資誠 IFRS 17 關鍵議題</a:t>
-            </a:r>
-            <a:r>
-              <a:rPr sz="900" b="0">
-                <a:solidFill>
-                  <a:srgbClr val="6B6B6B"/>
-                </a:solidFill>
-                <a:latin typeface="Microsoft JhengHei"/>
-              </a:rPr>
-              <a:t>　</a:t>
-            </a:r>
-            <a:r>
-              <a:rPr sz="900" b="0" u="sng">
-                <a:solidFill>
-                  <a:srgbClr val="1F5FBF"/>
-                </a:solidFill>
-                <a:latin typeface="Microsoft JhengHei"/>
-                <a:hlinkClick r:id="rId5"/>
-              </a:rPr>
-              <a:t>MAS AI 風險管理指引</a:t>
             </a:r>
           </a:p>
         </p:txBody>

--- a/research/insurtech-2026/保險科技服務優先順序_主管精簡版.pptx
+++ b/research/insurtech-2026/保險科技服務優先順序_主管精簡版.pptx
@@ -43459,7 +43459,7 @@
                 </a:solidFill>
                 <a:latin typeface="Microsoft JhengHei"/>
               </a:rPr>
-              <a:t>同意第一波兩項服務、各指派 1 位負責人、核定 90 天計畫（第 4／8／12 週檢查）。</a:t>
+              <a:t>同意第一波兩項服務，並各指派 1 位負責人。</a:t>
             </a:r>
           </a:p>
         </p:txBody>

--- a/research/insurtech-2026/保險科技服務優先順序_主管精簡版.pptx
+++ b/research/insurtech-2026/保險科技服務優先順序_主管精簡版.pptx
@@ -42222,8 +42222,9 @@
           <a:lstStyle/>
           <a:p>
             <a:r>
-              <a:rPr sz="2000">
-                <a:latin typeface="Microsoft JhengHei"/>
+              <a:rPr sz="2000" b="1">
+                <a:latin typeface="Georgia"/>
+                <a:ea typeface="微軟正黑體"/>
               </a:rPr>
               <a:t>重點摘要：保險 AI 已進入規模化，建議第一波先推 IFRS 17 與 AI 治理兩項服務包</a:t>
             </a:r>
@@ -42232,7 +42233,108 @@
       </p:sp>
       <p:sp>
         <p:nvSpPr>
-          <p:cNvPr id="3" name="Rectangle 2"/>
+          <p:cNvPr id="4" name="Footer Placeholder 4">
+            <a:extLst>
+              <a:ext uri="{FF2B5EF4-FFF2-40B4-BE49-F238E27FC236}">
+                <a16:creationId xmlns:a16="http://schemas.microsoft.com/office/drawing/2014/main" id="{E57B29C1-93EA-1886-CD27-23CE023225D9}"/>
+              </a:ext>
+            </a:extLst>
+          </p:cNvPr>
+          <p:cNvSpPr>
+            <a:spLocks noGrp="1"/>
+          </p:cNvSpPr>
+          <p:nvPr>
+            <p:ph type="ftr" sz="quarter" idx="3"/>
+          </p:nvPr>
+        </p:nvSpPr>
+        <p:spPr>
+          <a:xfrm>
+            <a:off x="1066800" y="6497441"/>
+            <a:ext cx="8814816" cy="161583"/>
+          </a:xfrm>
+          <a:prstGeom prst="rect">
+            <a:avLst/>
+          </a:prstGeom>
+        </p:spPr>
+        <p:txBody>
+          <a:bodyPr vert="horz" wrap="square" lIns="0" tIns="0" rIns="0" bIns="0" rtlCol="0" anchor="b" anchorCtr="0">
+            <a:spAutoFit/>
+          </a:bodyPr>
+          <a:lstStyle>
+            <a:lvl1pPr algn="l">
+              <a:defRPr sz="1050" b="0">
+                <a:solidFill>
+                  <a:sysClr val="windowText" lastClr="000000"/>
+                </a:solidFill>
+                <a:latin typeface="+mn-lt"/>
+                <a:cs typeface="Arial" panose="020B0604020202020204" pitchFamily="34" charset="0"/>
+              </a:defRPr>
+            </a:lvl1pPr>
+          </a:lstStyle>
+          <a:p>
+            <a:r>
+              <a:rPr>
+                <a:latin typeface="Arial"/>
+                <a:ea typeface="微軟正黑體"/>
+              </a:rPr>
+              <a:t>內部討論稿｜僅供 FSC1 保險組內部使用｜資料來源為公開研究，點選來源可開啟原文</a:t>
+            </a:r>
+          </a:p>
+        </p:txBody>
+      </p:sp>
+      <p:sp>
+        <p:nvSpPr>
+          <p:cNvPr id="6" name="Slide Number Placeholder 13">
+            <a:extLst>
+              <a:ext uri="{FF2B5EF4-FFF2-40B4-BE49-F238E27FC236}">
+                <a16:creationId xmlns:a16="http://schemas.microsoft.com/office/drawing/2014/main" id="{D15FEAD4-DFB9-ED08-EBEE-A4E5DE31E318}"/>
+              </a:ext>
+            </a:extLst>
+          </p:cNvPr>
+          <p:cNvSpPr>
+            <a:spLocks noGrp="1"/>
+          </p:cNvSpPr>
+          <p:nvPr>
+            <p:ph type="sldNum" sz="quarter" idx="4"/>
+          </p:nvPr>
+        </p:nvSpPr>
+        <p:spPr>
+          <a:xfrm>
+            <a:off x="11503818" y="6501384"/>
+            <a:ext cx="298209" cy="161583"/>
+          </a:xfrm>
+          <a:prstGeom prst="rect">
+            <a:avLst/>
+          </a:prstGeom>
+        </p:spPr>
+        <p:txBody>
+          <a:bodyPr vert="horz" wrap="square" lIns="0" tIns="0" rIns="0" bIns="0" rtlCol="0" anchor="b" anchorCtr="0">
+            <a:spAutoFit/>
+          </a:bodyPr>
+          <a:lstStyle>
+            <a:lvl1pPr algn="r">
+              <a:defRPr sz="1050">
+                <a:solidFill>
+                  <a:schemeClr val="tx1"/>
+                </a:solidFill>
+                <a:latin typeface="+mn-lt"/>
+                <a:cs typeface="Arial" panose="020B0604020202020204" pitchFamily="34" charset="0"/>
+              </a:defRPr>
+            </a:lvl1pPr>
+          </a:lstStyle>
+          <a:p>
+            <a:fld id="{3E6AC032-1535-134B-A583-D5E1DDD0D167}" type="slidenum">
+              <a:rPr lang="en-US" smtClean="0"/>
+              <a:pPr/>
+              <a:t>‹#›</a:t>
+            </a:fld>
+            <a:endParaRPr lang="en-US"/>
+          </a:p>
+        </p:txBody>
+      </p:sp>
+      <p:sp>
+        <p:nvSpPr>
+          <p:cNvPr id="7" name="Rectangle 6"/>
           <p:cNvSpPr/>
           <p:nvPr/>
         </p:nvSpPr>
@@ -42245,7 +42347,7 @@
             <a:avLst/>
           </a:prstGeom>
           <a:solidFill>
-            <a:srgbClr val="F3F3F3"/>
+            <a:srgbClr val="EBEBEB"/>
           </a:solidFill>
           <a:ln>
             <a:noFill/>
@@ -42278,9 +42380,10 @@
             <a:r>
               <a:rPr sz="1100" b="0">
                 <a:solidFill>
-                  <a:srgbClr val="1E1E1E"/>
+                  <a:srgbClr val="000000"/>
                 </a:solidFill>
-                <a:latin typeface="Microsoft JhengHei"/>
+                <a:latin typeface="Arial"/>
+                <a:ea typeface="微軟正黑體"/>
               </a:rPr>
               <a:t/>
             </a:r>
@@ -42289,7 +42392,7 @@
       </p:sp>
       <p:sp>
         <p:nvSpPr>
-          <p:cNvPr id="4" name="Rectangle 3"/>
+          <p:cNvPr id="8" name="Rectangle 7"/>
           <p:cNvSpPr/>
           <p:nvPr/>
         </p:nvSpPr>
@@ -42331,11 +42434,12 @@
               </a:spcAft>
             </a:pPr>
             <a:r>
-              <a:rPr sz="3000" b="1">
+              <a:rPr sz="3200" b="0">
                 <a:solidFill>
                   <a:srgbClr val="FD5108"/>
                 </a:solidFill>
-                <a:latin typeface="Microsoft JhengHei"/>
+                <a:latin typeface="Arial"/>
+                <a:ea typeface="微軟正黑體"/>
               </a:rPr>
               <a:t>95.2%</a:t>
             </a:r>
@@ -42344,7 +42448,7 @@
       </p:sp>
       <p:sp>
         <p:nvSpPr>
-          <p:cNvPr id="5" name="Rectangle 4"/>
+          <p:cNvPr id="9" name="Rectangle 8"/>
           <p:cNvSpPr/>
           <p:nvPr/>
         </p:nvSpPr>
@@ -42388,9 +42492,10 @@
             <a:r>
               <a:rPr sz="1100" b="0">
                 <a:solidFill>
-                  <a:srgbClr val="1E1E1E"/>
+                  <a:srgbClr val="000000"/>
                 </a:solidFill>
-                <a:latin typeface="Microsoft JhengHei"/>
+                <a:latin typeface="Arial"/>
+                <a:ea typeface="微軟正黑體"/>
               </a:rPr>
               <a:t>2026 Q1 全球保險科技募資流向 AI 企業的比例（歷史新高）</a:t>
             </a:r>
@@ -42399,7 +42504,7 @@
       </p:sp>
       <p:sp>
         <p:nvSpPr>
-          <p:cNvPr id="6" name="Rectangle 5"/>
+          <p:cNvPr id="10" name="Rectangle 9"/>
           <p:cNvSpPr/>
           <p:nvPr/>
         </p:nvSpPr>
@@ -42443,9 +42548,10 @@
             <a:r>
               <a:rPr sz="900" b="0" u="sng">
                 <a:solidFill>
-                  <a:srgbClr val="1F5FBF"/>
+                  <a:srgbClr val="000000"/>
                 </a:solidFill>
-                <a:latin typeface="Microsoft JhengHei"/>
+                <a:latin typeface="Arial"/>
+                <a:ea typeface="微軟正黑體"/>
                 <a:hlinkClick r:id="rId2"/>
               </a:rPr>
               <a:t>Gallagher Re, 2026-05</a:t>
@@ -42455,7 +42561,7 @@
       </p:sp>
       <p:sp>
         <p:nvSpPr>
-          <p:cNvPr id="7" name="Rectangle 6"/>
+          <p:cNvPr id="11" name="Rectangle 10"/>
           <p:cNvSpPr/>
           <p:nvPr/>
         </p:nvSpPr>
@@ -42468,7 +42574,7 @@
             <a:avLst/>
           </a:prstGeom>
           <a:solidFill>
-            <a:srgbClr val="F3F3F3"/>
+            <a:srgbClr val="EBEBEB"/>
           </a:solidFill>
           <a:ln>
             <a:noFill/>
@@ -42501,9 +42607,10 @@
             <a:r>
               <a:rPr sz="1100" b="0">
                 <a:solidFill>
-                  <a:srgbClr val="1E1E1E"/>
+                  <a:srgbClr val="000000"/>
                 </a:solidFill>
-                <a:latin typeface="Microsoft JhengHei"/>
+                <a:latin typeface="Arial"/>
+                <a:ea typeface="微軟正黑體"/>
               </a:rPr>
               <a:t/>
             </a:r>
@@ -42512,7 +42619,7 @@
       </p:sp>
       <p:sp>
         <p:nvSpPr>
-          <p:cNvPr id="8" name="Rectangle 7"/>
+          <p:cNvPr id="12" name="Rectangle 11"/>
           <p:cNvSpPr/>
           <p:nvPr/>
         </p:nvSpPr>
@@ -42554,11 +42661,12 @@
               </a:spcAft>
             </a:pPr>
             <a:r>
-              <a:rPr sz="3000" b="1">
+              <a:rPr sz="3200" b="0">
                 <a:solidFill>
                   <a:srgbClr val="FD5108"/>
                 </a:solidFill>
-                <a:latin typeface="Microsoft JhengHei"/>
+                <a:latin typeface="Arial"/>
+                <a:ea typeface="微軟正黑體"/>
               </a:rPr>
               <a:t>57%</a:t>
             </a:r>
@@ -42567,7 +42675,7 @@
       </p:sp>
       <p:sp>
         <p:nvSpPr>
-          <p:cNvPr id="9" name="Rectangle 8"/>
+          <p:cNvPr id="13" name="Rectangle 12"/>
           <p:cNvSpPr/>
           <p:nvPr/>
         </p:nvSpPr>
@@ -42611,9 +42719,10 @@
             <a:r>
               <a:rPr sz="1100" b="0">
                 <a:solidFill>
-                  <a:srgbClr val="1E1E1E"/>
+                  <a:srgbClr val="000000"/>
                 </a:solidFill>
-                <a:latin typeface="Microsoft JhengHei"/>
+                <a:latin typeface="Arial"/>
+                <a:ea typeface="微軟正黑體"/>
               </a:rPr>
               <a:t>保險高階主管把生成式與代理型 AI 列為 2026 首要科技投資</a:t>
             </a:r>
@@ -42622,7 +42731,7 @@
       </p:sp>
       <p:sp>
         <p:nvSpPr>
-          <p:cNvPr id="10" name="Rectangle 9"/>
+          <p:cNvPr id="14" name="Rectangle 13"/>
           <p:cNvSpPr/>
           <p:nvPr/>
         </p:nvSpPr>
@@ -42666,9 +42775,10 @@
             <a:r>
               <a:rPr sz="900" b="0" u="sng">
                 <a:solidFill>
-                  <a:srgbClr val="1F5FBF"/>
+                  <a:srgbClr val="000000"/>
                 </a:solidFill>
-                <a:latin typeface="Microsoft JhengHei"/>
+                <a:latin typeface="Arial"/>
+                <a:ea typeface="微軟正黑體"/>
                 <a:hlinkClick r:id="rId3"/>
               </a:rPr>
               <a:t>PwC 調查, 2025-11</a:t>
@@ -42678,7 +42788,7 @@
       </p:sp>
       <p:sp>
         <p:nvSpPr>
-          <p:cNvPr id="11" name="Rectangle 10"/>
+          <p:cNvPr id="15" name="Rectangle 14"/>
           <p:cNvSpPr/>
           <p:nvPr/>
         </p:nvSpPr>
@@ -42724,9 +42834,10 @@
             <a:r>
               <a:rPr sz="1100" b="0">
                 <a:solidFill>
-                  <a:srgbClr val="1E1E1E"/>
+                  <a:srgbClr val="000000"/>
                 </a:solidFill>
-                <a:latin typeface="Microsoft JhengHei"/>
+                <a:latin typeface="Arial"/>
+                <a:ea typeface="微軟正黑體"/>
               </a:rPr>
               <a:t/>
             </a:r>
@@ -42735,7 +42846,7 @@
       </p:sp>
       <p:sp>
         <p:nvSpPr>
-          <p:cNvPr id="12" name="Rectangle 11"/>
+          <p:cNvPr id="16" name="Rectangle 15"/>
           <p:cNvSpPr/>
           <p:nvPr/>
         </p:nvSpPr>
@@ -42777,11 +42888,12 @@
               </a:spcAft>
             </a:pPr>
             <a:r>
-              <a:rPr sz="3000" b="1">
+              <a:rPr sz="3200" b="0">
                 <a:solidFill>
                   <a:srgbClr val="FFFFFF"/>
                 </a:solidFill>
-                <a:latin typeface="Microsoft JhengHei"/>
+                <a:latin typeface="Arial"/>
+                <a:ea typeface="微軟正黑體"/>
               </a:rPr>
               <a:t>95%</a:t>
             </a:r>
@@ -42790,7 +42902,7 @@
       </p:sp>
       <p:sp>
         <p:nvSpPr>
-          <p:cNvPr id="13" name="Rectangle 12"/>
+          <p:cNvPr id="17" name="Rectangle 16"/>
           <p:cNvSpPr/>
           <p:nvPr/>
         </p:nvSpPr>
@@ -42836,7 +42948,8 @@
                 <a:solidFill>
                   <a:srgbClr val="FFFFFF"/>
                 </a:solidFill>
-                <a:latin typeface="Microsoft JhengHei"/>
+                <a:latin typeface="Arial"/>
+                <a:ea typeface="微軟正黑體"/>
               </a:rPr>
               <a:t>投資 AI 但尚未看到可衡量回報的企業（跨產業）</a:t>
             </a:r>
@@ -42845,7 +42958,7 @@
       </p:sp>
       <p:sp>
         <p:nvSpPr>
-          <p:cNvPr id="14" name="Rectangle 13"/>
+          <p:cNvPr id="18" name="Rectangle 17"/>
           <p:cNvSpPr/>
           <p:nvPr/>
         </p:nvSpPr>
@@ -42891,7 +43004,8 @@
                 <a:solidFill>
                   <a:srgbClr val="FFFFFF"/>
                 </a:solidFill>
-                <a:latin typeface="Microsoft JhengHei"/>
+                <a:latin typeface="Arial"/>
+                <a:ea typeface="微軟正黑體"/>
                 <a:hlinkClick r:id="rId4"/>
               </a:rPr>
               <a:t>Bain 引述 MIT</a:t>
@@ -42901,7 +43015,7 @@
       </p:sp>
       <p:sp>
         <p:nvSpPr>
-          <p:cNvPr id="15" name="Rectangle 14"/>
+          <p:cNvPr id="19" name="Rectangle 18"/>
           <p:cNvSpPr/>
           <p:nvPr/>
         </p:nvSpPr>
@@ -42914,7 +43028,7 @@
             <a:avLst/>
           </a:prstGeom>
           <a:solidFill>
-            <a:srgbClr val="F3F3F3"/>
+            <a:srgbClr val="EBEBEB"/>
           </a:solidFill>
           <a:ln>
             <a:noFill/>
@@ -42949,16 +43063,18 @@
                 <a:solidFill>
                   <a:srgbClr val="FD5108"/>
                 </a:solidFill>
-                <a:latin typeface="Microsoft JhengHei"/>
+                <a:latin typeface="Arial"/>
+                <a:ea typeface="微軟正黑體"/>
               </a:rPr>
               <a:t>情境　</a:t>
             </a:r>
             <a:r>
               <a:rPr sz="1200" b="0">
                 <a:solidFill>
-                  <a:srgbClr val="1E1E1E"/>
+                  <a:srgbClr val="000000"/>
                 </a:solidFill>
-                <a:latin typeface="Microsoft JhengHei"/>
+                <a:latin typeface="Arial"/>
+                <a:ea typeface="微軟正黑體"/>
               </a:rPr>
               <a:t>資金與預算全面轉向 AI，保險業已從試點走向規模化。</a:t>
             </a:r>
@@ -42974,16 +43090,18 @@
                 <a:solidFill>
                   <a:srgbClr val="FD5108"/>
                 </a:solidFill>
-                <a:latin typeface="Microsoft JhengHei"/>
+                <a:latin typeface="Arial"/>
+                <a:ea typeface="微軟正黑體"/>
               </a:rPr>
               <a:t>衝突　</a:t>
             </a:r>
             <a:r>
               <a:rPr sz="1200" b="0">
                 <a:solidFill>
-                  <a:srgbClr val="1E1E1E"/>
+                  <a:srgbClr val="000000"/>
                 </a:solidFill>
-                <a:latin typeface="Microsoft JhengHei"/>
+                <a:latin typeface="Arial"/>
+                <a:ea typeface="微軟正黑體"/>
               </a:rPr>
               <a:t>多數投資還看不到回報；台灣同時面對 IFRS 17／TW-ICS 首年出表與 AI 治理要求。</a:t>
             </a:r>
@@ -42992,7 +43110,7 @@
       </p:sp>
       <p:sp>
         <p:nvSpPr>
-          <p:cNvPr id="16" name="Rectangle 15"/>
+          <p:cNvPr id="20" name="Rectangle 19"/>
           <p:cNvSpPr/>
           <p:nvPr/>
         </p:nvSpPr>
@@ -43040,7 +43158,8 @@
                 <a:solidFill>
                   <a:srgbClr val="FFFFFF"/>
                 </a:solidFill>
-                <a:latin typeface="Microsoft JhengHei"/>
+                <a:latin typeface="Arial"/>
+                <a:ea typeface="微軟正黑體"/>
               </a:rPr>
               <a:t>建議　</a:t>
             </a:r>
@@ -43049,7 +43168,8 @@
                 <a:solidFill>
                   <a:srgbClr val="FFFFFF"/>
                 </a:solidFill>
-                <a:latin typeface="Microsoft JhengHei"/>
+                <a:latin typeface="微軟正黑體"/>
+                <a:ea typeface="微軟正黑體"/>
               </a:rPr>
               <a:t>第一波先推 ① IFRS 17／TW-ICS 後財務轉型　② AI 清冊、模型驗證與護欄；代理型 AI 核保理賠、核心現代化、深偽反詐欺列為第二波。</a:t>
             </a:r>
@@ -43058,7 +43178,7 @@
       </p:sp>
       <p:sp>
         <p:nvSpPr>
-          <p:cNvPr id="17" name="Rectangle 16"/>
+          <p:cNvPr id="21" name="Rectangle 20"/>
           <p:cNvSpPr/>
           <p:nvPr/>
         </p:nvSpPr>
@@ -43106,7 +43226,8 @@
                 <a:solidFill>
                   <a:srgbClr val="FD5108"/>
                 </a:solidFill>
-                <a:latin typeface="Microsoft JhengHei"/>
+                <a:latin typeface="Arial"/>
+                <a:ea typeface="微軟正黑體"/>
               </a:rPr>
               <a:t>需求有時限</a:t>
             </a:r>
@@ -43115,7 +43236,7 @@
       </p:sp>
       <p:sp>
         <p:nvSpPr>
-          <p:cNvPr id="18" name="Rectangle 17"/>
+          <p:cNvPr id="22" name="Rectangle 21"/>
           <p:cNvSpPr/>
           <p:nvPr/>
         </p:nvSpPr>
@@ -43128,7 +43249,7 @@
             <a:avLst/>
           </a:prstGeom>
           <a:solidFill>
-            <a:srgbClr val="F3F3F3"/>
+            <a:srgbClr val="EBEBEB"/>
           </a:solidFill>
           <a:ln>
             <a:noFill/>
@@ -43161,9 +43282,10 @@
             <a:r>
               <a:rPr sz="1100" b="0">
                 <a:solidFill>
-                  <a:srgbClr val="1E1E1E"/>
+                  <a:srgbClr val="000000"/>
                 </a:solidFill>
-                <a:latin typeface="Microsoft JhengHei"/>
+                <a:latin typeface="Arial"/>
+                <a:ea typeface="微軟正黑體"/>
               </a:rPr>
               <a:t>IFRS 17／TW-ICS 2026-01-01 接軌；委外新辦法 2025-12-31 施行；AI 指引進入落地</a:t>
             </a:r>
@@ -43172,7 +43294,7 @@
       </p:sp>
       <p:sp>
         <p:nvSpPr>
-          <p:cNvPr id="19" name="Rectangle 18"/>
+          <p:cNvPr id="23" name="Rectangle 22"/>
           <p:cNvSpPr/>
           <p:nvPr/>
         </p:nvSpPr>
@@ -43220,7 +43342,8 @@
                 <a:solidFill>
                   <a:srgbClr val="FD5108"/>
                 </a:solidFill>
-                <a:latin typeface="Microsoft JhengHei"/>
+                <a:latin typeface="Arial"/>
+                <a:ea typeface="微軟正黑體"/>
               </a:rPr>
               <a:t>離既有服務最近</a:t>
             </a:r>
@@ -43229,7 +43352,7 @@
       </p:sp>
       <p:sp>
         <p:nvSpPr>
-          <p:cNvPr id="20" name="Rectangle 19"/>
+          <p:cNvPr id="24" name="Rectangle 23"/>
           <p:cNvSpPr/>
           <p:nvPr/>
         </p:nvSpPr>
@@ -43242,7 +43365,7 @@
             <a:avLst/>
           </a:prstGeom>
           <a:solidFill>
-            <a:srgbClr val="F3F3F3"/>
+            <a:srgbClr val="EBEBEB"/>
           </a:solidFill>
           <a:ln>
             <a:noFill/>
@@ -43275,9 +43398,10 @@
             <a:r>
               <a:rPr sz="1100" b="0">
                 <a:solidFill>
-                  <a:srgbClr val="1E1E1E"/>
+                  <a:srgbClr val="000000"/>
                 </a:solidFill>
-                <a:latin typeface="Microsoft JhengHei"/>
+                <a:latin typeface="Arial"/>
+                <a:ea typeface="微軟正黑體"/>
               </a:rPr>
               <a:t>延伸既有駐點團隊與 AI 治理服務，不需新技術夥伴；AI 治理健檢 4–6 週可交付</a:t>
             </a:r>
@@ -43286,7 +43410,7 @@
       </p:sp>
       <p:sp>
         <p:nvSpPr>
-          <p:cNvPr id="21" name="Rectangle 20"/>
+          <p:cNvPr id="25" name="Rectangle 24"/>
           <p:cNvSpPr/>
           <p:nvPr/>
         </p:nvSpPr>
@@ -43334,7 +43458,8 @@
                 <a:solidFill>
                   <a:srgbClr val="FD5108"/>
                 </a:solidFill>
-                <a:latin typeface="Microsoft JhengHei"/>
+                <a:latin typeface="Arial"/>
+                <a:ea typeface="微軟正黑體"/>
               </a:rPr>
               <a:t>能帶出第二波</a:t>
             </a:r>
@@ -43343,7 +43468,7 @@
       </p:sp>
       <p:sp>
         <p:nvSpPr>
-          <p:cNvPr id="22" name="Rectangle 21"/>
+          <p:cNvPr id="26" name="Rectangle 25"/>
           <p:cNvSpPr/>
           <p:nvPr/>
         </p:nvSpPr>
@@ -43356,7 +43481,7 @@
             <a:avLst/>
           </a:prstGeom>
           <a:solidFill>
-            <a:srgbClr val="F3F3F3"/>
+            <a:srgbClr val="EBEBEB"/>
           </a:solidFill>
           <a:ln>
             <a:noFill/>
@@ -43389,9 +43514,10 @@
             <a:r>
               <a:rPr sz="1100" b="0">
                 <a:solidFill>
-                  <a:srgbClr val="1E1E1E"/>
+                  <a:srgbClr val="000000"/>
                 </a:solidFill>
-                <a:latin typeface="Microsoft JhengHei"/>
+                <a:latin typeface="Arial"/>
+                <a:ea typeface="微軟正黑體"/>
               </a:rPr>
               <a:t>財務資料與 AI 治理是代理型 AI、核心現代化的前置條件，可延伸為 1–3 年人力委外</a:t>
             </a:r>
@@ -43400,7 +43526,7 @@
       </p:sp>
       <p:sp>
         <p:nvSpPr>
-          <p:cNvPr id="23" name="Rectangle 22"/>
+          <p:cNvPr id="27" name="Rectangle 26"/>
           <p:cNvSpPr/>
           <p:nvPr/>
         </p:nvSpPr>
@@ -43448,16 +43574,18 @@
                 <a:solidFill>
                   <a:srgbClr val="FD5108"/>
                 </a:solidFill>
-                <a:latin typeface="Microsoft JhengHei"/>
+                <a:latin typeface="Arial"/>
+                <a:ea typeface="微軟正黑體"/>
               </a:rPr>
               <a:t>今天請決定：</a:t>
             </a:r>
             <a:r>
               <a:rPr sz="1200" b="0">
                 <a:solidFill>
-                  <a:srgbClr val="1E1E1E"/>
+                  <a:srgbClr val="000000"/>
                 </a:solidFill>
-                <a:latin typeface="Microsoft JhengHei"/>
+                <a:latin typeface="Arial"/>
+                <a:ea typeface="微軟正黑體"/>
               </a:rPr>
               <a:t>同意第一波兩項服務，並各指派 1 位負責人。</a:t>
             </a:r>
@@ -43466,7 +43594,7 @@
       </p:sp>
       <p:sp>
         <p:nvSpPr>
-          <p:cNvPr id="24" name="Rectangle 23"/>
+          <p:cNvPr id="28" name="Rectangle 27"/>
           <p:cNvSpPr/>
           <p:nvPr/>
         </p:nvSpPr>
@@ -43510,18 +43638,20 @@
             <a:r>
               <a:rPr sz="900" b="1">
                 <a:solidFill>
-                  <a:srgbClr val="6B6B6B"/>
+                  <a:srgbClr val="595959"/>
                 </a:solidFill>
-                <a:latin typeface="Microsoft JhengHei"/>
+                <a:latin typeface="Arial"/>
+                <a:ea typeface="微軟正黑體"/>
               </a:rPr>
               <a:t>來源：</a:t>
             </a:r>
             <a:r>
               <a:rPr sz="900" b="0" u="sng">
                 <a:solidFill>
-                  <a:srgbClr val="1F5FBF"/>
+                  <a:srgbClr val="595959"/>
                 </a:solidFill>
-                <a:latin typeface="Microsoft JhengHei"/>
+                <a:latin typeface="Arial"/>
+                <a:ea typeface="微軟正黑體"/>
                 <a:hlinkClick r:id="rId2"/>
               </a:rPr>
               <a:t>Gallagher Re Global InsurTech Report Q1 2026</a:t>
@@ -43529,18 +43659,20 @@
             <a:r>
               <a:rPr sz="900" b="0">
                 <a:solidFill>
-                  <a:srgbClr val="6B6B6B"/>
+                  <a:srgbClr val="595959"/>
                 </a:solidFill>
-                <a:latin typeface="Microsoft JhengHei"/>
+                <a:latin typeface="Arial"/>
+                <a:ea typeface="微軟正黑體"/>
               </a:rPr>
               <a:t>　</a:t>
             </a:r>
             <a:r>
               <a:rPr sz="900" b="0" u="sng">
                 <a:solidFill>
-                  <a:srgbClr val="1F5FBF"/>
+                  <a:srgbClr val="595959"/>
                 </a:solidFill>
-                <a:latin typeface="Microsoft JhengHei"/>
+                <a:latin typeface="Arial"/>
+                <a:ea typeface="微軟正黑體"/>
                 <a:hlinkClick r:id="rId5"/>
               </a:rPr>
               <a:t>Insurance Business 報導（95.2%）</a:t>
@@ -43548,18 +43680,20 @@
             <a:r>
               <a:rPr sz="900" b="0">
                 <a:solidFill>
-                  <a:srgbClr val="6B6B6B"/>
+                  <a:srgbClr val="595959"/>
                 </a:solidFill>
-                <a:latin typeface="Microsoft JhengHei"/>
+                <a:latin typeface="Arial"/>
+                <a:ea typeface="微軟正黑體"/>
               </a:rPr>
               <a:t>　</a:t>
             </a:r>
             <a:r>
               <a:rPr sz="900" b="0" u="sng">
                 <a:solidFill>
-                  <a:srgbClr val="1F5FBF"/>
+                  <a:srgbClr val="595959"/>
                 </a:solidFill>
-                <a:latin typeface="Microsoft JhengHei"/>
+                <a:latin typeface="Arial"/>
+                <a:ea typeface="微軟正黑體"/>
                 <a:hlinkClick r:id="rId3"/>
               </a:rPr>
               <a:t>PwC 保險高階主管調查（Claims Journal）</a:t>
@@ -43567,18 +43701,20 @@
             <a:r>
               <a:rPr sz="900" b="0">
                 <a:solidFill>
-                  <a:srgbClr val="6B6B6B"/>
+                  <a:srgbClr val="595959"/>
                 </a:solidFill>
-                <a:latin typeface="Microsoft JhengHei"/>
+                <a:latin typeface="Arial"/>
+                <a:ea typeface="微軟正黑體"/>
               </a:rPr>
               <a:t>　</a:t>
             </a:r>
             <a:r>
               <a:rPr sz="900" b="0" u="sng">
                 <a:solidFill>
-                  <a:srgbClr val="1F5FBF"/>
+                  <a:srgbClr val="595959"/>
                 </a:solidFill>
-                <a:latin typeface="Microsoft JhengHei"/>
+                <a:latin typeface="Arial"/>
+                <a:ea typeface="微軟正黑體"/>
                 <a:hlinkClick r:id="rId4"/>
               </a:rPr>
               <a:t>Bain：Reimagining Insurance for the AI Era</a:t>
@@ -43620,17 +43756,119 @@
           <a:lstStyle/>
           <a:p>
             <a:r>
-              <a:rPr sz="2000">
-                <a:latin typeface="Microsoft JhengHei"/>
+              <a:rPr sz="2000" b="1">
+                <a:latin typeface="Georgia"/>
+                <a:ea typeface="微軟正黑體"/>
               </a:rPr>
               <a:t>為什麼是這兩項：台灣監理時程已經確定，而且兩項服務離我們的既有能力最近</a:t>
             </a:r>
           </a:p>
         </p:txBody>
       </p:sp>
+      <p:sp>
+        <p:nvSpPr>
+          <p:cNvPr id="4" name="Footer Placeholder 4">
+            <a:extLst>
+              <a:ext uri="{FF2B5EF4-FFF2-40B4-BE49-F238E27FC236}">
+                <a16:creationId xmlns:a16="http://schemas.microsoft.com/office/drawing/2014/main" id="{E57B29C1-93EA-1886-CD27-23CE023225D9}"/>
+              </a:ext>
+            </a:extLst>
+          </p:cNvPr>
+          <p:cNvSpPr>
+            <a:spLocks noGrp="1"/>
+          </p:cNvSpPr>
+          <p:nvPr>
+            <p:ph type="ftr" sz="quarter" idx="3"/>
+          </p:nvPr>
+        </p:nvSpPr>
+        <p:spPr>
+          <a:xfrm>
+            <a:off x="1066800" y="6497441"/>
+            <a:ext cx="8814816" cy="161583"/>
+          </a:xfrm>
+          <a:prstGeom prst="rect">
+            <a:avLst/>
+          </a:prstGeom>
+        </p:spPr>
+        <p:txBody>
+          <a:bodyPr vert="horz" wrap="square" lIns="0" tIns="0" rIns="0" bIns="0" rtlCol="0" anchor="b" anchorCtr="0">
+            <a:spAutoFit/>
+          </a:bodyPr>
+          <a:lstStyle>
+            <a:lvl1pPr algn="l">
+              <a:defRPr sz="1050" b="0">
+                <a:solidFill>
+                  <a:sysClr val="windowText" lastClr="000000"/>
+                </a:solidFill>
+                <a:latin typeface="+mn-lt"/>
+                <a:cs typeface="Arial" panose="020B0604020202020204" pitchFamily="34" charset="0"/>
+              </a:defRPr>
+            </a:lvl1pPr>
+          </a:lstStyle>
+          <a:p>
+            <a:r>
+              <a:rPr>
+                <a:latin typeface="Arial"/>
+                <a:ea typeface="微軟正黑體"/>
+              </a:rPr>
+              <a:t>內部討論稿｜僅供 FSC1 保險組內部使用｜資料來源為公開研究，點選來源可開啟原文</a:t>
+            </a:r>
+          </a:p>
+        </p:txBody>
+      </p:sp>
+      <p:sp>
+        <p:nvSpPr>
+          <p:cNvPr id="6" name="Slide Number Placeholder 13">
+            <a:extLst>
+              <a:ext uri="{FF2B5EF4-FFF2-40B4-BE49-F238E27FC236}">
+                <a16:creationId xmlns:a16="http://schemas.microsoft.com/office/drawing/2014/main" id="{D15FEAD4-DFB9-ED08-EBEE-A4E5DE31E318}"/>
+              </a:ext>
+            </a:extLst>
+          </p:cNvPr>
+          <p:cNvSpPr>
+            <a:spLocks noGrp="1"/>
+          </p:cNvSpPr>
+          <p:nvPr>
+            <p:ph type="sldNum" sz="quarter" idx="4"/>
+          </p:nvPr>
+        </p:nvSpPr>
+        <p:spPr>
+          <a:xfrm>
+            <a:off x="11503818" y="6501384"/>
+            <a:ext cx="298209" cy="161583"/>
+          </a:xfrm>
+          <a:prstGeom prst="rect">
+            <a:avLst/>
+          </a:prstGeom>
+        </p:spPr>
+        <p:txBody>
+          <a:bodyPr vert="horz" wrap="square" lIns="0" tIns="0" rIns="0" bIns="0" rtlCol="0" anchor="b" anchorCtr="0">
+            <a:spAutoFit/>
+          </a:bodyPr>
+          <a:lstStyle>
+            <a:lvl1pPr algn="r">
+              <a:defRPr sz="1050">
+                <a:solidFill>
+                  <a:schemeClr val="tx1"/>
+                </a:solidFill>
+                <a:latin typeface="+mn-lt"/>
+                <a:cs typeface="Arial" panose="020B0604020202020204" pitchFamily="34" charset="0"/>
+              </a:defRPr>
+            </a:lvl1pPr>
+          </a:lstStyle>
+          <a:p>
+            <a:fld id="{3E6AC032-1535-134B-A583-D5E1DDD0D167}" type="slidenum">
+              <a:rPr lang="en-US" smtClean="0"/>
+              <a:pPr/>
+              <a:t>‹#›</a:t>
+            </a:fld>
+            <a:endParaRPr lang="en-US"/>
+          </a:p>
+        </p:txBody>
+      </p:sp>
       <p:cxnSp>
         <p:nvCxnSpPr>
-          <p:cNvPr id="3" name="Connector 2"/>
+          <p:cNvPr id="7" name="Connector 6"/>
           <p:cNvCxnSpPr/>
           <p:nvPr/>
         </p:nvCxnSpPr>
@@ -43665,7 +43903,7 @@
       </p:cxnSp>
       <p:sp>
         <p:nvSpPr>
-          <p:cNvPr id="4" name="Oval 3"/>
+          <p:cNvPr id="8" name="Oval 7"/>
           <p:cNvSpPr/>
           <p:nvPr/>
         </p:nvSpPr>
@@ -43709,7 +43947,8 @@
                 <a:solidFill>
                   <a:srgbClr val="FFFFFF"/>
                 </a:solidFill>
-                <a:latin typeface="Microsoft JhengHei"/>
+                <a:latin typeface="Arial"/>
+                <a:ea typeface="微軟正黑體"/>
               </a:rPr>
               <a:t/>
             </a:r>
@@ -43718,7 +43957,7 @@
       </p:sp>
       <p:sp>
         <p:nvSpPr>
-          <p:cNvPr id="5" name="Rectangle 4"/>
+          <p:cNvPr id="9" name="Rectangle 8"/>
           <p:cNvSpPr/>
           <p:nvPr/>
         </p:nvSpPr>
@@ -43764,7 +44003,8 @@
                 <a:solidFill>
                   <a:srgbClr val="FD5108"/>
                 </a:solidFill>
-                <a:latin typeface="Microsoft JhengHei"/>
+                <a:latin typeface="Arial"/>
+                <a:ea typeface="微軟正黑體"/>
               </a:rPr>
               <a:t>2024-06</a:t>
             </a:r>
@@ -43773,7 +44013,7 @@
       </p:sp>
       <p:sp>
         <p:nvSpPr>
-          <p:cNvPr id="6" name="Rectangle 5"/>
+          <p:cNvPr id="10" name="Rectangle 9"/>
           <p:cNvSpPr/>
           <p:nvPr/>
         </p:nvSpPr>
@@ -43786,7 +44026,7 @@
             <a:avLst/>
           </a:prstGeom>
           <a:solidFill>
-            <a:srgbClr val="F3F3F3"/>
+            <a:srgbClr val="EBEBEB"/>
           </a:solidFill>
           <a:ln>
             <a:noFill/>
@@ -43819,9 +44059,10 @@
             <a:r>
               <a:rPr sz="1050" b="0">
                 <a:solidFill>
-                  <a:srgbClr val="1E1E1E"/>
+                  <a:srgbClr val="000000"/>
                 </a:solidFill>
-                <a:latin typeface="Microsoft JhengHei"/>
+                <a:latin typeface="Arial"/>
+                <a:ea typeface="微軟正黑體"/>
               </a:rPr>
               <a:t>金管會《金融業運用 AI 指引》</a:t>
             </a:r>
@@ -43835,9 +44076,10 @@
             <a:r>
               <a:rPr sz="900" b="0" u="sng">
                 <a:solidFill>
-                  <a:srgbClr val="1F5FBF"/>
+                  <a:srgbClr val="000000"/>
                 </a:solidFill>
-                <a:latin typeface="Microsoft JhengHei"/>
+                <a:latin typeface="Arial"/>
+                <a:ea typeface="微軟正黑體"/>
                 <a:hlinkClick r:id="rId2"/>
               </a:rPr>
               <a:t>原文</a:t>
@@ -43847,7 +44089,7 @@
       </p:sp>
       <p:sp>
         <p:nvSpPr>
-          <p:cNvPr id="7" name="Oval 6"/>
+          <p:cNvPr id="11" name="Oval 10"/>
           <p:cNvSpPr/>
           <p:nvPr/>
         </p:nvSpPr>
@@ -43891,7 +44133,8 @@
                 <a:solidFill>
                   <a:srgbClr val="FFFFFF"/>
                 </a:solidFill>
-                <a:latin typeface="Microsoft JhengHei"/>
+                <a:latin typeface="Arial"/>
+                <a:ea typeface="微軟正黑體"/>
               </a:rPr>
               <a:t/>
             </a:r>
@@ -43900,7 +44143,7 @@
       </p:sp>
       <p:sp>
         <p:nvSpPr>
-          <p:cNvPr id="8" name="Rectangle 7"/>
+          <p:cNvPr id="12" name="Rectangle 11"/>
           <p:cNvSpPr/>
           <p:nvPr/>
         </p:nvSpPr>
@@ -43946,7 +44189,8 @@
                 <a:solidFill>
                   <a:srgbClr val="FD5108"/>
                 </a:solidFill>
-                <a:latin typeface="Microsoft JhengHei"/>
+                <a:latin typeface="Arial"/>
+                <a:ea typeface="微軟正黑體"/>
               </a:rPr>
               <a:t>2024-08</a:t>
             </a:r>
@@ -43955,7 +44199,7 @@
       </p:sp>
       <p:sp>
         <p:nvSpPr>
-          <p:cNvPr id="9" name="Rectangle 8"/>
+          <p:cNvPr id="13" name="Rectangle 12"/>
           <p:cNvSpPr/>
           <p:nvPr/>
         </p:nvSpPr>
@@ -43968,7 +44212,7 @@
             <a:avLst/>
           </a:prstGeom>
           <a:solidFill>
-            <a:srgbClr val="F3F3F3"/>
+            <a:srgbClr val="EBEBEB"/>
           </a:solidFill>
           <a:ln>
             <a:noFill/>
@@ -44001,9 +44245,10 @@
             <a:r>
               <a:rPr sz="1050" b="0">
                 <a:solidFill>
-                  <a:srgbClr val="1E1E1E"/>
+                  <a:srgbClr val="000000"/>
                 </a:solidFill>
-                <a:latin typeface="Microsoft JhengHei"/>
+                <a:latin typeface="Arial"/>
+                <a:ea typeface="微軟正黑體"/>
               </a:rPr>
               <a:t>委外注意事項修正：放寬雲端聯合查核</a:t>
             </a:r>
@@ -44017,9 +44262,10 @@
             <a:r>
               <a:rPr sz="900" b="0" u="sng">
                 <a:solidFill>
-                  <a:srgbClr val="1F5FBF"/>
+                  <a:srgbClr val="000000"/>
                 </a:solidFill>
-                <a:latin typeface="Microsoft JhengHei"/>
+                <a:latin typeface="Arial"/>
+                <a:ea typeface="微軟正黑體"/>
                 <a:hlinkClick r:id="rId3"/>
               </a:rPr>
               <a:t>原文</a:t>
@@ -44029,7 +44275,7 @@
       </p:sp>
       <p:sp>
         <p:nvSpPr>
-          <p:cNvPr id="10" name="Oval 9"/>
+          <p:cNvPr id="14" name="Oval 13"/>
           <p:cNvSpPr/>
           <p:nvPr/>
         </p:nvSpPr>
@@ -44073,7 +44319,8 @@
                 <a:solidFill>
                   <a:srgbClr val="FFFFFF"/>
                 </a:solidFill>
-                <a:latin typeface="Microsoft JhengHei"/>
+                <a:latin typeface="Arial"/>
+                <a:ea typeface="微軟正黑體"/>
               </a:rPr>
               <a:t/>
             </a:r>
@@ -44082,7 +44329,7 @@
       </p:sp>
       <p:sp>
         <p:nvSpPr>
-          <p:cNvPr id="11" name="Rectangle 10"/>
+          <p:cNvPr id="15" name="Rectangle 14"/>
           <p:cNvSpPr/>
           <p:nvPr/>
         </p:nvSpPr>
@@ -44128,7 +44375,8 @@
                 <a:solidFill>
                   <a:srgbClr val="FD5108"/>
                 </a:solidFill>
-                <a:latin typeface="Microsoft JhengHei"/>
+                <a:latin typeface="Arial"/>
+                <a:ea typeface="微軟正黑體"/>
               </a:rPr>
               <a:t>2025-12-31</a:t>
             </a:r>
@@ -44137,7 +44385,7 @@
       </p:sp>
       <p:sp>
         <p:nvSpPr>
-          <p:cNvPr id="12" name="Rectangle 11"/>
+          <p:cNvPr id="16" name="Rectangle 15"/>
           <p:cNvSpPr/>
           <p:nvPr/>
         </p:nvSpPr>
@@ -44150,7 +44398,7 @@
             <a:avLst/>
           </a:prstGeom>
           <a:solidFill>
-            <a:srgbClr val="F3F3F3"/>
+            <a:srgbClr val="EBEBEB"/>
           </a:solidFill>
           <a:ln>
             <a:noFill/>
@@ -44183,9 +44431,10 @@
             <a:r>
               <a:rPr sz="1050" b="0">
                 <a:solidFill>
-                  <a:srgbClr val="1E1E1E"/>
+                  <a:srgbClr val="000000"/>
                 </a:solidFill>
-                <a:latin typeface="Microsoft JhengHei"/>
+                <a:latin typeface="Arial"/>
+                <a:ea typeface="微軟正黑體"/>
               </a:rPr>
               <a:t>委外新辦法施行，提升為法規命令</a:t>
             </a:r>
@@ -44199,9 +44448,10 @@
             <a:r>
               <a:rPr sz="900" b="0" u="sng">
                 <a:solidFill>
-                  <a:srgbClr val="1F5FBF"/>
+                  <a:srgbClr val="000000"/>
                 </a:solidFill>
-                <a:latin typeface="Microsoft JhengHei"/>
+                <a:latin typeface="Arial"/>
+                <a:ea typeface="微軟正黑體"/>
                 <a:hlinkClick r:id="rId4"/>
               </a:rPr>
               <a:t>原文</a:t>
@@ -44211,7 +44461,7 @@
       </p:sp>
       <p:sp>
         <p:nvSpPr>
-          <p:cNvPr id="13" name="Oval 12"/>
+          <p:cNvPr id="17" name="Oval 16"/>
           <p:cNvSpPr/>
           <p:nvPr/>
         </p:nvSpPr>
@@ -44255,7 +44505,8 @@
                 <a:solidFill>
                   <a:srgbClr val="FFFFFF"/>
                 </a:solidFill>
-                <a:latin typeface="Microsoft JhengHei"/>
+                <a:latin typeface="Arial"/>
+                <a:ea typeface="微軟正黑體"/>
               </a:rPr>
               <a:t/>
             </a:r>
@@ -44264,7 +44515,7 @@
       </p:sp>
       <p:sp>
         <p:nvSpPr>
-          <p:cNvPr id="14" name="Rectangle 13"/>
+          <p:cNvPr id="18" name="Rectangle 17"/>
           <p:cNvSpPr/>
           <p:nvPr/>
         </p:nvSpPr>
@@ -44310,7 +44561,8 @@
                 <a:solidFill>
                   <a:srgbClr val="FD5108"/>
                 </a:solidFill>
-                <a:latin typeface="Microsoft JhengHei"/>
+                <a:latin typeface="Arial"/>
+                <a:ea typeface="微軟正黑體"/>
               </a:rPr>
               <a:t>2026-01-01</a:t>
             </a:r>
@@ -44319,7 +44571,7 @@
       </p:sp>
       <p:sp>
         <p:nvSpPr>
-          <p:cNvPr id="15" name="Rectangle 14"/>
+          <p:cNvPr id="19" name="Rectangle 18"/>
           <p:cNvSpPr/>
           <p:nvPr/>
         </p:nvSpPr>
@@ -44332,7 +44584,7 @@
             <a:avLst/>
           </a:prstGeom>
           <a:solidFill>
-            <a:srgbClr val="F3F3F3"/>
+            <a:srgbClr val="EBEBEB"/>
           </a:solidFill>
           <a:ln>
             <a:noFill/>
@@ -44365,9 +44617,10 @@
             <a:r>
               <a:rPr sz="1050" b="0">
                 <a:solidFill>
-                  <a:srgbClr val="1E1E1E"/>
+                  <a:srgbClr val="000000"/>
                 </a:solidFill>
-                <a:latin typeface="Microsoft JhengHei"/>
+                <a:latin typeface="Arial"/>
+                <a:ea typeface="微軟正黑體"/>
               </a:rPr>
               <a:t>IFRS 17／TW-ICS 正式接軌</a:t>
             </a:r>
@@ -44381,9 +44634,10 @@
             <a:r>
               <a:rPr sz="900" b="0" u="sng">
                 <a:solidFill>
-                  <a:srgbClr val="1F5FBF"/>
+                  <a:srgbClr val="000000"/>
                 </a:solidFill>
-                <a:latin typeface="Microsoft JhengHei"/>
+                <a:latin typeface="Arial"/>
+                <a:ea typeface="微軟正黑體"/>
                 <a:hlinkClick r:id="rId5"/>
               </a:rPr>
               <a:t>原文</a:t>
@@ -44393,7 +44647,7 @@
       </p:sp>
       <p:sp>
         <p:nvSpPr>
-          <p:cNvPr id="16" name="Oval 15"/>
+          <p:cNvPr id="20" name="Oval 19"/>
           <p:cNvSpPr/>
           <p:nvPr/>
         </p:nvSpPr>
@@ -44406,7 +44660,7 @@
             <a:avLst/>
           </a:prstGeom>
           <a:solidFill>
-            <a:srgbClr val="6B6B6B"/>
+            <a:srgbClr val="595959"/>
           </a:solidFill>
           <a:ln>
             <a:noFill/>
@@ -44437,7 +44691,8 @@
                 <a:solidFill>
                   <a:srgbClr val="FFFFFF"/>
                 </a:solidFill>
-                <a:latin typeface="Microsoft JhengHei"/>
+                <a:latin typeface="Arial"/>
+                <a:ea typeface="微軟正黑體"/>
               </a:rPr>
               <a:t/>
             </a:r>
@@ -44446,7 +44701,7 @@
       </p:sp>
       <p:sp>
         <p:nvSpPr>
-          <p:cNvPr id="17" name="Rectangle 16"/>
+          <p:cNvPr id="21" name="Rectangle 20"/>
           <p:cNvSpPr/>
           <p:nvPr/>
         </p:nvSpPr>
@@ -44490,9 +44745,10 @@
             <a:r>
               <a:rPr sz="1250" b="1">
                 <a:solidFill>
-                  <a:srgbClr val="6B6B6B"/>
+                  <a:srgbClr val="595959"/>
                 </a:solidFill>
-                <a:latin typeface="Microsoft JhengHei"/>
+                <a:latin typeface="Arial"/>
+                <a:ea typeface="微軟正黑體"/>
               </a:rPr>
               <a:t>2026-03～09</a:t>
             </a:r>
@@ -44501,7 +44757,7 @@
       </p:sp>
       <p:sp>
         <p:nvSpPr>
-          <p:cNvPr id="18" name="Rectangle 17"/>
+          <p:cNvPr id="22" name="Rectangle 21"/>
           <p:cNvSpPr/>
           <p:nvPr/>
         </p:nvSpPr>
@@ -44516,7 +44772,7 @@
           <a:noFill/>
           <a:ln w="9525">
             <a:solidFill>
-              <a:srgbClr val="D9D9D9"/>
+              <a:srgbClr val="CBD1D6"/>
             </a:solidFill>
           </a:ln>
           <a:effectLst/>
@@ -44547,9 +44803,10 @@
             <a:r>
               <a:rPr sz="1050" b="0">
                 <a:solidFill>
-                  <a:srgbClr val="1E1E1E"/>
+                  <a:srgbClr val="000000"/>
                 </a:solidFill>
-                <a:latin typeface="Microsoft JhengHei"/>
+                <a:latin typeface="Arial"/>
+                <a:ea typeface="微軟正黑體"/>
               </a:rPr>
               <a:t>NAIC 12 州 AI 評估工具試點（美國）</a:t>
             </a:r>
@@ -44563,9 +44820,10 @@
             <a:r>
               <a:rPr sz="900" b="0" u="sng">
                 <a:solidFill>
-                  <a:srgbClr val="1F5FBF"/>
+                  <a:srgbClr val="000000"/>
                 </a:solidFill>
-                <a:latin typeface="Microsoft JhengHei"/>
+                <a:latin typeface="Arial"/>
+                <a:ea typeface="微軟正黑體"/>
                 <a:hlinkClick r:id="rId6"/>
               </a:rPr>
               <a:t>原文</a:t>
@@ -44575,7 +44833,7 @@
       </p:sp>
       <p:sp>
         <p:nvSpPr>
-          <p:cNvPr id="19" name="Oval 18"/>
+          <p:cNvPr id="23" name="Oval 22"/>
           <p:cNvSpPr/>
           <p:nvPr/>
         </p:nvSpPr>
@@ -44588,7 +44846,7 @@
             <a:avLst/>
           </a:prstGeom>
           <a:solidFill>
-            <a:srgbClr val="6B6B6B"/>
+            <a:srgbClr val="595959"/>
           </a:solidFill>
           <a:ln>
             <a:noFill/>
@@ -44619,7 +44877,8 @@
                 <a:solidFill>
                   <a:srgbClr val="FFFFFF"/>
                 </a:solidFill>
-                <a:latin typeface="Microsoft JhengHei"/>
+                <a:latin typeface="Arial"/>
+                <a:ea typeface="微軟正黑體"/>
               </a:rPr>
               <a:t/>
             </a:r>
@@ -44628,7 +44887,7 @@
       </p:sp>
       <p:sp>
         <p:nvSpPr>
-          <p:cNvPr id="20" name="Rectangle 19"/>
+          <p:cNvPr id="24" name="Rectangle 23"/>
           <p:cNvSpPr/>
           <p:nvPr/>
         </p:nvSpPr>
@@ -44672,9 +44931,10 @@
             <a:r>
               <a:rPr sz="1250" b="1">
                 <a:solidFill>
-                  <a:srgbClr val="6B6B6B"/>
+                  <a:srgbClr val="595959"/>
                 </a:solidFill>
-                <a:latin typeface="Microsoft JhengHei"/>
+                <a:latin typeface="Arial"/>
+                <a:ea typeface="微軟正黑體"/>
               </a:rPr>
               <a:t>2026-10</a:t>
             </a:r>
@@ -44683,7 +44943,7 @@
       </p:sp>
       <p:sp>
         <p:nvSpPr>
-          <p:cNvPr id="21" name="Rectangle 20"/>
+          <p:cNvPr id="25" name="Rectangle 24"/>
           <p:cNvSpPr/>
           <p:nvPr/>
         </p:nvSpPr>
@@ -44698,7 +44958,7 @@
           <a:noFill/>
           <a:ln w="9525">
             <a:solidFill>
-              <a:srgbClr val="D9D9D9"/>
+              <a:srgbClr val="CBD1D6"/>
             </a:solidFill>
           </a:ln>
           <a:effectLst/>
@@ -44729,9 +44989,10 @@
             <a:r>
               <a:rPr sz="1050" b="0">
                 <a:solidFill>
-                  <a:srgbClr val="1E1E1E"/>
+                  <a:srgbClr val="000000"/>
                 </a:solidFill>
-                <a:latin typeface="Microsoft JhengHei"/>
+                <a:latin typeface="Arial"/>
+                <a:ea typeface="微軟正黑體"/>
               </a:rPr>
               <a:t>MAS AI 風險管理指引定稿（新加坡）</a:t>
             </a:r>
@@ -44745,9 +45006,10 @@
             <a:r>
               <a:rPr sz="900" b="0" u="sng">
                 <a:solidFill>
-                  <a:srgbClr val="1F5FBF"/>
+                  <a:srgbClr val="000000"/>
                 </a:solidFill>
-                <a:latin typeface="Microsoft JhengHei"/>
+                <a:latin typeface="Arial"/>
+                <a:ea typeface="微軟正黑體"/>
                 <a:hlinkClick r:id="rId7"/>
               </a:rPr>
               <a:t>原文</a:t>
@@ -44757,7 +45019,7 @@
       </p:sp>
       <p:sp>
         <p:nvSpPr>
-          <p:cNvPr id="22" name="Rectangle 21"/>
+          <p:cNvPr id="26" name="Rectangle 25"/>
           <p:cNvSpPr/>
           <p:nvPr/>
         </p:nvSpPr>
@@ -44801,9 +45063,10 @@
             <a:r>
               <a:rPr sz="900" b="0">
                 <a:solidFill>
-                  <a:srgbClr val="6B6B6B"/>
+                  <a:srgbClr val="595959"/>
                 </a:solidFill>
-                <a:latin typeface="Microsoft JhengHei"/>
+                <a:latin typeface="微軟正黑體"/>
+                <a:ea typeface="微軟正黑體"/>
               </a:rPr>
               <a:t>時間軸：橘色為台灣監理事件，灰色為國際標竿。　評等：● 有利　◐ 中等　○ 不利，為團隊依研究報告判斷，請會議校準。</a:t>
             </a:r>
@@ -44812,7 +45075,7 @@
       </p:sp>
       <p:sp>
         <p:nvSpPr>
-          <p:cNvPr id="23" name="Rectangle 22"/>
+          <p:cNvPr id="27" name="Rectangle 26"/>
           <p:cNvSpPr/>
           <p:nvPr/>
         </p:nvSpPr>
@@ -44860,7 +45123,8 @@
                 <a:solidFill>
                   <a:srgbClr val="FFFFFF"/>
                 </a:solidFill>
-                <a:latin typeface="Microsoft JhengHei"/>
+                <a:latin typeface="Arial"/>
+                <a:ea typeface="微軟正黑體"/>
               </a:rPr>
               <a:t>服務</a:t>
             </a:r>
@@ -44869,7 +45133,7 @@
       </p:sp>
       <p:sp>
         <p:nvSpPr>
-          <p:cNvPr id="24" name="Rectangle 23"/>
+          <p:cNvPr id="28" name="Rectangle 27"/>
           <p:cNvSpPr/>
           <p:nvPr/>
         </p:nvSpPr>
@@ -44917,7 +45181,8 @@
                 <a:solidFill>
                   <a:srgbClr val="FFFFFF"/>
                 </a:solidFill>
-                <a:latin typeface="Microsoft JhengHei"/>
+                <a:latin typeface="Arial"/>
+                <a:ea typeface="微軟正黑體"/>
               </a:rPr>
               <a:t>需求迫切度</a:t>
             </a:r>
@@ -44926,7 +45191,7 @@
       </p:sp>
       <p:sp>
         <p:nvSpPr>
-          <p:cNvPr id="25" name="Rectangle 24"/>
+          <p:cNvPr id="29" name="Rectangle 28"/>
           <p:cNvSpPr/>
           <p:nvPr/>
         </p:nvSpPr>
@@ -44974,7 +45239,8 @@
                 <a:solidFill>
                   <a:srgbClr val="FFFFFF"/>
                 </a:solidFill>
-                <a:latin typeface="Microsoft JhengHei"/>
+                <a:latin typeface="Arial"/>
+                <a:ea typeface="微軟正黑體"/>
               </a:rPr>
               <a:t>離既有服務</a:t>
             </a:r>
@@ -44983,7 +45249,7 @@
       </p:sp>
       <p:sp>
         <p:nvSpPr>
-          <p:cNvPr id="26" name="Rectangle 25"/>
+          <p:cNvPr id="30" name="Rectangle 29"/>
           <p:cNvSpPr/>
           <p:nvPr/>
         </p:nvSpPr>
@@ -45031,7 +45297,8 @@
                 <a:solidFill>
                   <a:srgbClr val="FFFFFF"/>
                 </a:solidFill>
-                <a:latin typeface="Microsoft JhengHei"/>
+                <a:latin typeface="Arial"/>
+                <a:ea typeface="微軟正黑體"/>
               </a:rPr>
               <a:t>首案週期</a:t>
             </a:r>
@@ -45040,7 +45307,7 @@
       </p:sp>
       <p:sp>
         <p:nvSpPr>
-          <p:cNvPr id="27" name="Rectangle 26"/>
+          <p:cNvPr id="31" name="Rectangle 30"/>
           <p:cNvSpPr/>
           <p:nvPr/>
         </p:nvSpPr>
@@ -45088,7 +45355,8 @@
                 <a:solidFill>
                   <a:srgbClr val="FFFFFF"/>
                 </a:solidFill>
-                <a:latin typeface="Microsoft JhengHei"/>
+                <a:latin typeface="Arial"/>
+                <a:ea typeface="微軟正黑體"/>
               </a:rPr>
               <a:t>切入案</a:t>
             </a:r>
@@ -45097,7 +45365,7 @@
       </p:sp>
       <p:sp>
         <p:nvSpPr>
-          <p:cNvPr id="28" name="Rectangle 27"/>
+          <p:cNvPr id="32" name="Rectangle 31"/>
           <p:cNvSpPr/>
           <p:nvPr/>
         </p:nvSpPr>
@@ -45145,7 +45413,8 @@
                 <a:solidFill>
                   <a:srgbClr val="FFFFFF"/>
                 </a:solidFill>
-                <a:latin typeface="Microsoft JhengHei"/>
+                <a:latin typeface="Arial"/>
+                <a:ea typeface="微軟正黑體"/>
               </a:rPr>
               <a:t>建議</a:t>
             </a:r>
@@ -45154,7 +45423,7 @@
       </p:sp>
       <p:sp>
         <p:nvSpPr>
-          <p:cNvPr id="29" name="Rectangle 28"/>
+          <p:cNvPr id="33" name="Rectangle 32"/>
           <p:cNvSpPr/>
           <p:nvPr/>
         </p:nvSpPr>
@@ -45167,7 +45436,7 @@
             <a:avLst/>
           </a:prstGeom>
           <a:solidFill>
-            <a:srgbClr val="F3F3F3"/>
+            <a:srgbClr val="EBEBEB"/>
           </a:solidFill>
           <a:ln>
             <a:noFill/>
@@ -45200,9 +45469,10 @@
             <a:r>
               <a:rPr sz="1100" b="1">
                 <a:solidFill>
-                  <a:srgbClr val="1E1E1E"/>
+                  <a:srgbClr val="000000"/>
                 </a:solidFill>
-                <a:latin typeface="Microsoft JhengHei"/>
+                <a:latin typeface="Arial"/>
+                <a:ea typeface="微軟正黑體"/>
               </a:rPr>
               <a:t>IFRS 17／TW-ICS 後財務轉型</a:t>
             </a:r>
@@ -45211,7 +45481,7 @@
       </p:sp>
       <p:sp>
         <p:nvSpPr>
-          <p:cNvPr id="30" name="Rectangle 29"/>
+          <p:cNvPr id="34" name="Rectangle 33"/>
           <p:cNvSpPr/>
           <p:nvPr/>
         </p:nvSpPr>
@@ -45224,7 +45494,7 @@
             <a:avLst/>
           </a:prstGeom>
           <a:solidFill>
-            <a:srgbClr val="F3F3F3"/>
+            <a:srgbClr val="EBEBEB"/>
           </a:solidFill>
           <a:ln>
             <a:noFill/>
@@ -45259,7 +45529,8 @@
                 <a:solidFill>
                   <a:srgbClr val="FD5108"/>
                 </a:solidFill>
-                <a:latin typeface="Microsoft JhengHei"/>
+                <a:latin typeface="微軟正黑體"/>
+                <a:ea typeface="微軟正黑體"/>
               </a:rPr>
               <a:t>●</a:t>
             </a:r>
@@ -45268,7 +45539,7 @@
       </p:sp>
       <p:sp>
         <p:nvSpPr>
-          <p:cNvPr id="31" name="Rectangle 30"/>
+          <p:cNvPr id="35" name="Rectangle 34"/>
           <p:cNvSpPr/>
           <p:nvPr/>
         </p:nvSpPr>
@@ -45281,7 +45552,7 @@
             <a:avLst/>
           </a:prstGeom>
           <a:solidFill>
-            <a:srgbClr val="F3F3F3"/>
+            <a:srgbClr val="EBEBEB"/>
           </a:solidFill>
           <a:ln>
             <a:noFill/>
@@ -45316,7 +45587,8 @@
                 <a:solidFill>
                   <a:srgbClr val="FD5108"/>
                 </a:solidFill>
-                <a:latin typeface="Microsoft JhengHei"/>
+                <a:latin typeface="微軟正黑體"/>
+                <a:ea typeface="微軟正黑體"/>
               </a:rPr>
               <a:t>●</a:t>
             </a:r>
@@ -45325,7 +45597,7 @@
       </p:sp>
       <p:sp>
         <p:nvSpPr>
-          <p:cNvPr id="32" name="Rectangle 31"/>
+          <p:cNvPr id="36" name="Rectangle 35"/>
           <p:cNvSpPr/>
           <p:nvPr/>
         </p:nvSpPr>
@@ -45338,7 +45610,7 @@
             <a:avLst/>
           </a:prstGeom>
           <a:solidFill>
-            <a:srgbClr val="F3F3F3"/>
+            <a:srgbClr val="EBEBEB"/>
           </a:solidFill>
           <a:ln>
             <a:noFill/>
@@ -45373,7 +45645,8 @@
                 <a:solidFill>
                   <a:srgbClr val="FD5108"/>
                 </a:solidFill>
-                <a:latin typeface="Microsoft JhengHei"/>
+                <a:latin typeface="微軟正黑體"/>
+                <a:ea typeface="微軟正黑體"/>
               </a:rPr>
               <a:t>●</a:t>
             </a:r>
@@ -45382,7 +45655,7 @@
       </p:sp>
       <p:sp>
         <p:nvSpPr>
-          <p:cNvPr id="33" name="Rectangle 32"/>
+          <p:cNvPr id="37" name="Rectangle 36"/>
           <p:cNvSpPr/>
           <p:nvPr/>
         </p:nvSpPr>
@@ -45395,7 +45668,7 @@
             <a:avLst/>
           </a:prstGeom>
           <a:solidFill>
-            <a:srgbClr val="F3F3F3"/>
+            <a:srgbClr val="EBEBEB"/>
           </a:solidFill>
           <a:ln>
             <a:noFill/>
@@ -45428,9 +45701,10 @@
             <a:r>
               <a:rPr sz="1100" b="0">
                 <a:solidFill>
-                  <a:srgbClr val="1E1E1E"/>
+                  <a:srgbClr val="000000"/>
                 </a:solidFill>
-                <a:latin typeface="Microsoft JhengHei"/>
+                <a:latin typeface="Arial"/>
+                <a:ea typeface="微軟正黑體"/>
               </a:rPr>
               <a:t>首年結帳瓶頸診斷＋CSM 儀表板</a:t>
             </a:r>
@@ -45439,7 +45713,7 @@
       </p:sp>
       <p:sp>
         <p:nvSpPr>
-          <p:cNvPr id="34" name="Rectangle 33"/>
+          <p:cNvPr id="38" name="Rectangle 37"/>
           <p:cNvSpPr/>
           <p:nvPr/>
         </p:nvSpPr>
@@ -45487,7 +45761,8 @@
                 <a:solidFill>
                   <a:srgbClr val="FFFFFF"/>
                 </a:solidFill>
-                <a:latin typeface="Microsoft JhengHei"/>
+                <a:latin typeface="Arial"/>
+                <a:ea typeface="微軟正黑體"/>
               </a:rPr>
               <a:t>第一波</a:t>
             </a:r>
@@ -45496,7 +45771,7 @@
       </p:sp>
       <p:sp>
         <p:nvSpPr>
-          <p:cNvPr id="35" name="Rectangle 34"/>
+          <p:cNvPr id="39" name="Rectangle 38"/>
           <p:cNvSpPr/>
           <p:nvPr/>
         </p:nvSpPr>
@@ -45542,9 +45817,10 @@
             <a:r>
               <a:rPr sz="1100" b="1">
                 <a:solidFill>
-                  <a:srgbClr val="1E1E1E"/>
+                  <a:srgbClr val="000000"/>
                 </a:solidFill>
-                <a:latin typeface="Microsoft JhengHei"/>
+                <a:latin typeface="Arial"/>
+                <a:ea typeface="微軟正黑體"/>
               </a:rPr>
               <a:t>AI 清冊、模型驗證與護欄</a:t>
             </a:r>
@@ -45553,7 +45829,7 @@
       </p:sp>
       <p:sp>
         <p:nvSpPr>
-          <p:cNvPr id="36" name="Rectangle 35"/>
+          <p:cNvPr id="40" name="Rectangle 39"/>
           <p:cNvSpPr/>
           <p:nvPr/>
         </p:nvSpPr>
@@ -45601,7 +45877,8 @@
                 <a:solidFill>
                   <a:srgbClr val="FD5108"/>
                 </a:solidFill>
-                <a:latin typeface="Microsoft JhengHei"/>
+                <a:latin typeface="微軟正黑體"/>
+                <a:ea typeface="微軟正黑體"/>
               </a:rPr>
               <a:t>●</a:t>
             </a:r>
@@ -45610,7 +45887,7 @@
       </p:sp>
       <p:sp>
         <p:nvSpPr>
-          <p:cNvPr id="37" name="Rectangle 36"/>
+          <p:cNvPr id="41" name="Rectangle 40"/>
           <p:cNvSpPr/>
           <p:nvPr/>
         </p:nvSpPr>
@@ -45658,7 +45935,8 @@
                 <a:solidFill>
                   <a:srgbClr val="FD5108"/>
                 </a:solidFill>
-                <a:latin typeface="Microsoft JhengHei"/>
+                <a:latin typeface="微軟正黑體"/>
+                <a:ea typeface="微軟正黑體"/>
               </a:rPr>
               <a:t>●</a:t>
             </a:r>
@@ -45667,7 +45945,7 @@
       </p:sp>
       <p:sp>
         <p:nvSpPr>
-          <p:cNvPr id="38" name="Rectangle 37"/>
+          <p:cNvPr id="42" name="Rectangle 41"/>
           <p:cNvSpPr/>
           <p:nvPr/>
         </p:nvSpPr>
@@ -45715,7 +45993,8 @@
                 <a:solidFill>
                   <a:srgbClr val="FD5108"/>
                 </a:solidFill>
-                <a:latin typeface="Microsoft JhengHei"/>
+                <a:latin typeface="微軟正黑體"/>
+                <a:ea typeface="微軟正黑體"/>
               </a:rPr>
               <a:t>●</a:t>
             </a:r>
@@ -45724,7 +46003,7 @@
       </p:sp>
       <p:sp>
         <p:nvSpPr>
-          <p:cNvPr id="39" name="Rectangle 38"/>
+          <p:cNvPr id="43" name="Rectangle 42"/>
           <p:cNvSpPr/>
           <p:nvPr/>
         </p:nvSpPr>
@@ -45770,9 +46049,10 @@
             <a:r>
               <a:rPr sz="1100" b="0">
                 <a:solidFill>
-                  <a:srgbClr val="1E1E1E"/>
+                  <a:srgbClr val="000000"/>
                 </a:solidFill>
-                <a:latin typeface="Microsoft JhengHei"/>
+                <a:latin typeface="Arial"/>
+                <a:ea typeface="微軟正黑體"/>
               </a:rPr>
               <a:t>4–6 週 AI 清冊盤點與合規健檢</a:t>
             </a:r>
@@ -45781,7 +46061,7 @@
       </p:sp>
       <p:sp>
         <p:nvSpPr>
-          <p:cNvPr id="40" name="Rectangle 39"/>
+          <p:cNvPr id="44" name="Rectangle 43"/>
           <p:cNvSpPr/>
           <p:nvPr/>
         </p:nvSpPr>
@@ -45829,7 +46109,8 @@
                 <a:solidFill>
                   <a:srgbClr val="FFFFFF"/>
                 </a:solidFill>
-                <a:latin typeface="Microsoft JhengHei"/>
+                <a:latin typeface="Arial"/>
+                <a:ea typeface="微軟正黑體"/>
               </a:rPr>
               <a:t>第一波</a:t>
             </a:r>
@@ -45838,7 +46119,7 @@
       </p:sp>
       <p:sp>
         <p:nvSpPr>
-          <p:cNvPr id="41" name="Rectangle 40"/>
+          <p:cNvPr id="45" name="Rectangle 44"/>
           <p:cNvSpPr/>
           <p:nvPr/>
         </p:nvSpPr>
@@ -45851,7 +46132,7 @@
             <a:avLst/>
           </a:prstGeom>
           <a:solidFill>
-            <a:srgbClr val="F3F3F3"/>
+            <a:srgbClr val="EBEBEB"/>
           </a:solidFill>
           <a:ln>
             <a:noFill/>
@@ -45884,9 +46165,10 @@
             <a:r>
               <a:rPr sz="1100" b="1">
                 <a:solidFill>
-                  <a:srgbClr val="1E1E1E"/>
+                  <a:srgbClr val="000000"/>
                 </a:solidFill>
-                <a:latin typeface="Microsoft JhengHei"/>
+                <a:latin typeface="Arial"/>
+                <a:ea typeface="微軟正黑體"/>
               </a:rPr>
               <a:t>代理型 AI 核保與理賠</a:t>
             </a:r>
@@ -45895,7 +46177,7 @@
       </p:sp>
       <p:sp>
         <p:nvSpPr>
-          <p:cNvPr id="42" name="Rectangle 41"/>
+          <p:cNvPr id="46" name="Rectangle 45"/>
           <p:cNvSpPr/>
           <p:nvPr/>
         </p:nvSpPr>
@@ -45908,7 +46190,7 @@
             <a:avLst/>
           </a:prstGeom>
           <a:solidFill>
-            <a:srgbClr val="F3F3F3"/>
+            <a:srgbClr val="EBEBEB"/>
           </a:solidFill>
           <a:ln>
             <a:noFill/>
@@ -45943,7 +46225,8 @@
                 <a:solidFill>
                   <a:srgbClr val="FD5108"/>
                 </a:solidFill>
-                <a:latin typeface="Microsoft JhengHei"/>
+                <a:latin typeface="微軟正黑體"/>
+                <a:ea typeface="微軟正黑體"/>
               </a:rPr>
               <a:t>●</a:t>
             </a:r>
@@ -45952,7 +46235,7 @@
       </p:sp>
       <p:sp>
         <p:nvSpPr>
-          <p:cNvPr id="43" name="Rectangle 42"/>
+          <p:cNvPr id="47" name="Rectangle 46"/>
           <p:cNvSpPr/>
           <p:nvPr/>
         </p:nvSpPr>
@@ -45965,7 +46248,7 @@
             <a:avLst/>
           </a:prstGeom>
           <a:solidFill>
-            <a:srgbClr val="F3F3F3"/>
+            <a:srgbClr val="EBEBEB"/>
           </a:solidFill>
           <a:ln>
             <a:noFill/>
@@ -46000,7 +46283,8 @@
                 <a:solidFill>
                   <a:srgbClr val="FD5108"/>
                 </a:solidFill>
-                <a:latin typeface="Microsoft JhengHei"/>
+                <a:latin typeface="微軟正黑體"/>
+                <a:ea typeface="微軟正黑體"/>
               </a:rPr>
               <a:t>◐</a:t>
             </a:r>
@@ -46009,7 +46293,7 @@
       </p:sp>
       <p:sp>
         <p:nvSpPr>
-          <p:cNvPr id="44" name="Rectangle 43"/>
+          <p:cNvPr id="48" name="Rectangle 47"/>
           <p:cNvSpPr/>
           <p:nvPr/>
         </p:nvSpPr>
@@ -46022,7 +46306,7 @@
             <a:avLst/>
           </a:prstGeom>
           <a:solidFill>
-            <a:srgbClr val="F3F3F3"/>
+            <a:srgbClr val="EBEBEB"/>
           </a:solidFill>
           <a:ln>
             <a:noFill/>
@@ -46057,7 +46341,8 @@
                 <a:solidFill>
                   <a:srgbClr val="FD5108"/>
                 </a:solidFill>
-                <a:latin typeface="Microsoft JhengHei"/>
+                <a:latin typeface="微軟正黑體"/>
+                <a:ea typeface="微軟正黑體"/>
               </a:rPr>
               <a:t>◐</a:t>
             </a:r>
@@ -46066,7 +46351,7 @@
       </p:sp>
       <p:sp>
         <p:nvSpPr>
-          <p:cNvPr id="45" name="Rectangle 44"/>
+          <p:cNvPr id="49" name="Rectangle 48"/>
           <p:cNvSpPr/>
           <p:nvPr/>
         </p:nvSpPr>
@@ -46079,7 +46364,7 @@
             <a:avLst/>
           </a:prstGeom>
           <a:solidFill>
-            <a:srgbClr val="F3F3F3"/>
+            <a:srgbClr val="EBEBEB"/>
           </a:solidFill>
           <a:ln>
             <a:noFill/>
@@ -46112,9 +46397,10 @@
             <a:r>
               <a:rPr sz="1100" b="0">
                 <a:solidFill>
-                  <a:srgbClr val="1E1E1E"/>
+                  <a:srgbClr val="000000"/>
                 </a:solidFill>
-                <a:latin typeface="Microsoft JhengHei"/>
+                <a:latin typeface="Arial"/>
+                <a:ea typeface="微軟正黑體"/>
               </a:rPr>
               <a:t>6–8 週單一險種工作流藍圖</a:t>
             </a:r>
@@ -46123,7 +46409,7 @@
       </p:sp>
       <p:sp>
         <p:nvSpPr>
-          <p:cNvPr id="46" name="Rectangle 45"/>
+          <p:cNvPr id="50" name="Rectangle 49"/>
           <p:cNvSpPr/>
           <p:nvPr/>
         </p:nvSpPr>
@@ -46171,7 +46457,8 @@
                 <a:solidFill>
                   <a:srgbClr val="FD5108"/>
                 </a:solidFill>
-                <a:latin typeface="Microsoft JhengHei"/>
+                <a:latin typeface="Arial"/>
+                <a:ea typeface="微軟正黑體"/>
               </a:rPr>
               <a:t>第二波</a:t>
             </a:r>
@@ -46180,7 +46467,7 @@
       </p:sp>
       <p:sp>
         <p:nvSpPr>
-          <p:cNvPr id="47" name="Rectangle 46"/>
+          <p:cNvPr id="51" name="Rectangle 50"/>
           <p:cNvSpPr/>
           <p:nvPr/>
         </p:nvSpPr>
@@ -46226,9 +46513,10 @@
             <a:r>
               <a:rPr sz="1100" b="1">
                 <a:solidFill>
-                  <a:srgbClr val="1E1E1E"/>
+                  <a:srgbClr val="000000"/>
                 </a:solidFill>
-                <a:latin typeface="Microsoft JhengHei"/>
+                <a:latin typeface="Arial"/>
+                <a:ea typeface="微軟正黑體"/>
               </a:rPr>
               <a:t>AI 加速核心現代化與雲端</a:t>
             </a:r>
@@ -46237,7 +46525,7 @@
       </p:sp>
       <p:sp>
         <p:nvSpPr>
-          <p:cNvPr id="48" name="Rectangle 47"/>
+          <p:cNvPr id="52" name="Rectangle 51"/>
           <p:cNvSpPr/>
           <p:nvPr/>
         </p:nvSpPr>
@@ -46285,7 +46573,8 @@
                 <a:solidFill>
                   <a:srgbClr val="FD5108"/>
                 </a:solidFill>
-                <a:latin typeface="Microsoft JhengHei"/>
+                <a:latin typeface="微軟正黑體"/>
+                <a:ea typeface="微軟正黑體"/>
               </a:rPr>
               <a:t>◐</a:t>
             </a:r>
@@ -46294,7 +46583,7 @@
       </p:sp>
       <p:sp>
         <p:nvSpPr>
-          <p:cNvPr id="49" name="Rectangle 48"/>
+          <p:cNvPr id="53" name="Rectangle 52"/>
           <p:cNvSpPr/>
           <p:nvPr/>
         </p:nvSpPr>
@@ -46342,7 +46631,8 @@
                 <a:solidFill>
                   <a:srgbClr val="FD5108"/>
                 </a:solidFill>
-                <a:latin typeface="Microsoft JhengHei"/>
+                <a:latin typeface="微軟正黑體"/>
+                <a:ea typeface="微軟正黑體"/>
               </a:rPr>
               <a:t>◐</a:t>
             </a:r>
@@ -46351,7 +46641,7 @@
       </p:sp>
       <p:sp>
         <p:nvSpPr>
-          <p:cNvPr id="50" name="Rectangle 49"/>
+          <p:cNvPr id="54" name="Rectangle 53"/>
           <p:cNvSpPr/>
           <p:nvPr/>
         </p:nvSpPr>
@@ -46399,7 +46689,8 @@
                 <a:solidFill>
                   <a:srgbClr val="FD5108"/>
                 </a:solidFill>
-                <a:latin typeface="Microsoft JhengHei"/>
+                <a:latin typeface="微軟正黑體"/>
+                <a:ea typeface="微軟正黑體"/>
               </a:rPr>
               <a:t>○</a:t>
             </a:r>
@@ -46408,7 +46699,7 @@
       </p:sp>
       <p:sp>
         <p:nvSpPr>
-          <p:cNvPr id="51" name="Rectangle 50"/>
+          <p:cNvPr id="55" name="Rectangle 54"/>
           <p:cNvSpPr/>
           <p:nvPr/>
         </p:nvSpPr>
@@ -46454,9 +46745,10 @@
             <a:r>
               <a:rPr sz="1100" b="0">
                 <a:solidFill>
-                  <a:srgbClr val="1E1E1E"/>
+                  <a:srgbClr val="000000"/>
                 </a:solidFill>
-                <a:latin typeface="Microsoft JhengHei"/>
+                <a:latin typeface="Arial"/>
+                <a:ea typeface="微軟正黑體"/>
               </a:rPr>
               <a:t>雲端委外合規評估或 AI 重寫 PoC</a:t>
             </a:r>
@@ -46465,7 +46757,7 @@
       </p:sp>
       <p:sp>
         <p:nvSpPr>
-          <p:cNvPr id="52" name="Rectangle 51"/>
+          <p:cNvPr id="56" name="Rectangle 55"/>
           <p:cNvSpPr/>
           <p:nvPr/>
         </p:nvSpPr>
@@ -46513,7 +46805,8 @@
                 <a:solidFill>
                   <a:srgbClr val="FD5108"/>
                 </a:solidFill>
-                <a:latin typeface="Microsoft JhengHei"/>
+                <a:latin typeface="Arial"/>
+                <a:ea typeface="微軟正黑體"/>
               </a:rPr>
               <a:t>第二波</a:t>
             </a:r>
@@ -46522,7 +46815,7 @@
       </p:sp>
       <p:sp>
         <p:nvSpPr>
-          <p:cNvPr id="53" name="Rectangle 52"/>
+          <p:cNvPr id="57" name="Rectangle 56"/>
           <p:cNvSpPr/>
           <p:nvPr/>
         </p:nvSpPr>
@@ -46535,7 +46828,7 @@
             <a:avLst/>
           </a:prstGeom>
           <a:solidFill>
-            <a:srgbClr val="F3F3F3"/>
+            <a:srgbClr val="EBEBEB"/>
           </a:solidFill>
           <a:ln>
             <a:noFill/>
@@ -46568,9 +46861,10 @@
             <a:r>
               <a:rPr sz="1100" b="1">
                 <a:solidFill>
-                  <a:srgbClr val="1E1E1E"/>
+                  <a:srgbClr val="000000"/>
                 </a:solidFill>
-                <a:latin typeface="Microsoft JhengHei"/>
+                <a:latin typeface="Arial"/>
+                <a:ea typeface="微軟正黑體"/>
               </a:rPr>
               <a:t>深偽理賠反詐欺</a:t>
             </a:r>
@@ -46579,7 +46873,7 @@
       </p:sp>
       <p:sp>
         <p:nvSpPr>
-          <p:cNvPr id="54" name="Rectangle 53"/>
+          <p:cNvPr id="58" name="Rectangle 57"/>
           <p:cNvSpPr/>
           <p:nvPr/>
         </p:nvSpPr>
@@ -46592,7 +46886,7 @@
             <a:avLst/>
           </a:prstGeom>
           <a:solidFill>
-            <a:srgbClr val="F3F3F3"/>
+            <a:srgbClr val="EBEBEB"/>
           </a:solidFill>
           <a:ln>
             <a:noFill/>
@@ -46627,7 +46921,8 @@
                 <a:solidFill>
                   <a:srgbClr val="FD5108"/>
                 </a:solidFill>
-                <a:latin typeface="Microsoft JhengHei"/>
+                <a:latin typeface="微軟正黑體"/>
+                <a:ea typeface="微軟正黑體"/>
               </a:rPr>
               <a:t>◐</a:t>
             </a:r>
@@ -46636,7 +46931,7 @@
       </p:sp>
       <p:sp>
         <p:nvSpPr>
-          <p:cNvPr id="55" name="Rectangle 54"/>
+          <p:cNvPr id="59" name="Rectangle 58"/>
           <p:cNvSpPr/>
           <p:nvPr/>
         </p:nvSpPr>
@@ -46649,7 +46944,7 @@
             <a:avLst/>
           </a:prstGeom>
           <a:solidFill>
-            <a:srgbClr val="F3F3F3"/>
+            <a:srgbClr val="EBEBEB"/>
           </a:solidFill>
           <a:ln>
             <a:noFill/>
@@ -46684,7 +46979,8 @@
                 <a:solidFill>
                   <a:srgbClr val="FD5108"/>
                 </a:solidFill>
-                <a:latin typeface="Microsoft JhengHei"/>
+                <a:latin typeface="微軟正黑體"/>
+                <a:ea typeface="微軟正黑體"/>
               </a:rPr>
               <a:t>○</a:t>
             </a:r>
@@ -46693,7 +46989,7 @@
       </p:sp>
       <p:sp>
         <p:nvSpPr>
-          <p:cNvPr id="56" name="Rectangle 55"/>
+          <p:cNvPr id="60" name="Rectangle 59"/>
           <p:cNvSpPr/>
           <p:nvPr/>
         </p:nvSpPr>
@@ -46706,7 +47002,7 @@
             <a:avLst/>
           </a:prstGeom>
           <a:solidFill>
-            <a:srgbClr val="F3F3F3"/>
+            <a:srgbClr val="EBEBEB"/>
           </a:solidFill>
           <a:ln>
             <a:noFill/>
@@ -46741,7 +47037,8 @@
                 <a:solidFill>
                   <a:srgbClr val="FD5108"/>
                 </a:solidFill>
-                <a:latin typeface="Microsoft JhengHei"/>
+                <a:latin typeface="微軟正黑體"/>
+                <a:ea typeface="微軟正黑體"/>
               </a:rPr>
               <a:t>◐</a:t>
             </a:r>
@@ -46750,7 +47047,7 @@
       </p:sp>
       <p:sp>
         <p:nvSpPr>
-          <p:cNvPr id="57" name="Rectangle 56"/>
+          <p:cNvPr id="61" name="Rectangle 60"/>
           <p:cNvSpPr/>
           <p:nvPr/>
         </p:nvSpPr>
@@ -46763,7 +47060,7 @@
             <a:avLst/>
           </a:prstGeom>
           <a:solidFill>
-            <a:srgbClr val="F3F3F3"/>
+            <a:srgbClr val="EBEBEB"/>
           </a:solidFill>
           <a:ln>
             <a:noFill/>
@@ -46796,9 +47093,10 @@
             <a:r>
               <a:rPr sz="1100" b="0">
                 <a:solidFill>
-                  <a:srgbClr val="1E1E1E"/>
+                  <a:srgbClr val="000000"/>
                 </a:solidFill>
-                <a:latin typeface="Microsoft JhengHei"/>
+                <a:latin typeface="Arial"/>
+                <a:ea typeface="微軟正黑體"/>
               </a:rPr>
               <a:t>車損照片／醫療單據偽造偵測 PoC</a:t>
             </a:r>
@@ -46807,7 +47105,7 @@
       </p:sp>
       <p:sp>
         <p:nvSpPr>
-          <p:cNvPr id="58" name="Rectangle 57"/>
+          <p:cNvPr id="62" name="Rectangle 61"/>
           <p:cNvSpPr/>
           <p:nvPr/>
         </p:nvSpPr>
@@ -46855,7 +47153,8 @@
                 <a:solidFill>
                   <a:srgbClr val="FD5108"/>
                 </a:solidFill>
-                <a:latin typeface="Microsoft JhengHei"/>
+                <a:latin typeface="Arial"/>
+                <a:ea typeface="微軟正黑體"/>
               </a:rPr>
               <a:t>第二波</a:t>
             </a:r>
@@ -46864,7 +47163,7 @@
       </p:sp>
       <p:sp>
         <p:nvSpPr>
-          <p:cNvPr id="59" name="Rectangle 58"/>
+          <p:cNvPr id="63" name="Rectangle 62"/>
           <p:cNvSpPr/>
           <p:nvPr/>
         </p:nvSpPr>
@@ -46908,18 +47207,20 @@
             <a:r>
               <a:rPr sz="900" b="1">
                 <a:solidFill>
-                  <a:srgbClr val="6B6B6B"/>
+                  <a:srgbClr val="595959"/>
                 </a:solidFill>
-                <a:latin typeface="Microsoft JhengHei"/>
+                <a:latin typeface="Arial"/>
+                <a:ea typeface="微軟正黑體"/>
               </a:rPr>
               <a:t>來源：</a:t>
             </a:r>
             <a:r>
               <a:rPr sz="900" b="0" u="sng">
                 <a:solidFill>
-                  <a:srgbClr val="1F5FBF"/>
+                  <a:srgbClr val="595959"/>
                 </a:solidFill>
-                <a:latin typeface="Microsoft JhengHei"/>
+                <a:latin typeface="Arial"/>
+                <a:ea typeface="微軟正黑體"/>
                 <a:hlinkClick r:id="rId2"/>
               </a:rPr>
               <a:t>金管會 AI 指引</a:t>
@@ -46927,18 +47228,20 @@
             <a:r>
               <a:rPr sz="900" b="0">
                 <a:solidFill>
-                  <a:srgbClr val="6B6B6B"/>
+                  <a:srgbClr val="595959"/>
                 </a:solidFill>
-                <a:latin typeface="Microsoft JhengHei"/>
+                <a:latin typeface="Arial"/>
+                <a:ea typeface="微軟正黑體"/>
               </a:rPr>
               <a:t>　</a:t>
             </a:r>
             <a:r>
               <a:rPr sz="900" b="0" u="sng">
                 <a:solidFill>
-                  <a:srgbClr val="1F5FBF"/>
+                  <a:srgbClr val="595959"/>
                 </a:solidFill>
-                <a:latin typeface="Microsoft JhengHei"/>
+                <a:latin typeface="Arial"/>
+                <a:ea typeface="微軟正黑體"/>
                 <a:hlinkClick r:id="rId8"/>
               </a:rPr>
               <a:t>理律：AI 指引解析</a:t>
@@ -46946,18 +47249,20 @@
             <a:r>
               <a:rPr sz="900" b="0">
                 <a:solidFill>
-                  <a:srgbClr val="6B6B6B"/>
+                  <a:srgbClr val="595959"/>
                 </a:solidFill>
-                <a:latin typeface="Microsoft JhengHei"/>
+                <a:latin typeface="Arial"/>
+                <a:ea typeface="微軟正黑體"/>
               </a:rPr>
               <a:t>　</a:t>
             </a:r>
             <a:r>
               <a:rPr sz="900" b="0" u="sng">
                 <a:solidFill>
-                  <a:srgbClr val="1F5FBF"/>
+                  <a:srgbClr val="595959"/>
                 </a:solidFill>
-                <a:latin typeface="Microsoft JhengHei"/>
+                <a:latin typeface="Arial"/>
+                <a:ea typeface="微軟正黑體"/>
                 <a:hlinkClick r:id="rId3"/>
               </a:rPr>
               <a:t>金管會委外修正</a:t>
@@ -46965,18 +47270,20 @@
             <a:r>
               <a:rPr sz="900" b="0">
                 <a:solidFill>
-                  <a:srgbClr val="6B6B6B"/>
+                  <a:srgbClr val="595959"/>
                 </a:solidFill>
-                <a:latin typeface="Microsoft JhengHei"/>
+                <a:latin typeface="Arial"/>
+                <a:ea typeface="微軟正黑體"/>
               </a:rPr>
               <a:t>　</a:t>
             </a:r>
             <a:r>
               <a:rPr sz="900" b="0" u="sng">
                 <a:solidFill>
-                  <a:srgbClr val="1F5FBF"/>
+                  <a:srgbClr val="595959"/>
                 </a:solidFill>
-                <a:latin typeface="Microsoft JhengHei"/>
+                <a:latin typeface="Arial"/>
+                <a:ea typeface="微軟正黑體"/>
                 <a:hlinkClick r:id="rId4"/>
               </a:rPr>
               <a:t>理律：委外新辦法</a:t>
@@ -46984,18 +47291,20 @@
             <a:r>
               <a:rPr sz="900" b="0">
                 <a:solidFill>
-                  <a:srgbClr val="6B6B6B"/>
+                  <a:srgbClr val="595959"/>
                 </a:solidFill>
-                <a:latin typeface="Microsoft JhengHei"/>
+                <a:latin typeface="Arial"/>
+                <a:ea typeface="微軟正黑體"/>
               </a:rPr>
               <a:t>　</a:t>
             </a:r>
             <a:r>
               <a:rPr sz="900" b="0" u="sng">
                 <a:solidFill>
-                  <a:srgbClr val="1F5FBF"/>
+                  <a:srgbClr val="595959"/>
                 </a:solidFill>
-                <a:latin typeface="Microsoft JhengHei"/>
+                <a:latin typeface="Arial"/>
+                <a:ea typeface="微軟正黑體"/>
                 <a:hlinkClick r:id="rId9"/>
               </a:rPr>
               <a:t>公會雲端自律規範</a:t>
@@ -47003,18 +47312,20 @@
             <a:r>
               <a:rPr sz="900" b="0">
                 <a:solidFill>
-                  <a:srgbClr val="6B6B6B"/>
+                  <a:srgbClr val="595959"/>
                 </a:solidFill>
-                <a:latin typeface="Microsoft JhengHei"/>
+                <a:latin typeface="Arial"/>
+                <a:ea typeface="微軟正黑體"/>
               </a:rPr>
               <a:t>　</a:t>
             </a:r>
             <a:r>
               <a:rPr sz="900" b="0" u="sng">
                 <a:solidFill>
-                  <a:srgbClr val="1F5FBF"/>
+                  <a:srgbClr val="595959"/>
                 </a:solidFill>
-                <a:latin typeface="Microsoft JhengHei"/>
+                <a:latin typeface="Arial"/>
+                <a:ea typeface="微軟正黑體"/>
                 <a:hlinkClick r:id="rId5"/>
               </a:rPr>
               <a:t>資誠 IFRS 17 關鍵議題</a:t>
@@ -47022,18 +47333,20 @@
             <a:r>
               <a:rPr sz="900" b="0">
                 <a:solidFill>
-                  <a:srgbClr val="6B6B6B"/>
+                  <a:srgbClr val="595959"/>
                 </a:solidFill>
-                <a:latin typeface="Microsoft JhengHei"/>
+                <a:latin typeface="Arial"/>
+                <a:ea typeface="微軟正黑體"/>
               </a:rPr>
               <a:t>　</a:t>
             </a:r>
             <a:r>
               <a:rPr sz="900" b="0" u="sng">
                 <a:solidFill>
-                  <a:srgbClr val="1F5FBF"/>
+                  <a:srgbClr val="595959"/>
                 </a:solidFill>
-                <a:latin typeface="Microsoft JhengHei"/>
+                <a:latin typeface="Arial"/>
+                <a:ea typeface="微軟正黑體"/>
                 <a:hlinkClick r:id="rId10"/>
               </a:rPr>
               <a:t>NAIC 工作小組</a:t>
@@ -47041,18 +47354,20 @@
             <a:r>
               <a:rPr sz="900" b="0">
                 <a:solidFill>
-                  <a:srgbClr val="6B6B6B"/>
+                  <a:srgbClr val="595959"/>
                 </a:solidFill>
-                <a:latin typeface="Microsoft JhengHei"/>
+                <a:latin typeface="Arial"/>
+                <a:ea typeface="微軟正黑體"/>
               </a:rPr>
               <a:t>　</a:t>
             </a:r>
             <a:r>
               <a:rPr sz="900" b="0" u="sng">
                 <a:solidFill>
-                  <a:srgbClr val="1F5FBF"/>
+                  <a:srgbClr val="595959"/>
                 </a:solidFill>
-                <a:latin typeface="Microsoft JhengHei"/>
+                <a:latin typeface="Arial"/>
+                <a:ea typeface="微軟正黑體"/>
                 <a:hlinkClick r:id="rId7"/>
               </a:rPr>
               <a:t>MAS AI 指引</a:t>
@@ -47094,17 +47409,119 @@
           <a:lstStyle/>
           <a:p>
             <a:r>
-              <a:rPr sz="2000">
-                <a:latin typeface="Microsoft JhengHei"/>
+              <a:rPr sz="2000" b="1">
+                <a:latin typeface="Georgia"/>
+                <a:ea typeface="微軟正黑體"/>
               </a:rPr>
-              <a:t>MBB 與四大都在推代理型 AI 藍圖或平台；我們的空間在在地確信、IFRS 17 資料與駐點人力</a:t>
-            </a:r>
-          </a:p>
-        </p:txBody>
-      </p:sp>
-      <p:sp>
-        <p:nvSpPr>
-          <p:cNvPr id="3" name="Rectangle 2"/>
+              <a:t>MBB 與四大都在推代理型 AI 藍圖；我們以在地確信、IFRS 17 資料與駐點人力區隔</a:t>
+            </a:r>
+          </a:p>
+        </p:txBody>
+      </p:sp>
+      <p:sp>
+        <p:nvSpPr>
+          <p:cNvPr id="4" name="Footer Placeholder 4">
+            <a:extLst>
+              <a:ext uri="{FF2B5EF4-FFF2-40B4-BE49-F238E27FC236}">
+                <a16:creationId xmlns:a16="http://schemas.microsoft.com/office/drawing/2014/main" id="{E57B29C1-93EA-1886-CD27-23CE023225D9}"/>
+              </a:ext>
+            </a:extLst>
+          </p:cNvPr>
+          <p:cNvSpPr>
+            <a:spLocks noGrp="1"/>
+          </p:cNvSpPr>
+          <p:nvPr>
+            <p:ph type="ftr" sz="quarter" idx="3"/>
+          </p:nvPr>
+        </p:nvSpPr>
+        <p:spPr>
+          <a:xfrm>
+            <a:off x="1066800" y="6497441"/>
+            <a:ext cx="8814816" cy="161583"/>
+          </a:xfrm>
+          <a:prstGeom prst="rect">
+            <a:avLst/>
+          </a:prstGeom>
+        </p:spPr>
+        <p:txBody>
+          <a:bodyPr vert="horz" wrap="square" lIns="0" tIns="0" rIns="0" bIns="0" rtlCol="0" anchor="b" anchorCtr="0">
+            <a:spAutoFit/>
+          </a:bodyPr>
+          <a:lstStyle>
+            <a:lvl1pPr algn="l">
+              <a:defRPr sz="1050" b="0">
+                <a:solidFill>
+                  <a:sysClr val="windowText" lastClr="000000"/>
+                </a:solidFill>
+                <a:latin typeface="+mn-lt"/>
+                <a:cs typeface="Arial" panose="020B0604020202020204" pitchFamily="34" charset="0"/>
+              </a:defRPr>
+            </a:lvl1pPr>
+          </a:lstStyle>
+          <a:p>
+            <a:r>
+              <a:rPr>
+                <a:latin typeface="Arial"/>
+                <a:ea typeface="微軟正黑體"/>
+              </a:rPr>
+              <a:t>內部討論稿｜僅供 FSC1 保險組內部使用｜資料來源為公開研究，點選來源可開啟原文</a:t>
+            </a:r>
+          </a:p>
+        </p:txBody>
+      </p:sp>
+      <p:sp>
+        <p:nvSpPr>
+          <p:cNvPr id="6" name="Slide Number Placeholder 13">
+            <a:extLst>
+              <a:ext uri="{FF2B5EF4-FFF2-40B4-BE49-F238E27FC236}">
+                <a16:creationId xmlns:a16="http://schemas.microsoft.com/office/drawing/2014/main" id="{D15FEAD4-DFB9-ED08-EBEE-A4E5DE31E318}"/>
+              </a:ext>
+            </a:extLst>
+          </p:cNvPr>
+          <p:cNvSpPr>
+            <a:spLocks noGrp="1"/>
+          </p:cNvSpPr>
+          <p:nvPr>
+            <p:ph type="sldNum" sz="quarter" idx="4"/>
+          </p:nvPr>
+        </p:nvSpPr>
+        <p:spPr>
+          <a:xfrm>
+            <a:off x="11503818" y="6501384"/>
+            <a:ext cx="298209" cy="161583"/>
+          </a:xfrm>
+          <a:prstGeom prst="rect">
+            <a:avLst/>
+          </a:prstGeom>
+        </p:spPr>
+        <p:txBody>
+          <a:bodyPr vert="horz" wrap="square" lIns="0" tIns="0" rIns="0" bIns="0" rtlCol="0" anchor="b" anchorCtr="0">
+            <a:spAutoFit/>
+          </a:bodyPr>
+          <a:lstStyle>
+            <a:lvl1pPr algn="r">
+              <a:defRPr sz="1050">
+                <a:solidFill>
+                  <a:schemeClr val="tx1"/>
+                </a:solidFill>
+                <a:latin typeface="+mn-lt"/>
+                <a:cs typeface="Arial" panose="020B0604020202020204" pitchFamily="34" charset="0"/>
+              </a:defRPr>
+            </a:lvl1pPr>
+          </a:lstStyle>
+          <a:p>
+            <a:fld id="{3E6AC032-1535-134B-A583-D5E1DDD0D167}" type="slidenum">
+              <a:rPr lang="en-US" smtClean="0"/>
+              <a:pPr/>
+              <a:t>‹#›</a:t>
+            </a:fld>
+            <a:endParaRPr lang="en-US"/>
+          </a:p>
+        </p:txBody>
+      </p:sp>
+      <p:sp>
+        <p:nvSpPr>
+          <p:cNvPr id="7" name="Rectangle 6"/>
           <p:cNvSpPr/>
           <p:nvPr/>
         </p:nvSpPr>
@@ -47152,7 +47569,8 @@
                 <a:solidFill>
                   <a:srgbClr val="FFFFFF"/>
                 </a:solidFill>
-                <a:latin typeface="Microsoft JhengHei"/>
+                <a:latin typeface="Arial"/>
+                <a:ea typeface="微軟正黑體"/>
               </a:rPr>
               <a:t>機構</a:t>
             </a:r>
@@ -47161,7 +47579,7 @@
       </p:sp>
       <p:sp>
         <p:nvSpPr>
-          <p:cNvPr id="4" name="Rectangle 3"/>
+          <p:cNvPr id="8" name="Rectangle 7"/>
           <p:cNvSpPr/>
           <p:nvPr/>
         </p:nvSpPr>
@@ -47209,7 +47627,8 @@
                 <a:solidFill>
                   <a:srgbClr val="FFFFFF"/>
                 </a:solidFill>
-                <a:latin typeface="Microsoft JhengHei"/>
+                <a:latin typeface="Arial"/>
+                <a:ea typeface="微軟正黑體"/>
               </a:rPr>
               <a:t>保險 AI 主力產品／方法</a:t>
             </a:r>
@@ -47218,7 +47637,7 @@
       </p:sp>
       <p:sp>
         <p:nvSpPr>
-          <p:cNvPr id="5" name="Rectangle 4"/>
+          <p:cNvPr id="9" name="Rectangle 8"/>
           <p:cNvSpPr/>
           <p:nvPr/>
         </p:nvSpPr>
@@ -47266,7 +47685,8 @@
                 <a:solidFill>
                   <a:srgbClr val="FFFFFF"/>
                 </a:solidFill>
-                <a:latin typeface="Microsoft JhengHei"/>
+                <a:latin typeface="Arial"/>
+                <a:ea typeface="微軟正黑體"/>
               </a:rPr>
               <a:t>主攻</a:t>
             </a:r>
@@ -47275,7 +47695,7 @@
       </p:sp>
       <p:sp>
         <p:nvSpPr>
-          <p:cNvPr id="6" name="Rectangle 5"/>
+          <p:cNvPr id="10" name="Rectangle 9"/>
           <p:cNvSpPr/>
           <p:nvPr/>
         </p:nvSpPr>
@@ -47323,7 +47743,8 @@
                 <a:solidFill>
                   <a:srgbClr val="FFFFFF"/>
                 </a:solidFill>
-                <a:latin typeface="Microsoft JhengHei"/>
+                <a:latin typeface="Arial"/>
+                <a:ea typeface="微軟正黑體"/>
               </a:rPr>
               <a:t>可能侷限（推論）</a:t>
             </a:r>
@@ -47332,7 +47753,7 @@
       </p:sp>
       <p:sp>
         <p:nvSpPr>
-          <p:cNvPr id="7" name="Rectangle 6"/>
+          <p:cNvPr id="11" name="Rectangle 10"/>
           <p:cNvSpPr/>
           <p:nvPr/>
         </p:nvSpPr>
@@ -47380,7 +47801,8 @@
                 <a:solidFill>
                   <a:srgbClr val="FFFFFF"/>
                 </a:solidFill>
-                <a:latin typeface="Microsoft JhengHei"/>
+                <a:latin typeface="Arial"/>
+                <a:ea typeface="微軟正黑體"/>
               </a:rPr>
               <a:t>官網／原文</a:t>
             </a:r>
@@ -47389,7 +47811,7 @@
       </p:sp>
       <p:sp>
         <p:nvSpPr>
-          <p:cNvPr id="8" name="Rectangle 7"/>
+          <p:cNvPr id="12" name="Rectangle 11"/>
           <p:cNvSpPr/>
           <p:nvPr/>
         </p:nvSpPr>
@@ -47402,7 +47824,7 @@
             <a:avLst/>
           </a:prstGeom>
           <a:solidFill>
-            <a:srgbClr val="F3F3F3"/>
+            <a:srgbClr val="EBEBEB"/>
           </a:solidFill>
           <a:ln>
             <a:noFill/>
@@ -47435,9 +47857,10 @@
             <a:r>
               <a:rPr sz="1150" b="1">
                 <a:solidFill>
-                  <a:srgbClr val="1E1E1E"/>
+                  <a:srgbClr val="000000"/>
                 </a:solidFill>
-                <a:latin typeface="Microsoft JhengHei"/>
+                <a:latin typeface="Arial"/>
+                <a:ea typeface="微軟正黑體"/>
               </a:rPr>
               <a:t>McKinsey</a:t>
             </a:r>
@@ -47451,9 +47874,10 @@
             <a:r>
               <a:rPr sz="900" b="0">
                 <a:solidFill>
-                  <a:srgbClr val="6B6B6B"/>
+                  <a:srgbClr val="595959"/>
                 </a:solidFill>
-                <a:latin typeface="Microsoft JhengHei"/>
+                <a:latin typeface="Arial"/>
+                <a:ea typeface="微軟正黑體"/>
               </a:rPr>
               <a:t>MBB</a:t>
             </a:r>
@@ -47462,7 +47886,7 @@
       </p:sp>
       <p:sp>
         <p:nvSpPr>
-          <p:cNvPr id="9" name="Rectangle 8"/>
+          <p:cNvPr id="13" name="Rectangle 12"/>
           <p:cNvSpPr/>
           <p:nvPr/>
         </p:nvSpPr>
@@ -47475,7 +47899,7 @@
             <a:avLst/>
           </a:prstGeom>
           <a:solidFill>
-            <a:srgbClr val="F3F3F3"/>
+            <a:srgbClr val="EBEBEB"/>
           </a:solidFill>
           <a:ln>
             <a:noFill/>
@@ -47508,9 +47932,10 @@
             <a:r>
               <a:rPr sz="1000" b="0">
                 <a:solidFill>
-                  <a:srgbClr val="1E1E1E"/>
+                  <a:srgbClr val="000000"/>
                 </a:solidFill>
-                <a:latin typeface="Microsoft JhengHei"/>
+                <a:latin typeface="Arial"/>
+                <a:ea typeface="微軟正黑體"/>
               </a:rPr>
               <a:t>核保作業系統 UWOS：45 項能力、6 大領域；代理型 AI 核心現代化（原子化代理能力庫）</a:t>
             </a:r>
@@ -47519,7 +47944,7 @@
       </p:sp>
       <p:sp>
         <p:nvSpPr>
-          <p:cNvPr id="10" name="Rectangle 9"/>
+          <p:cNvPr id="14" name="Rectangle 13"/>
           <p:cNvSpPr/>
           <p:nvPr/>
         </p:nvSpPr>
@@ -47532,7 +47957,7 @@
             <a:avLst/>
           </a:prstGeom>
           <a:solidFill>
-            <a:srgbClr val="F3F3F3"/>
+            <a:srgbClr val="EBEBEB"/>
           </a:solidFill>
           <a:ln>
             <a:noFill/>
@@ -47565,9 +47990,10 @@
             <a:r>
               <a:rPr sz="1000" b="0">
                 <a:solidFill>
-                  <a:srgbClr val="1E1E1E"/>
+                  <a:srgbClr val="000000"/>
                 </a:solidFill>
-                <a:latin typeface="Microsoft JhengHei"/>
+                <a:latin typeface="Arial"/>
+                <a:ea typeface="微軟正黑體"/>
               </a:rPr>
               <a:t>商業與專業險核保、核心重寫</a:t>
             </a:r>
@@ -47576,7 +48002,7 @@
       </p:sp>
       <p:sp>
         <p:nvSpPr>
-          <p:cNvPr id="11" name="Rectangle 10"/>
+          <p:cNvPr id="15" name="Rectangle 14"/>
           <p:cNvSpPr/>
           <p:nvPr/>
         </p:nvSpPr>
@@ -47589,7 +48015,7 @@
             <a:avLst/>
           </a:prstGeom>
           <a:solidFill>
-            <a:srgbClr val="F3F3F3"/>
+            <a:srgbClr val="EBEBEB"/>
           </a:solidFill>
           <a:ln>
             <a:noFill/>
@@ -47622,9 +48048,10 @@
             <a:r>
               <a:rPr sz="1000" b="0">
                 <a:solidFill>
-                  <a:srgbClr val="1E1E1E"/>
+                  <a:srgbClr val="000000"/>
                 </a:solidFill>
-                <a:latin typeface="Microsoft JhengHei"/>
+                <a:latin typeface="Arial"/>
+                <a:ea typeface="微軟正黑體"/>
               </a:rPr>
               <a:t>在台缺在地法規確信與長期駐點人力</a:t>
             </a:r>
@@ -47633,7 +48060,7 @@
       </p:sp>
       <p:sp>
         <p:nvSpPr>
-          <p:cNvPr id="12" name="Rectangle 11"/>
+          <p:cNvPr id="16" name="Rectangle 15"/>
           <p:cNvSpPr/>
           <p:nvPr/>
         </p:nvSpPr>
@@ -47646,7 +48073,7 @@
             <a:avLst/>
           </a:prstGeom>
           <a:solidFill>
-            <a:srgbClr val="F3F3F3"/>
+            <a:srgbClr val="EBEBEB"/>
           </a:solidFill>
           <a:ln>
             <a:noFill/>
@@ -47679,9 +48106,10 @@
             <a:r>
               <a:rPr sz="950" b="0" u="sng">
                 <a:solidFill>
-                  <a:srgbClr val="1F5FBF"/>
+                  <a:srgbClr val="000000"/>
                 </a:solidFill>
-                <a:latin typeface="Microsoft JhengHei"/>
+                <a:latin typeface="Arial"/>
+                <a:ea typeface="微軟正黑體"/>
                 <a:hlinkClick r:id="rId2"/>
               </a:rPr>
               <a:t>UWOS</a:t>
@@ -47696,9 +48124,10 @@
             <a:r>
               <a:rPr sz="950" b="0" u="sng">
                 <a:solidFill>
-                  <a:srgbClr val="1F5FBF"/>
+                  <a:srgbClr val="000000"/>
                 </a:solidFill>
-                <a:latin typeface="Microsoft JhengHei"/>
+                <a:latin typeface="Arial"/>
+                <a:ea typeface="微軟正黑體"/>
                 <a:hlinkClick r:id="rId3"/>
               </a:rPr>
               <a:t>核心現代化</a:t>
@@ -47708,7 +48137,7 @@
       </p:sp>
       <p:sp>
         <p:nvSpPr>
-          <p:cNvPr id="13" name="Rectangle 12"/>
+          <p:cNvPr id="17" name="Rectangle 16"/>
           <p:cNvSpPr/>
           <p:nvPr/>
         </p:nvSpPr>
@@ -47754,9 +48183,10 @@
             <a:r>
               <a:rPr sz="1150" b="1">
                 <a:solidFill>
-                  <a:srgbClr val="1E1E1E"/>
+                  <a:srgbClr val="000000"/>
                 </a:solidFill>
-                <a:latin typeface="Microsoft JhengHei"/>
+                <a:latin typeface="Arial"/>
+                <a:ea typeface="微軟正黑體"/>
               </a:rPr>
               <a:t>BCG</a:t>
             </a:r>
@@ -47770,9 +48200,10 @@
             <a:r>
               <a:rPr sz="900" b="0">
                 <a:solidFill>
-                  <a:srgbClr val="6B6B6B"/>
+                  <a:srgbClr val="595959"/>
                 </a:solidFill>
-                <a:latin typeface="Microsoft JhengHei"/>
+                <a:latin typeface="Arial"/>
+                <a:ea typeface="微軟正黑體"/>
               </a:rPr>
               <a:t>MBB</a:t>
             </a:r>
@@ -47781,7 +48212,7 @@
       </p:sp>
       <p:sp>
         <p:nvSpPr>
-          <p:cNvPr id="14" name="Rectangle 13"/>
+          <p:cNvPr id="18" name="Rectangle 17"/>
           <p:cNvSpPr/>
           <p:nvPr/>
         </p:nvSpPr>
@@ -47827,9 +48258,10 @@
             <a:r>
               <a:rPr sz="1000" b="0">
                 <a:solidFill>
-                  <a:srgbClr val="1E1E1E"/>
+                  <a:srgbClr val="000000"/>
                 </a:solidFill>
-                <a:latin typeface="Microsoft JhengHei"/>
+                <a:latin typeface="Arial"/>
+                <a:ea typeface="微軟正黑體"/>
               </a:rPr>
               <a:t>「AI-First 產險公司」三階段藍圖；亞太保險代理型 AI 白皮書（資源 70% 放在人與變革）</a:t>
             </a:r>
@@ -47838,7 +48270,7 @@
       </p:sp>
       <p:sp>
         <p:nvSpPr>
-          <p:cNvPr id="15" name="Rectangle 14"/>
+          <p:cNvPr id="19" name="Rectangle 18"/>
           <p:cNvSpPr/>
           <p:nvPr/>
         </p:nvSpPr>
@@ -47884,9 +48316,10 @@
             <a:r>
               <a:rPr sz="1000" b="0">
                 <a:solidFill>
-                  <a:srgbClr val="1E1E1E"/>
+                  <a:srgbClr val="000000"/>
                 </a:solidFill>
-                <a:latin typeface="Microsoft JhengHei"/>
+                <a:latin typeface="Arial"/>
+                <a:ea typeface="微軟正黑體"/>
               </a:rPr>
               <a:t>策略藍圖、組織變革</a:t>
             </a:r>
@@ -47895,7 +48328,7 @@
       </p:sp>
       <p:sp>
         <p:nvSpPr>
-          <p:cNvPr id="16" name="Rectangle 15"/>
+          <p:cNvPr id="20" name="Rectangle 19"/>
           <p:cNvSpPr/>
           <p:nvPr/>
         </p:nvSpPr>
@@ -47941,9 +48374,10 @@
             <a:r>
               <a:rPr sz="1000" b="0">
                 <a:solidFill>
-                  <a:srgbClr val="1E1E1E"/>
+                  <a:srgbClr val="000000"/>
                 </a:solidFill>
-                <a:latin typeface="Microsoft JhengHei"/>
+                <a:latin typeface="Arial"/>
+                <a:ea typeface="微軟正黑體"/>
               </a:rPr>
               <a:t>偏策略與變革設計，系統落地多需另找夥伴</a:t>
             </a:r>
@@ -47952,7 +48386,7 @@
       </p:sp>
       <p:sp>
         <p:nvSpPr>
-          <p:cNvPr id="17" name="Rectangle 16"/>
+          <p:cNvPr id="21" name="Rectangle 20"/>
           <p:cNvSpPr/>
           <p:nvPr/>
         </p:nvSpPr>
@@ -47998,9 +48432,10 @@
             <a:r>
               <a:rPr sz="950" b="0" u="sng">
                 <a:solidFill>
-                  <a:srgbClr val="1F5FBF"/>
+                  <a:srgbClr val="000000"/>
                 </a:solidFill>
-                <a:latin typeface="Microsoft JhengHei"/>
+                <a:latin typeface="Arial"/>
+                <a:ea typeface="微軟正黑體"/>
                 <a:hlinkClick r:id="rId4"/>
               </a:rPr>
               <a:t>亞太白皮書</a:t>
@@ -48015,9 +48450,10 @@
             <a:r>
               <a:rPr sz="950" b="0" u="sng">
                 <a:solidFill>
-                  <a:srgbClr val="1F5FBF"/>
+                  <a:srgbClr val="000000"/>
                 </a:solidFill>
-                <a:latin typeface="Microsoft JhengHei"/>
+                <a:latin typeface="Arial"/>
+                <a:ea typeface="微軟正黑體"/>
                 <a:hlinkClick r:id="rId5"/>
               </a:rPr>
               <a:t>產險藍圖</a:t>
@@ -48027,7 +48463,7 @@
       </p:sp>
       <p:sp>
         <p:nvSpPr>
-          <p:cNvPr id="18" name="Rectangle 17"/>
+          <p:cNvPr id="22" name="Rectangle 21"/>
           <p:cNvSpPr/>
           <p:nvPr/>
         </p:nvSpPr>
@@ -48040,7 +48476,7 @@
             <a:avLst/>
           </a:prstGeom>
           <a:solidFill>
-            <a:srgbClr val="F3F3F3"/>
+            <a:srgbClr val="EBEBEB"/>
           </a:solidFill>
           <a:ln>
             <a:noFill/>
@@ -48073,9 +48509,10 @@
             <a:r>
               <a:rPr sz="1150" b="1">
                 <a:solidFill>
-                  <a:srgbClr val="1E1E1E"/>
+                  <a:srgbClr val="000000"/>
                 </a:solidFill>
-                <a:latin typeface="Microsoft JhengHei"/>
+                <a:latin typeface="Arial"/>
+                <a:ea typeface="微軟正黑體"/>
               </a:rPr>
               <a:t>Bain</a:t>
             </a:r>
@@ -48089,9 +48526,10 @@
             <a:r>
               <a:rPr sz="900" b="0">
                 <a:solidFill>
-                  <a:srgbClr val="6B6B6B"/>
+                  <a:srgbClr val="595959"/>
                 </a:solidFill>
-                <a:latin typeface="Microsoft JhengHei"/>
+                <a:latin typeface="Arial"/>
+                <a:ea typeface="微軟正黑體"/>
               </a:rPr>
               <a:t>MBB</a:t>
             </a:r>
@@ -48100,7 +48538,7 @@
       </p:sp>
       <p:sp>
         <p:nvSpPr>
-          <p:cNvPr id="19" name="Rectangle 18"/>
+          <p:cNvPr id="23" name="Rectangle 22"/>
           <p:cNvSpPr/>
           <p:nvPr/>
         </p:nvSpPr>
@@ -48113,7 +48551,7 @@
             <a:avLst/>
           </a:prstGeom>
           <a:solidFill>
-            <a:srgbClr val="F3F3F3"/>
+            <a:srgbClr val="EBEBEB"/>
           </a:solidFill>
           <a:ln>
             <a:noFill/>
@@ -48146,9 +48584,10 @@
             <a:r>
               <a:rPr sz="1000" b="0">
                 <a:solidFill>
-                  <a:srgbClr val="1E1E1E"/>
+                  <a:srgbClr val="000000"/>
                 </a:solidFill>
-                <a:latin typeface="Microsoft JhengHei"/>
+                <a:latin typeface="Arial"/>
+                <a:ea typeface="微軟正黑體"/>
               </a:rPr>
               <a:t>亞太保險公司以 AI 重塑理賠與客服案例；保險通路 GenAI 年效益逾 500 億美元（2024）</a:t>
             </a:r>
@@ -48157,7 +48596,7 @@
       </p:sp>
       <p:sp>
         <p:nvSpPr>
-          <p:cNvPr id="20" name="Rectangle 19"/>
+          <p:cNvPr id="24" name="Rectangle 23"/>
           <p:cNvSpPr/>
           <p:nvPr/>
         </p:nvSpPr>
@@ -48170,7 +48609,7 @@
             <a:avLst/>
           </a:prstGeom>
           <a:solidFill>
-            <a:srgbClr val="F3F3F3"/>
+            <a:srgbClr val="EBEBEB"/>
           </a:solidFill>
           <a:ln>
             <a:noFill/>
@@ -48203,9 +48642,10 @@
             <a:r>
               <a:rPr sz="1000" b="0">
                 <a:solidFill>
-                  <a:srgbClr val="1E1E1E"/>
+                  <a:srgbClr val="000000"/>
                 </a:solidFill>
-                <a:latin typeface="Microsoft JhengHei"/>
+                <a:latin typeface="Arial"/>
+                <a:ea typeface="微軟正黑體"/>
               </a:rPr>
               <a:t>理賠、客服、通路</a:t>
             </a:r>
@@ -48214,7 +48654,7 @@
       </p:sp>
       <p:sp>
         <p:nvSpPr>
-          <p:cNvPr id="21" name="Rectangle 20"/>
+          <p:cNvPr id="25" name="Rectangle 24"/>
           <p:cNvSpPr/>
           <p:nvPr/>
         </p:nvSpPr>
@@ -48227,7 +48667,7 @@
             <a:avLst/>
           </a:prstGeom>
           <a:solidFill>
-            <a:srgbClr val="F3F3F3"/>
+            <a:srgbClr val="EBEBEB"/>
           </a:solidFill>
           <a:ln>
             <a:noFill/>
@@ -48260,9 +48700,10 @@
             <a:r>
               <a:rPr sz="1000" b="0">
                 <a:solidFill>
-                  <a:srgbClr val="1E1E1E"/>
+                  <a:srgbClr val="000000"/>
                 </a:solidFill>
-                <a:latin typeface="Microsoft JhengHei"/>
+                <a:latin typeface="Arial"/>
+                <a:ea typeface="微軟正黑體"/>
               </a:rPr>
               <a:t>在台交付規模較小，大型核心導入人力有限</a:t>
             </a:r>
@@ -48271,7 +48712,7 @@
       </p:sp>
       <p:sp>
         <p:nvSpPr>
-          <p:cNvPr id="22" name="Rectangle 21"/>
+          <p:cNvPr id="26" name="Rectangle 25"/>
           <p:cNvSpPr/>
           <p:nvPr/>
         </p:nvSpPr>
@@ -48284,7 +48725,7 @@
             <a:avLst/>
           </a:prstGeom>
           <a:solidFill>
-            <a:srgbClr val="F3F3F3"/>
+            <a:srgbClr val="EBEBEB"/>
           </a:solidFill>
           <a:ln>
             <a:noFill/>
@@ -48317,9 +48758,10 @@
             <a:r>
               <a:rPr sz="950" b="0" u="sng">
                 <a:solidFill>
-                  <a:srgbClr val="1F5FBF"/>
+                  <a:srgbClr val="000000"/>
                 </a:solidFill>
-                <a:latin typeface="Microsoft JhengHei"/>
+                <a:latin typeface="Arial"/>
+                <a:ea typeface="微軟正黑體"/>
                 <a:hlinkClick r:id="rId6"/>
               </a:rPr>
               <a:t>案例</a:t>
@@ -48334,9 +48776,10 @@
             <a:r>
               <a:rPr sz="950" b="0" u="sng">
                 <a:solidFill>
-                  <a:srgbClr val="1F5FBF"/>
+                  <a:srgbClr val="000000"/>
                 </a:solidFill>
-                <a:latin typeface="Microsoft JhengHei"/>
+                <a:latin typeface="Arial"/>
+                <a:ea typeface="微軟正黑體"/>
                 <a:hlinkClick r:id="rId7"/>
               </a:rPr>
               <a:t>通路研究</a:t>
@@ -48346,7 +48789,7 @@
       </p:sp>
       <p:cxnSp>
         <p:nvCxnSpPr>
-          <p:cNvPr id="23" name="Connector 22"/>
+          <p:cNvPr id="27" name="Connector 26"/>
           <p:cNvCxnSpPr/>
           <p:nvPr/>
         </p:nvCxnSpPr>
@@ -48381,7 +48824,7 @@
       </p:cxnSp>
       <p:sp>
         <p:nvSpPr>
-          <p:cNvPr id="24" name="Rectangle 23"/>
+          <p:cNvPr id="28" name="Rectangle 27"/>
           <p:cNvSpPr/>
           <p:nvPr/>
         </p:nvSpPr>
@@ -48427,9 +48870,10 @@
             <a:r>
               <a:rPr sz="1150" b="1">
                 <a:solidFill>
-                  <a:srgbClr val="1E1E1E"/>
+                  <a:srgbClr val="000000"/>
                 </a:solidFill>
-                <a:latin typeface="Microsoft JhengHei"/>
+                <a:latin typeface="Arial"/>
+                <a:ea typeface="微軟正黑體"/>
               </a:rPr>
               <a:t>Deloitte</a:t>
             </a:r>
@@ -48443,9 +48887,10 @@
             <a:r>
               <a:rPr sz="900" b="0">
                 <a:solidFill>
-                  <a:srgbClr val="6B6B6B"/>
+                  <a:srgbClr val="595959"/>
                 </a:solidFill>
-                <a:latin typeface="Microsoft JhengHei"/>
+                <a:latin typeface="Arial"/>
+                <a:ea typeface="微軟正黑體"/>
               </a:rPr>
               <a:t>四大</a:t>
             </a:r>
@@ -48454,7 +48899,7 @@
       </p:sp>
       <p:sp>
         <p:nvSpPr>
-          <p:cNvPr id="25" name="Rectangle 24"/>
+          <p:cNvPr id="29" name="Rectangle 28"/>
           <p:cNvSpPr/>
           <p:nvPr/>
         </p:nvSpPr>
@@ -48500,9 +48945,10 @@
             <a:r>
               <a:rPr sz="1000" b="0">
                 <a:solidFill>
-                  <a:srgbClr val="1E1E1E"/>
+                  <a:srgbClr val="000000"/>
                 </a:solidFill>
-                <a:latin typeface="Microsoft JhengHei"/>
+                <a:latin typeface="微軟正黑體"/>
+                <a:ea typeface="微軟正黑體"/>
               </a:rPr>
               <a:t>Agentic AI Blueprint for Insurance：產險／壽險分類，評估→設計→試點→規模化，預建＋客製代理</a:t>
             </a:r>
@@ -48511,7 +48957,7 @@
       </p:sp>
       <p:sp>
         <p:nvSpPr>
-          <p:cNvPr id="26" name="Rectangle 25"/>
+          <p:cNvPr id="30" name="Rectangle 29"/>
           <p:cNvSpPr/>
           <p:nvPr/>
         </p:nvSpPr>
@@ -48557,9 +49003,10 @@
             <a:r>
               <a:rPr sz="1000" b="0">
                 <a:solidFill>
-                  <a:srgbClr val="1E1E1E"/>
+                  <a:srgbClr val="000000"/>
                 </a:solidFill>
-                <a:latin typeface="Microsoft JhengHei"/>
+                <a:latin typeface="Arial"/>
+                <a:ea typeface="微軟正黑體"/>
               </a:rPr>
               <a:t>全價值鏈代理型 AI 轉型</a:t>
             </a:r>
@@ -48568,7 +49015,7 @@
       </p:sp>
       <p:sp>
         <p:nvSpPr>
-          <p:cNvPr id="27" name="Rectangle 26"/>
+          <p:cNvPr id="31" name="Rectangle 30"/>
           <p:cNvSpPr/>
           <p:nvPr/>
         </p:nvSpPr>
@@ -48614,9 +49061,10 @@
             <a:r>
               <a:rPr sz="1000" b="0">
                 <a:solidFill>
-                  <a:srgbClr val="1E1E1E"/>
+                  <a:srgbClr val="000000"/>
                 </a:solidFill>
-                <a:latin typeface="Microsoft JhengHei"/>
+                <a:latin typeface="Arial"/>
+                <a:ea typeface="微軟正黑體"/>
               </a:rPr>
               <a:t>預建代理套到台灣客製化舊核心與繁中條款需調適</a:t>
             </a:r>
@@ -48625,7 +49073,7 @@
       </p:sp>
       <p:sp>
         <p:nvSpPr>
-          <p:cNvPr id="28" name="Rectangle 27"/>
+          <p:cNvPr id="32" name="Rectangle 31"/>
           <p:cNvSpPr/>
           <p:nvPr/>
         </p:nvSpPr>
@@ -48671,9 +49119,10 @@
             <a:r>
               <a:rPr sz="950" b="0" u="sng">
                 <a:solidFill>
-                  <a:srgbClr val="1F5FBF"/>
+                  <a:srgbClr val="000000"/>
                 </a:solidFill>
-                <a:latin typeface="Microsoft JhengHei"/>
+                <a:latin typeface="Arial"/>
+                <a:ea typeface="微軟正黑體"/>
                 <a:hlinkClick r:id="rId8"/>
               </a:rPr>
               <a:t>Blueprint</a:t>
@@ -48688,9 +49137,10 @@
             <a:r>
               <a:rPr sz="950" b="0" u="sng">
                 <a:solidFill>
-                  <a:srgbClr val="1F5FBF"/>
+                  <a:srgbClr val="000000"/>
                 </a:solidFill>
-                <a:latin typeface="Microsoft JhengHei"/>
+                <a:latin typeface="Arial"/>
+                <a:ea typeface="微軟正黑體"/>
                 <a:hlinkClick r:id="rId9"/>
               </a:rPr>
               <a:t>亞太壽險</a:t>
@@ -48700,7 +49150,7 @@
       </p:sp>
       <p:sp>
         <p:nvSpPr>
-          <p:cNvPr id="29" name="Rectangle 28"/>
+          <p:cNvPr id="33" name="Rectangle 32"/>
           <p:cNvSpPr/>
           <p:nvPr/>
         </p:nvSpPr>
@@ -48713,7 +49163,7 @@
             <a:avLst/>
           </a:prstGeom>
           <a:solidFill>
-            <a:srgbClr val="F3F3F3"/>
+            <a:srgbClr val="EBEBEB"/>
           </a:solidFill>
           <a:ln>
             <a:noFill/>
@@ -48746,9 +49196,10 @@
             <a:r>
               <a:rPr sz="1150" b="1">
                 <a:solidFill>
-                  <a:srgbClr val="1E1E1E"/>
+                  <a:srgbClr val="000000"/>
                 </a:solidFill>
-                <a:latin typeface="Microsoft JhengHei"/>
+                <a:latin typeface="Arial"/>
+                <a:ea typeface="微軟正黑體"/>
               </a:rPr>
               <a:t>EY</a:t>
             </a:r>
@@ -48762,9 +49213,10 @@
             <a:r>
               <a:rPr sz="900" b="0">
                 <a:solidFill>
-                  <a:srgbClr val="6B6B6B"/>
+                  <a:srgbClr val="595959"/>
                 </a:solidFill>
-                <a:latin typeface="Microsoft JhengHei"/>
+                <a:latin typeface="Arial"/>
+                <a:ea typeface="微軟正黑體"/>
               </a:rPr>
               <a:t>四大</a:t>
             </a:r>
@@ -48773,7 +49225,7 @@
       </p:sp>
       <p:sp>
         <p:nvSpPr>
-          <p:cNvPr id="30" name="Rectangle 29"/>
+          <p:cNvPr id="34" name="Rectangle 33"/>
           <p:cNvSpPr/>
           <p:nvPr/>
         </p:nvSpPr>
@@ -48786,7 +49238,7 @@
             <a:avLst/>
           </a:prstGeom>
           <a:solidFill>
-            <a:srgbClr val="F3F3F3"/>
+            <a:srgbClr val="EBEBEB"/>
           </a:solidFill>
           <a:ln>
             <a:noFill/>
@@ -48819,9 +49271,10 @@
             <a:r>
               <a:rPr sz="1000" b="0">
                 <a:solidFill>
-                  <a:srgbClr val="1E1E1E"/>
+                  <a:srgbClr val="000000"/>
                 </a:solidFill>
-                <a:latin typeface="Microsoft JhengHei"/>
+                <a:latin typeface="Arial"/>
+                <a:ea typeface="微軟正黑體"/>
               </a:rPr>
               <a:t>EY Nexus for Insurance：雲原生平台，快速推出新商品與品牌，串接 650+ 保險科技</a:t>
             </a:r>
@@ -48830,7 +49283,7 @@
       </p:sp>
       <p:sp>
         <p:nvSpPr>
-          <p:cNvPr id="31" name="Rectangle 30"/>
+          <p:cNvPr id="35" name="Rectangle 34"/>
           <p:cNvSpPr/>
           <p:nvPr/>
         </p:nvSpPr>
@@ -48843,7 +49296,7 @@
             <a:avLst/>
           </a:prstGeom>
           <a:solidFill>
-            <a:srgbClr val="F3F3F3"/>
+            <a:srgbClr val="EBEBEB"/>
           </a:solidFill>
           <a:ln>
             <a:noFill/>
@@ -48876,9 +49329,10 @@
             <a:r>
               <a:rPr sz="1000" b="0">
                 <a:solidFill>
-                  <a:srgbClr val="1E1E1E"/>
+                  <a:srgbClr val="000000"/>
                 </a:solidFill>
-                <a:latin typeface="Microsoft JhengHei"/>
+                <a:latin typeface="Arial"/>
+                <a:ea typeface="微軟正黑體"/>
               </a:rPr>
               <a:t>新商品、嵌入式通路、核心延伸</a:t>
             </a:r>
@@ -48887,7 +49341,7 @@
       </p:sp>
       <p:sp>
         <p:nvSpPr>
-          <p:cNvPr id="32" name="Rectangle 31"/>
+          <p:cNvPr id="36" name="Rectangle 35"/>
           <p:cNvSpPr/>
           <p:nvPr/>
         </p:nvSpPr>
@@ -48900,7 +49354,7 @@
             <a:avLst/>
           </a:prstGeom>
           <a:solidFill>
-            <a:srgbClr val="F3F3F3"/>
+            <a:srgbClr val="EBEBEB"/>
           </a:solidFill>
           <a:ln>
             <a:noFill/>
@@ -48933,9 +49387,10 @@
             <a:r>
               <a:rPr sz="1000" b="0">
                 <a:solidFill>
-                  <a:srgbClr val="1E1E1E"/>
+                  <a:srgbClr val="000000"/>
                 </a:solidFill>
-                <a:latin typeface="Microsoft JhengHei"/>
+                <a:latin typeface="Arial"/>
+                <a:ea typeface="微軟正黑體"/>
               </a:rPr>
               <a:t>偏新業務上線，舊核心遷移與 IFRS 17 整合難只靠平台</a:t>
             </a:r>
@@ -48944,7 +49399,7 @@
       </p:sp>
       <p:sp>
         <p:nvSpPr>
-          <p:cNvPr id="33" name="Rectangle 32"/>
+          <p:cNvPr id="37" name="Rectangle 36"/>
           <p:cNvSpPr/>
           <p:nvPr/>
         </p:nvSpPr>
@@ -48957,7 +49412,7 @@
             <a:avLst/>
           </a:prstGeom>
           <a:solidFill>
-            <a:srgbClr val="F3F3F3"/>
+            <a:srgbClr val="EBEBEB"/>
           </a:solidFill>
           <a:ln>
             <a:noFill/>
@@ -48990,9 +49445,10 @@
             <a:r>
               <a:rPr sz="950" b="0" u="sng">
                 <a:solidFill>
-                  <a:srgbClr val="1F5FBF"/>
+                  <a:srgbClr val="000000"/>
                 </a:solidFill>
-                <a:latin typeface="Microsoft JhengHei"/>
+                <a:latin typeface="Arial"/>
+                <a:ea typeface="微軟正黑體"/>
                 <a:hlinkClick r:id="rId10"/>
               </a:rPr>
               <a:t>Nexus</a:t>
@@ -49002,7 +49458,7 @@
       </p:sp>
       <p:sp>
         <p:nvSpPr>
-          <p:cNvPr id="34" name="Rectangle 33"/>
+          <p:cNvPr id="38" name="Rectangle 37"/>
           <p:cNvSpPr/>
           <p:nvPr/>
         </p:nvSpPr>
@@ -49048,9 +49504,10 @@
             <a:r>
               <a:rPr sz="1150" b="1">
                 <a:solidFill>
-                  <a:srgbClr val="1E1E1E"/>
+                  <a:srgbClr val="000000"/>
                 </a:solidFill>
-                <a:latin typeface="Microsoft JhengHei"/>
+                <a:latin typeface="Arial"/>
+                <a:ea typeface="微軟正黑體"/>
               </a:rPr>
               <a:t>KPMG</a:t>
             </a:r>
@@ -49064,9 +49521,10 @@
             <a:r>
               <a:rPr sz="900" b="0">
                 <a:solidFill>
-                  <a:srgbClr val="6B6B6B"/>
+                  <a:srgbClr val="595959"/>
                 </a:solidFill>
-                <a:latin typeface="Microsoft JhengHei"/>
+                <a:latin typeface="Arial"/>
+                <a:ea typeface="微軟正黑體"/>
               </a:rPr>
               <a:t>四大</a:t>
             </a:r>
@@ -49075,7 +49533,7 @@
       </p:sp>
       <p:sp>
         <p:nvSpPr>
-          <p:cNvPr id="35" name="Rectangle 34"/>
+          <p:cNvPr id="39" name="Rectangle 38"/>
           <p:cNvSpPr/>
           <p:nvPr/>
         </p:nvSpPr>
@@ -49121,9 +49579,10 @@
             <a:r>
               <a:rPr sz="1000" b="0">
                 <a:solidFill>
-                  <a:srgbClr val="1E1E1E"/>
+                  <a:srgbClr val="000000"/>
                 </a:solidFill>
-                <a:latin typeface="Microsoft JhengHei"/>
+                <a:latin typeface="Arial"/>
+                <a:ea typeface="微軟正黑體"/>
               </a:rPr>
               <a:t>Intelligent Insurance：AI 價值三階段導入；Trusted AI 十大支柱治理框架</a:t>
             </a:r>
@@ -49132,7 +49591,7 @@
       </p:sp>
       <p:sp>
         <p:nvSpPr>
-          <p:cNvPr id="36" name="Rectangle 35"/>
+          <p:cNvPr id="40" name="Rectangle 39"/>
           <p:cNvSpPr/>
           <p:nvPr/>
         </p:nvSpPr>
@@ -49178,9 +49637,10 @@
             <a:r>
               <a:rPr sz="1000" b="0">
                 <a:solidFill>
-                  <a:srgbClr val="1E1E1E"/>
+                  <a:srgbClr val="000000"/>
                 </a:solidFill>
-                <a:latin typeface="Microsoft JhengHei"/>
+                <a:latin typeface="Arial"/>
+                <a:ea typeface="微軟正黑體"/>
               </a:rPr>
               <a:t>AI 導入路徑與治理</a:t>
             </a:r>
@@ -49189,7 +49649,7 @@
       </p:sp>
       <p:sp>
         <p:nvSpPr>
-          <p:cNvPr id="37" name="Rectangle 36"/>
+          <p:cNvPr id="41" name="Rectangle 40"/>
           <p:cNvSpPr/>
           <p:nvPr/>
         </p:nvSpPr>
@@ -49235,9 +49695,10 @@
             <a:r>
               <a:rPr sz="1000" b="0">
                 <a:solidFill>
-                  <a:srgbClr val="1E1E1E"/>
+                  <a:srgbClr val="000000"/>
                 </a:solidFill>
-                <a:latin typeface="Microsoft JhengHei"/>
+                <a:latin typeface="Arial"/>
+                <a:ea typeface="微軟正黑體"/>
               </a:rPr>
               <a:t>公開資料未見保險專屬代理型產品</a:t>
             </a:r>
@@ -49246,7 +49707,7 @@
       </p:sp>
       <p:sp>
         <p:nvSpPr>
-          <p:cNvPr id="38" name="Rectangle 37"/>
+          <p:cNvPr id="42" name="Rectangle 41"/>
           <p:cNvSpPr/>
           <p:nvPr/>
         </p:nvSpPr>
@@ -49292,9 +49753,10 @@
             <a:r>
               <a:rPr sz="950" b="0" u="sng">
                 <a:solidFill>
-                  <a:srgbClr val="1F5FBF"/>
+                  <a:srgbClr val="000000"/>
                 </a:solidFill>
-                <a:latin typeface="Microsoft JhengHei"/>
+                <a:latin typeface="Arial"/>
+                <a:ea typeface="微軟正黑體"/>
                 <a:hlinkClick r:id="rId11"/>
               </a:rPr>
               <a:t>Intelligent Insurance</a:t>
@@ -49309,9 +49771,10 @@
             <a:r>
               <a:rPr sz="950" b="0" u="sng">
                 <a:solidFill>
-                  <a:srgbClr val="1F5FBF"/>
+                  <a:srgbClr val="000000"/>
                 </a:solidFill>
-                <a:latin typeface="Microsoft JhengHei"/>
+                <a:latin typeface="Arial"/>
+                <a:ea typeface="微軟正黑體"/>
                 <a:hlinkClick r:id="rId12"/>
               </a:rPr>
               <a:t>Trusted AI</a:t>
@@ -49321,7 +49784,7 @@
       </p:sp>
       <p:sp>
         <p:nvSpPr>
-          <p:cNvPr id="39" name="Rectangle 38"/>
+          <p:cNvPr id="43" name="Rectangle 42"/>
           <p:cNvSpPr/>
           <p:nvPr/>
         </p:nvSpPr>
@@ -49369,7 +49832,8 @@
                 <a:solidFill>
                   <a:srgbClr val="FD5108"/>
                 </a:solidFill>
-                <a:latin typeface="Microsoft JhengHei"/>
+                <a:latin typeface="Arial"/>
+                <a:ea typeface="微軟正黑體"/>
               </a:rPr>
               <a:t>PwC（所內）</a:t>
             </a:r>
@@ -49383,9 +49847,10 @@
             <a:r>
               <a:rPr sz="900" b="0">
                 <a:solidFill>
-                  <a:srgbClr val="6B6B6B"/>
+                  <a:srgbClr val="595959"/>
                 </a:solidFill>
-                <a:latin typeface="Microsoft JhengHei"/>
+                <a:latin typeface="Arial"/>
+                <a:ea typeface="微軟正黑體"/>
               </a:rPr>
               <a:t>四大</a:t>
             </a:r>
@@ -49394,7 +49859,7 @@
       </p:sp>
       <p:sp>
         <p:nvSpPr>
-          <p:cNvPr id="40" name="Rectangle 39"/>
+          <p:cNvPr id="44" name="Rectangle 43"/>
           <p:cNvSpPr/>
           <p:nvPr/>
         </p:nvSpPr>
@@ -49440,9 +49905,10 @@
             <a:r>
               <a:rPr sz="1000" b="0">
                 <a:solidFill>
-                  <a:srgbClr val="1E1E1E"/>
+                  <a:srgbClr val="000000"/>
                 </a:solidFill>
-                <a:latin typeface="Microsoft JhengHei"/>
+                <a:latin typeface="Arial"/>
+                <a:ea typeface="微軟正黑體"/>
               </a:rPr>
               <a:t>Agent OS 代理編排平台（跨廠商串接、權限控管、監督儀表板）；IFRS 17／TW-ICS 與 AI 治理服務</a:t>
             </a:r>
@@ -49451,7 +49917,7 @@
       </p:sp>
       <p:sp>
         <p:nvSpPr>
-          <p:cNvPr id="41" name="Rectangle 40"/>
+          <p:cNvPr id="45" name="Rectangle 44"/>
           <p:cNvSpPr/>
           <p:nvPr/>
         </p:nvSpPr>
@@ -49497,9 +49963,10 @@
             <a:r>
               <a:rPr sz="1000" b="0">
                 <a:solidFill>
-                  <a:srgbClr val="1E1E1E"/>
+                  <a:srgbClr val="000000"/>
                 </a:solidFill>
-                <a:latin typeface="Microsoft JhengHei"/>
+                <a:latin typeface="Arial"/>
+                <a:ea typeface="微軟正黑體"/>
               </a:rPr>
               <a:t>治理＋財務資料＋落地</a:t>
             </a:r>
@@ -49508,7 +49975,7 @@
       </p:sp>
       <p:sp>
         <p:nvSpPr>
-          <p:cNvPr id="42" name="Rectangle 41"/>
+          <p:cNvPr id="46" name="Rectangle 45"/>
           <p:cNvSpPr/>
           <p:nvPr/>
         </p:nvSpPr>
@@ -49554,9 +50021,10 @@
             <a:r>
               <a:rPr sz="1000" b="0">
                 <a:solidFill>
-                  <a:srgbClr val="1E1E1E"/>
+                  <a:srgbClr val="000000"/>
                 </a:solidFill>
-                <a:latin typeface="Microsoft JhengHei"/>
+                <a:latin typeface="Arial"/>
+                <a:ea typeface="微軟正黑體"/>
               </a:rPr>
               <a:t>可協作：把 Agent OS 與確信能力帶進第一波服務包</a:t>
             </a:r>
@@ -49565,7 +50033,7 @@
       </p:sp>
       <p:sp>
         <p:nvSpPr>
-          <p:cNvPr id="43" name="Rectangle 42"/>
+          <p:cNvPr id="47" name="Rectangle 46"/>
           <p:cNvSpPr/>
           <p:nvPr/>
         </p:nvSpPr>
@@ -49611,9 +50079,10 @@
             <a:r>
               <a:rPr sz="950" b="0" u="sng">
                 <a:solidFill>
-                  <a:srgbClr val="1F5FBF"/>
+                  <a:srgbClr val="000000"/>
                 </a:solidFill>
-                <a:latin typeface="Microsoft JhengHei"/>
+                <a:latin typeface="Arial"/>
+                <a:ea typeface="微軟正黑體"/>
                 <a:hlinkClick r:id="rId13"/>
               </a:rPr>
               <a:t>Agent OS</a:t>
@@ -49628,9 +50097,10 @@
             <a:r>
               <a:rPr sz="950" b="0" u="sng">
                 <a:solidFill>
-                  <a:srgbClr val="1F5FBF"/>
+                  <a:srgbClr val="000000"/>
                 </a:solidFill>
-                <a:latin typeface="Microsoft JhengHei"/>
+                <a:latin typeface="Arial"/>
+                <a:ea typeface="微軟正黑體"/>
                 <a:hlinkClick r:id="rId14"/>
               </a:rPr>
               <a:t>IFRS 17</a:t>
@@ -49640,7 +50110,7 @@
       </p:sp>
       <p:sp>
         <p:nvSpPr>
-          <p:cNvPr id="44" name="Rectangle 43"/>
+          <p:cNvPr id="48" name="Rectangle 47"/>
           <p:cNvSpPr/>
           <p:nvPr/>
         </p:nvSpPr>
@@ -49684,9 +50154,10 @@
             <a:r>
               <a:rPr sz="900" b="0">
                 <a:solidFill>
-                  <a:srgbClr val="6B6B6B"/>
+                  <a:srgbClr val="595959"/>
                 </a:solidFill>
-                <a:latin typeface="Microsoft JhengHei"/>
+                <a:latin typeface="Arial"/>
+                <a:ea typeface="微軟正黑體"/>
               </a:rPr>
               <a:t>「可能侷限」為依公開資料的推論，僅供內部討論，對外勿點名競爭者。點選右欄可開啟各機構官網或原文。</a:t>
             </a:r>

--- a/research/insurtech-2026/保險科技服務優先順序_主管精簡版.pptx
+++ b/research/insurtech-2026/保險科技服務優先順序_主管精簡版.pptx
@@ -16,6 +16,7 @@
     <p:sldId id="256" r:id="rId17"/>
     <p:sldId id="257" r:id="rId18"/>
     <p:sldId id="258" r:id="rId19"/>
+    <p:sldId id="259" r:id="rId20"/>
   </p:sldIdLst>
   <p:sldSz cx="12192000" cy="6858000"/>
   <p:notesSz cx="6858000" cy="9144000"/>
@@ -43760,7 +43761,7 @@
                 <a:latin typeface="Georgia"/>
                 <a:ea typeface="微軟正黑體"/>
               </a:rPr>
-              <a:t>為什麼是這兩項：台灣監理時程已經確定，而且兩項服務離我們的既有能力最近</a:t>
+              <a:t>五項優先服務的依據：第一波兩項同時具備監理時限、既有能力與 4–8 週切入案</a:t>
             </a:r>
           </a:p>
         </p:txBody>
@@ -43866,53 +43867,18 @@
           </a:p>
         </p:txBody>
       </p:sp>
-      <p:cxnSp>
-        <p:nvCxnSpPr>
-          <p:cNvPr id="7" name="Connector 6"/>
-          <p:cNvCxnSpPr/>
-          <p:nvPr/>
-        </p:nvCxnSpPr>
-        <p:spPr>
-          <a:xfrm>
-            <a:off x="548640" y="1920240"/>
-            <a:ext cx="11109960" cy="0"/>
-          </a:xfrm>
-          <a:prstGeom prst="line">
-            <a:avLst/>
-          </a:prstGeom>
-          <a:ln w="31750">
-            <a:solidFill>
-              <a:srgbClr val="FD5108"/>
-            </a:solidFill>
-          </a:ln>
-        </p:spPr>
-        <p:style>
-          <a:lnRef idx="2">
-            <a:schemeClr val="accent1"/>
-          </a:lnRef>
-          <a:fillRef idx="0">
-            <a:schemeClr val="accent1"/>
-          </a:fillRef>
-          <a:effectRef idx="1">
-            <a:schemeClr val="accent1"/>
-          </a:effectRef>
-          <a:fontRef idx="minor">
-            <a:schemeClr val="tx1"/>
-          </a:fontRef>
-        </p:style>
-      </p:cxnSp>
-      <p:sp>
-        <p:nvSpPr>
-          <p:cNvPr id="8" name="Oval 7"/>
+      <p:sp>
+        <p:nvSpPr>
+          <p:cNvPr id="7" name="Rectangle 6"/>
           <p:cNvSpPr/>
           <p:nvPr/>
         </p:nvSpPr>
         <p:spPr>
           <a:xfrm>
-            <a:off x="1225295" y="1792224"/>
-            <a:ext cx="256032" cy="256032"/>
-          </a:xfrm>
-          <a:prstGeom prst="ellipse">
+            <a:off x="411480" y="1280160"/>
+            <a:ext cx="1655064" cy="365760"/>
+          </a:xfrm>
+          <a:prstGeom prst="rect">
             <a:avLst/>
           </a:prstGeom>
           <a:solidFill>
@@ -43938,38 +43904,44 @@
           </a:fontRef>
         </p:style>
         <p:txBody>
-          <a:bodyPr rtlCol="0" anchor="ctr" lIns="0" rIns="0" tIns="0" bIns="0"/>
+          <a:bodyPr rtlCol="0" anchor="ctr" wrap="square" lIns="54864" rIns="54864" tIns="54864" bIns="54864"/>
           <a:lstStyle/>
           <a:p>
-            <a:pPr algn="ctr"/>
-            <a:r>
-              <a:rPr sz="1200" b="1">
+            <a:pPr algn="l">
+              <a:spcAft>
+                <a:spcPts val="200"/>
+              </a:spcAft>
+            </a:pPr>
+            <a:r>
+              <a:rPr sz="1050" b="1">
                 <a:solidFill>
                   <a:srgbClr val="FFFFFF"/>
                 </a:solidFill>
                 <a:latin typeface="Arial"/>
                 <a:ea typeface="微軟正黑體"/>
               </a:rPr>
-              <a:t/>
-            </a:r>
-          </a:p>
-        </p:txBody>
-      </p:sp>
-      <p:sp>
-        <p:nvSpPr>
-          <p:cNvPr id="9" name="Rectangle 8"/>
+              <a:t>服務</a:t>
+            </a:r>
+          </a:p>
+        </p:txBody>
+      </p:sp>
+      <p:sp>
+        <p:nvSpPr>
+          <p:cNvPr id="8" name="Rectangle 7"/>
           <p:cNvSpPr/>
           <p:nvPr/>
         </p:nvSpPr>
         <p:spPr>
           <a:xfrm>
-            <a:off x="457200" y="1261872"/>
-            <a:ext cx="1792224" cy="457200"/>
+            <a:off x="2103120" y="1280160"/>
+            <a:ext cx="2935224" cy="365760"/>
           </a:xfrm>
           <a:prstGeom prst="rect">
             <a:avLst/>
           </a:prstGeom>
-          <a:noFill/>
+          <a:solidFill>
+            <a:srgbClr val="FD5108"/>
+          </a:solidFill>
           <a:ln>
             <a:noFill/>
           </a:ln>
@@ -43990,43 +43962,43 @@
           </a:fontRef>
         </p:style>
         <p:txBody>
-          <a:bodyPr rtlCol="0" anchor="b" wrap="square" lIns="54864" rIns="54864" tIns="54864" bIns="54864"/>
+          <a:bodyPr rtlCol="0" anchor="ctr" wrap="square" lIns="54864" rIns="54864" tIns="54864" bIns="54864"/>
           <a:lstStyle/>
           <a:p>
-            <a:pPr algn="ctr">
+            <a:pPr algn="l">
               <a:spcAft>
                 <a:spcPts val="200"/>
               </a:spcAft>
             </a:pPr>
             <a:r>
-              <a:rPr sz="1250" b="1">
-                <a:solidFill>
-                  <a:srgbClr val="FD5108"/>
+              <a:rPr sz="1050" b="1">
+                <a:solidFill>
+                  <a:srgbClr val="FFFFFF"/>
                 </a:solidFill>
                 <a:latin typeface="Arial"/>
                 <a:ea typeface="微軟正黑體"/>
               </a:rPr>
-              <a:t>2024-06</a:t>
-            </a:r>
-          </a:p>
-        </p:txBody>
-      </p:sp>
-      <p:sp>
-        <p:nvSpPr>
-          <p:cNvPr id="10" name="Rectangle 9"/>
+              <a:t>為什麼是現在（監理與痛點）</a:t>
+            </a:r>
+          </a:p>
+        </p:txBody>
+      </p:sp>
+      <p:sp>
+        <p:nvSpPr>
+          <p:cNvPr id="9" name="Rectangle 8"/>
           <p:cNvSpPr/>
           <p:nvPr/>
         </p:nvSpPr>
         <p:spPr>
           <a:xfrm>
-            <a:off x="457200" y="2176272"/>
-            <a:ext cx="1792224" cy="868680"/>
+            <a:off x="5074920" y="1280160"/>
+            <a:ext cx="2340864" cy="365760"/>
           </a:xfrm>
           <a:prstGeom prst="rect">
             <a:avLst/>
           </a:prstGeom>
           <a:solidFill>
-            <a:srgbClr val="EBEBEB"/>
+            <a:srgbClr val="FD5108"/>
           </a:solidFill>
           <a:ln>
             <a:noFill/>
@@ -44048,57 +44020,39 @@
           </a:fontRef>
         </p:style>
         <p:txBody>
-          <a:bodyPr rtlCol="0" anchor="t" wrap="square" lIns="64008" rIns="64008" tIns="64008" bIns="64008"/>
+          <a:bodyPr rtlCol="0" anchor="ctr" wrap="square" lIns="54864" rIns="54864" tIns="54864" bIns="54864"/>
           <a:lstStyle/>
           <a:p>
-            <a:pPr algn="ctr">
+            <a:pPr algn="l">
               <a:spcAft>
                 <a:spcPts val="200"/>
               </a:spcAft>
             </a:pPr>
             <a:r>
-              <a:rPr sz="1050" b="0">
-                <a:solidFill>
-                  <a:srgbClr val="000000"/>
+              <a:rPr sz="1050" b="1">
+                <a:solidFill>
+                  <a:srgbClr val="FFFFFF"/>
                 </a:solidFill>
                 <a:latin typeface="Arial"/>
                 <a:ea typeface="微軟正黑體"/>
               </a:rPr>
-              <a:t>金管會《金融業運用 AI 指引》</a:t>
-            </a:r>
-          </a:p>
-          <a:p>
-            <a:pPr algn="ctr">
-              <a:spcAft>
-                <a:spcPts val="200"/>
-              </a:spcAft>
-            </a:pPr>
-            <a:r>
-              <a:rPr sz="900" b="0" u="sng">
-                <a:solidFill>
-                  <a:srgbClr val="000000"/>
-                </a:solidFill>
-                <a:latin typeface="Arial"/>
-                <a:ea typeface="微軟正黑體"/>
-                <a:hlinkClick r:id="rId2"/>
-              </a:rPr>
-              <a:t>原文</a:t>
-            </a:r>
-          </a:p>
-        </p:txBody>
-      </p:sp>
-      <p:sp>
-        <p:nvSpPr>
-          <p:cNvPr id="11" name="Oval 10"/>
+              <a:t>國際標竿與證據</a:t>
+            </a:r>
+          </a:p>
+        </p:txBody>
+      </p:sp>
+      <p:sp>
+        <p:nvSpPr>
+          <p:cNvPr id="10" name="Rectangle 9"/>
           <p:cNvSpPr/>
           <p:nvPr/>
         </p:nvSpPr>
         <p:spPr>
           <a:xfrm>
-            <a:off x="3118103" y="1792224"/>
-            <a:ext cx="256032" cy="256032"/>
-          </a:xfrm>
-          <a:prstGeom prst="ellipse">
+            <a:off x="7452360" y="1280160"/>
+            <a:ext cx="1746504" cy="365760"/>
+          </a:xfrm>
+          <a:prstGeom prst="rect">
             <a:avLst/>
           </a:prstGeom>
           <a:solidFill>
@@ -44124,38 +44078,44 @@
           </a:fontRef>
         </p:style>
         <p:txBody>
-          <a:bodyPr rtlCol="0" anchor="ctr" lIns="0" rIns="0" tIns="0" bIns="0"/>
+          <a:bodyPr rtlCol="0" anchor="ctr" wrap="square" lIns="54864" rIns="54864" tIns="54864" bIns="54864"/>
           <a:lstStyle/>
           <a:p>
-            <a:pPr algn="ctr"/>
-            <a:r>
-              <a:rPr sz="1200" b="1">
+            <a:pPr algn="l">
+              <a:spcAft>
+                <a:spcPts val="200"/>
+              </a:spcAft>
+            </a:pPr>
+            <a:r>
+              <a:rPr sz="1050" b="1">
                 <a:solidFill>
                   <a:srgbClr val="FFFFFF"/>
                 </a:solidFill>
                 <a:latin typeface="Arial"/>
                 <a:ea typeface="微軟正黑體"/>
               </a:rPr>
-              <a:t/>
-            </a:r>
-          </a:p>
-        </p:txBody>
-      </p:sp>
-      <p:sp>
-        <p:nvSpPr>
-          <p:cNvPr id="12" name="Rectangle 11"/>
+              <a:t>首案切入</a:t>
+            </a:r>
+          </a:p>
+        </p:txBody>
+      </p:sp>
+      <p:sp>
+        <p:nvSpPr>
+          <p:cNvPr id="11" name="Rectangle 10"/>
           <p:cNvSpPr/>
           <p:nvPr/>
         </p:nvSpPr>
         <p:spPr>
           <a:xfrm>
-            <a:off x="2350008" y="1261872"/>
-            <a:ext cx="1792224" cy="457200"/>
+            <a:off x="9235440" y="1280160"/>
+            <a:ext cx="1014983" cy="365760"/>
           </a:xfrm>
           <a:prstGeom prst="rect">
             <a:avLst/>
           </a:prstGeom>
-          <a:noFill/>
+          <a:solidFill>
+            <a:srgbClr val="FD5108"/>
+          </a:solidFill>
           <a:ln>
             <a:noFill/>
           </a:ln>
@@ -44176,7 +44136,7 @@
           </a:fontRef>
         </p:style>
         <p:txBody>
-          <a:bodyPr rtlCol="0" anchor="b" wrap="square" lIns="54864" rIns="54864" tIns="54864" bIns="54864"/>
+          <a:bodyPr rtlCol="0" anchor="ctr" wrap="square" lIns="54864" rIns="54864" tIns="54864" bIns="54864"/>
           <a:lstStyle/>
           <a:p>
             <a:pPr algn="ctr">
@@ -44185,34 +44145,34 @@
               </a:spcAft>
             </a:pPr>
             <a:r>
-              <a:rPr sz="1250" b="1">
-                <a:solidFill>
-                  <a:srgbClr val="FD5108"/>
+              <a:rPr sz="1050" b="1">
+                <a:solidFill>
+                  <a:srgbClr val="FFFFFF"/>
                 </a:solidFill>
                 <a:latin typeface="Arial"/>
                 <a:ea typeface="微軟正黑體"/>
               </a:rPr>
-              <a:t>2024-08</a:t>
-            </a:r>
-          </a:p>
-        </p:txBody>
-      </p:sp>
-      <p:sp>
-        <p:nvSpPr>
-          <p:cNvPr id="13" name="Rectangle 12"/>
+              <a:t>評等</a:t>
+            </a:r>
+          </a:p>
+        </p:txBody>
+      </p:sp>
+      <p:sp>
+        <p:nvSpPr>
+          <p:cNvPr id="12" name="Rectangle 11"/>
           <p:cNvSpPr/>
           <p:nvPr/>
         </p:nvSpPr>
         <p:spPr>
           <a:xfrm>
-            <a:off x="2350008" y="2176272"/>
-            <a:ext cx="1792224" cy="868680"/>
+            <a:off x="10287000" y="1280160"/>
+            <a:ext cx="603503" cy="365760"/>
           </a:xfrm>
           <a:prstGeom prst="rect">
             <a:avLst/>
           </a:prstGeom>
           <a:solidFill>
-            <a:srgbClr val="EBEBEB"/>
+            <a:srgbClr val="FD5108"/>
           </a:solidFill>
           <a:ln>
             <a:noFill/>
@@ -44234,7 +44194,7 @@
           </a:fontRef>
         </p:style>
         <p:txBody>
-          <a:bodyPr rtlCol="0" anchor="t" wrap="square" lIns="64008" rIns="64008" tIns="64008" bIns="64008"/>
+          <a:bodyPr rtlCol="0" anchor="ctr" wrap="square" lIns="54864" rIns="54864" tIns="54864" bIns="54864"/>
           <a:lstStyle/>
           <a:p>
             <a:pPr algn="ctr">
@@ -44243,48 +44203,30 @@
               </a:spcAft>
             </a:pPr>
             <a:r>
-              <a:rPr sz="1050" b="0">
-                <a:solidFill>
-                  <a:srgbClr val="000000"/>
+              <a:rPr sz="1050" b="1">
+                <a:solidFill>
+                  <a:srgbClr val="FFFFFF"/>
                 </a:solidFill>
                 <a:latin typeface="Arial"/>
                 <a:ea typeface="微軟正黑體"/>
               </a:rPr>
-              <a:t>委外注意事項修正：放寬雲端聯合查核</a:t>
-            </a:r>
-          </a:p>
-          <a:p>
-            <a:pPr algn="ctr">
-              <a:spcAft>
-                <a:spcPts val="200"/>
-              </a:spcAft>
-            </a:pPr>
-            <a:r>
-              <a:rPr sz="900" b="0" u="sng">
-                <a:solidFill>
-                  <a:srgbClr val="000000"/>
-                </a:solidFill>
-                <a:latin typeface="Arial"/>
-                <a:ea typeface="微軟正黑體"/>
-                <a:hlinkClick r:id="rId3"/>
-              </a:rPr>
-              <a:t>原文</a:t>
-            </a:r>
-          </a:p>
-        </p:txBody>
-      </p:sp>
-      <p:sp>
-        <p:nvSpPr>
-          <p:cNvPr id="14" name="Oval 13"/>
+              <a:t>建議</a:t>
+            </a:r>
+          </a:p>
+        </p:txBody>
+      </p:sp>
+      <p:sp>
+        <p:nvSpPr>
+          <p:cNvPr id="13" name="Rectangle 12"/>
           <p:cNvSpPr/>
           <p:nvPr/>
         </p:nvSpPr>
         <p:spPr>
           <a:xfrm>
-            <a:off x="5010912" y="1792224"/>
-            <a:ext cx="256032" cy="256032"/>
-          </a:xfrm>
-          <a:prstGeom prst="ellipse">
+            <a:off x="10927080" y="1280160"/>
+            <a:ext cx="832103" cy="365760"/>
+          </a:xfrm>
+          <a:prstGeom prst="rect">
             <a:avLst/>
           </a:prstGeom>
           <a:solidFill>
@@ -44310,38 +44252,44 @@
           </a:fontRef>
         </p:style>
         <p:txBody>
-          <a:bodyPr rtlCol="0" anchor="ctr" lIns="0" rIns="0" tIns="0" bIns="0"/>
+          <a:bodyPr rtlCol="0" anchor="ctr" wrap="square" lIns="54864" rIns="54864" tIns="54864" bIns="54864"/>
           <a:lstStyle/>
           <a:p>
-            <a:pPr algn="ctr"/>
-            <a:r>
-              <a:rPr sz="1200" b="1">
+            <a:pPr algn="ctr">
+              <a:spcAft>
+                <a:spcPts val="200"/>
+              </a:spcAft>
+            </a:pPr>
+            <a:r>
+              <a:rPr sz="1050" b="1">
                 <a:solidFill>
                   <a:srgbClr val="FFFFFF"/>
                 </a:solidFill>
                 <a:latin typeface="Arial"/>
                 <a:ea typeface="微軟正黑體"/>
               </a:rPr>
-              <a:t/>
-            </a:r>
-          </a:p>
-        </p:txBody>
-      </p:sp>
-      <p:sp>
-        <p:nvSpPr>
-          <p:cNvPr id="15" name="Rectangle 14"/>
+              <a:t>文獻</a:t>
+            </a:r>
+          </a:p>
+        </p:txBody>
+      </p:sp>
+      <p:sp>
+        <p:nvSpPr>
+          <p:cNvPr id="14" name="Rectangle 13"/>
           <p:cNvSpPr/>
           <p:nvPr/>
         </p:nvSpPr>
         <p:spPr>
           <a:xfrm>
-            <a:off x="4242816" y="1261872"/>
-            <a:ext cx="1792224" cy="457200"/>
+            <a:off x="411480" y="1682495"/>
+            <a:ext cx="1655064" cy="822959"/>
           </a:xfrm>
           <a:prstGeom prst="rect">
             <a:avLst/>
           </a:prstGeom>
-          <a:noFill/>
+          <a:solidFill>
+            <a:srgbClr val="EBEBEB"/>
+          </a:solidFill>
           <a:ln>
             <a:noFill/>
           </a:ln>
@@ -44362,37 +44310,37 @@
           </a:fontRef>
         </p:style>
         <p:txBody>
-          <a:bodyPr rtlCol="0" anchor="b" wrap="square" lIns="54864" rIns="54864" tIns="54864" bIns="54864"/>
+          <a:bodyPr rtlCol="0" anchor="ctr" wrap="square" lIns="54864" rIns="54864" tIns="54864" bIns="54864"/>
           <a:lstStyle/>
           <a:p>
-            <a:pPr algn="ctr">
+            <a:pPr algn="l">
               <a:spcAft>
                 <a:spcPts val="200"/>
               </a:spcAft>
             </a:pPr>
             <a:r>
-              <a:rPr sz="1250" b="1">
+              <a:rPr sz="1100" b="1">
                 <a:solidFill>
                   <a:srgbClr val="FD5108"/>
                 </a:solidFill>
                 <a:latin typeface="Arial"/>
                 <a:ea typeface="微軟正黑體"/>
               </a:rPr>
-              <a:t>2025-12-31</a:t>
-            </a:r>
-          </a:p>
-        </p:txBody>
-      </p:sp>
-      <p:sp>
-        <p:nvSpPr>
-          <p:cNvPr id="16" name="Rectangle 15"/>
+              <a:t>IFRS 17／TW-ICS 後財務轉型</a:t>
+            </a:r>
+          </a:p>
+        </p:txBody>
+      </p:sp>
+      <p:sp>
+        <p:nvSpPr>
+          <p:cNvPr id="15" name="Rectangle 14"/>
           <p:cNvSpPr/>
           <p:nvPr/>
         </p:nvSpPr>
         <p:spPr>
           <a:xfrm>
-            <a:off x="4242816" y="2176272"/>
-            <a:ext cx="1792224" cy="868680"/>
+            <a:off x="2103120" y="1682495"/>
+            <a:ext cx="2935224" cy="822959"/>
           </a:xfrm>
           <a:prstGeom prst="rect">
             <a:avLst/>
@@ -44420,61 +44368,43 @@
           </a:fontRef>
         </p:style>
         <p:txBody>
-          <a:bodyPr rtlCol="0" anchor="t" wrap="square" lIns="64008" rIns="64008" tIns="64008" bIns="64008"/>
+          <a:bodyPr rtlCol="0" anchor="ctr" wrap="square" lIns="54864" rIns="54864" tIns="54864" bIns="54864"/>
           <a:lstStyle/>
           <a:p>
-            <a:pPr algn="ctr">
+            <a:pPr algn="l">
               <a:spcAft>
                 <a:spcPts val="200"/>
               </a:spcAft>
             </a:pPr>
             <a:r>
-              <a:rPr sz="1050" b="0">
+              <a:rPr sz="1000" b="0">
                 <a:solidFill>
                   <a:srgbClr val="000000"/>
                 </a:solidFill>
                 <a:latin typeface="Arial"/>
                 <a:ea typeface="微軟正黑體"/>
               </a:rPr>
-              <a:t>委外新辦法施行，提升為法規命令</a:t>
-            </a:r>
-          </a:p>
-          <a:p>
-            <a:pPr algn="ctr">
-              <a:spcAft>
-                <a:spcPts val="200"/>
-              </a:spcAft>
-            </a:pPr>
-            <a:r>
-              <a:rPr sz="900" b="0" u="sng">
-                <a:solidFill>
-                  <a:srgbClr val="000000"/>
-                </a:solidFill>
-                <a:latin typeface="Arial"/>
-                <a:ea typeface="微軟正黑體"/>
-                <a:hlinkClick r:id="rId4"/>
-              </a:rPr>
-              <a:t>原文</a:t>
-            </a:r>
-          </a:p>
-        </p:txBody>
-      </p:sp>
-      <p:sp>
-        <p:nvSpPr>
-          <p:cNvPr id="17" name="Oval 16"/>
+              <a:t>2026-01-01 與 TW-ICS 同步上路，15 年過渡期逐年趨緊；台灣業者對新制的準備度低於全球（3.06 對 3.27）</a:t>
+            </a:r>
+          </a:p>
+        </p:txBody>
+      </p:sp>
+      <p:sp>
+        <p:nvSpPr>
+          <p:cNvPr id="16" name="Rectangle 15"/>
           <p:cNvSpPr/>
           <p:nvPr/>
         </p:nvSpPr>
         <p:spPr>
           <a:xfrm>
-            <a:off x="6903719" y="1792224"/>
-            <a:ext cx="256032" cy="256032"/>
-          </a:xfrm>
-          <a:prstGeom prst="ellipse">
+            <a:off x="5074920" y="1682495"/>
+            <a:ext cx="2340864" cy="822959"/>
+          </a:xfrm>
+          <a:prstGeom prst="rect">
             <a:avLst/>
           </a:prstGeom>
           <a:solidFill>
-            <a:srgbClr val="FD5108"/>
+            <a:srgbClr val="EBEBEB"/>
           </a:solidFill>
           <a:ln>
             <a:noFill/>
@@ -44496,38 +44426,44 @@
           </a:fontRef>
         </p:style>
         <p:txBody>
-          <a:bodyPr rtlCol="0" anchor="ctr" lIns="0" rIns="0" tIns="0" bIns="0"/>
+          <a:bodyPr rtlCol="0" anchor="ctr" wrap="square" lIns="54864" rIns="54864" tIns="54864" bIns="54864"/>
           <a:lstStyle/>
           <a:p>
-            <a:pPr algn="ctr"/>
-            <a:r>
-              <a:rPr sz="1200" b="1">
-                <a:solidFill>
-                  <a:srgbClr val="FFFFFF"/>
+            <a:pPr algn="l">
+              <a:spcAft>
+                <a:spcPts val="200"/>
+              </a:spcAft>
+            </a:pPr>
+            <a:r>
+              <a:rPr sz="1000" b="0">
+                <a:solidFill>
+                  <a:srgbClr val="000000"/>
                 </a:solidFill>
                 <a:latin typeface="Arial"/>
                 <a:ea typeface="微軟正黑體"/>
               </a:rPr>
-              <a:t/>
-            </a:r>
-          </a:p>
-        </p:txBody>
-      </p:sp>
-      <p:sp>
-        <p:nvSpPr>
-          <p:cNvPr id="18" name="Rectangle 17"/>
+              <a:t>新制以現時價值衡量負債，業者經營指標轉向 CSM 與資產負債管理（ALM）</a:t>
+            </a:r>
+          </a:p>
+        </p:txBody>
+      </p:sp>
+      <p:sp>
+        <p:nvSpPr>
+          <p:cNvPr id="17" name="Rectangle 16"/>
           <p:cNvSpPr/>
           <p:nvPr/>
         </p:nvSpPr>
         <p:spPr>
           <a:xfrm>
-            <a:off x="6135623" y="1261872"/>
-            <a:ext cx="1792224" cy="457200"/>
+            <a:off x="7452360" y="1682495"/>
+            <a:ext cx="1746504" cy="822959"/>
           </a:xfrm>
           <a:prstGeom prst="rect">
             <a:avLst/>
           </a:prstGeom>
-          <a:noFill/>
+          <a:solidFill>
+            <a:srgbClr val="EBEBEB"/>
+          </a:solidFill>
           <a:ln>
             <a:noFill/>
           </a:ln>
@@ -44548,37 +44484,37 @@
           </a:fontRef>
         </p:style>
         <p:txBody>
-          <a:bodyPr rtlCol="0" anchor="b" wrap="square" lIns="54864" rIns="54864" tIns="54864" bIns="54864"/>
+          <a:bodyPr rtlCol="0" anchor="ctr" wrap="square" lIns="54864" rIns="54864" tIns="54864" bIns="54864"/>
           <a:lstStyle/>
           <a:p>
-            <a:pPr algn="ctr">
+            <a:pPr algn="l">
               <a:spcAft>
                 <a:spcPts val="200"/>
               </a:spcAft>
             </a:pPr>
             <a:r>
-              <a:rPr sz="1250" b="1">
-                <a:solidFill>
-                  <a:srgbClr val="FD5108"/>
+              <a:rPr sz="1000" b="1">
+                <a:solidFill>
+                  <a:srgbClr val="000000"/>
                 </a:solidFill>
                 <a:latin typeface="Arial"/>
                 <a:ea typeface="微軟正黑體"/>
               </a:rPr>
-              <a:t>2026-01-01</a:t>
-            </a:r>
-          </a:p>
-        </p:txBody>
-      </p:sp>
-      <p:sp>
-        <p:nvSpPr>
-          <p:cNvPr id="19" name="Rectangle 18"/>
+              <a:t>首年結帳瓶頸診斷＋CSM 管理儀表板</a:t>
+            </a:r>
+          </a:p>
+        </p:txBody>
+      </p:sp>
+      <p:sp>
+        <p:nvSpPr>
+          <p:cNvPr id="18" name="Rectangle 17"/>
           <p:cNvSpPr/>
           <p:nvPr/>
         </p:nvSpPr>
         <p:spPr>
           <a:xfrm>
-            <a:off x="6135623" y="2176272"/>
-            <a:ext cx="1792224" cy="868680"/>
+            <a:off x="9235440" y="1682495"/>
+            <a:ext cx="1014983" cy="822959"/>
           </a:xfrm>
           <a:prstGeom prst="rect">
             <a:avLst/>
@@ -44606,7 +44542,7 @@
           </a:fontRef>
         </p:style>
         <p:txBody>
-          <a:bodyPr rtlCol="0" anchor="t" wrap="square" lIns="64008" rIns="64008" tIns="64008" bIns="64008"/>
+          <a:bodyPr rtlCol="0" anchor="ctr" wrap="square" lIns="54864" rIns="54864" tIns="54864" bIns="54864"/>
           <a:lstStyle/>
           <a:p>
             <a:pPr algn="ctr">
@@ -44615,52 +44551,34 @@
               </a:spcAft>
             </a:pPr>
             <a:r>
-              <a:rPr sz="1050" b="0">
-                <a:solidFill>
-                  <a:srgbClr val="000000"/>
-                </a:solidFill>
-                <a:latin typeface="Arial"/>
+              <a:rPr sz="1500" b="0">
+                <a:solidFill>
+                  <a:srgbClr val="FD5108"/>
+                </a:solidFill>
+                <a:latin typeface="微軟正黑體"/>
                 <a:ea typeface="微軟正黑體"/>
               </a:rPr>
-              <a:t>IFRS 17／TW-ICS 正式接軌</a:t>
-            </a:r>
-          </a:p>
-          <a:p>
-            <a:pPr algn="ctr">
-              <a:spcAft>
-                <a:spcPts val="200"/>
-              </a:spcAft>
-            </a:pPr>
-            <a:r>
-              <a:rPr sz="900" b="0" u="sng">
-                <a:solidFill>
-                  <a:srgbClr val="000000"/>
-                </a:solidFill>
-                <a:latin typeface="Arial"/>
-                <a:ea typeface="微軟正黑體"/>
-                <a:hlinkClick r:id="rId5"/>
-              </a:rPr>
-              <a:t>原文</a:t>
-            </a:r>
-          </a:p>
-        </p:txBody>
-      </p:sp>
-      <p:sp>
-        <p:nvSpPr>
-          <p:cNvPr id="20" name="Oval 19"/>
+              <a:t>●  ●  ●</a:t>
+            </a:r>
+          </a:p>
+        </p:txBody>
+      </p:sp>
+      <p:sp>
+        <p:nvSpPr>
+          <p:cNvPr id="19" name="Rectangle 18"/>
           <p:cNvSpPr/>
           <p:nvPr/>
         </p:nvSpPr>
         <p:spPr>
           <a:xfrm>
-            <a:off x="8796528" y="1792224"/>
-            <a:ext cx="256032" cy="256032"/>
-          </a:xfrm>
-          <a:prstGeom prst="ellipse">
+            <a:off x="10287000" y="1682495"/>
+            <a:ext cx="603503" cy="822959"/>
+          </a:xfrm>
+          <a:prstGeom prst="rect">
             <a:avLst/>
           </a:prstGeom>
           <a:solidFill>
-            <a:srgbClr val="595959"/>
+            <a:srgbClr val="FD5108"/>
           </a:solidFill>
           <a:ln>
             <a:noFill/>
@@ -44682,38 +44600,44 @@
           </a:fontRef>
         </p:style>
         <p:txBody>
-          <a:bodyPr rtlCol="0" anchor="ctr" lIns="0" rIns="0" tIns="0" bIns="0"/>
+          <a:bodyPr rtlCol="0" anchor="ctr" wrap="square" lIns="54864" rIns="54864" tIns="54864" bIns="54864"/>
           <a:lstStyle/>
           <a:p>
-            <a:pPr algn="ctr"/>
-            <a:r>
-              <a:rPr sz="1200" b="1">
+            <a:pPr algn="ctr">
+              <a:spcAft>
+                <a:spcPts val="200"/>
+              </a:spcAft>
+            </a:pPr>
+            <a:r>
+              <a:rPr sz="1050" b="1">
                 <a:solidFill>
                   <a:srgbClr val="FFFFFF"/>
                 </a:solidFill>
                 <a:latin typeface="Arial"/>
                 <a:ea typeface="微軟正黑體"/>
               </a:rPr>
-              <a:t/>
-            </a:r>
-          </a:p>
-        </p:txBody>
-      </p:sp>
-      <p:sp>
-        <p:nvSpPr>
-          <p:cNvPr id="21" name="Rectangle 20"/>
+              <a:t>第一波</a:t>
+            </a:r>
+          </a:p>
+        </p:txBody>
+      </p:sp>
+      <p:sp>
+        <p:nvSpPr>
+          <p:cNvPr id="20" name="Rectangle 19"/>
           <p:cNvSpPr/>
           <p:nvPr/>
         </p:nvSpPr>
         <p:spPr>
           <a:xfrm>
-            <a:off x="8028431" y="1261872"/>
-            <a:ext cx="1792224" cy="457200"/>
+            <a:off x="10927080" y="1682495"/>
+            <a:ext cx="832103" cy="822959"/>
           </a:xfrm>
           <a:prstGeom prst="rect">
             <a:avLst/>
           </a:prstGeom>
-          <a:noFill/>
+          <a:solidFill>
+            <a:srgbClr val="EBEBEB"/>
+          </a:solidFill>
           <a:ln>
             <a:noFill/>
           </a:ln>
@@ -44734,7 +44658,7 @@
           </a:fontRef>
         </p:style>
         <p:txBody>
-          <a:bodyPr rtlCol="0" anchor="b" wrap="square" lIns="54864" rIns="54864" tIns="54864" bIns="54864"/>
+          <a:bodyPr rtlCol="0" anchor="ctr" wrap="square" lIns="54864" rIns="54864" tIns="54864" bIns="54864"/>
           <a:lstStyle/>
           <a:p>
             <a:pPr algn="ctr">
@@ -44743,37 +44667,71 @@
               </a:spcAft>
             </a:pPr>
             <a:r>
-              <a:rPr sz="1250" b="1">
-                <a:solidFill>
-                  <a:srgbClr val="595959"/>
+              <a:rPr sz="1000" b="0" u="sng">
+                <a:solidFill>
+                  <a:srgbClr val="000000"/>
                 </a:solidFill>
                 <a:latin typeface="Arial"/>
                 <a:ea typeface="微軟正黑體"/>
+                <a:hlinkClick r:id="rId2"/>
               </a:rPr>
-              <a:t>2026-03～09</a:t>
-            </a:r>
-          </a:p>
-        </p:txBody>
-      </p:sp>
-      <p:sp>
-        <p:nvSpPr>
-          <p:cNvPr id="22" name="Rectangle 21"/>
+              <a:t>[5]</a:t>
+            </a:r>
+            <a:r>
+              <a:rPr sz="1000" b="0" u="sng">
+                <a:solidFill>
+                  <a:srgbClr val="000000"/>
+                </a:solidFill>
+                <a:latin typeface="Arial"/>
+                <a:ea typeface="微軟正黑體"/>
+                <a:hlinkClick r:id="rId3"/>
+              </a:rPr>
+              <a:t>[6]</a:t>
+            </a:r>
+            <a:r>
+              <a:rPr sz="1000" b="0" u="sng">
+                <a:solidFill>
+                  <a:srgbClr val="000000"/>
+                </a:solidFill>
+                <a:latin typeface="Arial"/>
+                <a:ea typeface="微軟正黑體"/>
+                <a:hlinkClick r:id="rId4"/>
+              </a:rPr>
+              <a:t>[7]</a:t>
+            </a:r>
+            <a:r>
+              <a:rPr sz="1000" b="0" u="sng">
+                <a:solidFill>
+                  <a:srgbClr val="000000"/>
+                </a:solidFill>
+                <a:latin typeface="Arial"/>
+                <a:ea typeface="微軟正黑體"/>
+                <a:hlinkClick r:id="rId5"/>
+              </a:rPr>
+              <a:t>[8]</a:t>
+            </a:r>
+          </a:p>
+        </p:txBody>
+      </p:sp>
+      <p:sp>
+        <p:nvSpPr>
+          <p:cNvPr id="21" name="Rectangle 20"/>
           <p:cNvSpPr/>
           <p:nvPr/>
         </p:nvSpPr>
         <p:spPr>
           <a:xfrm>
-            <a:off x="8028431" y="2176272"/>
-            <a:ext cx="1792224" cy="868680"/>
+            <a:off x="411480" y="2542032"/>
+            <a:ext cx="1655064" cy="822959"/>
           </a:xfrm>
           <a:prstGeom prst="rect">
             <a:avLst/>
           </a:prstGeom>
-          <a:noFill/>
-          <a:ln w="9525">
-            <a:solidFill>
-              <a:srgbClr val="CBD1D6"/>
-            </a:solidFill>
+          <a:solidFill>
+            <a:srgbClr val="FFFFFF"/>
+          </a:solidFill>
+          <a:ln>
+            <a:noFill/>
           </a:ln>
           <a:effectLst/>
         </p:spPr>
@@ -44792,61 +44750,43 @@
           </a:fontRef>
         </p:style>
         <p:txBody>
-          <a:bodyPr rtlCol="0" anchor="t" wrap="square" lIns="64008" rIns="64008" tIns="64008" bIns="64008"/>
+          <a:bodyPr rtlCol="0" anchor="ctr" wrap="square" lIns="54864" rIns="54864" tIns="54864" bIns="54864"/>
           <a:lstStyle/>
           <a:p>
-            <a:pPr algn="ctr">
+            <a:pPr algn="l">
               <a:spcAft>
                 <a:spcPts val="200"/>
               </a:spcAft>
             </a:pPr>
             <a:r>
-              <a:rPr sz="1050" b="0">
-                <a:solidFill>
-                  <a:srgbClr val="000000"/>
+              <a:rPr sz="1100" b="1">
+                <a:solidFill>
+                  <a:srgbClr val="FD5108"/>
                 </a:solidFill>
                 <a:latin typeface="Arial"/>
                 <a:ea typeface="微軟正黑體"/>
               </a:rPr>
-              <a:t>NAIC 12 州 AI 評估工具試點（美國）</a:t>
-            </a:r>
-          </a:p>
-          <a:p>
-            <a:pPr algn="ctr">
-              <a:spcAft>
-                <a:spcPts val="200"/>
-              </a:spcAft>
-            </a:pPr>
-            <a:r>
-              <a:rPr sz="900" b="0" u="sng">
-                <a:solidFill>
-                  <a:srgbClr val="000000"/>
-                </a:solidFill>
-                <a:latin typeface="Arial"/>
-                <a:ea typeface="微軟正黑體"/>
-                <a:hlinkClick r:id="rId6"/>
-              </a:rPr>
-              <a:t>原文</a:t>
-            </a:r>
-          </a:p>
-        </p:txBody>
-      </p:sp>
-      <p:sp>
-        <p:nvSpPr>
-          <p:cNvPr id="23" name="Oval 22"/>
+              <a:t>AI 清冊、模型驗證與護欄</a:t>
+            </a:r>
+          </a:p>
+        </p:txBody>
+      </p:sp>
+      <p:sp>
+        <p:nvSpPr>
+          <p:cNvPr id="22" name="Rectangle 21"/>
           <p:cNvSpPr/>
           <p:nvPr/>
         </p:nvSpPr>
         <p:spPr>
           <a:xfrm>
-            <a:off x="10689336" y="1792224"/>
-            <a:ext cx="256032" cy="256032"/>
-          </a:xfrm>
-          <a:prstGeom prst="ellipse">
+            <a:off x="2103120" y="2542032"/>
+            <a:ext cx="2935224" cy="822959"/>
+          </a:xfrm>
+          <a:prstGeom prst="rect">
             <a:avLst/>
           </a:prstGeom>
           <a:solidFill>
-            <a:srgbClr val="595959"/>
+            <a:srgbClr val="FFFFFF"/>
           </a:solidFill>
           <a:ln>
             <a:noFill/>
@@ -44868,38 +44808,44 @@
           </a:fontRef>
         </p:style>
         <p:txBody>
-          <a:bodyPr rtlCol="0" anchor="ctr" lIns="0" rIns="0" tIns="0" bIns="0"/>
+          <a:bodyPr rtlCol="0" anchor="ctr" wrap="square" lIns="54864" rIns="54864" tIns="54864" bIns="54864"/>
           <a:lstStyle/>
           <a:p>
-            <a:pPr algn="ctr"/>
-            <a:r>
-              <a:rPr sz="1200" b="1">
-                <a:solidFill>
-                  <a:srgbClr val="FFFFFF"/>
+            <a:pPr algn="l">
+              <a:spcAft>
+                <a:spcPts val="200"/>
+              </a:spcAft>
+            </a:pPr>
+            <a:r>
+              <a:rPr sz="1000" b="0">
+                <a:solidFill>
+                  <a:srgbClr val="000000"/>
                 </a:solidFill>
                 <a:latin typeface="Arial"/>
                 <a:ea typeface="微軟正黑體"/>
               </a:rPr>
-              <a:t/>
-            </a:r>
-          </a:p>
-        </p:txBody>
-      </p:sp>
-      <p:sp>
-        <p:nvSpPr>
-          <p:cNvPr id="24" name="Rectangle 23"/>
+              <a:t>金管會 AI 指引（2024-06）；公會 AI 自律規範 2025-04-10 備查，保險公司對 AI 結果負最終責任</a:t>
+            </a:r>
+          </a:p>
+        </p:txBody>
+      </p:sp>
+      <p:sp>
+        <p:nvSpPr>
+          <p:cNvPr id="23" name="Rectangle 22"/>
           <p:cNvSpPr/>
           <p:nvPr/>
         </p:nvSpPr>
         <p:spPr>
           <a:xfrm>
-            <a:off x="9921240" y="1261872"/>
-            <a:ext cx="1792224" cy="457200"/>
+            <a:off x="5074920" y="2542032"/>
+            <a:ext cx="2340864" cy="822959"/>
           </a:xfrm>
           <a:prstGeom prst="rect">
             <a:avLst/>
           </a:prstGeom>
-          <a:noFill/>
+          <a:solidFill>
+            <a:srgbClr val="FFFFFF"/>
+          </a:solidFill>
           <a:ln>
             <a:noFill/>
           </a:ln>
@@ -44920,46 +44866,46 @@
           </a:fontRef>
         </p:style>
         <p:txBody>
-          <a:bodyPr rtlCol="0" anchor="b" wrap="square" lIns="54864" rIns="54864" tIns="54864" bIns="54864"/>
+          <a:bodyPr rtlCol="0" anchor="ctr" wrap="square" lIns="54864" rIns="54864" tIns="54864" bIns="54864"/>
           <a:lstStyle/>
           <a:p>
-            <a:pPr algn="ctr">
+            <a:pPr algn="l">
               <a:spcAft>
                 <a:spcPts val="200"/>
               </a:spcAft>
             </a:pPr>
             <a:r>
-              <a:rPr sz="1250" b="1">
-                <a:solidFill>
-                  <a:srgbClr val="595959"/>
+              <a:rPr sz="1000" b="0">
+                <a:solidFill>
+                  <a:srgbClr val="000000"/>
                 </a:solidFill>
                 <a:latin typeface="Arial"/>
                 <a:ea typeface="微軟正黑體"/>
               </a:rPr>
-              <a:t>2026-10</a:t>
-            </a:r>
-          </a:p>
-        </p:txBody>
-      </p:sp>
-      <p:sp>
-        <p:nvSpPr>
-          <p:cNvPr id="25" name="Rectangle 24"/>
+              <a:t>NAIC 12 州 AI 評估工具試點（2026-03～09）；MAS AI 風險管理指引 2026-10 定稿</a:t>
+            </a:r>
+          </a:p>
+        </p:txBody>
+      </p:sp>
+      <p:sp>
+        <p:nvSpPr>
+          <p:cNvPr id="24" name="Rectangle 23"/>
           <p:cNvSpPr/>
           <p:nvPr/>
         </p:nvSpPr>
         <p:spPr>
           <a:xfrm>
-            <a:off x="9921240" y="2176272"/>
-            <a:ext cx="1792224" cy="868680"/>
+            <a:off x="7452360" y="2542032"/>
+            <a:ext cx="1746504" cy="822959"/>
           </a:xfrm>
           <a:prstGeom prst="rect">
             <a:avLst/>
           </a:prstGeom>
-          <a:noFill/>
-          <a:ln w="9525">
-            <a:solidFill>
-              <a:srgbClr val="CBD1D6"/>
-            </a:solidFill>
+          <a:solidFill>
+            <a:srgbClr val="FFFFFF"/>
+          </a:solidFill>
+          <a:ln>
+            <a:noFill/>
           </a:ln>
           <a:effectLst/>
         </p:spPr>
@@ -44978,60 +44924,44 @@
           </a:fontRef>
         </p:style>
         <p:txBody>
-          <a:bodyPr rtlCol="0" anchor="t" wrap="square" lIns="64008" rIns="64008" tIns="64008" bIns="64008"/>
+          <a:bodyPr rtlCol="0" anchor="ctr" wrap="square" lIns="54864" rIns="54864" tIns="54864" bIns="54864"/>
           <a:lstStyle/>
           <a:p>
-            <a:pPr algn="ctr">
+            <a:pPr algn="l">
               <a:spcAft>
                 <a:spcPts val="200"/>
               </a:spcAft>
             </a:pPr>
             <a:r>
-              <a:rPr sz="1050" b="0">
+              <a:rPr sz="1000" b="1">
                 <a:solidFill>
                   <a:srgbClr val="000000"/>
                 </a:solidFill>
                 <a:latin typeface="Arial"/>
                 <a:ea typeface="微軟正黑體"/>
               </a:rPr>
-              <a:t>MAS AI 風險管理指引定稿（新加坡）</a:t>
-            </a:r>
-          </a:p>
-          <a:p>
-            <a:pPr algn="ctr">
-              <a:spcAft>
-                <a:spcPts val="200"/>
-              </a:spcAft>
-            </a:pPr>
-            <a:r>
-              <a:rPr sz="900" b="0" u="sng">
-                <a:solidFill>
-                  <a:srgbClr val="000000"/>
-                </a:solidFill>
-                <a:latin typeface="Arial"/>
-                <a:ea typeface="微軟正黑體"/>
-                <a:hlinkClick r:id="rId7"/>
-              </a:rPr>
-              <a:t>原文</a:t>
-            </a:r>
-          </a:p>
-        </p:txBody>
-      </p:sp>
-      <p:sp>
-        <p:nvSpPr>
-          <p:cNvPr id="26" name="Rectangle 25"/>
+              <a:t>4–6 週 AI 清冊盤點＋自律規範合規健檢</a:t>
+            </a:r>
+          </a:p>
+        </p:txBody>
+      </p:sp>
+      <p:sp>
+        <p:nvSpPr>
+          <p:cNvPr id="25" name="Rectangle 24"/>
           <p:cNvSpPr/>
           <p:nvPr/>
         </p:nvSpPr>
         <p:spPr>
           <a:xfrm>
-            <a:off x="411480" y="3127248"/>
-            <a:ext cx="11338560" cy="274320"/>
+            <a:off x="9235440" y="2542032"/>
+            <a:ext cx="1014983" cy="822959"/>
           </a:xfrm>
           <a:prstGeom prst="rect">
             <a:avLst/>
           </a:prstGeom>
-          <a:noFill/>
+          <a:solidFill>
+            <a:srgbClr val="FFFFFF"/>
+          </a:solidFill>
           <a:ln>
             <a:noFill/>
           </a:ln>
@@ -45052,37 +44982,37 @@
           </a:fontRef>
         </p:style>
         <p:txBody>
-          <a:bodyPr rtlCol="0" anchor="t" wrap="square" lIns="54864" rIns="54864" tIns="54864" bIns="54864"/>
+          <a:bodyPr rtlCol="0" anchor="ctr" wrap="square" lIns="54864" rIns="54864" tIns="54864" bIns="54864"/>
           <a:lstStyle/>
           <a:p>
-            <a:pPr algn="l">
+            <a:pPr algn="ctr">
               <a:spcAft>
                 <a:spcPts val="200"/>
               </a:spcAft>
             </a:pPr>
             <a:r>
-              <a:rPr sz="900" b="0">
-                <a:solidFill>
-                  <a:srgbClr val="595959"/>
+              <a:rPr sz="1500" b="0">
+                <a:solidFill>
+                  <a:srgbClr val="FD5108"/>
                 </a:solidFill>
                 <a:latin typeface="微軟正黑體"/>
                 <a:ea typeface="微軟正黑體"/>
               </a:rPr>
-              <a:t>時間軸：橘色為台灣監理事件，灰色為國際標竿。　評等：● 有利　◐ 中等　○ 不利，為團隊依研究報告判斷，請會議校準。</a:t>
-            </a:r>
-          </a:p>
-        </p:txBody>
-      </p:sp>
-      <p:sp>
-        <p:nvSpPr>
-          <p:cNvPr id="27" name="Rectangle 26"/>
+              <a:t>●  ●  ●</a:t>
+            </a:r>
+          </a:p>
+        </p:txBody>
+      </p:sp>
+      <p:sp>
+        <p:nvSpPr>
+          <p:cNvPr id="26" name="Rectangle 25"/>
           <p:cNvSpPr/>
           <p:nvPr/>
         </p:nvSpPr>
         <p:spPr>
           <a:xfrm>
-            <a:off x="411480" y="3456432"/>
-            <a:ext cx="3072384" cy="365760"/>
+            <a:off x="10287000" y="2542032"/>
+            <a:ext cx="603503" cy="822959"/>
           </a:xfrm>
           <a:prstGeom prst="rect">
             <a:avLst/>
@@ -45110,43 +45040,43 @@
           </a:fontRef>
         </p:style>
         <p:txBody>
-          <a:bodyPr rtlCol="0" anchor="ctr" wrap="square" lIns="73152" rIns="73152" tIns="73152" bIns="73152"/>
+          <a:bodyPr rtlCol="0" anchor="ctr" wrap="square" lIns="54864" rIns="54864" tIns="54864" bIns="54864"/>
           <a:lstStyle/>
           <a:p>
-            <a:pPr algn="l">
+            <a:pPr algn="ctr">
               <a:spcAft>
                 <a:spcPts val="200"/>
               </a:spcAft>
             </a:pPr>
             <a:r>
-              <a:rPr sz="1100" b="1">
+              <a:rPr sz="1050" b="1">
                 <a:solidFill>
                   <a:srgbClr val="FFFFFF"/>
                 </a:solidFill>
                 <a:latin typeface="Arial"/>
                 <a:ea typeface="微軟正黑體"/>
               </a:rPr>
-              <a:t>服務</a:t>
-            </a:r>
-          </a:p>
-        </p:txBody>
-      </p:sp>
-      <p:sp>
-        <p:nvSpPr>
-          <p:cNvPr id="28" name="Rectangle 27"/>
+              <a:t>第一波</a:t>
+            </a:r>
+          </a:p>
+        </p:txBody>
+      </p:sp>
+      <p:sp>
+        <p:nvSpPr>
+          <p:cNvPr id="27" name="Rectangle 26"/>
           <p:cNvSpPr/>
           <p:nvPr/>
         </p:nvSpPr>
         <p:spPr>
           <a:xfrm>
-            <a:off x="3520440" y="3456432"/>
-            <a:ext cx="1197864" cy="365760"/>
+            <a:off x="10927080" y="2542032"/>
+            <a:ext cx="832103" cy="822959"/>
           </a:xfrm>
           <a:prstGeom prst="rect">
             <a:avLst/>
           </a:prstGeom>
           <a:solidFill>
-            <a:srgbClr val="FD5108"/>
+            <a:srgbClr val="FFFFFF"/>
           </a:solidFill>
           <a:ln>
             <a:noFill/>
@@ -45168,7 +45098,7 @@
           </a:fontRef>
         </p:style>
         <p:txBody>
-          <a:bodyPr rtlCol="0" anchor="ctr" wrap="square" lIns="73152" rIns="73152" tIns="73152" bIns="73152"/>
+          <a:bodyPr rtlCol="0" anchor="ctr" wrap="square" lIns="54864" rIns="54864" tIns="54864" bIns="54864"/>
           <a:lstStyle/>
           <a:p>
             <a:pPr algn="ctr">
@@ -45177,34 +45107,79 @@
               </a:spcAft>
             </a:pPr>
             <a:r>
-              <a:rPr sz="1100" b="1">
-                <a:solidFill>
-                  <a:srgbClr val="FFFFFF"/>
+              <a:rPr sz="1000" b="0" u="sng">
+                <a:solidFill>
+                  <a:srgbClr val="000000"/>
                 </a:solidFill>
                 <a:latin typeface="Arial"/>
                 <a:ea typeface="微軟正黑體"/>
+                <a:hlinkClick r:id="rId6"/>
               </a:rPr>
-              <a:t>需求迫切度</a:t>
-            </a:r>
-          </a:p>
-        </p:txBody>
-      </p:sp>
-      <p:sp>
-        <p:nvSpPr>
-          <p:cNvPr id="29" name="Rectangle 28"/>
+              <a:t>[9]</a:t>
+            </a:r>
+            <a:r>
+              <a:rPr sz="1000" b="0" u="sng">
+                <a:solidFill>
+                  <a:srgbClr val="000000"/>
+                </a:solidFill>
+                <a:latin typeface="Arial"/>
+                <a:ea typeface="微軟正黑體"/>
+                <a:hlinkClick r:id="rId7"/>
+              </a:rPr>
+              <a:t>[10]</a:t>
+            </a:r>
+            <a:r>
+              <a:rPr sz="1000" b="0" u="sng">
+                <a:solidFill>
+                  <a:srgbClr val="000000"/>
+                </a:solidFill>
+                <a:latin typeface="Arial"/>
+                <a:ea typeface="微軟正黑體"/>
+                <a:hlinkClick r:id="rId8"/>
+              </a:rPr>
+              <a:t>[11]</a:t>
+            </a:r>
+            <a:r>
+              <a:rPr sz="1000" b="0" u="sng">
+                <a:solidFill>
+                  <a:srgbClr val="000000"/>
+                </a:solidFill>
+                <a:latin typeface="Arial"/>
+                <a:ea typeface="微軟正黑體"/>
+                <a:hlinkClick r:id="rId9"/>
+              </a:rPr>
+              <a:t>[12]</a:t>
+            </a:r>
+            <a:r>
+              <a:rPr sz="1000" b="0" u="sng">
+                <a:solidFill>
+                  <a:srgbClr val="000000"/>
+                </a:solidFill>
+                <a:latin typeface="Arial"/>
+                <a:ea typeface="微軟正黑體"/>
+                <a:hlinkClick r:id="rId10"/>
+              </a:rPr>
+              <a:t>[13]</a:t>
+            </a:r>
+          </a:p>
+        </p:txBody>
+      </p:sp>
+      <p:sp>
+        <p:nvSpPr>
+          <p:cNvPr id="28" name="Rectangle 27"/>
           <p:cNvSpPr/>
           <p:nvPr/>
         </p:nvSpPr>
         <p:spPr>
           <a:xfrm>
-            <a:off x="4754880" y="3456432"/>
-            <a:ext cx="1197864" cy="365760"/>
+            <a:off x="411480" y="3401568"/>
+            <a:ext cx="1655064" cy="822959"/>
           </a:xfrm>
           <a:prstGeom prst="rect">
             <a:avLst/>
           </a:prstGeom>
           <a:solidFill>
-            <a:srgbClr val="FD5108"/>
+            <a:srgbClr val="EBEBEB"/>
           </a:solidFill>
           <a:ln>
             <a:noFill/>
@@ -45226,10 +45201,10 @@
           </a:fontRef>
         </p:style>
         <p:txBody>
-          <a:bodyPr rtlCol="0" anchor="ctr" wrap="square" lIns="73152" rIns="73152" tIns="73152" bIns="73152"/>
+          <a:bodyPr rtlCol="0" anchor="ctr" wrap="square" lIns="54864" rIns="54864" tIns="54864" bIns="54864"/>
           <a:lstStyle/>
           <a:p>
-            <a:pPr algn="ctr">
+            <a:pPr algn="l">
               <a:spcAft>
                 <a:spcPts val="200"/>
               </a:spcAft>
@@ -45237,32 +45212,32 @@
             <a:r>
               <a:rPr sz="1100" b="1">
                 <a:solidFill>
-                  <a:srgbClr val="FFFFFF"/>
+                  <a:srgbClr val="000000"/>
                 </a:solidFill>
                 <a:latin typeface="Arial"/>
                 <a:ea typeface="微軟正黑體"/>
               </a:rPr>
-              <a:t>離既有服務</a:t>
-            </a:r>
-          </a:p>
-        </p:txBody>
-      </p:sp>
-      <p:sp>
-        <p:nvSpPr>
-          <p:cNvPr id="30" name="Rectangle 29"/>
+              <a:t>代理型 AI 核保與理賠</a:t>
+            </a:r>
+          </a:p>
+        </p:txBody>
+      </p:sp>
+      <p:sp>
+        <p:nvSpPr>
+          <p:cNvPr id="29" name="Rectangle 28"/>
           <p:cNvSpPr/>
           <p:nvPr/>
         </p:nvSpPr>
         <p:spPr>
           <a:xfrm>
-            <a:off x="5989320" y="3456432"/>
-            <a:ext cx="1197864" cy="365760"/>
+            <a:off x="2103120" y="3401568"/>
+            <a:ext cx="2935224" cy="822959"/>
           </a:xfrm>
           <a:prstGeom prst="rect">
             <a:avLst/>
           </a:prstGeom>
           <a:solidFill>
-            <a:srgbClr val="FD5108"/>
+            <a:srgbClr val="EBEBEB"/>
           </a:solidFill>
           <a:ln>
             <a:noFill/>
@@ -45284,43 +45259,43 @@
           </a:fontRef>
         </p:style>
         <p:txBody>
-          <a:bodyPr rtlCol="0" anchor="ctr" wrap="square" lIns="73152" rIns="73152" tIns="73152" bIns="73152"/>
+          <a:bodyPr rtlCol="0" anchor="ctr" wrap="square" lIns="54864" rIns="54864" tIns="54864" bIns="54864"/>
           <a:lstStyle/>
           <a:p>
-            <a:pPr algn="ctr">
+            <a:pPr algn="l">
               <a:spcAft>
                 <a:spcPts val="200"/>
               </a:spcAft>
             </a:pPr>
             <a:r>
-              <a:rPr sz="1100" b="1">
-                <a:solidFill>
-                  <a:srgbClr val="FFFFFF"/>
+              <a:rPr sz="1000" b="0">
+                <a:solidFill>
+                  <a:srgbClr val="000000"/>
                 </a:solidFill>
                 <a:latin typeface="Arial"/>
                 <a:ea typeface="微軟正黑體"/>
               </a:rPr>
-              <a:t>首案週期</a:t>
-            </a:r>
-          </a:p>
-        </p:txBody>
-      </p:sp>
-      <p:sp>
-        <p:nvSpPr>
-          <p:cNvPr id="31" name="Rectangle 30"/>
+              <a:t>多數停在單點智能助理；Celent：22% 保險公司計畫 2026 年底前上線代理型 AI</a:t>
+            </a:r>
+          </a:p>
+        </p:txBody>
+      </p:sp>
+      <p:sp>
+        <p:nvSpPr>
+          <p:cNvPr id="30" name="Rectangle 29"/>
           <p:cNvSpPr/>
           <p:nvPr/>
         </p:nvSpPr>
         <p:spPr>
           <a:xfrm>
-            <a:off x="7223760" y="3456432"/>
-            <a:ext cx="3483864" cy="365760"/>
+            <a:off x="5074920" y="3401568"/>
+            <a:ext cx="2340864" cy="822959"/>
           </a:xfrm>
           <a:prstGeom prst="rect">
             <a:avLst/>
           </a:prstGeom>
           <a:solidFill>
-            <a:srgbClr val="FD5108"/>
+            <a:srgbClr val="EBEBEB"/>
           </a:solidFill>
           <a:ln>
             <a:noFill/>
@@ -45342,7 +45317,7 @@
           </a:fontRef>
         </p:style>
         <p:txBody>
-          <a:bodyPr rtlCol="0" anchor="ctr" wrap="square" lIns="73152" rIns="73152" tIns="73152" bIns="73152"/>
+          <a:bodyPr rtlCol="0" anchor="ctr" wrap="square" lIns="54864" rIns="54864" tIns="54864" bIns="54864"/>
           <a:lstStyle/>
           <a:p>
             <a:pPr algn="l">
@@ -45351,34 +45326,34 @@
               </a:spcAft>
             </a:pPr>
             <a:r>
-              <a:rPr sz="1100" b="1">
-                <a:solidFill>
-                  <a:srgbClr val="FFFFFF"/>
+              <a:rPr sz="1000" b="0">
+                <a:solidFill>
+                  <a:srgbClr val="000000"/>
                 </a:solidFill>
                 <a:latin typeface="Arial"/>
                 <a:ea typeface="微軟正黑體"/>
               </a:rPr>
-              <a:t>切入案</a:t>
-            </a:r>
-          </a:p>
-        </p:txBody>
-      </p:sp>
-      <p:sp>
-        <p:nvSpPr>
-          <p:cNvPr id="32" name="Rectangle 31"/>
+              <a:t>Manulife MAUDE 自動核准逾 58% 合格壽險案件、約 2 分鐘通知；McKinsey 核保作業系統</a:t>
+            </a:r>
+          </a:p>
+        </p:txBody>
+      </p:sp>
+      <p:sp>
+        <p:nvSpPr>
+          <p:cNvPr id="31" name="Rectangle 30"/>
           <p:cNvSpPr/>
           <p:nvPr/>
         </p:nvSpPr>
         <p:spPr>
           <a:xfrm>
-            <a:off x="10744200" y="3456432"/>
-            <a:ext cx="969264" cy="365760"/>
+            <a:off x="7452360" y="3401568"/>
+            <a:ext cx="1746504" cy="822959"/>
           </a:xfrm>
           <a:prstGeom prst="rect">
             <a:avLst/>
           </a:prstGeom>
           <a:solidFill>
-            <a:srgbClr val="FD5108"/>
+            <a:srgbClr val="EBEBEB"/>
           </a:solidFill>
           <a:ln>
             <a:noFill/>
@@ -45400,37 +45375,37 @@
           </a:fontRef>
         </p:style>
         <p:txBody>
-          <a:bodyPr rtlCol="0" anchor="ctr" wrap="square" lIns="73152" rIns="73152" tIns="73152" bIns="73152"/>
+          <a:bodyPr rtlCol="0" anchor="ctr" wrap="square" lIns="54864" rIns="54864" tIns="54864" bIns="54864"/>
           <a:lstStyle/>
           <a:p>
-            <a:pPr algn="ctr">
+            <a:pPr algn="l">
               <a:spcAft>
                 <a:spcPts val="200"/>
               </a:spcAft>
             </a:pPr>
             <a:r>
-              <a:rPr sz="1100" b="1">
-                <a:solidFill>
-                  <a:srgbClr val="FFFFFF"/>
+              <a:rPr sz="1000" b="0">
+                <a:solidFill>
+                  <a:srgbClr val="000000"/>
                 </a:solidFill>
                 <a:latin typeface="Arial"/>
                 <a:ea typeface="微軟正黑體"/>
               </a:rPr>
-              <a:t>建議</a:t>
-            </a:r>
-          </a:p>
-        </p:txBody>
-      </p:sp>
-      <p:sp>
-        <p:nvSpPr>
-          <p:cNvPr id="33" name="Rectangle 32"/>
+              <a:t>6–8 週單一險種工作流藍圖</a:t>
+            </a:r>
+          </a:p>
+        </p:txBody>
+      </p:sp>
+      <p:sp>
+        <p:nvSpPr>
+          <p:cNvPr id="32" name="Rectangle 31"/>
           <p:cNvSpPr/>
           <p:nvPr/>
         </p:nvSpPr>
         <p:spPr>
           <a:xfrm>
-            <a:off x="411480" y="3858768"/>
-            <a:ext cx="3072384" cy="393192"/>
+            <a:off x="9235440" y="3401568"/>
+            <a:ext cx="1014983" cy="822959"/>
           </a:xfrm>
           <a:prstGeom prst="rect">
             <a:avLst/>
@@ -45458,43 +45433,43 @@
           </a:fontRef>
         </p:style>
         <p:txBody>
-          <a:bodyPr rtlCol="0" anchor="ctr" wrap="square" lIns="73152" rIns="73152" tIns="73152" bIns="73152"/>
+          <a:bodyPr rtlCol="0" anchor="ctr" wrap="square" lIns="54864" rIns="54864" tIns="54864" bIns="54864"/>
           <a:lstStyle/>
           <a:p>
-            <a:pPr algn="l">
+            <a:pPr algn="ctr">
               <a:spcAft>
                 <a:spcPts val="200"/>
               </a:spcAft>
             </a:pPr>
             <a:r>
-              <a:rPr sz="1100" b="1">
-                <a:solidFill>
-                  <a:srgbClr val="000000"/>
-                </a:solidFill>
-                <a:latin typeface="Arial"/>
+              <a:rPr sz="1500" b="0">
+                <a:solidFill>
+                  <a:srgbClr val="FD5108"/>
+                </a:solidFill>
+                <a:latin typeface="微軟正黑體"/>
                 <a:ea typeface="微軟正黑體"/>
               </a:rPr>
-              <a:t>IFRS 17／TW-ICS 後財務轉型</a:t>
-            </a:r>
-          </a:p>
-        </p:txBody>
-      </p:sp>
-      <p:sp>
-        <p:nvSpPr>
-          <p:cNvPr id="34" name="Rectangle 33"/>
+              <a:t>●  ◐  ◐</a:t>
+            </a:r>
+          </a:p>
+        </p:txBody>
+      </p:sp>
+      <p:sp>
+        <p:nvSpPr>
+          <p:cNvPr id="33" name="Rectangle 32"/>
           <p:cNvSpPr/>
           <p:nvPr/>
         </p:nvSpPr>
         <p:spPr>
           <a:xfrm>
-            <a:off x="3520440" y="3858768"/>
-            <a:ext cx="1197864" cy="393192"/>
+            <a:off x="10287000" y="3401568"/>
+            <a:ext cx="603503" cy="822959"/>
           </a:xfrm>
           <a:prstGeom prst="rect">
             <a:avLst/>
           </a:prstGeom>
           <a:solidFill>
-            <a:srgbClr val="EBEBEB"/>
+            <a:srgbClr val="FFE8D4"/>
           </a:solidFill>
           <a:ln>
             <a:noFill/>
@@ -45516,7 +45491,7 @@
           </a:fontRef>
         </p:style>
         <p:txBody>
-          <a:bodyPr rtlCol="0" anchor="ctr" wrap="square" lIns="73152" rIns="73152" tIns="73152" bIns="73152"/>
+          <a:bodyPr rtlCol="0" anchor="ctr" wrap="square" lIns="54864" rIns="54864" tIns="54864" bIns="54864"/>
           <a:lstStyle/>
           <a:p>
             <a:pPr algn="ctr">
@@ -45525,28 +45500,28 @@
               </a:spcAft>
             </a:pPr>
             <a:r>
-              <a:rPr sz="1600" b="0">
+              <a:rPr sz="1050" b="1">
                 <a:solidFill>
                   <a:srgbClr val="FD5108"/>
                 </a:solidFill>
-                <a:latin typeface="微軟正黑體"/>
+                <a:latin typeface="Arial"/>
                 <a:ea typeface="微軟正黑體"/>
               </a:rPr>
-              <a:t>●</a:t>
-            </a:r>
-          </a:p>
-        </p:txBody>
-      </p:sp>
-      <p:sp>
-        <p:nvSpPr>
-          <p:cNvPr id="35" name="Rectangle 34"/>
+              <a:t>第二波</a:t>
+            </a:r>
+          </a:p>
+        </p:txBody>
+      </p:sp>
+      <p:sp>
+        <p:nvSpPr>
+          <p:cNvPr id="34" name="Rectangle 33"/>
           <p:cNvSpPr/>
           <p:nvPr/>
         </p:nvSpPr>
         <p:spPr>
           <a:xfrm>
-            <a:off x="4754880" y="3858768"/>
-            <a:ext cx="1197864" cy="393192"/>
+            <a:off x="10927080" y="3401568"/>
+            <a:ext cx="832103" cy="822959"/>
           </a:xfrm>
           <a:prstGeom prst="rect">
             <a:avLst/>
@@ -45574,7 +45549,7 @@
           </a:fontRef>
         </p:style>
         <p:txBody>
-          <a:bodyPr rtlCol="0" anchor="ctr" wrap="square" lIns="73152" rIns="73152" tIns="73152" bIns="73152"/>
+          <a:bodyPr rtlCol="0" anchor="ctr" wrap="square" lIns="54864" rIns="54864" tIns="54864" bIns="54864"/>
           <a:lstStyle/>
           <a:p>
             <a:pPr algn="ctr">
@@ -45583,34 +45558,57 @@
               </a:spcAft>
             </a:pPr>
             <a:r>
-              <a:rPr sz="1600" b="0">
-                <a:solidFill>
-                  <a:srgbClr val="FD5108"/>
-                </a:solidFill>
-                <a:latin typeface="微軟正黑體"/>
+              <a:rPr sz="1000" b="0" u="sng">
+                <a:solidFill>
+                  <a:srgbClr val="000000"/>
+                </a:solidFill>
+                <a:latin typeface="Arial"/>
                 <a:ea typeface="微軟正黑體"/>
+                <a:hlinkClick r:id="rId11"/>
               </a:rPr>
-              <a:t>●</a:t>
-            </a:r>
-          </a:p>
-        </p:txBody>
-      </p:sp>
-      <p:sp>
-        <p:nvSpPr>
-          <p:cNvPr id="36" name="Rectangle 35"/>
+              <a:t>[14]</a:t>
+            </a:r>
+            <a:r>
+              <a:rPr sz="1000" b="0" u="sng">
+                <a:solidFill>
+                  <a:srgbClr val="000000"/>
+                </a:solidFill>
+                <a:latin typeface="Arial"/>
+                <a:ea typeface="微軟正黑體"/>
+                <a:hlinkClick r:id="rId12"/>
+              </a:rPr>
+              <a:t>[15]</a:t>
+            </a:r>
+            <a:r>
+              <a:rPr sz="1000" b="0" u="sng">
+                <a:solidFill>
+                  <a:srgbClr val="000000"/>
+                </a:solidFill>
+                <a:latin typeface="Arial"/>
+                <a:ea typeface="微軟正黑體"/>
+                <a:hlinkClick r:id="rId13"/>
+              </a:rPr>
+              <a:t>[16]</a:t>
+            </a:r>
+          </a:p>
+        </p:txBody>
+      </p:sp>
+      <p:sp>
+        <p:nvSpPr>
+          <p:cNvPr id="35" name="Rectangle 34"/>
           <p:cNvSpPr/>
           <p:nvPr/>
         </p:nvSpPr>
         <p:spPr>
           <a:xfrm>
-            <a:off x="5989320" y="3858768"/>
-            <a:ext cx="1197864" cy="393192"/>
+            <a:off x="411480" y="4261104"/>
+            <a:ext cx="1655064" cy="822959"/>
           </a:xfrm>
           <a:prstGeom prst="rect">
             <a:avLst/>
           </a:prstGeom>
           <a:solidFill>
-            <a:srgbClr val="EBEBEB"/>
+            <a:srgbClr val="FFFFFF"/>
           </a:solidFill>
           <a:ln>
             <a:noFill/>
@@ -45632,43 +45630,43 @@
           </a:fontRef>
         </p:style>
         <p:txBody>
-          <a:bodyPr rtlCol="0" anchor="ctr" wrap="square" lIns="73152" rIns="73152" tIns="73152" bIns="73152"/>
+          <a:bodyPr rtlCol="0" anchor="ctr" wrap="square" lIns="54864" rIns="54864" tIns="54864" bIns="54864"/>
           <a:lstStyle/>
           <a:p>
-            <a:pPr algn="ctr">
+            <a:pPr algn="l">
               <a:spcAft>
                 <a:spcPts val="200"/>
               </a:spcAft>
             </a:pPr>
             <a:r>
-              <a:rPr sz="1600" b="0">
-                <a:solidFill>
-                  <a:srgbClr val="FD5108"/>
-                </a:solidFill>
-                <a:latin typeface="微軟正黑體"/>
+              <a:rPr sz="1100" b="1">
+                <a:solidFill>
+                  <a:srgbClr val="000000"/>
+                </a:solidFill>
+                <a:latin typeface="Arial"/>
                 <a:ea typeface="微軟正黑體"/>
               </a:rPr>
-              <a:t>●</a:t>
-            </a:r>
-          </a:p>
-        </p:txBody>
-      </p:sp>
-      <p:sp>
-        <p:nvSpPr>
-          <p:cNvPr id="37" name="Rectangle 36"/>
+              <a:t>AI 加速核心現代化與雲端</a:t>
+            </a:r>
+          </a:p>
+        </p:txBody>
+      </p:sp>
+      <p:sp>
+        <p:nvSpPr>
+          <p:cNvPr id="36" name="Rectangle 35"/>
           <p:cNvSpPr/>
           <p:nvPr/>
         </p:nvSpPr>
         <p:spPr>
           <a:xfrm>
-            <a:off x="7223760" y="3858768"/>
-            <a:ext cx="3483864" cy="393192"/>
+            <a:off x="2103120" y="4261104"/>
+            <a:ext cx="2935224" cy="822959"/>
           </a:xfrm>
           <a:prstGeom prst="rect">
             <a:avLst/>
           </a:prstGeom>
           <a:solidFill>
-            <a:srgbClr val="EBEBEB"/>
+            <a:srgbClr val="FFFFFF"/>
           </a:solidFill>
           <a:ln>
             <a:noFill/>
@@ -45690,7 +45688,7 @@
           </a:fontRef>
         </p:style>
         <p:txBody>
-          <a:bodyPr rtlCol="0" anchor="ctr" wrap="square" lIns="73152" rIns="73152" tIns="73152" bIns="73152"/>
+          <a:bodyPr rtlCol="0" anchor="ctr" wrap="square" lIns="54864" rIns="54864" tIns="54864" bIns="54864"/>
           <a:lstStyle/>
           <a:p>
             <a:pPr algn="l">
@@ -45699,34 +45697,34 @@
               </a:spcAft>
             </a:pPr>
             <a:r>
-              <a:rPr sz="1100" b="0">
+              <a:rPr sz="1000" b="0">
                 <a:solidFill>
                   <a:srgbClr val="000000"/>
                 </a:solidFill>
                 <a:latin typeface="Arial"/>
                 <a:ea typeface="微軟正黑體"/>
               </a:rPr>
-              <a:t>首年結帳瓶頸診斷＋CSM 儀表板</a:t>
-            </a:r>
-          </a:p>
-        </p:txBody>
-      </p:sp>
-      <p:sp>
-        <p:nvSpPr>
-          <p:cNvPr id="38" name="Rectangle 37"/>
+              <a:t>委外新辦法 2025-12-31 施行、雲端自律規範 2026-06 修正；舊核心難以支援 API 與 AI 串接</a:t>
+            </a:r>
+          </a:p>
+        </p:txBody>
+      </p:sp>
+      <p:sp>
+        <p:nvSpPr>
+          <p:cNvPr id="37" name="Rectangle 36"/>
           <p:cNvSpPr/>
           <p:nvPr/>
         </p:nvSpPr>
         <p:spPr>
           <a:xfrm>
-            <a:off x="10744200" y="3858768"/>
-            <a:ext cx="969264" cy="393192"/>
+            <a:off x="5074920" y="4261104"/>
+            <a:ext cx="2340864" cy="822959"/>
           </a:xfrm>
           <a:prstGeom prst="rect">
             <a:avLst/>
           </a:prstGeom>
           <a:solidFill>
-            <a:srgbClr val="FD5108"/>
+            <a:srgbClr val="FFFFFF"/>
           </a:solidFill>
           <a:ln>
             <a:noFill/>
@@ -45748,37 +45746,37 @@
           </a:fontRef>
         </p:style>
         <p:txBody>
-          <a:bodyPr rtlCol="0" anchor="ctr" wrap="square" lIns="73152" rIns="73152" tIns="73152" bIns="73152"/>
+          <a:bodyPr rtlCol="0" anchor="ctr" wrap="square" lIns="54864" rIns="54864" tIns="54864" bIns="54864"/>
           <a:lstStyle/>
           <a:p>
-            <a:pPr algn="ctr">
+            <a:pPr algn="l">
               <a:spcAft>
                 <a:spcPts val="200"/>
               </a:spcAft>
             </a:pPr>
             <a:r>
-              <a:rPr sz="1100" b="1">
-                <a:solidFill>
-                  <a:srgbClr val="FFFFFF"/>
+              <a:rPr sz="1000" b="0">
+                <a:solidFill>
+                  <a:srgbClr val="000000"/>
                 </a:solidFill>
                 <a:latin typeface="Arial"/>
                 <a:ea typeface="微軟正黑體"/>
               </a:rPr>
-              <a:t>第一波</a:t>
-            </a:r>
-          </a:p>
-        </p:txBody>
-      </p:sp>
-      <p:sp>
-        <p:nvSpPr>
-          <p:cNvPr id="39" name="Rectangle 38"/>
+              <a:t>McKinsey：代理型 AI 可壓縮舊程式解析、測試與對帳的重工</a:t>
+            </a:r>
+          </a:p>
+        </p:txBody>
+      </p:sp>
+      <p:sp>
+        <p:nvSpPr>
+          <p:cNvPr id="38" name="Rectangle 37"/>
           <p:cNvSpPr/>
           <p:nvPr/>
         </p:nvSpPr>
         <p:spPr>
           <a:xfrm>
-            <a:off x="411480" y="4288536"/>
-            <a:ext cx="3072384" cy="393192"/>
+            <a:off x="7452360" y="4261104"/>
+            <a:ext cx="1746504" cy="822959"/>
           </a:xfrm>
           <a:prstGeom prst="rect">
             <a:avLst/>
@@ -45806,7 +45804,7 @@
           </a:fontRef>
         </p:style>
         <p:txBody>
-          <a:bodyPr rtlCol="0" anchor="ctr" wrap="square" lIns="73152" rIns="73152" tIns="73152" bIns="73152"/>
+          <a:bodyPr rtlCol="0" anchor="ctr" wrap="square" lIns="54864" rIns="54864" tIns="54864" bIns="54864"/>
           <a:lstStyle/>
           <a:p>
             <a:pPr algn="l">
@@ -45815,28 +45813,28 @@
               </a:spcAft>
             </a:pPr>
             <a:r>
-              <a:rPr sz="1100" b="1">
+              <a:rPr sz="1000" b="0">
                 <a:solidFill>
                   <a:srgbClr val="000000"/>
                 </a:solidFill>
                 <a:latin typeface="Arial"/>
                 <a:ea typeface="微軟正黑體"/>
               </a:rPr>
-              <a:t>AI 清冊、模型驗證與護欄</a:t>
-            </a:r>
-          </a:p>
-        </p:txBody>
-      </p:sp>
-      <p:sp>
-        <p:nvSpPr>
-          <p:cNvPr id="40" name="Rectangle 39"/>
+              <a:t>雲端委外合規評估，或周邊系統 AI 重寫 PoC</a:t>
+            </a:r>
+          </a:p>
+        </p:txBody>
+      </p:sp>
+      <p:sp>
+        <p:nvSpPr>
+          <p:cNvPr id="39" name="Rectangle 38"/>
           <p:cNvSpPr/>
           <p:nvPr/>
         </p:nvSpPr>
         <p:spPr>
           <a:xfrm>
-            <a:off x="3520440" y="4288536"/>
-            <a:ext cx="1197864" cy="393192"/>
+            <a:off x="9235440" y="4261104"/>
+            <a:ext cx="1014983" cy="822959"/>
           </a:xfrm>
           <a:prstGeom prst="rect">
             <a:avLst/>
@@ -45864,7 +45862,7 @@
           </a:fontRef>
         </p:style>
         <p:txBody>
-          <a:bodyPr rtlCol="0" anchor="ctr" wrap="square" lIns="73152" rIns="73152" tIns="73152" bIns="73152"/>
+          <a:bodyPr rtlCol="0" anchor="ctr" wrap="square" lIns="54864" rIns="54864" tIns="54864" bIns="54864"/>
           <a:lstStyle/>
           <a:p>
             <a:pPr algn="ctr">
@@ -45873,34 +45871,34 @@
               </a:spcAft>
             </a:pPr>
             <a:r>
-              <a:rPr sz="1600" b="0">
+              <a:rPr sz="1500" b="0">
                 <a:solidFill>
                   <a:srgbClr val="FD5108"/>
                 </a:solidFill>
                 <a:latin typeface="微軟正黑體"/>
                 <a:ea typeface="微軟正黑體"/>
               </a:rPr>
-              <a:t>●</a:t>
-            </a:r>
-          </a:p>
-        </p:txBody>
-      </p:sp>
-      <p:sp>
-        <p:nvSpPr>
-          <p:cNvPr id="41" name="Rectangle 40"/>
+              <a:t>◐  ◐  ○</a:t>
+            </a:r>
+          </a:p>
+        </p:txBody>
+      </p:sp>
+      <p:sp>
+        <p:nvSpPr>
+          <p:cNvPr id="40" name="Rectangle 39"/>
           <p:cNvSpPr/>
           <p:nvPr/>
         </p:nvSpPr>
         <p:spPr>
           <a:xfrm>
-            <a:off x="4754880" y="4288536"/>
-            <a:ext cx="1197864" cy="393192"/>
+            <a:off x="10287000" y="4261104"/>
+            <a:ext cx="603503" cy="822959"/>
           </a:xfrm>
           <a:prstGeom prst="rect">
             <a:avLst/>
           </a:prstGeom>
           <a:solidFill>
-            <a:srgbClr val="FFFFFF"/>
+            <a:srgbClr val="FFE8D4"/>
           </a:solidFill>
           <a:ln>
             <a:noFill/>
@@ -45922,7 +45920,7 @@
           </a:fontRef>
         </p:style>
         <p:txBody>
-          <a:bodyPr rtlCol="0" anchor="ctr" wrap="square" lIns="73152" rIns="73152" tIns="73152" bIns="73152"/>
+          <a:bodyPr rtlCol="0" anchor="ctr" wrap="square" lIns="54864" rIns="54864" tIns="54864" bIns="54864"/>
           <a:lstStyle/>
           <a:p>
             <a:pPr algn="ctr">
@@ -45931,28 +45929,28 @@
               </a:spcAft>
             </a:pPr>
             <a:r>
-              <a:rPr sz="1600" b="0">
+              <a:rPr sz="1050" b="1">
                 <a:solidFill>
                   <a:srgbClr val="FD5108"/>
                 </a:solidFill>
-                <a:latin typeface="微軟正黑體"/>
+                <a:latin typeface="Arial"/>
                 <a:ea typeface="微軟正黑體"/>
               </a:rPr>
-              <a:t>●</a:t>
-            </a:r>
-          </a:p>
-        </p:txBody>
-      </p:sp>
-      <p:sp>
-        <p:nvSpPr>
-          <p:cNvPr id="42" name="Rectangle 41"/>
+              <a:t>第二波</a:t>
+            </a:r>
+          </a:p>
+        </p:txBody>
+      </p:sp>
+      <p:sp>
+        <p:nvSpPr>
+          <p:cNvPr id="41" name="Rectangle 40"/>
           <p:cNvSpPr/>
           <p:nvPr/>
         </p:nvSpPr>
         <p:spPr>
           <a:xfrm>
-            <a:off x="5989320" y="4288536"/>
-            <a:ext cx="1197864" cy="393192"/>
+            <a:off x="10927080" y="4261104"/>
+            <a:ext cx="832103" cy="822959"/>
           </a:xfrm>
           <a:prstGeom prst="rect">
             <a:avLst/>
@@ -45980,7 +45978,7 @@
           </a:fontRef>
         </p:style>
         <p:txBody>
-          <a:bodyPr rtlCol="0" anchor="ctr" wrap="square" lIns="73152" rIns="73152" tIns="73152" bIns="73152"/>
+          <a:bodyPr rtlCol="0" anchor="ctr" wrap="square" lIns="54864" rIns="54864" tIns="54864" bIns="54864"/>
           <a:lstStyle/>
           <a:p>
             <a:pPr algn="ctr">
@@ -45989,34 +45987,57 @@
               </a:spcAft>
             </a:pPr>
             <a:r>
-              <a:rPr sz="1600" b="0">
-                <a:solidFill>
-                  <a:srgbClr val="FD5108"/>
-                </a:solidFill>
-                <a:latin typeface="微軟正黑體"/>
+              <a:rPr sz="1000" b="0" u="sng">
+                <a:solidFill>
+                  <a:srgbClr val="000000"/>
+                </a:solidFill>
+                <a:latin typeface="Arial"/>
                 <a:ea typeface="微軟正黑體"/>
+                <a:hlinkClick r:id="rId14"/>
               </a:rPr>
-              <a:t>●</a:t>
-            </a:r>
-          </a:p>
-        </p:txBody>
-      </p:sp>
-      <p:sp>
-        <p:nvSpPr>
-          <p:cNvPr id="43" name="Rectangle 42"/>
+              <a:t>[17]</a:t>
+            </a:r>
+            <a:r>
+              <a:rPr sz="1000" b="0" u="sng">
+                <a:solidFill>
+                  <a:srgbClr val="000000"/>
+                </a:solidFill>
+                <a:latin typeface="Arial"/>
+                <a:ea typeface="微軟正黑體"/>
+                <a:hlinkClick r:id="rId15"/>
+              </a:rPr>
+              <a:t>[18]</a:t>
+            </a:r>
+            <a:r>
+              <a:rPr sz="1000" b="0" u="sng">
+                <a:solidFill>
+                  <a:srgbClr val="000000"/>
+                </a:solidFill>
+                <a:latin typeface="Arial"/>
+                <a:ea typeface="微軟正黑體"/>
+                <a:hlinkClick r:id="rId16"/>
+              </a:rPr>
+              <a:t>[19]</a:t>
+            </a:r>
+          </a:p>
+        </p:txBody>
+      </p:sp>
+      <p:sp>
+        <p:nvSpPr>
+          <p:cNvPr id="42" name="Rectangle 41"/>
           <p:cNvSpPr/>
           <p:nvPr/>
         </p:nvSpPr>
         <p:spPr>
           <a:xfrm>
-            <a:off x="7223760" y="4288536"/>
-            <a:ext cx="3483864" cy="393192"/>
+            <a:off x="411480" y="5120640"/>
+            <a:ext cx="1655064" cy="822959"/>
           </a:xfrm>
           <a:prstGeom prst="rect">
             <a:avLst/>
           </a:prstGeom>
           <a:solidFill>
-            <a:srgbClr val="FFFFFF"/>
+            <a:srgbClr val="EBEBEB"/>
           </a:solidFill>
           <a:ln>
             <a:noFill/>
@@ -46038,7 +46059,7 @@
           </a:fontRef>
         </p:style>
         <p:txBody>
-          <a:bodyPr rtlCol="0" anchor="ctr" wrap="square" lIns="73152" rIns="73152" tIns="73152" bIns="73152"/>
+          <a:bodyPr rtlCol="0" anchor="ctr" wrap="square" lIns="54864" rIns="54864" tIns="54864" bIns="54864"/>
           <a:lstStyle/>
           <a:p>
             <a:pPr algn="l">
@@ -46047,34 +46068,34 @@
               </a:spcAft>
             </a:pPr>
             <a:r>
-              <a:rPr sz="1100" b="0">
+              <a:rPr sz="1100" b="1">
                 <a:solidFill>
                   <a:srgbClr val="000000"/>
                 </a:solidFill>
                 <a:latin typeface="Arial"/>
                 <a:ea typeface="微軟正黑體"/>
               </a:rPr>
-              <a:t>4–6 週 AI 清冊盤點與合規健檢</a:t>
-            </a:r>
-          </a:p>
-        </p:txBody>
-      </p:sp>
-      <p:sp>
-        <p:nvSpPr>
-          <p:cNvPr id="44" name="Rectangle 43"/>
+              <a:t>深偽理賠反詐欺</a:t>
+            </a:r>
+          </a:p>
+        </p:txBody>
+      </p:sp>
+      <p:sp>
+        <p:nvSpPr>
+          <p:cNvPr id="43" name="Rectangle 42"/>
           <p:cNvSpPr/>
           <p:nvPr/>
         </p:nvSpPr>
         <p:spPr>
           <a:xfrm>
-            <a:off x="10744200" y="4288536"/>
-            <a:ext cx="969264" cy="393192"/>
+            <a:off x="2103120" y="5120640"/>
+            <a:ext cx="2935224" cy="822959"/>
           </a:xfrm>
           <a:prstGeom prst="rect">
             <a:avLst/>
           </a:prstGeom>
           <a:solidFill>
-            <a:srgbClr val="FD5108"/>
+            <a:srgbClr val="EBEBEB"/>
           </a:solidFill>
           <a:ln>
             <a:noFill/>
@@ -46096,37 +46117,37 @@
           </a:fontRef>
         </p:style>
         <p:txBody>
-          <a:bodyPr rtlCol="0" anchor="ctr" wrap="square" lIns="73152" rIns="73152" tIns="73152" bIns="73152"/>
+          <a:bodyPr rtlCol="0" anchor="ctr" wrap="square" lIns="54864" rIns="54864" tIns="54864" bIns="54864"/>
           <a:lstStyle/>
           <a:p>
-            <a:pPr algn="ctr">
+            <a:pPr algn="l">
               <a:spcAft>
                 <a:spcPts val="200"/>
               </a:spcAft>
             </a:pPr>
             <a:r>
-              <a:rPr sz="1100" b="1">
-                <a:solidFill>
-                  <a:srgbClr val="FFFFFF"/>
+              <a:rPr sz="1000" b="0">
+                <a:solidFill>
+                  <a:srgbClr val="000000"/>
                 </a:solidFill>
                 <a:latin typeface="Arial"/>
                 <a:ea typeface="微軟正黑體"/>
               </a:rPr>
-              <a:t>第一波</a:t>
-            </a:r>
-          </a:p>
-        </p:txBody>
-      </p:sp>
-      <p:sp>
-        <p:nvSpPr>
-          <p:cNvPr id="45" name="Rectangle 44"/>
+              <a:t>修圖車損、偽造醫療單據門檻降低，規則引擎難以辨識</a:t>
+            </a:r>
+          </a:p>
+        </p:txBody>
+      </p:sp>
+      <p:sp>
+        <p:nvSpPr>
+          <p:cNvPr id="44" name="Rectangle 43"/>
           <p:cNvSpPr/>
           <p:nvPr/>
         </p:nvSpPr>
         <p:spPr>
           <a:xfrm>
-            <a:off x="411480" y="4718304"/>
-            <a:ext cx="3072384" cy="393192"/>
+            <a:off x="5074920" y="5120640"/>
+            <a:ext cx="2340864" cy="822959"/>
           </a:xfrm>
           <a:prstGeom prst="rect">
             <a:avLst/>
@@ -46154,7 +46175,7 @@
           </a:fontRef>
         </p:style>
         <p:txBody>
-          <a:bodyPr rtlCol="0" anchor="ctr" wrap="square" lIns="73152" rIns="73152" tIns="73152" bIns="73152"/>
+          <a:bodyPr rtlCol="0" anchor="ctr" wrap="square" lIns="54864" rIns="54864" tIns="54864" bIns="54864"/>
           <a:lstStyle/>
           <a:p>
             <a:pPr algn="l">
@@ -46163,28 +46184,28 @@
               </a:spcAft>
             </a:pPr>
             <a:r>
-              <a:rPr sz="1100" b="1">
+              <a:rPr sz="1000" b="0">
                 <a:solidFill>
                   <a:srgbClr val="000000"/>
                 </a:solidFill>
                 <a:latin typeface="Arial"/>
                 <a:ea typeface="微軟正黑體"/>
               </a:rPr>
-              <a:t>代理型 AI 核保與理賠</a:t>
-            </a:r>
-          </a:p>
-        </p:txBody>
-      </p:sp>
-      <p:sp>
-        <p:nvSpPr>
-          <p:cNvPr id="46" name="Rectangle 45"/>
+              <a:t>Swiss Re SONAR 2025 將「深偽助長保險詐欺」列為高影響新興風險</a:t>
+            </a:r>
+          </a:p>
+        </p:txBody>
+      </p:sp>
+      <p:sp>
+        <p:nvSpPr>
+          <p:cNvPr id="45" name="Rectangle 44"/>
           <p:cNvSpPr/>
           <p:nvPr/>
         </p:nvSpPr>
         <p:spPr>
           <a:xfrm>
-            <a:off x="3520440" y="4718304"/>
-            <a:ext cx="1197864" cy="393192"/>
+            <a:off x="7452360" y="5120640"/>
+            <a:ext cx="1746504" cy="822959"/>
           </a:xfrm>
           <a:prstGeom prst="rect">
             <a:avLst/>
@@ -46212,37 +46233,37 @@
           </a:fontRef>
         </p:style>
         <p:txBody>
-          <a:bodyPr rtlCol="0" anchor="ctr" wrap="square" lIns="73152" rIns="73152" tIns="73152" bIns="73152"/>
+          <a:bodyPr rtlCol="0" anchor="ctr" wrap="square" lIns="54864" rIns="54864" tIns="54864" bIns="54864"/>
           <a:lstStyle/>
           <a:p>
-            <a:pPr algn="ctr">
+            <a:pPr algn="l">
               <a:spcAft>
                 <a:spcPts val="200"/>
               </a:spcAft>
             </a:pPr>
             <a:r>
-              <a:rPr sz="1600" b="0">
-                <a:solidFill>
-                  <a:srgbClr val="FD5108"/>
-                </a:solidFill>
-                <a:latin typeface="微軟正黑體"/>
+              <a:rPr sz="1000" b="0">
+                <a:solidFill>
+                  <a:srgbClr val="000000"/>
+                </a:solidFill>
+                <a:latin typeface="Arial"/>
                 <a:ea typeface="微軟正黑體"/>
               </a:rPr>
-              <a:t>●</a:t>
-            </a:r>
-          </a:p>
-        </p:txBody>
-      </p:sp>
-      <p:sp>
-        <p:nvSpPr>
-          <p:cNvPr id="47" name="Rectangle 46"/>
+              <a:t>車損照片／醫療單據偽造偵測 PoC</a:t>
+            </a:r>
+          </a:p>
+        </p:txBody>
+      </p:sp>
+      <p:sp>
+        <p:nvSpPr>
+          <p:cNvPr id="46" name="Rectangle 45"/>
           <p:cNvSpPr/>
           <p:nvPr/>
         </p:nvSpPr>
         <p:spPr>
           <a:xfrm>
-            <a:off x="4754880" y="4718304"/>
-            <a:ext cx="1197864" cy="393192"/>
+            <a:off x="9235440" y="5120640"/>
+            <a:ext cx="1014983" cy="822959"/>
           </a:xfrm>
           <a:prstGeom prst="rect">
             <a:avLst/>
@@ -46270,7 +46291,7 @@
           </a:fontRef>
         </p:style>
         <p:txBody>
-          <a:bodyPr rtlCol="0" anchor="ctr" wrap="square" lIns="73152" rIns="73152" tIns="73152" bIns="73152"/>
+          <a:bodyPr rtlCol="0" anchor="ctr" wrap="square" lIns="54864" rIns="54864" tIns="54864" bIns="54864"/>
           <a:lstStyle/>
           <a:p>
             <a:pPr algn="ctr">
@@ -46279,34 +46300,34 @@
               </a:spcAft>
             </a:pPr>
             <a:r>
-              <a:rPr sz="1600" b="0">
+              <a:rPr sz="1500" b="0">
                 <a:solidFill>
                   <a:srgbClr val="FD5108"/>
                 </a:solidFill>
                 <a:latin typeface="微軟正黑體"/>
                 <a:ea typeface="微軟正黑體"/>
               </a:rPr>
-              <a:t>◐</a:t>
-            </a:r>
-          </a:p>
-        </p:txBody>
-      </p:sp>
-      <p:sp>
-        <p:nvSpPr>
-          <p:cNvPr id="48" name="Rectangle 47"/>
+              <a:t>◐  ○  ◐</a:t>
+            </a:r>
+          </a:p>
+        </p:txBody>
+      </p:sp>
+      <p:sp>
+        <p:nvSpPr>
+          <p:cNvPr id="47" name="Rectangle 46"/>
           <p:cNvSpPr/>
           <p:nvPr/>
         </p:nvSpPr>
         <p:spPr>
           <a:xfrm>
-            <a:off x="5989320" y="4718304"/>
-            <a:ext cx="1197864" cy="393192"/>
+            <a:off x="10287000" y="5120640"/>
+            <a:ext cx="603503" cy="822959"/>
           </a:xfrm>
           <a:prstGeom prst="rect">
             <a:avLst/>
           </a:prstGeom>
           <a:solidFill>
-            <a:srgbClr val="EBEBEB"/>
+            <a:srgbClr val="FFE8D4"/>
           </a:solidFill>
           <a:ln>
             <a:noFill/>
@@ -46328,7 +46349,7 @@
           </a:fontRef>
         </p:style>
         <p:txBody>
-          <a:bodyPr rtlCol="0" anchor="ctr" wrap="square" lIns="73152" rIns="73152" tIns="73152" bIns="73152"/>
+          <a:bodyPr rtlCol="0" anchor="ctr" wrap="square" lIns="54864" rIns="54864" tIns="54864" bIns="54864"/>
           <a:lstStyle/>
           <a:p>
             <a:pPr algn="ctr">
@@ -46337,28 +46358,28 @@
               </a:spcAft>
             </a:pPr>
             <a:r>
-              <a:rPr sz="1600" b="0">
+              <a:rPr sz="1050" b="1">
                 <a:solidFill>
                   <a:srgbClr val="FD5108"/>
                 </a:solidFill>
-                <a:latin typeface="微軟正黑體"/>
+                <a:latin typeface="Arial"/>
                 <a:ea typeface="微軟正黑體"/>
               </a:rPr>
-              <a:t>◐</a:t>
-            </a:r>
-          </a:p>
-        </p:txBody>
-      </p:sp>
-      <p:sp>
-        <p:nvSpPr>
-          <p:cNvPr id="49" name="Rectangle 48"/>
+              <a:t>第二波</a:t>
+            </a:r>
+          </a:p>
+        </p:txBody>
+      </p:sp>
+      <p:sp>
+        <p:nvSpPr>
+          <p:cNvPr id="48" name="Rectangle 47"/>
           <p:cNvSpPr/>
           <p:nvPr/>
         </p:nvSpPr>
         <p:spPr>
           <a:xfrm>
-            <a:off x="7223760" y="4718304"/>
-            <a:ext cx="3483864" cy="393192"/>
+            <a:off x="10927080" y="5120640"/>
+            <a:ext cx="832103" cy="822959"/>
           </a:xfrm>
           <a:prstGeom prst="rect">
             <a:avLst/>
@@ -46386,44 +46407,65 @@
           </a:fontRef>
         </p:style>
         <p:txBody>
-          <a:bodyPr rtlCol="0" anchor="ctr" wrap="square" lIns="73152" rIns="73152" tIns="73152" bIns="73152"/>
+          <a:bodyPr rtlCol="0" anchor="ctr" wrap="square" lIns="54864" rIns="54864" tIns="54864" bIns="54864"/>
           <a:lstStyle/>
           <a:p>
-            <a:pPr algn="l">
+            <a:pPr algn="ctr">
               <a:spcAft>
                 <a:spcPts val="200"/>
               </a:spcAft>
             </a:pPr>
             <a:r>
-              <a:rPr sz="1100" b="0">
+              <a:rPr sz="1000" b="0" u="sng">
                 <a:solidFill>
                   <a:srgbClr val="000000"/>
                 </a:solidFill>
                 <a:latin typeface="Arial"/>
                 <a:ea typeface="微軟正黑體"/>
+                <a:hlinkClick r:id="rId17"/>
               </a:rPr>
-              <a:t>6–8 週單一險種工作流藍圖</a:t>
-            </a:r>
-          </a:p>
-        </p:txBody>
-      </p:sp>
-      <p:sp>
-        <p:nvSpPr>
-          <p:cNvPr id="50" name="Rectangle 49"/>
+              <a:t>[20]</a:t>
+            </a:r>
+            <a:r>
+              <a:rPr sz="1000" b="0" u="sng">
+                <a:solidFill>
+                  <a:srgbClr val="000000"/>
+                </a:solidFill>
+                <a:latin typeface="Arial"/>
+                <a:ea typeface="微軟正黑體"/>
+                <a:hlinkClick r:id="rId18"/>
+              </a:rPr>
+              <a:t>[21]</a:t>
+            </a:r>
+            <a:r>
+              <a:rPr sz="1000" b="0" u="sng">
+                <a:solidFill>
+                  <a:srgbClr val="000000"/>
+                </a:solidFill>
+                <a:latin typeface="Arial"/>
+                <a:ea typeface="微軟正黑體"/>
+                <a:hlinkClick r:id="rId19"/>
+              </a:rPr>
+              <a:t>[22]</a:t>
+            </a:r>
+          </a:p>
+        </p:txBody>
+      </p:sp>
+      <p:sp>
+        <p:nvSpPr>
+          <p:cNvPr id="49" name="Rectangle 48"/>
           <p:cNvSpPr/>
           <p:nvPr/>
         </p:nvSpPr>
         <p:spPr>
           <a:xfrm>
-            <a:off x="10744200" y="4718304"/>
-            <a:ext cx="969264" cy="393192"/>
+            <a:off x="411480" y="5998463"/>
+            <a:ext cx="11384280" cy="274320"/>
           </a:xfrm>
           <a:prstGeom prst="rect">
             <a:avLst/>
           </a:prstGeom>
-          <a:solidFill>
-            <a:srgbClr val="FFE8D4"/>
-          </a:solidFill>
+          <a:noFill/>
           <a:ln>
             <a:noFill/>
           </a:ln>
@@ -46444,65 +46486,7 @@
           </a:fontRef>
         </p:style>
         <p:txBody>
-          <a:bodyPr rtlCol="0" anchor="ctr" wrap="square" lIns="73152" rIns="73152" tIns="73152" bIns="73152"/>
-          <a:lstStyle/>
-          <a:p>
-            <a:pPr algn="ctr">
-              <a:spcAft>
-                <a:spcPts val="200"/>
-              </a:spcAft>
-            </a:pPr>
-            <a:r>
-              <a:rPr sz="1100" b="1">
-                <a:solidFill>
-                  <a:srgbClr val="FD5108"/>
-                </a:solidFill>
-                <a:latin typeface="Arial"/>
-                <a:ea typeface="微軟正黑體"/>
-              </a:rPr>
-              <a:t>第二波</a:t>
-            </a:r>
-          </a:p>
-        </p:txBody>
-      </p:sp>
-      <p:sp>
-        <p:nvSpPr>
-          <p:cNvPr id="51" name="Rectangle 50"/>
-          <p:cNvSpPr/>
-          <p:nvPr/>
-        </p:nvSpPr>
-        <p:spPr>
-          <a:xfrm>
-            <a:off x="411480" y="5148072"/>
-            <a:ext cx="3072384" cy="393192"/>
-          </a:xfrm>
-          <a:prstGeom prst="rect">
-            <a:avLst/>
-          </a:prstGeom>
-          <a:solidFill>
-            <a:srgbClr val="FFFFFF"/>
-          </a:solidFill>
-          <a:ln>
-            <a:noFill/>
-          </a:ln>
-          <a:effectLst/>
-        </p:spPr>
-        <p:style>
-          <a:lnRef idx="1">
-            <a:schemeClr val="accent1"/>
-          </a:lnRef>
-          <a:fillRef idx="3">
-            <a:schemeClr val="accent1"/>
-          </a:fillRef>
-          <a:effectRef idx="2">
-            <a:schemeClr val="accent1"/>
-          </a:effectRef>
-          <a:fontRef idx="minor">
-            <a:schemeClr val="lt1"/>
-          </a:fontRef>
-        </p:style>
-        <p:txBody>
-          <a:bodyPr rtlCol="0" anchor="ctr" wrap="square" lIns="73152" rIns="73152" tIns="73152" bIns="73152"/>
+          <a:bodyPr rtlCol="0" anchor="t" wrap="square" lIns="54864" rIns="54864" tIns="54864" bIns="54864"/>
           <a:lstStyle/>
           <a:p>
             <a:pPr algn="l">
@@ -46511,866 +46495,14 @@
               </a:spcAft>
             </a:pPr>
             <a:r>
-              <a:rPr sz="1100" b="1">
-                <a:solidFill>
-                  <a:srgbClr val="000000"/>
-                </a:solidFill>
-                <a:latin typeface="Arial"/>
-                <a:ea typeface="微軟正黑體"/>
-              </a:rPr>
-              <a:t>AI 加速核心現代化與雲端</a:t>
-            </a:r>
-          </a:p>
-        </p:txBody>
-      </p:sp>
-      <p:sp>
-        <p:nvSpPr>
-          <p:cNvPr id="52" name="Rectangle 51"/>
-          <p:cNvSpPr/>
-          <p:nvPr/>
-        </p:nvSpPr>
-        <p:spPr>
-          <a:xfrm>
-            <a:off x="3520440" y="5148072"/>
-            <a:ext cx="1197864" cy="393192"/>
-          </a:xfrm>
-          <a:prstGeom prst="rect">
-            <a:avLst/>
-          </a:prstGeom>
-          <a:solidFill>
-            <a:srgbClr val="FFFFFF"/>
-          </a:solidFill>
-          <a:ln>
-            <a:noFill/>
-          </a:ln>
-          <a:effectLst/>
-        </p:spPr>
-        <p:style>
-          <a:lnRef idx="1">
-            <a:schemeClr val="accent1"/>
-          </a:lnRef>
-          <a:fillRef idx="3">
-            <a:schemeClr val="accent1"/>
-          </a:fillRef>
-          <a:effectRef idx="2">
-            <a:schemeClr val="accent1"/>
-          </a:effectRef>
-          <a:fontRef idx="minor">
-            <a:schemeClr val="lt1"/>
-          </a:fontRef>
-        </p:style>
-        <p:txBody>
-          <a:bodyPr rtlCol="0" anchor="ctr" wrap="square" lIns="73152" rIns="73152" tIns="73152" bIns="73152"/>
-          <a:lstStyle/>
-          <a:p>
-            <a:pPr algn="ctr">
-              <a:spcAft>
-                <a:spcPts val="200"/>
-              </a:spcAft>
-            </a:pPr>
-            <a:r>
-              <a:rPr sz="1600" b="0">
-                <a:solidFill>
-                  <a:srgbClr val="FD5108"/>
+              <a:rPr sz="900" b="0">
+                <a:solidFill>
+                  <a:srgbClr val="595959"/>
                 </a:solidFill>
                 <a:latin typeface="微軟正黑體"/>
                 <a:ea typeface="微軟正黑體"/>
               </a:rPr>
-              <a:t>◐</a:t>
-            </a:r>
-          </a:p>
-        </p:txBody>
-      </p:sp>
-      <p:sp>
-        <p:nvSpPr>
-          <p:cNvPr id="53" name="Rectangle 52"/>
-          <p:cNvSpPr/>
-          <p:nvPr/>
-        </p:nvSpPr>
-        <p:spPr>
-          <a:xfrm>
-            <a:off x="4754880" y="5148072"/>
-            <a:ext cx="1197864" cy="393192"/>
-          </a:xfrm>
-          <a:prstGeom prst="rect">
-            <a:avLst/>
-          </a:prstGeom>
-          <a:solidFill>
-            <a:srgbClr val="FFFFFF"/>
-          </a:solidFill>
-          <a:ln>
-            <a:noFill/>
-          </a:ln>
-          <a:effectLst/>
-        </p:spPr>
-        <p:style>
-          <a:lnRef idx="1">
-            <a:schemeClr val="accent1"/>
-          </a:lnRef>
-          <a:fillRef idx="3">
-            <a:schemeClr val="accent1"/>
-          </a:fillRef>
-          <a:effectRef idx="2">
-            <a:schemeClr val="accent1"/>
-          </a:effectRef>
-          <a:fontRef idx="minor">
-            <a:schemeClr val="lt1"/>
-          </a:fontRef>
-        </p:style>
-        <p:txBody>
-          <a:bodyPr rtlCol="0" anchor="ctr" wrap="square" lIns="73152" rIns="73152" tIns="73152" bIns="73152"/>
-          <a:lstStyle/>
-          <a:p>
-            <a:pPr algn="ctr">
-              <a:spcAft>
-                <a:spcPts val="200"/>
-              </a:spcAft>
-            </a:pPr>
-            <a:r>
-              <a:rPr sz="1600" b="0">
-                <a:solidFill>
-                  <a:srgbClr val="FD5108"/>
-                </a:solidFill>
-                <a:latin typeface="微軟正黑體"/>
-                <a:ea typeface="微軟正黑體"/>
-              </a:rPr>
-              <a:t>◐</a:t>
-            </a:r>
-          </a:p>
-        </p:txBody>
-      </p:sp>
-      <p:sp>
-        <p:nvSpPr>
-          <p:cNvPr id="54" name="Rectangle 53"/>
-          <p:cNvSpPr/>
-          <p:nvPr/>
-        </p:nvSpPr>
-        <p:spPr>
-          <a:xfrm>
-            <a:off x="5989320" y="5148072"/>
-            <a:ext cx="1197864" cy="393192"/>
-          </a:xfrm>
-          <a:prstGeom prst="rect">
-            <a:avLst/>
-          </a:prstGeom>
-          <a:solidFill>
-            <a:srgbClr val="FFFFFF"/>
-          </a:solidFill>
-          <a:ln>
-            <a:noFill/>
-          </a:ln>
-          <a:effectLst/>
-        </p:spPr>
-        <p:style>
-          <a:lnRef idx="1">
-            <a:schemeClr val="accent1"/>
-          </a:lnRef>
-          <a:fillRef idx="3">
-            <a:schemeClr val="accent1"/>
-          </a:fillRef>
-          <a:effectRef idx="2">
-            <a:schemeClr val="accent1"/>
-          </a:effectRef>
-          <a:fontRef idx="minor">
-            <a:schemeClr val="lt1"/>
-          </a:fontRef>
-        </p:style>
-        <p:txBody>
-          <a:bodyPr rtlCol="0" anchor="ctr" wrap="square" lIns="73152" rIns="73152" tIns="73152" bIns="73152"/>
-          <a:lstStyle/>
-          <a:p>
-            <a:pPr algn="ctr">
-              <a:spcAft>
-                <a:spcPts val="200"/>
-              </a:spcAft>
-            </a:pPr>
-            <a:r>
-              <a:rPr sz="1600" b="0">
-                <a:solidFill>
-                  <a:srgbClr val="FD5108"/>
-                </a:solidFill>
-                <a:latin typeface="微軟正黑體"/>
-                <a:ea typeface="微軟正黑體"/>
-              </a:rPr>
-              <a:t>○</a:t>
-            </a:r>
-          </a:p>
-        </p:txBody>
-      </p:sp>
-      <p:sp>
-        <p:nvSpPr>
-          <p:cNvPr id="55" name="Rectangle 54"/>
-          <p:cNvSpPr/>
-          <p:nvPr/>
-        </p:nvSpPr>
-        <p:spPr>
-          <a:xfrm>
-            <a:off x="7223760" y="5148072"/>
-            <a:ext cx="3483864" cy="393192"/>
-          </a:xfrm>
-          <a:prstGeom prst="rect">
-            <a:avLst/>
-          </a:prstGeom>
-          <a:solidFill>
-            <a:srgbClr val="FFFFFF"/>
-          </a:solidFill>
-          <a:ln>
-            <a:noFill/>
-          </a:ln>
-          <a:effectLst/>
-        </p:spPr>
-        <p:style>
-          <a:lnRef idx="1">
-            <a:schemeClr val="accent1"/>
-          </a:lnRef>
-          <a:fillRef idx="3">
-            <a:schemeClr val="accent1"/>
-          </a:fillRef>
-          <a:effectRef idx="2">
-            <a:schemeClr val="accent1"/>
-          </a:effectRef>
-          <a:fontRef idx="minor">
-            <a:schemeClr val="lt1"/>
-          </a:fontRef>
-        </p:style>
-        <p:txBody>
-          <a:bodyPr rtlCol="0" anchor="ctr" wrap="square" lIns="73152" rIns="73152" tIns="73152" bIns="73152"/>
-          <a:lstStyle/>
-          <a:p>
-            <a:pPr algn="l">
-              <a:spcAft>
-                <a:spcPts val="200"/>
-              </a:spcAft>
-            </a:pPr>
-            <a:r>
-              <a:rPr sz="1100" b="0">
-                <a:solidFill>
-                  <a:srgbClr val="000000"/>
-                </a:solidFill>
-                <a:latin typeface="Arial"/>
-                <a:ea typeface="微軟正黑體"/>
-              </a:rPr>
-              <a:t>雲端委外合規評估或 AI 重寫 PoC</a:t>
-            </a:r>
-          </a:p>
-        </p:txBody>
-      </p:sp>
-      <p:sp>
-        <p:nvSpPr>
-          <p:cNvPr id="56" name="Rectangle 55"/>
-          <p:cNvSpPr/>
-          <p:nvPr/>
-        </p:nvSpPr>
-        <p:spPr>
-          <a:xfrm>
-            <a:off x="10744200" y="5148072"/>
-            <a:ext cx="969264" cy="393192"/>
-          </a:xfrm>
-          <a:prstGeom prst="rect">
-            <a:avLst/>
-          </a:prstGeom>
-          <a:solidFill>
-            <a:srgbClr val="FFE8D4"/>
-          </a:solidFill>
-          <a:ln>
-            <a:noFill/>
-          </a:ln>
-          <a:effectLst/>
-        </p:spPr>
-        <p:style>
-          <a:lnRef idx="1">
-            <a:schemeClr val="accent1"/>
-          </a:lnRef>
-          <a:fillRef idx="3">
-            <a:schemeClr val="accent1"/>
-          </a:fillRef>
-          <a:effectRef idx="2">
-            <a:schemeClr val="accent1"/>
-          </a:effectRef>
-          <a:fontRef idx="minor">
-            <a:schemeClr val="lt1"/>
-          </a:fontRef>
-        </p:style>
-        <p:txBody>
-          <a:bodyPr rtlCol="0" anchor="ctr" wrap="square" lIns="73152" rIns="73152" tIns="73152" bIns="73152"/>
-          <a:lstStyle/>
-          <a:p>
-            <a:pPr algn="ctr">
-              <a:spcAft>
-                <a:spcPts val="200"/>
-              </a:spcAft>
-            </a:pPr>
-            <a:r>
-              <a:rPr sz="1100" b="1">
-                <a:solidFill>
-                  <a:srgbClr val="FD5108"/>
-                </a:solidFill>
-                <a:latin typeface="Arial"/>
-                <a:ea typeface="微軟正黑體"/>
-              </a:rPr>
-              <a:t>第二波</a:t>
-            </a:r>
-          </a:p>
-        </p:txBody>
-      </p:sp>
-      <p:sp>
-        <p:nvSpPr>
-          <p:cNvPr id="57" name="Rectangle 56"/>
-          <p:cNvSpPr/>
-          <p:nvPr/>
-        </p:nvSpPr>
-        <p:spPr>
-          <a:xfrm>
-            <a:off x="411480" y="5577840"/>
-            <a:ext cx="3072384" cy="393192"/>
-          </a:xfrm>
-          <a:prstGeom prst="rect">
-            <a:avLst/>
-          </a:prstGeom>
-          <a:solidFill>
-            <a:srgbClr val="EBEBEB"/>
-          </a:solidFill>
-          <a:ln>
-            <a:noFill/>
-          </a:ln>
-          <a:effectLst/>
-        </p:spPr>
-        <p:style>
-          <a:lnRef idx="1">
-            <a:schemeClr val="accent1"/>
-          </a:lnRef>
-          <a:fillRef idx="3">
-            <a:schemeClr val="accent1"/>
-          </a:fillRef>
-          <a:effectRef idx="2">
-            <a:schemeClr val="accent1"/>
-          </a:effectRef>
-          <a:fontRef idx="minor">
-            <a:schemeClr val="lt1"/>
-          </a:fontRef>
-        </p:style>
-        <p:txBody>
-          <a:bodyPr rtlCol="0" anchor="ctr" wrap="square" lIns="73152" rIns="73152" tIns="73152" bIns="73152"/>
-          <a:lstStyle/>
-          <a:p>
-            <a:pPr algn="l">
-              <a:spcAft>
-                <a:spcPts val="200"/>
-              </a:spcAft>
-            </a:pPr>
-            <a:r>
-              <a:rPr sz="1100" b="1">
-                <a:solidFill>
-                  <a:srgbClr val="000000"/>
-                </a:solidFill>
-                <a:latin typeface="Arial"/>
-                <a:ea typeface="微軟正黑體"/>
-              </a:rPr>
-              <a:t>深偽理賠反詐欺</a:t>
-            </a:r>
-          </a:p>
-        </p:txBody>
-      </p:sp>
-      <p:sp>
-        <p:nvSpPr>
-          <p:cNvPr id="58" name="Rectangle 57"/>
-          <p:cNvSpPr/>
-          <p:nvPr/>
-        </p:nvSpPr>
-        <p:spPr>
-          <a:xfrm>
-            <a:off x="3520440" y="5577840"/>
-            <a:ext cx="1197864" cy="393192"/>
-          </a:xfrm>
-          <a:prstGeom prst="rect">
-            <a:avLst/>
-          </a:prstGeom>
-          <a:solidFill>
-            <a:srgbClr val="EBEBEB"/>
-          </a:solidFill>
-          <a:ln>
-            <a:noFill/>
-          </a:ln>
-          <a:effectLst/>
-        </p:spPr>
-        <p:style>
-          <a:lnRef idx="1">
-            <a:schemeClr val="accent1"/>
-          </a:lnRef>
-          <a:fillRef idx="3">
-            <a:schemeClr val="accent1"/>
-          </a:fillRef>
-          <a:effectRef idx="2">
-            <a:schemeClr val="accent1"/>
-          </a:effectRef>
-          <a:fontRef idx="minor">
-            <a:schemeClr val="lt1"/>
-          </a:fontRef>
-        </p:style>
-        <p:txBody>
-          <a:bodyPr rtlCol="0" anchor="ctr" wrap="square" lIns="73152" rIns="73152" tIns="73152" bIns="73152"/>
-          <a:lstStyle/>
-          <a:p>
-            <a:pPr algn="ctr">
-              <a:spcAft>
-                <a:spcPts val="200"/>
-              </a:spcAft>
-            </a:pPr>
-            <a:r>
-              <a:rPr sz="1600" b="0">
-                <a:solidFill>
-                  <a:srgbClr val="FD5108"/>
-                </a:solidFill>
-                <a:latin typeface="微軟正黑體"/>
-                <a:ea typeface="微軟正黑體"/>
-              </a:rPr>
-              <a:t>◐</a:t>
-            </a:r>
-          </a:p>
-        </p:txBody>
-      </p:sp>
-      <p:sp>
-        <p:nvSpPr>
-          <p:cNvPr id="59" name="Rectangle 58"/>
-          <p:cNvSpPr/>
-          <p:nvPr/>
-        </p:nvSpPr>
-        <p:spPr>
-          <a:xfrm>
-            <a:off x="4754880" y="5577840"/>
-            <a:ext cx="1197864" cy="393192"/>
-          </a:xfrm>
-          <a:prstGeom prst="rect">
-            <a:avLst/>
-          </a:prstGeom>
-          <a:solidFill>
-            <a:srgbClr val="EBEBEB"/>
-          </a:solidFill>
-          <a:ln>
-            <a:noFill/>
-          </a:ln>
-          <a:effectLst/>
-        </p:spPr>
-        <p:style>
-          <a:lnRef idx="1">
-            <a:schemeClr val="accent1"/>
-          </a:lnRef>
-          <a:fillRef idx="3">
-            <a:schemeClr val="accent1"/>
-          </a:fillRef>
-          <a:effectRef idx="2">
-            <a:schemeClr val="accent1"/>
-          </a:effectRef>
-          <a:fontRef idx="minor">
-            <a:schemeClr val="lt1"/>
-          </a:fontRef>
-        </p:style>
-        <p:txBody>
-          <a:bodyPr rtlCol="0" anchor="ctr" wrap="square" lIns="73152" rIns="73152" tIns="73152" bIns="73152"/>
-          <a:lstStyle/>
-          <a:p>
-            <a:pPr algn="ctr">
-              <a:spcAft>
-                <a:spcPts val="200"/>
-              </a:spcAft>
-            </a:pPr>
-            <a:r>
-              <a:rPr sz="1600" b="0">
-                <a:solidFill>
-                  <a:srgbClr val="FD5108"/>
-                </a:solidFill>
-                <a:latin typeface="微軟正黑體"/>
-                <a:ea typeface="微軟正黑體"/>
-              </a:rPr>
-              <a:t>○</a:t>
-            </a:r>
-          </a:p>
-        </p:txBody>
-      </p:sp>
-      <p:sp>
-        <p:nvSpPr>
-          <p:cNvPr id="60" name="Rectangle 59"/>
-          <p:cNvSpPr/>
-          <p:nvPr/>
-        </p:nvSpPr>
-        <p:spPr>
-          <a:xfrm>
-            <a:off x="5989320" y="5577840"/>
-            <a:ext cx="1197864" cy="393192"/>
-          </a:xfrm>
-          <a:prstGeom prst="rect">
-            <a:avLst/>
-          </a:prstGeom>
-          <a:solidFill>
-            <a:srgbClr val="EBEBEB"/>
-          </a:solidFill>
-          <a:ln>
-            <a:noFill/>
-          </a:ln>
-          <a:effectLst/>
-        </p:spPr>
-        <p:style>
-          <a:lnRef idx="1">
-            <a:schemeClr val="accent1"/>
-          </a:lnRef>
-          <a:fillRef idx="3">
-            <a:schemeClr val="accent1"/>
-          </a:fillRef>
-          <a:effectRef idx="2">
-            <a:schemeClr val="accent1"/>
-          </a:effectRef>
-          <a:fontRef idx="minor">
-            <a:schemeClr val="lt1"/>
-          </a:fontRef>
-        </p:style>
-        <p:txBody>
-          <a:bodyPr rtlCol="0" anchor="ctr" wrap="square" lIns="73152" rIns="73152" tIns="73152" bIns="73152"/>
-          <a:lstStyle/>
-          <a:p>
-            <a:pPr algn="ctr">
-              <a:spcAft>
-                <a:spcPts val="200"/>
-              </a:spcAft>
-            </a:pPr>
-            <a:r>
-              <a:rPr sz="1600" b="0">
-                <a:solidFill>
-                  <a:srgbClr val="FD5108"/>
-                </a:solidFill>
-                <a:latin typeface="微軟正黑體"/>
-                <a:ea typeface="微軟正黑體"/>
-              </a:rPr>
-              <a:t>◐</a:t>
-            </a:r>
-          </a:p>
-        </p:txBody>
-      </p:sp>
-      <p:sp>
-        <p:nvSpPr>
-          <p:cNvPr id="61" name="Rectangle 60"/>
-          <p:cNvSpPr/>
-          <p:nvPr/>
-        </p:nvSpPr>
-        <p:spPr>
-          <a:xfrm>
-            <a:off x="7223760" y="5577840"/>
-            <a:ext cx="3483864" cy="393192"/>
-          </a:xfrm>
-          <a:prstGeom prst="rect">
-            <a:avLst/>
-          </a:prstGeom>
-          <a:solidFill>
-            <a:srgbClr val="EBEBEB"/>
-          </a:solidFill>
-          <a:ln>
-            <a:noFill/>
-          </a:ln>
-          <a:effectLst/>
-        </p:spPr>
-        <p:style>
-          <a:lnRef idx="1">
-            <a:schemeClr val="accent1"/>
-          </a:lnRef>
-          <a:fillRef idx="3">
-            <a:schemeClr val="accent1"/>
-          </a:fillRef>
-          <a:effectRef idx="2">
-            <a:schemeClr val="accent1"/>
-          </a:effectRef>
-          <a:fontRef idx="minor">
-            <a:schemeClr val="lt1"/>
-          </a:fontRef>
-        </p:style>
-        <p:txBody>
-          <a:bodyPr rtlCol="0" anchor="ctr" wrap="square" lIns="73152" rIns="73152" tIns="73152" bIns="73152"/>
-          <a:lstStyle/>
-          <a:p>
-            <a:pPr algn="l">
-              <a:spcAft>
-                <a:spcPts val="200"/>
-              </a:spcAft>
-            </a:pPr>
-            <a:r>
-              <a:rPr sz="1100" b="0">
-                <a:solidFill>
-                  <a:srgbClr val="000000"/>
-                </a:solidFill>
-                <a:latin typeface="Arial"/>
-                <a:ea typeface="微軟正黑體"/>
-              </a:rPr>
-              <a:t>車損照片／醫療單據偽造偵測 PoC</a:t>
-            </a:r>
-          </a:p>
-        </p:txBody>
-      </p:sp>
-      <p:sp>
-        <p:nvSpPr>
-          <p:cNvPr id="62" name="Rectangle 61"/>
-          <p:cNvSpPr/>
-          <p:nvPr/>
-        </p:nvSpPr>
-        <p:spPr>
-          <a:xfrm>
-            <a:off x="10744200" y="5577840"/>
-            <a:ext cx="969264" cy="393192"/>
-          </a:xfrm>
-          <a:prstGeom prst="rect">
-            <a:avLst/>
-          </a:prstGeom>
-          <a:solidFill>
-            <a:srgbClr val="FFE8D4"/>
-          </a:solidFill>
-          <a:ln>
-            <a:noFill/>
-          </a:ln>
-          <a:effectLst/>
-        </p:spPr>
-        <p:style>
-          <a:lnRef idx="1">
-            <a:schemeClr val="accent1"/>
-          </a:lnRef>
-          <a:fillRef idx="3">
-            <a:schemeClr val="accent1"/>
-          </a:fillRef>
-          <a:effectRef idx="2">
-            <a:schemeClr val="accent1"/>
-          </a:effectRef>
-          <a:fontRef idx="minor">
-            <a:schemeClr val="lt1"/>
-          </a:fontRef>
-        </p:style>
-        <p:txBody>
-          <a:bodyPr rtlCol="0" anchor="ctr" wrap="square" lIns="73152" rIns="73152" tIns="73152" bIns="73152"/>
-          <a:lstStyle/>
-          <a:p>
-            <a:pPr algn="ctr">
-              <a:spcAft>
-                <a:spcPts val="200"/>
-              </a:spcAft>
-            </a:pPr>
-            <a:r>
-              <a:rPr sz="1100" b="1">
-                <a:solidFill>
-                  <a:srgbClr val="FD5108"/>
-                </a:solidFill>
-                <a:latin typeface="Arial"/>
-                <a:ea typeface="微軟正黑體"/>
-              </a:rPr>
-              <a:t>第二波</a:t>
-            </a:r>
-          </a:p>
-        </p:txBody>
-      </p:sp>
-      <p:sp>
-        <p:nvSpPr>
-          <p:cNvPr id="63" name="Rectangle 62"/>
-          <p:cNvSpPr/>
-          <p:nvPr/>
-        </p:nvSpPr>
-        <p:spPr>
-          <a:xfrm>
-            <a:off x="411480" y="6053328"/>
-            <a:ext cx="11384280" cy="384048"/>
-          </a:xfrm>
-          <a:prstGeom prst="rect">
-            <a:avLst/>
-          </a:prstGeom>
-          <a:noFill/>
-          <a:ln>
-            <a:noFill/>
-          </a:ln>
-          <a:effectLst/>
-        </p:spPr>
-        <p:style>
-          <a:lnRef idx="1">
-            <a:schemeClr val="accent1"/>
-          </a:lnRef>
-          <a:fillRef idx="3">
-            <a:schemeClr val="accent1"/>
-          </a:fillRef>
-          <a:effectRef idx="2">
-            <a:schemeClr val="accent1"/>
-          </a:effectRef>
-          <a:fontRef idx="minor">
-            <a:schemeClr val="lt1"/>
-          </a:fontRef>
-        </p:style>
-        <p:txBody>
-          <a:bodyPr rtlCol="0" anchor="t" wrap="square" lIns="27432" rIns="27432" tIns="27432" bIns="27432"/>
-          <a:lstStyle/>
-          <a:p>
-            <a:pPr algn="l">
-              <a:spcAft>
-                <a:spcPts val="200"/>
-              </a:spcAft>
-            </a:pPr>
-            <a:r>
-              <a:rPr sz="900" b="1">
-                <a:solidFill>
-                  <a:srgbClr val="595959"/>
-                </a:solidFill>
-                <a:latin typeface="Arial"/>
-                <a:ea typeface="微軟正黑體"/>
-              </a:rPr>
-              <a:t>來源：</a:t>
-            </a:r>
-            <a:r>
-              <a:rPr sz="900" b="0" u="sng">
-                <a:solidFill>
-                  <a:srgbClr val="595959"/>
-                </a:solidFill>
-                <a:latin typeface="Arial"/>
-                <a:ea typeface="微軟正黑體"/>
-                <a:hlinkClick r:id="rId2"/>
-              </a:rPr>
-              <a:t>金管會 AI 指引</a:t>
-            </a:r>
-            <a:r>
-              <a:rPr sz="900" b="0">
-                <a:solidFill>
-                  <a:srgbClr val="595959"/>
-                </a:solidFill>
-                <a:latin typeface="Arial"/>
-                <a:ea typeface="微軟正黑體"/>
-              </a:rPr>
-              <a:t>　</a:t>
-            </a:r>
-            <a:r>
-              <a:rPr sz="900" b="0" u="sng">
-                <a:solidFill>
-                  <a:srgbClr val="595959"/>
-                </a:solidFill>
-                <a:latin typeface="Arial"/>
-                <a:ea typeface="微軟正黑體"/>
-                <a:hlinkClick r:id="rId8"/>
-              </a:rPr>
-              <a:t>理律：AI 指引解析</a:t>
-            </a:r>
-            <a:r>
-              <a:rPr sz="900" b="0">
-                <a:solidFill>
-                  <a:srgbClr val="595959"/>
-                </a:solidFill>
-                <a:latin typeface="Arial"/>
-                <a:ea typeface="微軟正黑體"/>
-              </a:rPr>
-              <a:t>　</a:t>
-            </a:r>
-            <a:r>
-              <a:rPr sz="900" b="0" u="sng">
-                <a:solidFill>
-                  <a:srgbClr val="595959"/>
-                </a:solidFill>
-                <a:latin typeface="Arial"/>
-                <a:ea typeface="微軟正黑體"/>
-                <a:hlinkClick r:id="rId3"/>
-              </a:rPr>
-              <a:t>金管會委外修正</a:t>
-            </a:r>
-            <a:r>
-              <a:rPr sz="900" b="0">
-                <a:solidFill>
-                  <a:srgbClr val="595959"/>
-                </a:solidFill>
-                <a:latin typeface="Arial"/>
-                <a:ea typeface="微軟正黑體"/>
-              </a:rPr>
-              <a:t>　</a:t>
-            </a:r>
-            <a:r>
-              <a:rPr sz="900" b="0" u="sng">
-                <a:solidFill>
-                  <a:srgbClr val="595959"/>
-                </a:solidFill>
-                <a:latin typeface="Arial"/>
-                <a:ea typeface="微軟正黑體"/>
-                <a:hlinkClick r:id="rId4"/>
-              </a:rPr>
-              <a:t>理律：委外新辦法</a:t>
-            </a:r>
-            <a:r>
-              <a:rPr sz="900" b="0">
-                <a:solidFill>
-                  <a:srgbClr val="595959"/>
-                </a:solidFill>
-                <a:latin typeface="Arial"/>
-                <a:ea typeface="微軟正黑體"/>
-              </a:rPr>
-              <a:t>　</a:t>
-            </a:r>
-            <a:r>
-              <a:rPr sz="900" b="0" u="sng">
-                <a:solidFill>
-                  <a:srgbClr val="595959"/>
-                </a:solidFill>
-                <a:latin typeface="Arial"/>
-                <a:ea typeface="微軟正黑體"/>
-                <a:hlinkClick r:id="rId9"/>
-              </a:rPr>
-              <a:t>公會雲端自律規範</a:t>
-            </a:r>
-            <a:r>
-              <a:rPr sz="900" b="0">
-                <a:solidFill>
-                  <a:srgbClr val="595959"/>
-                </a:solidFill>
-                <a:latin typeface="Arial"/>
-                <a:ea typeface="微軟正黑體"/>
-              </a:rPr>
-              <a:t>　</a:t>
-            </a:r>
-            <a:r>
-              <a:rPr sz="900" b="0" u="sng">
-                <a:solidFill>
-                  <a:srgbClr val="595959"/>
-                </a:solidFill>
-                <a:latin typeface="Arial"/>
-                <a:ea typeface="微軟正黑體"/>
-                <a:hlinkClick r:id="rId5"/>
-              </a:rPr>
-              <a:t>資誠 IFRS 17 關鍵議題</a:t>
-            </a:r>
-            <a:r>
-              <a:rPr sz="900" b="0">
-                <a:solidFill>
-                  <a:srgbClr val="595959"/>
-                </a:solidFill>
-                <a:latin typeface="Arial"/>
-                <a:ea typeface="微軟正黑體"/>
-              </a:rPr>
-              <a:t>　</a:t>
-            </a:r>
-            <a:r>
-              <a:rPr sz="900" b="0" u="sng">
-                <a:solidFill>
-                  <a:srgbClr val="595959"/>
-                </a:solidFill>
-                <a:latin typeface="Arial"/>
-                <a:ea typeface="微軟正黑體"/>
-                <a:hlinkClick r:id="rId10"/>
-              </a:rPr>
-              <a:t>NAIC 工作小組</a:t>
-            </a:r>
-            <a:r>
-              <a:rPr sz="900" b="0">
-                <a:solidFill>
-                  <a:srgbClr val="595959"/>
-                </a:solidFill>
-                <a:latin typeface="Arial"/>
-                <a:ea typeface="微軟正黑體"/>
-              </a:rPr>
-              <a:t>　</a:t>
-            </a:r>
-            <a:r>
-              <a:rPr sz="900" b="0" u="sng">
-                <a:solidFill>
-                  <a:srgbClr val="595959"/>
-                </a:solidFill>
-                <a:latin typeface="Arial"/>
-                <a:ea typeface="微軟正黑體"/>
-                <a:hlinkClick r:id="rId7"/>
-              </a:rPr>
-              <a:t>MAS AI 指引</a:t>
+              <a:t>評等依序為需求迫切度、與既有服務距離、首案週期：● 有利　◐ 中等　○ 不利（團隊判斷，請會議校準）。文獻編號可點擊，完整清單見附錄 A。</a:t>
             </a:r>
           </a:p>
         </p:txBody>
@@ -50160,6 +49292,3066 @@
                 <a:ea typeface="微軟正黑體"/>
               </a:rPr>
               <a:t>「可能侷限」為依公開資料的推論，僅供內部討論，對外勿點名競爭者。點選右欄可開啟各機構官網或原文。</a:t>
+            </a:r>
+          </a:p>
+        </p:txBody>
+      </p:sp>
+    </p:spTree>
+  </p:cSld>
+  <p:clrMapOvr>
+    <a:masterClrMapping/>
+  </p:clrMapOvr>
+</p:sld>
+</file>
+
+<file path=ppt/slides/slide4.xml><?xml version="1.0" encoding="utf-8"?>
+<p:sld xmlns:a="http://schemas.openxmlformats.org/drawingml/2006/main" xmlns:p="http://schemas.openxmlformats.org/presentationml/2006/main" xmlns:r="http://schemas.openxmlformats.org/officeDocument/2006/relationships">
+  <p:cSld>
+    <p:spTree>
+      <p:nvGrpSpPr>
+        <p:cNvPr id="1" name=""/>
+        <p:cNvGrpSpPr/>
+        <p:nvPr/>
+      </p:nvGrpSpPr>
+      <p:grpSpPr/>
+      <p:sp>
+        <p:nvSpPr>
+          <p:cNvPr id="2" name="Title 1"/>
+          <p:cNvSpPr>
+            <a:spLocks noGrp="1"/>
+          </p:cNvSpPr>
+          <p:nvPr>
+            <p:ph type="title"/>
+          </p:nvPr>
+        </p:nvSpPr>
+        <p:spPr/>
+        <p:txBody>
+          <a:bodyPr/>
+          <a:lstStyle/>
+          <a:p>
+            <a:r>
+              <a:rPr sz="2000" b="1">
+                <a:latin typeface="Georgia"/>
+                <a:ea typeface="微軟正黑體"/>
+              </a:rPr>
+              <a:t>附錄 A｜文獻清單</a:t>
+            </a:r>
+          </a:p>
+        </p:txBody>
+      </p:sp>
+      <p:sp>
+        <p:nvSpPr>
+          <p:cNvPr id="4" name="Footer Placeholder 4">
+            <a:extLst>
+              <a:ext uri="{FF2B5EF4-FFF2-40B4-BE49-F238E27FC236}">
+                <a16:creationId xmlns:a16="http://schemas.microsoft.com/office/drawing/2014/main" id="{E57B29C1-93EA-1886-CD27-23CE023225D9}"/>
+              </a:ext>
+            </a:extLst>
+          </p:cNvPr>
+          <p:cNvSpPr>
+            <a:spLocks noGrp="1"/>
+          </p:cNvSpPr>
+          <p:nvPr>
+            <p:ph type="ftr" sz="quarter" idx="3"/>
+          </p:nvPr>
+        </p:nvSpPr>
+        <p:spPr>
+          <a:xfrm>
+            <a:off x="1066800" y="6497441"/>
+            <a:ext cx="8814816" cy="161583"/>
+          </a:xfrm>
+          <a:prstGeom prst="rect">
+            <a:avLst/>
+          </a:prstGeom>
+        </p:spPr>
+        <p:txBody>
+          <a:bodyPr vert="horz" wrap="square" lIns="0" tIns="0" rIns="0" bIns="0" rtlCol="0" anchor="b" anchorCtr="0">
+            <a:spAutoFit/>
+          </a:bodyPr>
+          <a:lstStyle>
+            <a:lvl1pPr algn="l">
+              <a:defRPr sz="1050" b="0">
+                <a:solidFill>
+                  <a:sysClr val="windowText" lastClr="000000"/>
+                </a:solidFill>
+                <a:latin typeface="+mn-lt"/>
+                <a:cs typeface="Arial" panose="020B0604020202020204" pitchFamily="34" charset="0"/>
+              </a:defRPr>
+            </a:lvl1pPr>
+          </a:lstStyle>
+          <a:p>
+            <a:r>
+              <a:rPr>
+                <a:latin typeface="Arial"/>
+                <a:ea typeface="微軟正黑體"/>
+              </a:rPr>
+              <a:t>內部討論稿｜僅供 FSC1 保險組內部使用｜資料來源為公開研究，點選來源可開啟原文</a:t>
+            </a:r>
+          </a:p>
+        </p:txBody>
+      </p:sp>
+      <p:sp>
+        <p:nvSpPr>
+          <p:cNvPr id="6" name="Slide Number Placeholder 13">
+            <a:extLst>
+              <a:ext uri="{FF2B5EF4-FFF2-40B4-BE49-F238E27FC236}">
+                <a16:creationId xmlns:a16="http://schemas.microsoft.com/office/drawing/2014/main" id="{D15FEAD4-DFB9-ED08-EBEE-A4E5DE31E318}"/>
+              </a:ext>
+            </a:extLst>
+          </p:cNvPr>
+          <p:cNvSpPr>
+            <a:spLocks noGrp="1"/>
+          </p:cNvSpPr>
+          <p:nvPr>
+            <p:ph type="sldNum" sz="quarter" idx="4"/>
+          </p:nvPr>
+        </p:nvSpPr>
+        <p:spPr>
+          <a:xfrm>
+            <a:off x="11503818" y="6501384"/>
+            <a:ext cx="298209" cy="161583"/>
+          </a:xfrm>
+          <a:prstGeom prst="rect">
+            <a:avLst/>
+          </a:prstGeom>
+        </p:spPr>
+        <p:txBody>
+          <a:bodyPr vert="horz" wrap="square" lIns="0" tIns="0" rIns="0" bIns="0" rtlCol="0" anchor="b" anchorCtr="0">
+            <a:spAutoFit/>
+          </a:bodyPr>
+          <a:lstStyle>
+            <a:lvl1pPr algn="r">
+              <a:defRPr sz="1050">
+                <a:solidFill>
+                  <a:schemeClr val="tx1"/>
+                </a:solidFill>
+                <a:latin typeface="+mn-lt"/>
+                <a:cs typeface="Arial" panose="020B0604020202020204" pitchFamily="34" charset="0"/>
+              </a:defRPr>
+            </a:lvl1pPr>
+          </a:lstStyle>
+          <a:p>
+            <a:fld id="{3E6AC032-1535-134B-A583-D5E1DDD0D167}" type="slidenum">
+              <a:rPr lang="en-US" smtClean="0"/>
+              <a:pPr/>
+              <a:t>‹#›</a:t>
+            </a:fld>
+            <a:endParaRPr lang="en-US"/>
+          </a:p>
+        </p:txBody>
+      </p:sp>
+      <p:sp>
+        <p:nvSpPr>
+          <p:cNvPr id="7" name="Rectangle 6"/>
+          <p:cNvSpPr/>
+          <p:nvPr/>
+        </p:nvSpPr>
+        <p:spPr>
+          <a:xfrm>
+            <a:off x="411480" y="1234440"/>
+            <a:ext cx="411480" cy="384048"/>
+          </a:xfrm>
+          <a:prstGeom prst="rect">
+            <a:avLst/>
+          </a:prstGeom>
+          <a:noFill/>
+          <a:ln>
+            <a:noFill/>
+          </a:ln>
+          <a:effectLst/>
+        </p:spPr>
+        <p:style>
+          <a:lnRef idx="1">
+            <a:schemeClr val="accent1"/>
+          </a:lnRef>
+          <a:fillRef idx="3">
+            <a:schemeClr val="accent1"/>
+          </a:fillRef>
+          <a:effectRef idx="2">
+            <a:schemeClr val="accent1"/>
+          </a:effectRef>
+          <a:fontRef idx="minor">
+            <a:schemeClr val="lt1"/>
+          </a:fontRef>
+        </p:style>
+        <p:txBody>
+          <a:bodyPr rtlCol="0" anchor="ctr" wrap="square" lIns="18288" rIns="18288" tIns="18288" bIns="18288"/>
+          <a:lstStyle/>
+          <a:p>
+            <a:pPr algn="l">
+              <a:spcAft>
+                <a:spcPts val="200"/>
+              </a:spcAft>
+            </a:pPr>
+            <a:r>
+              <a:rPr sz="1000" b="1">
+                <a:solidFill>
+                  <a:srgbClr val="FD5108"/>
+                </a:solidFill>
+                <a:latin typeface="Arial"/>
+                <a:ea typeface="微軟正黑體"/>
+              </a:rPr>
+              <a:t>[1]</a:t>
+            </a:r>
+          </a:p>
+        </p:txBody>
+      </p:sp>
+      <p:sp>
+        <p:nvSpPr>
+          <p:cNvPr id="8" name="Rectangle 7"/>
+          <p:cNvSpPr/>
+          <p:nvPr/>
+        </p:nvSpPr>
+        <p:spPr>
+          <a:xfrm>
+            <a:off x="822960" y="1234440"/>
+            <a:ext cx="5257800" cy="384048"/>
+          </a:xfrm>
+          <a:prstGeom prst="rect">
+            <a:avLst/>
+          </a:prstGeom>
+          <a:noFill/>
+          <a:ln>
+            <a:noFill/>
+          </a:ln>
+          <a:effectLst/>
+        </p:spPr>
+        <p:style>
+          <a:lnRef idx="1">
+            <a:schemeClr val="accent1"/>
+          </a:lnRef>
+          <a:fillRef idx="3">
+            <a:schemeClr val="accent1"/>
+          </a:fillRef>
+          <a:effectRef idx="2">
+            <a:schemeClr val="accent1"/>
+          </a:effectRef>
+          <a:fontRef idx="minor">
+            <a:schemeClr val="lt1"/>
+          </a:fontRef>
+        </p:style>
+        <p:txBody>
+          <a:bodyPr rtlCol="0" anchor="ctr" wrap="square" lIns="18288" rIns="18288" tIns="18288" bIns="18288"/>
+          <a:lstStyle/>
+          <a:p>
+            <a:pPr algn="l">
+              <a:spcAft>
+                <a:spcPts val="200"/>
+              </a:spcAft>
+            </a:pPr>
+            <a:r>
+              <a:rPr sz="1000" b="0" u="sng">
+                <a:solidFill>
+                  <a:srgbClr val="000000"/>
+                </a:solidFill>
+                <a:latin typeface="Arial"/>
+                <a:ea typeface="微軟正黑體"/>
+                <a:hlinkClick r:id="rId2"/>
+              </a:rPr>
+              <a:t>Global InsurTech Report Q1 2026　※</a:t>
+            </a:r>
+          </a:p>
+          <a:p>
+            <a:pPr algn="l">
+              <a:spcAft>
+                <a:spcPts val="200"/>
+              </a:spcAft>
+            </a:pPr>
+            <a:r>
+              <a:rPr sz="850" b="0">
+                <a:solidFill>
+                  <a:srgbClr val="595959"/>
+                </a:solidFill>
+                <a:latin typeface="Arial"/>
+                <a:ea typeface="微軟正黑體"/>
+              </a:rPr>
+              <a:t>市場數據｜Gallagher Re，2026-05</a:t>
+            </a:r>
+          </a:p>
+        </p:txBody>
+      </p:sp>
+      <p:sp>
+        <p:nvSpPr>
+          <p:cNvPr id="9" name="Rectangle 8"/>
+          <p:cNvSpPr/>
+          <p:nvPr/>
+        </p:nvSpPr>
+        <p:spPr>
+          <a:xfrm>
+            <a:off x="411480" y="1664208"/>
+            <a:ext cx="411480" cy="384048"/>
+          </a:xfrm>
+          <a:prstGeom prst="rect">
+            <a:avLst/>
+          </a:prstGeom>
+          <a:noFill/>
+          <a:ln>
+            <a:noFill/>
+          </a:ln>
+          <a:effectLst/>
+        </p:spPr>
+        <p:style>
+          <a:lnRef idx="1">
+            <a:schemeClr val="accent1"/>
+          </a:lnRef>
+          <a:fillRef idx="3">
+            <a:schemeClr val="accent1"/>
+          </a:fillRef>
+          <a:effectRef idx="2">
+            <a:schemeClr val="accent1"/>
+          </a:effectRef>
+          <a:fontRef idx="minor">
+            <a:schemeClr val="lt1"/>
+          </a:fontRef>
+        </p:style>
+        <p:txBody>
+          <a:bodyPr rtlCol="0" anchor="ctr" wrap="square" lIns="18288" rIns="18288" tIns="18288" bIns="18288"/>
+          <a:lstStyle/>
+          <a:p>
+            <a:pPr algn="l">
+              <a:spcAft>
+                <a:spcPts val="200"/>
+              </a:spcAft>
+            </a:pPr>
+            <a:r>
+              <a:rPr sz="1000" b="1">
+                <a:solidFill>
+                  <a:srgbClr val="FD5108"/>
+                </a:solidFill>
+                <a:latin typeface="Arial"/>
+                <a:ea typeface="微軟正黑體"/>
+              </a:rPr>
+              <a:t>[2]</a:t>
+            </a:r>
+          </a:p>
+        </p:txBody>
+      </p:sp>
+      <p:sp>
+        <p:nvSpPr>
+          <p:cNvPr id="10" name="Rectangle 9"/>
+          <p:cNvSpPr/>
+          <p:nvPr/>
+        </p:nvSpPr>
+        <p:spPr>
+          <a:xfrm>
+            <a:off x="822960" y="1664208"/>
+            <a:ext cx="5257800" cy="384048"/>
+          </a:xfrm>
+          <a:prstGeom prst="rect">
+            <a:avLst/>
+          </a:prstGeom>
+          <a:noFill/>
+          <a:ln>
+            <a:noFill/>
+          </a:ln>
+          <a:effectLst/>
+        </p:spPr>
+        <p:style>
+          <a:lnRef idx="1">
+            <a:schemeClr val="accent1"/>
+          </a:lnRef>
+          <a:fillRef idx="3">
+            <a:schemeClr val="accent1"/>
+          </a:fillRef>
+          <a:effectRef idx="2">
+            <a:schemeClr val="accent1"/>
+          </a:effectRef>
+          <a:fontRef idx="minor">
+            <a:schemeClr val="lt1"/>
+          </a:fontRef>
+        </p:style>
+        <p:txBody>
+          <a:bodyPr rtlCol="0" anchor="ctr" wrap="square" lIns="18288" rIns="18288" tIns="18288" bIns="18288"/>
+          <a:lstStyle/>
+          <a:p>
+            <a:pPr algn="l">
+              <a:spcAft>
+                <a:spcPts val="200"/>
+              </a:spcAft>
+            </a:pPr>
+            <a:r>
+              <a:rPr sz="1000" b="0" u="sng">
+                <a:solidFill>
+                  <a:srgbClr val="000000"/>
+                </a:solidFill>
+                <a:latin typeface="Arial"/>
+                <a:ea typeface="微軟正黑體"/>
+                <a:hlinkClick r:id="rId3"/>
+              </a:rPr>
+              <a:t>AI start-ups capture record 95.2% of insurtech funding</a:t>
+            </a:r>
+          </a:p>
+          <a:p>
+            <a:pPr algn="l">
+              <a:spcAft>
+                <a:spcPts val="200"/>
+              </a:spcAft>
+            </a:pPr>
+            <a:r>
+              <a:rPr sz="850" b="0">
+                <a:solidFill>
+                  <a:srgbClr val="595959"/>
+                </a:solidFill>
+                <a:latin typeface="Arial"/>
+                <a:ea typeface="微軟正黑體"/>
+              </a:rPr>
+              <a:t>市場數據｜Insurance Business，2026-05</a:t>
+            </a:r>
+          </a:p>
+        </p:txBody>
+      </p:sp>
+      <p:sp>
+        <p:nvSpPr>
+          <p:cNvPr id="11" name="Rectangle 10"/>
+          <p:cNvSpPr/>
+          <p:nvPr/>
+        </p:nvSpPr>
+        <p:spPr>
+          <a:xfrm>
+            <a:off x="411480" y="2093976"/>
+            <a:ext cx="411480" cy="384048"/>
+          </a:xfrm>
+          <a:prstGeom prst="rect">
+            <a:avLst/>
+          </a:prstGeom>
+          <a:noFill/>
+          <a:ln>
+            <a:noFill/>
+          </a:ln>
+          <a:effectLst/>
+        </p:spPr>
+        <p:style>
+          <a:lnRef idx="1">
+            <a:schemeClr val="accent1"/>
+          </a:lnRef>
+          <a:fillRef idx="3">
+            <a:schemeClr val="accent1"/>
+          </a:fillRef>
+          <a:effectRef idx="2">
+            <a:schemeClr val="accent1"/>
+          </a:effectRef>
+          <a:fontRef idx="minor">
+            <a:schemeClr val="lt1"/>
+          </a:fontRef>
+        </p:style>
+        <p:txBody>
+          <a:bodyPr rtlCol="0" anchor="ctr" wrap="square" lIns="18288" rIns="18288" tIns="18288" bIns="18288"/>
+          <a:lstStyle/>
+          <a:p>
+            <a:pPr algn="l">
+              <a:spcAft>
+                <a:spcPts val="200"/>
+              </a:spcAft>
+            </a:pPr>
+            <a:r>
+              <a:rPr sz="1000" b="1">
+                <a:solidFill>
+                  <a:srgbClr val="FD5108"/>
+                </a:solidFill>
+                <a:latin typeface="Arial"/>
+                <a:ea typeface="微軟正黑體"/>
+              </a:rPr>
+              <a:t>[3]</a:t>
+            </a:r>
+          </a:p>
+        </p:txBody>
+      </p:sp>
+      <p:sp>
+        <p:nvSpPr>
+          <p:cNvPr id="12" name="Rectangle 11"/>
+          <p:cNvSpPr/>
+          <p:nvPr/>
+        </p:nvSpPr>
+        <p:spPr>
+          <a:xfrm>
+            <a:off x="822960" y="2093976"/>
+            <a:ext cx="5257800" cy="384048"/>
+          </a:xfrm>
+          <a:prstGeom prst="rect">
+            <a:avLst/>
+          </a:prstGeom>
+          <a:noFill/>
+          <a:ln>
+            <a:noFill/>
+          </a:ln>
+          <a:effectLst/>
+        </p:spPr>
+        <p:style>
+          <a:lnRef idx="1">
+            <a:schemeClr val="accent1"/>
+          </a:lnRef>
+          <a:fillRef idx="3">
+            <a:schemeClr val="accent1"/>
+          </a:fillRef>
+          <a:effectRef idx="2">
+            <a:schemeClr val="accent1"/>
+          </a:effectRef>
+          <a:fontRef idx="minor">
+            <a:schemeClr val="lt1"/>
+          </a:fontRef>
+        </p:style>
+        <p:txBody>
+          <a:bodyPr rtlCol="0" anchor="ctr" wrap="square" lIns="18288" rIns="18288" tIns="18288" bIns="18288"/>
+          <a:lstStyle/>
+          <a:p>
+            <a:pPr algn="l">
+              <a:spcAft>
+                <a:spcPts val="200"/>
+              </a:spcAft>
+            </a:pPr>
+            <a:r>
+              <a:rPr sz="1000" b="0" u="sng">
+                <a:solidFill>
+                  <a:srgbClr val="000000"/>
+                </a:solidFill>
+                <a:latin typeface="Arial"/>
+                <a:ea typeface="微軟正黑體"/>
+                <a:hlinkClick r:id="rId4"/>
+              </a:rPr>
+              <a:t>PwC：保險高階主管視代理型 AI 為轉型主力（57%）</a:t>
+            </a:r>
+          </a:p>
+          <a:p>
+            <a:pPr algn="l">
+              <a:spcAft>
+                <a:spcPts val="200"/>
+              </a:spcAft>
+            </a:pPr>
+            <a:r>
+              <a:rPr sz="850" b="0">
+                <a:solidFill>
+                  <a:srgbClr val="595959"/>
+                </a:solidFill>
+                <a:latin typeface="Arial"/>
+                <a:ea typeface="微軟正黑體"/>
+              </a:rPr>
+              <a:t>市場數據｜Claims Journal，2025-11-17</a:t>
+            </a:r>
+          </a:p>
+        </p:txBody>
+      </p:sp>
+      <p:sp>
+        <p:nvSpPr>
+          <p:cNvPr id="13" name="Rectangle 12"/>
+          <p:cNvSpPr/>
+          <p:nvPr/>
+        </p:nvSpPr>
+        <p:spPr>
+          <a:xfrm>
+            <a:off x="411480" y="2523744"/>
+            <a:ext cx="411480" cy="384048"/>
+          </a:xfrm>
+          <a:prstGeom prst="rect">
+            <a:avLst/>
+          </a:prstGeom>
+          <a:noFill/>
+          <a:ln>
+            <a:noFill/>
+          </a:ln>
+          <a:effectLst/>
+        </p:spPr>
+        <p:style>
+          <a:lnRef idx="1">
+            <a:schemeClr val="accent1"/>
+          </a:lnRef>
+          <a:fillRef idx="3">
+            <a:schemeClr val="accent1"/>
+          </a:fillRef>
+          <a:effectRef idx="2">
+            <a:schemeClr val="accent1"/>
+          </a:effectRef>
+          <a:fontRef idx="minor">
+            <a:schemeClr val="lt1"/>
+          </a:fontRef>
+        </p:style>
+        <p:txBody>
+          <a:bodyPr rtlCol="0" anchor="ctr" wrap="square" lIns="18288" rIns="18288" tIns="18288" bIns="18288"/>
+          <a:lstStyle/>
+          <a:p>
+            <a:pPr algn="l">
+              <a:spcAft>
+                <a:spcPts val="200"/>
+              </a:spcAft>
+            </a:pPr>
+            <a:r>
+              <a:rPr sz="1000" b="1">
+                <a:solidFill>
+                  <a:srgbClr val="FD5108"/>
+                </a:solidFill>
+                <a:latin typeface="Arial"/>
+                <a:ea typeface="微軟正黑體"/>
+              </a:rPr>
+              <a:t>[4]</a:t>
+            </a:r>
+          </a:p>
+        </p:txBody>
+      </p:sp>
+      <p:sp>
+        <p:nvSpPr>
+          <p:cNvPr id="14" name="Rectangle 13"/>
+          <p:cNvSpPr/>
+          <p:nvPr/>
+        </p:nvSpPr>
+        <p:spPr>
+          <a:xfrm>
+            <a:off x="822960" y="2523744"/>
+            <a:ext cx="5257800" cy="384048"/>
+          </a:xfrm>
+          <a:prstGeom prst="rect">
+            <a:avLst/>
+          </a:prstGeom>
+          <a:noFill/>
+          <a:ln>
+            <a:noFill/>
+          </a:ln>
+          <a:effectLst/>
+        </p:spPr>
+        <p:style>
+          <a:lnRef idx="1">
+            <a:schemeClr val="accent1"/>
+          </a:lnRef>
+          <a:fillRef idx="3">
+            <a:schemeClr val="accent1"/>
+          </a:fillRef>
+          <a:effectRef idx="2">
+            <a:schemeClr val="accent1"/>
+          </a:effectRef>
+          <a:fontRef idx="minor">
+            <a:schemeClr val="lt1"/>
+          </a:fontRef>
+        </p:style>
+        <p:txBody>
+          <a:bodyPr rtlCol="0" anchor="ctr" wrap="square" lIns="18288" rIns="18288" tIns="18288" bIns="18288"/>
+          <a:lstStyle/>
+          <a:p>
+            <a:pPr algn="l">
+              <a:spcAft>
+                <a:spcPts val="200"/>
+              </a:spcAft>
+            </a:pPr>
+            <a:r>
+              <a:rPr sz="1000" b="0" u="sng">
+                <a:solidFill>
+                  <a:srgbClr val="000000"/>
+                </a:solidFill>
+                <a:latin typeface="Arial"/>
+                <a:ea typeface="微軟正黑體"/>
+                <a:hlinkClick r:id="rId5"/>
+              </a:rPr>
+              <a:t>Reimagining Insurance for the AI Era</a:t>
+            </a:r>
+          </a:p>
+          <a:p>
+            <a:pPr algn="l">
+              <a:spcAft>
+                <a:spcPts val="200"/>
+              </a:spcAft>
+            </a:pPr>
+            <a:r>
+              <a:rPr sz="850" b="0">
+                <a:solidFill>
+                  <a:srgbClr val="595959"/>
+                </a:solidFill>
+                <a:latin typeface="Arial"/>
+                <a:ea typeface="微軟正黑體"/>
+              </a:rPr>
+              <a:t>市場數據｜Bain（引述 MIT 2025）</a:t>
+            </a:r>
+          </a:p>
+        </p:txBody>
+      </p:sp>
+      <p:sp>
+        <p:nvSpPr>
+          <p:cNvPr id="15" name="Rectangle 14"/>
+          <p:cNvSpPr/>
+          <p:nvPr/>
+        </p:nvSpPr>
+        <p:spPr>
+          <a:xfrm>
+            <a:off x="411480" y="2953512"/>
+            <a:ext cx="411480" cy="384048"/>
+          </a:xfrm>
+          <a:prstGeom prst="rect">
+            <a:avLst/>
+          </a:prstGeom>
+          <a:noFill/>
+          <a:ln>
+            <a:noFill/>
+          </a:ln>
+          <a:effectLst/>
+        </p:spPr>
+        <p:style>
+          <a:lnRef idx="1">
+            <a:schemeClr val="accent1"/>
+          </a:lnRef>
+          <a:fillRef idx="3">
+            <a:schemeClr val="accent1"/>
+          </a:fillRef>
+          <a:effectRef idx="2">
+            <a:schemeClr val="accent1"/>
+          </a:effectRef>
+          <a:fontRef idx="minor">
+            <a:schemeClr val="lt1"/>
+          </a:fontRef>
+        </p:style>
+        <p:txBody>
+          <a:bodyPr rtlCol="0" anchor="ctr" wrap="square" lIns="18288" rIns="18288" tIns="18288" bIns="18288"/>
+          <a:lstStyle/>
+          <a:p>
+            <a:pPr algn="l">
+              <a:spcAft>
+                <a:spcPts val="200"/>
+              </a:spcAft>
+            </a:pPr>
+            <a:r>
+              <a:rPr sz="1000" b="1">
+                <a:solidFill>
+                  <a:srgbClr val="FD5108"/>
+                </a:solidFill>
+                <a:latin typeface="Arial"/>
+                <a:ea typeface="微軟正黑體"/>
+              </a:rPr>
+              <a:t>[5]</a:t>
+            </a:r>
+          </a:p>
+        </p:txBody>
+      </p:sp>
+      <p:sp>
+        <p:nvSpPr>
+          <p:cNvPr id="16" name="Rectangle 15"/>
+          <p:cNvSpPr/>
+          <p:nvPr/>
+        </p:nvSpPr>
+        <p:spPr>
+          <a:xfrm>
+            <a:off x="822960" y="2953512"/>
+            <a:ext cx="5257800" cy="384048"/>
+          </a:xfrm>
+          <a:prstGeom prst="rect">
+            <a:avLst/>
+          </a:prstGeom>
+          <a:noFill/>
+          <a:ln>
+            <a:noFill/>
+          </a:ln>
+          <a:effectLst/>
+        </p:spPr>
+        <p:style>
+          <a:lnRef idx="1">
+            <a:schemeClr val="accent1"/>
+          </a:lnRef>
+          <a:fillRef idx="3">
+            <a:schemeClr val="accent1"/>
+          </a:fillRef>
+          <a:effectRef idx="2">
+            <a:schemeClr val="accent1"/>
+          </a:effectRef>
+          <a:fontRef idx="minor">
+            <a:schemeClr val="lt1"/>
+          </a:fontRef>
+        </p:style>
+        <p:txBody>
+          <a:bodyPr rtlCol="0" anchor="ctr" wrap="square" lIns="18288" rIns="18288" tIns="18288" bIns="18288"/>
+          <a:lstStyle/>
+          <a:p>
+            <a:pPr algn="l">
+              <a:spcAft>
+                <a:spcPts val="200"/>
+              </a:spcAft>
+            </a:pPr>
+            <a:r>
+              <a:rPr sz="1000" b="0" u="sng">
+                <a:solidFill>
+                  <a:srgbClr val="000000"/>
+                </a:solidFill>
+                <a:latin typeface="Arial"/>
+                <a:ea typeface="微軟正黑體"/>
+                <a:hlinkClick r:id="rId6"/>
+              </a:rPr>
+              <a:t>保險局全球資訊網（IFRS 17／TW-ICS 專區）　※</a:t>
+            </a:r>
+          </a:p>
+          <a:p>
+            <a:pPr algn="l">
+              <a:spcAft>
+                <a:spcPts val="200"/>
+              </a:spcAft>
+            </a:pPr>
+            <a:r>
+              <a:rPr sz="850" b="0">
+                <a:solidFill>
+                  <a:srgbClr val="595959"/>
+                </a:solidFill>
+                <a:latin typeface="Arial"/>
+                <a:ea typeface="微軟正黑體"/>
+              </a:rPr>
+              <a:t>IFRS 17／TW-ICS｜金管會保險局</a:t>
+            </a:r>
+          </a:p>
+        </p:txBody>
+      </p:sp>
+      <p:sp>
+        <p:nvSpPr>
+          <p:cNvPr id="17" name="Rectangle 16"/>
+          <p:cNvSpPr/>
+          <p:nvPr/>
+        </p:nvSpPr>
+        <p:spPr>
+          <a:xfrm>
+            <a:off x="411480" y="3383279"/>
+            <a:ext cx="411480" cy="384048"/>
+          </a:xfrm>
+          <a:prstGeom prst="rect">
+            <a:avLst/>
+          </a:prstGeom>
+          <a:noFill/>
+          <a:ln>
+            <a:noFill/>
+          </a:ln>
+          <a:effectLst/>
+        </p:spPr>
+        <p:style>
+          <a:lnRef idx="1">
+            <a:schemeClr val="accent1"/>
+          </a:lnRef>
+          <a:fillRef idx="3">
+            <a:schemeClr val="accent1"/>
+          </a:fillRef>
+          <a:effectRef idx="2">
+            <a:schemeClr val="accent1"/>
+          </a:effectRef>
+          <a:fontRef idx="minor">
+            <a:schemeClr val="lt1"/>
+          </a:fontRef>
+        </p:style>
+        <p:txBody>
+          <a:bodyPr rtlCol="0" anchor="ctr" wrap="square" lIns="18288" rIns="18288" tIns="18288" bIns="18288"/>
+          <a:lstStyle/>
+          <a:p>
+            <a:pPr algn="l">
+              <a:spcAft>
+                <a:spcPts val="200"/>
+              </a:spcAft>
+            </a:pPr>
+            <a:r>
+              <a:rPr sz="1000" b="1">
+                <a:solidFill>
+                  <a:srgbClr val="FD5108"/>
+                </a:solidFill>
+                <a:latin typeface="Arial"/>
+                <a:ea typeface="微軟正黑體"/>
+              </a:rPr>
+              <a:t>[6]</a:t>
+            </a:r>
+          </a:p>
+        </p:txBody>
+      </p:sp>
+      <p:sp>
+        <p:nvSpPr>
+          <p:cNvPr id="18" name="Rectangle 17"/>
+          <p:cNvSpPr/>
+          <p:nvPr/>
+        </p:nvSpPr>
+        <p:spPr>
+          <a:xfrm>
+            <a:off x="822960" y="3383279"/>
+            <a:ext cx="5257800" cy="384048"/>
+          </a:xfrm>
+          <a:prstGeom prst="rect">
+            <a:avLst/>
+          </a:prstGeom>
+          <a:noFill/>
+          <a:ln>
+            <a:noFill/>
+          </a:ln>
+          <a:effectLst/>
+        </p:spPr>
+        <p:style>
+          <a:lnRef idx="1">
+            <a:schemeClr val="accent1"/>
+          </a:lnRef>
+          <a:fillRef idx="3">
+            <a:schemeClr val="accent1"/>
+          </a:fillRef>
+          <a:effectRef idx="2">
+            <a:schemeClr val="accent1"/>
+          </a:effectRef>
+          <a:fontRef idx="minor">
+            <a:schemeClr val="lt1"/>
+          </a:fontRef>
+        </p:style>
+        <p:txBody>
+          <a:bodyPr rtlCol="0" anchor="ctr" wrap="square" lIns="18288" rIns="18288" tIns="18288" bIns="18288"/>
+          <a:lstStyle/>
+          <a:p>
+            <a:pPr algn="l">
+              <a:spcAft>
+                <a:spcPts val="200"/>
+              </a:spcAft>
+            </a:pPr>
+            <a:r>
+              <a:rPr sz="1000" b="0" u="sng">
+                <a:solidFill>
+                  <a:srgbClr val="000000"/>
+                </a:solidFill>
+                <a:latin typeface="Arial"/>
+                <a:ea typeface="微軟正黑體"/>
+                <a:hlinkClick r:id="rId7"/>
+              </a:rPr>
+              <a:t>保險業資本新時代：壽險公會談 15 年過渡措施</a:t>
+            </a:r>
+          </a:p>
+          <a:p>
+            <a:pPr algn="l">
+              <a:spcAft>
+                <a:spcPts val="200"/>
+              </a:spcAft>
+            </a:pPr>
+            <a:r>
+              <a:rPr sz="850" b="0">
+                <a:solidFill>
+                  <a:srgbClr val="595959"/>
+                </a:solidFill>
+                <a:latin typeface="Arial"/>
+                <a:ea typeface="微軟正黑體"/>
+              </a:rPr>
+              <a:t>IFRS 17／TW-ICS｜優分析，2025-10</a:t>
+            </a:r>
+          </a:p>
+        </p:txBody>
+      </p:sp>
+      <p:sp>
+        <p:nvSpPr>
+          <p:cNvPr id="19" name="Rectangle 18"/>
+          <p:cNvSpPr/>
+          <p:nvPr/>
+        </p:nvSpPr>
+        <p:spPr>
+          <a:xfrm>
+            <a:off x="411480" y="3813048"/>
+            <a:ext cx="411480" cy="384048"/>
+          </a:xfrm>
+          <a:prstGeom prst="rect">
+            <a:avLst/>
+          </a:prstGeom>
+          <a:noFill/>
+          <a:ln>
+            <a:noFill/>
+          </a:ln>
+          <a:effectLst/>
+        </p:spPr>
+        <p:style>
+          <a:lnRef idx="1">
+            <a:schemeClr val="accent1"/>
+          </a:lnRef>
+          <a:fillRef idx="3">
+            <a:schemeClr val="accent1"/>
+          </a:fillRef>
+          <a:effectRef idx="2">
+            <a:schemeClr val="accent1"/>
+          </a:effectRef>
+          <a:fontRef idx="minor">
+            <a:schemeClr val="lt1"/>
+          </a:fontRef>
+        </p:style>
+        <p:txBody>
+          <a:bodyPr rtlCol="0" anchor="ctr" wrap="square" lIns="18288" rIns="18288" tIns="18288" bIns="18288"/>
+          <a:lstStyle/>
+          <a:p>
+            <a:pPr algn="l">
+              <a:spcAft>
+                <a:spcPts val="200"/>
+              </a:spcAft>
+            </a:pPr>
+            <a:r>
+              <a:rPr sz="1000" b="1">
+                <a:solidFill>
+                  <a:srgbClr val="FD5108"/>
+                </a:solidFill>
+                <a:latin typeface="Arial"/>
+                <a:ea typeface="微軟正黑體"/>
+              </a:rPr>
+              <a:t>[7]</a:t>
+            </a:r>
+          </a:p>
+        </p:txBody>
+      </p:sp>
+      <p:sp>
+        <p:nvSpPr>
+          <p:cNvPr id="20" name="Rectangle 19"/>
+          <p:cNvSpPr/>
+          <p:nvPr/>
+        </p:nvSpPr>
+        <p:spPr>
+          <a:xfrm>
+            <a:off x="822960" y="3813048"/>
+            <a:ext cx="5257800" cy="384048"/>
+          </a:xfrm>
+          <a:prstGeom prst="rect">
+            <a:avLst/>
+          </a:prstGeom>
+          <a:noFill/>
+          <a:ln>
+            <a:noFill/>
+          </a:ln>
+          <a:effectLst/>
+        </p:spPr>
+        <p:style>
+          <a:lnRef idx="1">
+            <a:schemeClr val="accent1"/>
+          </a:lnRef>
+          <a:fillRef idx="3">
+            <a:schemeClr val="accent1"/>
+          </a:fillRef>
+          <a:effectRef idx="2">
+            <a:schemeClr val="accent1"/>
+          </a:effectRef>
+          <a:fontRef idx="minor">
+            <a:schemeClr val="lt1"/>
+          </a:fontRef>
+        </p:style>
+        <p:txBody>
+          <a:bodyPr rtlCol="0" anchor="ctr" wrap="square" lIns="18288" rIns="18288" tIns="18288" bIns="18288"/>
+          <a:lstStyle/>
+          <a:p>
+            <a:pPr algn="l">
+              <a:spcAft>
+                <a:spcPts val="200"/>
+              </a:spcAft>
+            </a:pPr>
+            <a:r>
+              <a:rPr sz="1000" b="0" u="sng">
+                <a:solidFill>
+                  <a:srgbClr val="000000"/>
+                </a:solidFill>
+                <a:latin typeface="Arial"/>
+                <a:ea typeface="微軟正黑體"/>
+                <a:hlinkClick r:id="rId8"/>
+              </a:rPr>
+              <a:t>Insurance Banana Skins 2025：台灣焦慮高於全球、準備度低於全球</a:t>
+            </a:r>
+          </a:p>
+          <a:p>
+            <a:pPr algn="l">
+              <a:spcAft>
+                <a:spcPts val="200"/>
+              </a:spcAft>
+            </a:pPr>
+            <a:r>
+              <a:rPr sz="850" b="0">
+                <a:solidFill>
+                  <a:srgbClr val="595959"/>
+                </a:solidFill>
+                <a:latin typeface="Arial"/>
+                <a:ea typeface="微軟正黑體"/>
+              </a:rPr>
+              <a:t>IFRS 17／TW-ICS｜PwC／CSFI（中央社轉載），2025-10-07</a:t>
+            </a:r>
+          </a:p>
+        </p:txBody>
+      </p:sp>
+      <p:sp>
+        <p:nvSpPr>
+          <p:cNvPr id="21" name="Rectangle 20"/>
+          <p:cNvSpPr/>
+          <p:nvPr/>
+        </p:nvSpPr>
+        <p:spPr>
+          <a:xfrm>
+            <a:off x="411480" y="4242816"/>
+            <a:ext cx="411480" cy="384048"/>
+          </a:xfrm>
+          <a:prstGeom prst="rect">
+            <a:avLst/>
+          </a:prstGeom>
+          <a:noFill/>
+          <a:ln>
+            <a:noFill/>
+          </a:ln>
+          <a:effectLst/>
+        </p:spPr>
+        <p:style>
+          <a:lnRef idx="1">
+            <a:schemeClr val="accent1"/>
+          </a:lnRef>
+          <a:fillRef idx="3">
+            <a:schemeClr val="accent1"/>
+          </a:fillRef>
+          <a:effectRef idx="2">
+            <a:schemeClr val="accent1"/>
+          </a:effectRef>
+          <a:fontRef idx="minor">
+            <a:schemeClr val="lt1"/>
+          </a:fontRef>
+        </p:style>
+        <p:txBody>
+          <a:bodyPr rtlCol="0" anchor="ctr" wrap="square" lIns="18288" rIns="18288" tIns="18288" bIns="18288"/>
+          <a:lstStyle/>
+          <a:p>
+            <a:pPr algn="l">
+              <a:spcAft>
+                <a:spcPts val="200"/>
+              </a:spcAft>
+            </a:pPr>
+            <a:r>
+              <a:rPr sz="1000" b="1">
+                <a:solidFill>
+                  <a:srgbClr val="FD5108"/>
+                </a:solidFill>
+                <a:latin typeface="Arial"/>
+                <a:ea typeface="微軟正黑體"/>
+              </a:rPr>
+              <a:t>[8]</a:t>
+            </a:r>
+          </a:p>
+        </p:txBody>
+      </p:sp>
+      <p:sp>
+        <p:nvSpPr>
+          <p:cNvPr id="22" name="Rectangle 21"/>
+          <p:cNvSpPr/>
+          <p:nvPr/>
+        </p:nvSpPr>
+        <p:spPr>
+          <a:xfrm>
+            <a:off x="822960" y="4242816"/>
+            <a:ext cx="5257800" cy="384048"/>
+          </a:xfrm>
+          <a:prstGeom prst="rect">
+            <a:avLst/>
+          </a:prstGeom>
+          <a:noFill/>
+          <a:ln>
+            <a:noFill/>
+          </a:ln>
+          <a:effectLst/>
+        </p:spPr>
+        <p:style>
+          <a:lnRef idx="1">
+            <a:schemeClr val="accent1"/>
+          </a:lnRef>
+          <a:fillRef idx="3">
+            <a:schemeClr val="accent1"/>
+          </a:fillRef>
+          <a:effectRef idx="2">
+            <a:schemeClr val="accent1"/>
+          </a:effectRef>
+          <a:fontRef idx="minor">
+            <a:schemeClr val="lt1"/>
+          </a:fontRef>
+        </p:style>
+        <p:txBody>
+          <a:bodyPr rtlCol="0" anchor="ctr" wrap="square" lIns="18288" rIns="18288" tIns="18288" bIns="18288"/>
+          <a:lstStyle/>
+          <a:p>
+            <a:pPr algn="l">
+              <a:spcAft>
+                <a:spcPts val="200"/>
+              </a:spcAft>
+            </a:pPr>
+            <a:r>
+              <a:rPr sz="1000" b="0" u="sng">
+                <a:solidFill>
+                  <a:srgbClr val="000000"/>
+                </a:solidFill>
+                <a:latin typeface="Arial"/>
+                <a:ea typeface="微軟正黑體"/>
+                <a:hlinkClick r:id="rId9"/>
+              </a:rPr>
+              <a:t>IFRS 17 即將上路：建議臺灣保險業者的關鍵議題　※</a:t>
+            </a:r>
+          </a:p>
+          <a:p>
+            <a:pPr algn="l">
+              <a:spcAft>
+                <a:spcPts val="200"/>
+              </a:spcAft>
+            </a:pPr>
+            <a:r>
+              <a:rPr sz="850" b="0">
+                <a:solidFill>
+                  <a:srgbClr val="595959"/>
+                </a:solidFill>
+                <a:latin typeface="Arial"/>
+                <a:ea typeface="微軟正黑體"/>
+              </a:rPr>
+              <a:t>IFRS 17／TW-ICS｜資誠，2025-11</a:t>
+            </a:r>
+          </a:p>
+        </p:txBody>
+      </p:sp>
+      <p:sp>
+        <p:nvSpPr>
+          <p:cNvPr id="23" name="Rectangle 22"/>
+          <p:cNvSpPr/>
+          <p:nvPr/>
+        </p:nvSpPr>
+        <p:spPr>
+          <a:xfrm>
+            <a:off x="411480" y="4672583"/>
+            <a:ext cx="411480" cy="384048"/>
+          </a:xfrm>
+          <a:prstGeom prst="rect">
+            <a:avLst/>
+          </a:prstGeom>
+          <a:noFill/>
+          <a:ln>
+            <a:noFill/>
+          </a:ln>
+          <a:effectLst/>
+        </p:spPr>
+        <p:style>
+          <a:lnRef idx="1">
+            <a:schemeClr val="accent1"/>
+          </a:lnRef>
+          <a:fillRef idx="3">
+            <a:schemeClr val="accent1"/>
+          </a:fillRef>
+          <a:effectRef idx="2">
+            <a:schemeClr val="accent1"/>
+          </a:effectRef>
+          <a:fontRef idx="minor">
+            <a:schemeClr val="lt1"/>
+          </a:fontRef>
+        </p:style>
+        <p:txBody>
+          <a:bodyPr rtlCol="0" anchor="ctr" wrap="square" lIns="18288" rIns="18288" tIns="18288" bIns="18288"/>
+          <a:lstStyle/>
+          <a:p>
+            <a:pPr algn="l">
+              <a:spcAft>
+                <a:spcPts val="200"/>
+              </a:spcAft>
+            </a:pPr>
+            <a:r>
+              <a:rPr sz="1000" b="1">
+                <a:solidFill>
+                  <a:srgbClr val="FD5108"/>
+                </a:solidFill>
+                <a:latin typeface="Arial"/>
+                <a:ea typeface="微軟正黑體"/>
+              </a:rPr>
+              <a:t>[9]</a:t>
+            </a:r>
+          </a:p>
+        </p:txBody>
+      </p:sp>
+      <p:sp>
+        <p:nvSpPr>
+          <p:cNvPr id="24" name="Rectangle 23"/>
+          <p:cNvSpPr/>
+          <p:nvPr/>
+        </p:nvSpPr>
+        <p:spPr>
+          <a:xfrm>
+            <a:off x="822960" y="4672583"/>
+            <a:ext cx="5257800" cy="384048"/>
+          </a:xfrm>
+          <a:prstGeom prst="rect">
+            <a:avLst/>
+          </a:prstGeom>
+          <a:noFill/>
+          <a:ln>
+            <a:noFill/>
+          </a:ln>
+          <a:effectLst/>
+        </p:spPr>
+        <p:style>
+          <a:lnRef idx="1">
+            <a:schemeClr val="accent1"/>
+          </a:lnRef>
+          <a:fillRef idx="3">
+            <a:schemeClr val="accent1"/>
+          </a:fillRef>
+          <a:effectRef idx="2">
+            <a:schemeClr val="accent1"/>
+          </a:effectRef>
+          <a:fontRef idx="minor">
+            <a:schemeClr val="lt1"/>
+          </a:fontRef>
+        </p:style>
+        <p:txBody>
+          <a:bodyPr rtlCol="0" anchor="ctr" wrap="square" lIns="18288" rIns="18288" tIns="18288" bIns="18288"/>
+          <a:lstStyle/>
+          <a:p>
+            <a:pPr algn="l">
+              <a:spcAft>
+                <a:spcPts val="200"/>
+              </a:spcAft>
+            </a:pPr>
+            <a:r>
+              <a:rPr sz="1000" b="0" u="sng">
+                <a:solidFill>
+                  <a:srgbClr val="000000"/>
+                </a:solidFill>
+                <a:latin typeface="Arial"/>
+                <a:ea typeface="微軟正黑體"/>
+                <a:hlinkClick r:id="rId10"/>
+              </a:rPr>
+              <a:t>《金融業運用 AI 指引》　※</a:t>
+            </a:r>
+          </a:p>
+          <a:p>
+            <a:pPr algn="l">
+              <a:spcAft>
+                <a:spcPts val="200"/>
+              </a:spcAft>
+            </a:pPr>
+            <a:r>
+              <a:rPr sz="850" b="0">
+                <a:solidFill>
+                  <a:srgbClr val="595959"/>
+                </a:solidFill>
+                <a:latin typeface="Arial"/>
+                <a:ea typeface="微軟正黑體"/>
+              </a:rPr>
+              <a:t>AI 治理｜金管會，2024-06</a:t>
+            </a:r>
+          </a:p>
+        </p:txBody>
+      </p:sp>
+      <p:sp>
+        <p:nvSpPr>
+          <p:cNvPr id="25" name="Rectangle 24"/>
+          <p:cNvSpPr/>
+          <p:nvPr/>
+        </p:nvSpPr>
+        <p:spPr>
+          <a:xfrm>
+            <a:off x="411480" y="5102352"/>
+            <a:ext cx="411480" cy="384048"/>
+          </a:xfrm>
+          <a:prstGeom prst="rect">
+            <a:avLst/>
+          </a:prstGeom>
+          <a:noFill/>
+          <a:ln>
+            <a:noFill/>
+          </a:ln>
+          <a:effectLst/>
+        </p:spPr>
+        <p:style>
+          <a:lnRef idx="1">
+            <a:schemeClr val="accent1"/>
+          </a:lnRef>
+          <a:fillRef idx="3">
+            <a:schemeClr val="accent1"/>
+          </a:fillRef>
+          <a:effectRef idx="2">
+            <a:schemeClr val="accent1"/>
+          </a:effectRef>
+          <a:fontRef idx="minor">
+            <a:schemeClr val="lt1"/>
+          </a:fontRef>
+        </p:style>
+        <p:txBody>
+          <a:bodyPr rtlCol="0" anchor="ctr" wrap="square" lIns="18288" rIns="18288" tIns="18288" bIns="18288"/>
+          <a:lstStyle/>
+          <a:p>
+            <a:pPr algn="l">
+              <a:spcAft>
+                <a:spcPts val="200"/>
+              </a:spcAft>
+            </a:pPr>
+            <a:r>
+              <a:rPr sz="1000" b="1">
+                <a:solidFill>
+                  <a:srgbClr val="FD5108"/>
+                </a:solidFill>
+                <a:latin typeface="Arial"/>
+                <a:ea typeface="微軟正黑體"/>
+              </a:rPr>
+              <a:t>[10]</a:t>
+            </a:r>
+          </a:p>
+        </p:txBody>
+      </p:sp>
+      <p:sp>
+        <p:nvSpPr>
+          <p:cNvPr id="26" name="Rectangle 25"/>
+          <p:cNvSpPr/>
+          <p:nvPr/>
+        </p:nvSpPr>
+        <p:spPr>
+          <a:xfrm>
+            <a:off x="822960" y="5102352"/>
+            <a:ext cx="5257800" cy="384048"/>
+          </a:xfrm>
+          <a:prstGeom prst="rect">
+            <a:avLst/>
+          </a:prstGeom>
+          <a:noFill/>
+          <a:ln>
+            <a:noFill/>
+          </a:ln>
+          <a:effectLst/>
+        </p:spPr>
+        <p:style>
+          <a:lnRef idx="1">
+            <a:schemeClr val="accent1"/>
+          </a:lnRef>
+          <a:fillRef idx="3">
+            <a:schemeClr val="accent1"/>
+          </a:fillRef>
+          <a:effectRef idx="2">
+            <a:schemeClr val="accent1"/>
+          </a:effectRef>
+          <a:fontRef idx="minor">
+            <a:schemeClr val="lt1"/>
+          </a:fontRef>
+        </p:style>
+        <p:txBody>
+          <a:bodyPr rtlCol="0" anchor="ctr" wrap="square" lIns="18288" rIns="18288" tIns="18288" bIns="18288"/>
+          <a:lstStyle/>
+          <a:p>
+            <a:pPr algn="l">
+              <a:spcAft>
+                <a:spcPts val="200"/>
+              </a:spcAft>
+            </a:pPr>
+            <a:r>
+              <a:rPr sz="1000" b="0" u="sng">
+                <a:solidFill>
+                  <a:srgbClr val="000000"/>
+                </a:solidFill>
+                <a:latin typeface="Arial"/>
+                <a:ea typeface="微軟正黑體"/>
+                <a:hlinkClick r:id="rId11"/>
+              </a:rPr>
+              <a:t>金融業運用 AI 指引解析</a:t>
+            </a:r>
+          </a:p>
+          <a:p>
+            <a:pPr algn="l">
+              <a:spcAft>
+                <a:spcPts val="200"/>
+              </a:spcAft>
+            </a:pPr>
+            <a:r>
+              <a:rPr sz="850" b="0">
+                <a:solidFill>
+                  <a:srgbClr val="595959"/>
+                </a:solidFill>
+                <a:latin typeface="Arial"/>
+                <a:ea typeface="微軟正黑體"/>
+              </a:rPr>
+              <a:t>AI 治理｜理律法律事務所</a:t>
+            </a:r>
+          </a:p>
+        </p:txBody>
+      </p:sp>
+      <p:sp>
+        <p:nvSpPr>
+          <p:cNvPr id="27" name="Rectangle 26"/>
+          <p:cNvSpPr/>
+          <p:nvPr/>
+        </p:nvSpPr>
+        <p:spPr>
+          <a:xfrm>
+            <a:off x="411480" y="5532119"/>
+            <a:ext cx="411480" cy="384048"/>
+          </a:xfrm>
+          <a:prstGeom prst="rect">
+            <a:avLst/>
+          </a:prstGeom>
+          <a:noFill/>
+          <a:ln>
+            <a:noFill/>
+          </a:ln>
+          <a:effectLst/>
+        </p:spPr>
+        <p:style>
+          <a:lnRef idx="1">
+            <a:schemeClr val="accent1"/>
+          </a:lnRef>
+          <a:fillRef idx="3">
+            <a:schemeClr val="accent1"/>
+          </a:fillRef>
+          <a:effectRef idx="2">
+            <a:schemeClr val="accent1"/>
+          </a:effectRef>
+          <a:fontRef idx="minor">
+            <a:schemeClr val="lt1"/>
+          </a:fontRef>
+        </p:style>
+        <p:txBody>
+          <a:bodyPr rtlCol="0" anchor="ctr" wrap="square" lIns="18288" rIns="18288" tIns="18288" bIns="18288"/>
+          <a:lstStyle/>
+          <a:p>
+            <a:pPr algn="l">
+              <a:spcAft>
+                <a:spcPts val="200"/>
+              </a:spcAft>
+            </a:pPr>
+            <a:r>
+              <a:rPr sz="1000" b="1">
+                <a:solidFill>
+                  <a:srgbClr val="FD5108"/>
+                </a:solidFill>
+                <a:latin typeface="Arial"/>
+                <a:ea typeface="微軟正黑體"/>
+              </a:rPr>
+              <a:t>[11]</a:t>
+            </a:r>
+          </a:p>
+        </p:txBody>
+      </p:sp>
+      <p:sp>
+        <p:nvSpPr>
+          <p:cNvPr id="28" name="Rectangle 27"/>
+          <p:cNvSpPr/>
+          <p:nvPr/>
+        </p:nvSpPr>
+        <p:spPr>
+          <a:xfrm>
+            <a:off x="822960" y="5532119"/>
+            <a:ext cx="5257800" cy="384048"/>
+          </a:xfrm>
+          <a:prstGeom prst="rect">
+            <a:avLst/>
+          </a:prstGeom>
+          <a:noFill/>
+          <a:ln>
+            <a:noFill/>
+          </a:ln>
+          <a:effectLst/>
+        </p:spPr>
+        <p:style>
+          <a:lnRef idx="1">
+            <a:schemeClr val="accent1"/>
+          </a:lnRef>
+          <a:fillRef idx="3">
+            <a:schemeClr val="accent1"/>
+          </a:fillRef>
+          <a:effectRef idx="2">
+            <a:schemeClr val="accent1"/>
+          </a:effectRef>
+          <a:fontRef idx="minor">
+            <a:schemeClr val="lt1"/>
+          </a:fontRef>
+        </p:style>
+        <p:txBody>
+          <a:bodyPr rtlCol="0" anchor="ctr" wrap="square" lIns="18288" rIns="18288" tIns="18288" bIns="18288"/>
+          <a:lstStyle/>
+          <a:p>
+            <a:pPr algn="l">
+              <a:spcAft>
+                <a:spcPts val="200"/>
+              </a:spcAft>
+            </a:pPr>
+            <a:r>
+              <a:rPr sz="1000" b="0" u="sng">
+                <a:solidFill>
+                  <a:srgbClr val="000000"/>
+                </a:solidFill>
+                <a:latin typeface="Arial"/>
+                <a:ea typeface="微軟正黑體"/>
+                <a:hlinkClick r:id="rId12"/>
+              </a:rPr>
+              <a:t>《保險業運用人工智慧系統自律規範》</a:t>
+            </a:r>
+          </a:p>
+          <a:p>
+            <a:pPr algn="l">
+              <a:spcAft>
+                <a:spcPts val="200"/>
+              </a:spcAft>
+            </a:pPr>
+            <a:r>
+              <a:rPr sz="850" b="0">
+                <a:solidFill>
+                  <a:srgbClr val="595959"/>
+                </a:solidFill>
+                <a:latin typeface="Arial"/>
+                <a:ea typeface="微軟正黑體"/>
+              </a:rPr>
+              <a:t>AI 治理｜壽險／產險公會，2025-04-10 備查</a:t>
+            </a:r>
+          </a:p>
+        </p:txBody>
+      </p:sp>
+      <p:sp>
+        <p:nvSpPr>
+          <p:cNvPr id="29" name="Rectangle 28"/>
+          <p:cNvSpPr/>
+          <p:nvPr/>
+        </p:nvSpPr>
+        <p:spPr>
+          <a:xfrm>
+            <a:off x="6172200" y="1234440"/>
+            <a:ext cx="411480" cy="384048"/>
+          </a:xfrm>
+          <a:prstGeom prst="rect">
+            <a:avLst/>
+          </a:prstGeom>
+          <a:noFill/>
+          <a:ln>
+            <a:noFill/>
+          </a:ln>
+          <a:effectLst/>
+        </p:spPr>
+        <p:style>
+          <a:lnRef idx="1">
+            <a:schemeClr val="accent1"/>
+          </a:lnRef>
+          <a:fillRef idx="3">
+            <a:schemeClr val="accent1"/>
+          </a:fillRef>
+          <a:effectRef idx="2">
+            <a:schemeClr val="accent1"/>
+          </a:effectRef>
+          <a:fontRef idx="minor">
+            <a:schemeClr val="lt1"/>
+          </a:fontRef>
+        </p:style>
+        <p:txBody>
+          <a:bodyPr rtlCol="0" anchor="ctr" wrap="square" lIns="18288" rIns="18288" tIns="18288" bIns="18288"/>
+          <a:lstStyle/>
+          <a:p>
+            <a:pPr algn="l">
+              <a:spcAft>
+                <a:spcPts val="200"/>
+              </a:spcAft>
+            </a:pPr>
+            <a:r>
+              <a:rPr sz="1000" b="1">
+                <a:solidFill>
+                  <a:srgbClr val="FD5108"/>
+                </a:solidFill>
+                <a:latin typeface="Arial"/>
+                <a:ea typeface="微軟正黑體"/>
+              </a:rPr>
+              <a:t>[12]</a:t>
+            </a:r>
+          </a:p>
+        </p:txBody>
+      </p:sp>
+      <p:sp>
+        <p:nvSpPr>
+          <p:cNvPr id="30" name="Rectangle 29"/>
+          <p:cNvSpPr/>
+          <p:nvPr/>
+        </p:nvSpPr>
+        <p:spPr>
+          <a:xfrm>
+            <a:off x="6583680" y="1234440"/>
+            <a:ext cx="5257800" cy="384048"/>
+          </a:xfrm>
+          <a:prstGeom prst="rect">
+            <a:avLst/>
+          </a:prstGeom>
+          <a:noFill/>
+          <a:ln>
+            <a:noFill/>
+          </a:ln>
+          <a:effectLst/>
+        </p:spPr>
+        <p:style>
+          <a:lnRef idx="1">
+            <a:schemeClr val="accent1"/>
+          </a:lnRef>
+          <a:fillRef idx="3">
+            <a:schemeClr val="accent1"/>
+          </a:fillRef>
+          <a:effectRef idx="2">
+            <a:schemeClr val="accent1"/>
+          </a:effectRef>
+          <a:fontRef idx="minor">
+            <a:schemeClr val="lt1"/>
+          </a:fontRef>
+        </p:style>
+        <p:txBody>
+          <a:bodyPr rtlCol="0" anchor="ctr" wrap="square" lIns="18288" rIns="18288" tIns="18288" bIns="18288"/>
+          <a:lstStyle/>
+          <a:p>
+            <a:pPr algn="l">
+              <a:spcAft>
+                <a:spcPts val="200"/>
+              </a:spcAft>
+            </a:pPr>
+            <a:r>
+              <a:rPr sz="1000" b="0" u="sng">
+                <a:solidFill>
+                  <a:srgbClr val="000000"/>
+                </a:solidFill>
+                <a:latin typeface="Arial"/>
+                <a:ea typeface="微軟正黑體"/>
+                <a:hlinkClick r:id="rId13"/>
+              </a:rPr>
+              <a:t>NAIC expands AI Systems Evaluation Tool pilot to 12 states</a:t>
+            </a:r>
+          </a:p>
+          <a:p>
+            <a:pPr algn="l">
+              <a:spcAft>
+                <a:spcPts val="200"/>
+              </a:spcAft>
+            </a:pPr>
+            <a:r>
+              <a:rPr sz="850" b="0">
+                <a:solidFill>
+                  <a:srgbClr val="595959"/>
+                </a:solidFill>
+                <a:latin typeface="Arial"/>
+                <a:ea typeface="微軟正黑體"/>
+              </a:rPr>
+              <a:t>AI 治理｜Fenwick，2026</a:t>
+            </a:r>
+          </a:p>
+        </p:txBody>
+      </p:sp>
+      <p:sp>
+        <p:nvSpPr>
+          <p:cNvPr id="31" name="Rectangle 30"/>
+          <p:cNvSpPr/>
+          <p:nvPr/>
+        </p:nvSpPr>
+        <p:spPr>
+          <a:xfrm>
+            <a:off x="6172200" y="1664208"/>
+            <a:ext cx="411480" cy="384048"/>
+          </a:xfrm>
+          <a:prstGeom prst="rect">
+            <a:avLst/>
+          </a:prstGeom>
+          <a:noFill/>
+          <a:ln>
+            <a:noFill/>
+          </a:ln>
+          <a:effectLst/>
+        </p:spPr>
+        <p:style>
+          <a:lnRef idx="1">
+            <a:schemeClr val="accent1"/>
+          </a:lnRef>
+          <a:fillRef idx="3">
+            <a:schemeClr val="accent1"/>
+          </a:fillRef>
+          <a:effectRef idx="2">
+            <a:schemeClr val="accent1"/>
+          </a:effectRef>
+          <a:fontRef idx="minor">
+            <a:schemeClr val="lt1"/>
+          </a:fontRef>
+        </p:style>
+        <p:txBody>
+          <a:bodyPr rtlCol="0" anchor="ctr" wrap="square" lIns="18288" rIns="18288" tIns="18288" bIns="18288"/>
+          <a:lstStyle/>
+          <a:p>
+            <a:pPr algn="l">
+              <a:spcAft>
+                <a:spcPts val="200"/>
+              </a:spcAft>
+            </a:pPr>
+            <a:r>
+              <a:rPr sz="1000" b="1">
+                <a:solidFill>
+                  <a:srgbClr val="FD5108"/>
+                </a:solidFill>
+                <a:latin typeface="Arial"/>
+                <a:ea typeface="微軟正黑體"/>
+              </a:rPr>
+              <a:t>[13]</a:t>
+            </a:r>
+          </a:p>
+        </p:txBody>
+      </p:sp>
+      <p:sp>
+        <p:nvSpPr>
+          <p:cNvPr id="32" name="Rectangle 31"/>
+          <p:cNvSpPr/>
+          <p:nvPr/>
+        </p:nvSpPr>
+        <p:spPr>
+          <a:xfrm>
+            <a:off x="6583680" y="1664208"/>
+            <a:ext cx="5257800" cy="384048"/>
+          </a:xfrm>
+          <a:prstGeom prst="rect">
+            <a:avLst/>
+          </a:prstGeom>
+          <a:noFill/>
+          <a:ln>
+            <a:noFill/>
+          </a:ln>
+          <a:effectLst/>
+        </p:spPr>
+        <p:style>
+          <a:lnRef idx="1">
+            <a:schemeClr val="accent1"/>
+          </a:lnRef>
+          <a:fillRef idx="3">
+            <a:schemeClr val="accent1"/>
+          </a:fillRef>
+          <a:effectRef idx="2">
+            <a:schemeClr val="accent1"/>
+          </a:effectRef>
+          <a:fontRef idx="minor">
+            <a:schemeClr val="lt1"/>
+          </a:fontRef>
+        </p:style>
+        <p:txBody>
+          <a:bodyPr rtlCol="0" anchor="ctr" wrap="square" lIns="18288" rIns="18288" tIns="18288" bIns="18288"/>
+          <a:lstStyle/>
+          <a:p>
+            <a:pPr algn="l">
+              <a:spcAft>
+                <a:spcPts val="200"/>
+              </a:spcAft>
+            </a:pPr>
+            <a:r>
+              <a:rPr sz="1000" b="0" u="sng">
+                <a:solidFill>
+                  <a:srgbClr val="000000"/>
+                </a:solidFill>
+                <a:latin typeface="Arial"/>
+                <a:ea typeface="微軟正黑體"/>
+                <a:hlinkClick r:id="rId14"/>
+              </a:rPr>
+              <a:t>Guidelines on AI Risk Management for Financial Institutions</a:t>
+            </a:r>
+          </a:p>
+          <a:p>
+            <a:pPr algn="l">
+              <a:spcAft>
+                <a:spcPts val="200"/>
+              </a:spcAft>
+            </a:pPr>
+            <a:r>
+              <a:rPr sz="850" b="0">
+                <a:solidFill>
+                  <a:srgbClr val="595959"/>
+                </a:solidFill>
+                <a:latin typeface="Arial"/>
+                <a:ea typeface="微軟正黑體"/>
+              </a:rPr>
+              <a:t>AI 治理｜MAS，2026-10 定稿</a:t>
+            </a:r>
+          </a:p>
+        </p:txBody>
+      </p:sp>
+      <p:sp>
+        <p:nvSpPr>
+          <p:cNvPr id="33" name="Rectangle 32"/>
+          <p:cNvSpPr/>
+          <p:nvPr/>
+        </p:nvSpPr>
+        <p:spPr>
+          <a:xfrm>
+            <a:off x="6172200" y="2093976"/>
+            <a:ext cx="411480" cy="384048"/>
+          </a:xfrm>
+          <a:prstGeom prst="rect">
+            <a:avLst/>
+          </a:prstGeom>
+          <a:noFill/>
+          <a:ln>
+            <a:noFill/>
+          </a:ln>
+          <a:effectLst/>
+        </p:spPr>
+        <p:style>
+          <a:lnRef idx="1">
+            <a:schemeClr val="accent1"/>
+          </a:lnRef>
+          <a:fillRef idx="3">
+            <a:schemeClr val="accent1"/>
+          </a:fillRef>
+          <a:effectRef idx="2">
+            <a:schemeClr val="accent1"/>
+          </a:effectRef>
+          <a:fontRef idx="minor">
+            <a:schemeClr val="lt1"/>
+          </a:fontRef>
+        </p:style>
+        <p:txBody>
+          <a:bodyPr rtlCol="0" anchor="ctr" wrap="square" lIns="18288" rIns="18288" tIns="18288" bIns="18288"/>
+          <a:lstStyle/>
+          <a:p>
+            <a:pPr algn="l">
+              <a:spcAft>
+                <a:spcPts val="200"/>
+              </a:spcAft>
+            </a:pPr>
+            <a:r>
+              <a:rPr sz="1000" b="1">
+                <a:solidFill>
+                  <a:srgbClr val="FD5108"/>
+                </a:solidFill>
+                <a:latin typeface="Arial"/>
+                <a:ea typeface="微軟正黑體"/>
+              </a:rPr>
+              <a:t>[14]</a:t>
+            </a:r>
+          </a:p>
+        </p:txBody>
+      </p:sp>
+      <p:sp>
+        <p:nvSpPr>
+          <p:cNvPr id="34" name="Rectangle 33"/>
+          <p:cNvSpPr/>
+          <p:nvPr/>
+        </p:nvSpPr>
+        <p:spPr>
+          <a:xfrm>
+            <a:off x="6583680" y="2093976"/>
+            <a:ext cx="5257800" cy="384048"/>
+          </a:xfrm>
+          <a:prstGeom prst="rect">
+            <a:avLst/>
+          </a:prstGeom>
+          <a:noFill/>
+          <a:ln>
+            <a:noFill/>
+          </a:ln>
+          <a:effectLst/>
+        </p:spPr>
+        <p:style>
+          <a:lnRef idx="1">
+            <a:schemeClr val="accent1"/>
+          </a:lnRef>
+          <a:fillRef idx="3">
+            <a:schemeClr val="accent1"/>
+          </a:fillRef>
+          <a:effectRef idx="2">
+            <a:schemeClr val="accent1"/>
+          </a:effectRef>
+          <a:fontRef idx="minor">
+            <a:schemeClr val="lt1"/>
+          </a:fontRef>
+        </p:style>
+        <p:txBody>
+          <a:bodyPr rtlCol="0" anchor="ctr" wrap="square" lIns="18288" rIns="18288" tIns="18288" bIns="18288"/>
+          <a:lstStyle/>
+          <a:p>
+            <a:pPr algn="l">
+              <a:spcAft>
+                <a:spcPts val="200"/>
+              </a:spcAft>
+            </a:pPr>
+            <a:r>
+              <a:rPr sz="1000" b="0" u="sng">
+                <a:solidFill>
+                  <a:srgbClr val="000000"/>
+                </a:solidFill>
+                <a:latin typeface="Arial"/>
+                <a:ea typeface="微軟正黑體"/>
+                <a:hlinkClick r:id="rId15"/>
+              </a:rPr>
+              <a:t>Shedding Light on Agentic AI in Insurance（22% 計畫 2026 年底前上線）</a:t>
+            </a:r>
+          </a:p>
+          <a:p>
+            <a:pPr algn="l">
+              <a:spcAft>
+                <a:spcPts val="200"/>
+              </a:spcAft>
+            </a:pPr>
+            <a:r>
+              <a:rPr sz="850" b="0">
+                <a:solidFill>
+                  <a:srgbClr val="595959"/>
+                </a:solidFill>
+                <a:latin typeface="Arial"/>
+                <a:ea typeface="微軟正黑體"/>
+              </a:rPr>
+              <a:t>代理型 AI｜Celent，2025-05</a:t>
+            </a:r>
+          </a:p>
+        </p:txBody>
+      </p:sp>
+      <p:sp>
+        <p:nvSpPr>
+          <p:cNvPr id="35" name="Rectangle 34"/>
+          <p:cNvSpPr/>
+          <p:nvPr/>
+        </p:nvSpPr>
+        <p:spPr>
+          <a:xfrm>
+            <a:off x="6172200" y="2523744"/>
+            <a:ext cx="411480" cy="384048"/>
+          </a:xfrm>
+          <a:prstGeom prst="rect">
+            <a:avLst/>
+          </a:prstGeom>
+          <a:noFill/>
+          <a:ln>
+            <a:noFill/>
+          </a:ln>
+          <a:effectLst/>
+        </p:spPr>
+        <p:style>
+          <a:lnRef idx="1">
+            <a:schemeClr val="accent1"/>
+          </a:lnRef>
+          <a:fillRef idx="3">
+            <a:schemeClr val="accent1"/>
+          </a:fillRef>
+          <a:effectRef idx="2">
+            <a:schemeClr val="accent1"/>
+          </a:effectRef>
+          <a:fontRef idx="minor">
+            <a:schemeClr val="lt1"/>
+          </a:fontRef>
+        </p:style>
+        <p:txBody>
+          <a:bodyPr rtlCol="0" anchor="ctr" wrap="square" lIns="18288" rIns="18288" tIns="18288" bIns="18288"/>
+          <a:lstStyle/>
+          <a:p>
+            <a:pPr algn="l">
+              <a:spcAft>
+                <a:spcPts val="200"/>
+              </a:spcAft>
+            </a:pPr>
+            <a:r>
+              <a:rPr sz="1000" b="1">
+                <a:solidFill>
+                  <a:srgbClr val="FD5108"/>
+                </a:solidFill>
+                <a:latin typeface="Arial"/>
+                <a:ea typeface="微軟正黑體"/>
+              </a:rPr>
+              <a:t>[15]</a:t>
+            </a:r>
+          </a:p>
+        </p:txBody>
+      </p:sp>
+      <p:sp>
+        <p:nvSpPr>
+          <p:cNvPr id="36" name="Rectangle 35"/>
+          <p:cNvSpPr/>
+          <p:nvPr/>
+        </p:nvSpPr>
+        <p:spPr>
+          <a:xfrm>
+            <a:off x="6583680" y="2523744"/>
+            <a:ext cx="5257800" cy="384048"/>
+          </a:xfrm>
+          <a:prstGeom prst="rect">
+            <a:avLst/>
+          </a:prstGeom>
+          <a:noFill/>
+          <a:ln>
+            <a:noFill/>
+          </a:ln>
+          <a:effectLst/>
+        </p:spPr>
+        <p:style>
+          <a:lnRef idx="1">
+            <a:schemeClr val="accent1"/>
+          </a:lnRef>
+          <a:fillRef idx="3">
+            <a:schemeClr val="accent1"/>
+          </a:fillRef>
+          <a:effectRef idx="2">
+            <a:schemeClr val="accent1"/>
+          </a:effectRef>
+          <a:fontRef idx="minor">
+            <a:schemeClr val="lt1"/>
+          </a:fontRef>
+        </p:style>
+        <p:txBody>
+          <a:bodyPr rtlCol="0" anchor="ctr" wrap="square" lIns="18288" rIns="18288" tIns="18288" bIns="18288"/>
+          <a:lstStyle/>
+          <a:p>
+            <a:pPr algn="l">
+              <a:spcAft>
+                <a:spcPts val="200"/>
+              </a:spcAft>
+            </a:pPr>
+            <a:r>
+              <a:rPr sz="1000" b="0" u="sng">
+                <a:solidFill>
+                  <a:srgbClr val="000000"/>
+                </a:solidFill>
+                <a:latin typeface="Arial"/>
+                <a:ea typeface="微軟正黑體"/>
+                <a:hlinkClick r:id="rId16"/>
+              </a:rPr>
+              <a:t>Manulife MAUDE 獲 Celent 2026 Model Insurer（核保 AI）</a:t>
+            </a:r>
+          </a:p>
+          <a:p>
+            <a:pPr algn="l">
+              <a:spcAft>
+                <a:spcPts val="200"/>
+              </a:spcAft>
+            </a:pPr>
+            <a:r>
+              <a:rPr sz="850" b="0">
+                <a:solidFill>
+                  <a:srgbClr val="595959"/>
+                </a:solidFill>
+                <a:latin typeface="Arial"/>
+                <a:ea typeface="微軟正黑體"/>
+              </a:rPr>
+              <a:t>代理型 AI｜Manulife，2026</a:t>
+            </a:r>
+          </a:p>
+        </p:txBody>
+      </p:sp>
+      <p:sp>
+        <p:nvSpPr>
+          <p:cNvPr id="37" name="Rectangle 36"/>
+          <p:cNvSpPr/>
+          <p:nvPr/>
+        </p:nvSpPr>
+        <p:spPr>
+          <a:xfrm>
+            <a:off x="6172200" y="2953512"/>
+            <a:ext cx="411480" cy="384048"/>
+          </a:xfrm>
+          <a:prstGeom prst="rect">
+            <a:avLst/>
+          </a:prstGeom>
+          <a:noFill/>
+          <a:ln>
+            <a:noFill/>
+          </a:ln>
+          <a:effectLst/>
+        </p:spPr>
+        <p:style>
+          <a:lnRef idx="1">
+            <a:schemeClr val="accent1"/>
+          </a:lnRef>
+          <a:fillRef idx="3">
+            <a:schemeClr val="accent1"/>
+          </a:fillRef>
+          <a:effectRef idx="2">
+            <a:schemeClr val="accent1"/>
+          </a:effectRef>
+          <a:fontRef idx="minor">
+            <a:schemeClr val="lt1"/>
+          </a:fontRef>
+        </p:style>
+        <p:txBody>
+          <a:bodyPr rtlCol="0" anchor="ctr" wrap="square" lIns="18288" rIns="18288" tIns="18288" bIns="18288"/>
+          <a:lstStyle/>
+          <a:p>
+            <a:pPr algn="l">
+              <a:spcAft>
+                <a:spcPts val="200"/>
+              </a:spcAft>
+            </a:pPr>
+            <a:r>
+              <a:rPr sz="1000" b="1">
+                <a:solidFill>
+                  <a:srgbClr val="FD5108"/>
+                </a:solidFill>
+                <a:latin typeface="Arial"/>
+                <a:ea typeface="微軟正黑體"/>
+              </a:rPr>
+              <a:t>[16]</a:t>
+            </a:r>
+          </a:p>
+        </p:txBody>
+      </p:sp>
+      <p:sp>
+        <p:nvSpPr>
+          <p:cNvPr id="38" name="Rectangle 37"/>
+          <p:cNvSpPr/>
+          <p:nvPr/>
+        </p:nvSpPr>
+        <p:spPr>
+          <a:xfrm>
+            <a:off x="6583680" y="2953512"/>
+            <a:ext cx="5257800" cy="384048"/>
+          </a:xfrm>
+          <a:prstGeom prst="rect">
+            <a:avLst/>
+          </a:prstGeom>
+          <a:noFill/>
+          <a:ln>
+            <a:noFill/>
+          </a:ln>
+          <a:effectLst/>
+        </p:spPr>
+        <p:style>
+          <a:lnRef idx="1">
+            <a:schemeClr val="accent1"/>
+          </a:lnRef>
+          <a:fillRef idx="3">
+            <a:schemeClr val="accent1"/>
+          </a:fillRef>
+          <a:effectRef idx="2">
+            <a:schemeClr val="accent1"/>
+          </a:effectRef>
+          <a:fontRef idx="minor">
+            <a:schemeClr val="lt1"/>
+          </a:fontRef>
+        </p:style>
+        <p:txBody>
+          <a:bodyPr rtlCol="0" anchor="ctr" wrap="square" lIns="18288" rIns="18288" tIns="18288" bIns="18288"/>
+          <a:lstStyle/>
+          <a:p>
+            <a:pPr algn="l">
+              <a:spcAft>
+                <a:spcPts val="200"/>
+              </a:spcAft>
+            </a:pPr>
+            <a:r>
+              <a:rPr sz="1000" b="0" u="sng">
+                <a:solidFill>
+                  <a:srgbClr val="000000"/>
+                </a:solidFill>
+                <a:latin typeface="Arial"/>
+                <a:ea typeface="微軟正黑體"/>
+                <a:hlinkClick r:id="rId17"/>
+              </a:rPr>
+              <a:t>The future underwriting operating system（UWOS）</a:t>
+            </a:r>
+          </a:p>
+          <a:p>
+            <a:pPr algn="l">
+              <a:spcAft>
+                <a:spcPts val="200"/>
+              </a:spcAft>
+            </a:pPr>
+            <a:r>
+              <a:rPr sz="850" b="0">
+                <a:solidFill>
+                  <a:srgbClr val="595959"/>
+                </a:solidFill>
+                <a:latin typeface="Arial"/>
+                <a:ea typeface="微軟正黑體"/>
+              </a:rPr>
+              <a:t>代理型 AI｜McKinsey，2026-06</a:t>
+            </a:r>
+          </a:p>
+        </p:txBody>
+      </p:sp>
+      <p:sp>
+        <p:nvSpPr>
+          <p:cNvPr id="39" name="Rectangle 38"/>
+          <p:cNvSpPr/>
+          <p:nvPr/>
+        </p:nvSpPr>
+        <p:spPr>
+          <a:xfrm>
+            <a:off x="6172200" y="3383279"/>
+            <a:ext cx="411480" cy="384048"/>
+          </a:xfrm>
+          <a:prstGeom prst="rect">
+            <a:avLst/>
+          </a:prstGeom>
+          <a:noFill/>
+          <a:ln>
+            <a:noFill/>
+          </a:ln>
+          <a:effectLst/>
+        </p:spPr>
+        <p:style>
+          <a:lnRef idx="1">
+            <a:schemeClr val="accent1"/>
+          </a:lnRef>
+          <a:fillRef idx="3">
+            <a:schemeClr val="accent1"/>
+          </a:fillRef>
+          <a:effectRef idx="2">
+            <a:schemeClr val="accent1"/>
+          </a:effectRef>
+          <a:fontRef idx="minor">
+            <a:schemeClr val="lt1"/>
+          </a:fontRef>
+        </p:style>
+        <p:txBody>
+          <a:bodyPr rtlCol="0" anchor="ctr" wrap="square" lIns="18288" rIns="18288" tIns="18288" bIns="18288"/>
+          <a:lstStyle/>
+          <a:p>
+            <a:pPr algn="l">
+              <a:spcAft>
+                <a:spcPts val="200"/>
+              </a:spcAft>
+            </a:pPr>
+            <a:r>
+              <a:rPr sz="1000" b="1">
+                <a:solidFill>
+                  <a:srgbClr val="FD5108"/>
+                </a:solidFill>
+                <a:latin typeface="Arial"/>
+                <a:ea typeface="微軟正黑體"/>
+              </a:rPr>
+              <a:t>[17]</a:t>
+            </a:r>
+          </a:p>
+        </p:txBody>
+      </p:sp>
+      <p:sp>
+        <p:nvSpPr>
+          <p:cNvPr id="40" name="Rectangle 39"/>
+          <p:cNvSpPr/>
+          <p:nvPr/>
+        </p:nvSpPr>
+        <p:spPr>
+          <a:xfrm>
+            <a:off x="6583680" y="3383279"/>
+            <a:ext cx="5257800" cy="384048"/>
+          </a:xfrm>
+          <a:prstGeom prst="rect">
+            <a:avLst/>
+          </a:prstGeom>
+          <a:noFill/>
+          <a:ln>
+            <a:noFill/>
+          </a:ln>
+          <a:effectLst/>
+        </p:spPr>
+        <p:style>
+          <a:lnRef idx="1">
+            <a:schemeClr val="accent1"/>
+          </a:lnRef>
+          <a:fillRef idx="3">
+            <a:schemeClr val="accent1"/>
+          </a:fillRef>
+          <a:effectRef idx="2">
+            <a:schemeClr val="accent1"/>
+          </a:effectRef>
+          <a:fontRef idx="minor">
+            <a:schemeClr val="lt1"/>
+          </a:fontRef>
+        </p:style>
+        <p:txBody>
+          <a:bodyPr rtlCol="0" anchor="ctr" wrap="square" lIns="18288" rIns="18288" tIns="18288" bIns="18288"/>
+          <a:lstStyle/>
+          <a:p>
+            <a:pPr algn="l">
+              <a:spcAft>
+                <a:spcPts val="200"/>
+              </a:spcAft>
+            </a:pPr>
+            <a:r>
+              <a:rPr sz="1000" b="0" u="sng">
+                <a:solidFill>
+                  <a:srgbClr val="000000"/>
+                </a:solidFill>
+                <a:latin typeface="Arial"/>
+                <a:ea typeface="微軟正黑體"/>
+                <a:hlinkClick r:id="rId18"/>
+              </a:rPr>
+              <a:t>Can agentic AI (finally) modernize core technologies in insurance?</a:t>
+            </a:r>
+          </a:p>
+          <a:p>
+            <a:pPr algn="l">
+              <a:spcAft>
+                <a:spcPts val="200"/>
+              </a:spcAft>
+            </a:pPr>
+            <a:r>
+              <a:rPr sz="850" b="0">
+                <a:solidFill>
+                  <a:srgbClr val="595959"/>
+                </a:solidFill>
+                <a:latin typeface="Arial"/>
+                <a:ea typeface="微軟正黑體"/>
+              </a:rPr>
+              <a:t>核心與雲端｜McKinsey，2026-04</a:t>
+            </a:r>
+          </a:p>
+        </p:txBody>
+      </p:sp>
+      <p:sp>
+        <p:nvSpPr>
+          <p:cNvPr id="41" name="Rectangle 40"/>
+          <p:cNvSpPr/>
+          <p:nvPr/>
+        </p:nvSpPr>
+        <p:spPr>
+          <a:xfrm>
+            <a:off x="6172200" y="3813048"/>
+            <a:ext cx="411480" cy="384048"/>
+          </a:xfrm>
+          <a:prstGeom prst="rect">
+            <a:avLst/>
+          </a:prstGeom>
+          <a:noFill/>
+          <a:ln>
+            <a:noFill/>
+          </a:ln>
+          <a:effectLst/>
+        </p:spPr>
+        <p:style>
+          <a:lnRef idx="1">
+            <a:schemeClr val="accent1"/>
+          </a:lnRef>
+          <a:fillRef idx="3">
+            <a:schemeClr val="accent1"/>
+          </a:fillRef>
+          <a:effectRef idx="2">
+            <a:schemeClr val="accent1"/>
+          </a:effectRef>
+          <a:fontRef idx="minor">
+            <a:schemeClr val="lt1"/>
+          </a:fontRef>
+        </p:style>
+        <p:txBody>
+          <a:bodyPr rtlCol="0" anchor="ctr" wrap="square" lIns="18288" rIns="18288" tIns="18288" bIns="18288"/>
+          <a:lstStyle/>
+          <a:p>
+            <a:pPr algn="l">
+              <a:spcAft>
+                <a:spcPts val="200"/>
+              </a:spcAft>
+            </a:pPr>
+            <a:r>
+              <a:rPr sz="1000" b="1">
+                <a:solidFill>
+                  <a:srgbClr val="FD5108"/>
+                </a:solidFill>
+                <a:latin typeface="Arial"/>
+                <a:ea typeface="微軟正黑體"/>
+              </a:rPr>
+              <a:t>[18]</a:t>
+            </a:r>
+          </a:p>
+        </p:txBody>
+      </p:sp>
+      <p:sp>
+        <p:nvSpPr>
+          <p:cNvPr id="42" name="Rectangle 41"/>
+          <p:cNvSpPr/>
+          <p:nvPr/>
+        </p:nvSpPr>
+        <p:spPr>
+          <a:xfrm>
+            <a:off x="6583680" y="3813048"/>
+            <a:ext cx="5257800" cy="384048"/>
+          </a:xfrm>
+          <a:prstGeom prst="rect">
+            <a:avLst/>
+          </a:prstGeom>
+          <a:noFill/>
+          <a:ln>
+            <a:noFill/>
+          </a:ln>
+          <a:effectLst/>
+        </p:spPr>
+        <p:style>
+          <a:lnRef idx="1">
+            <a:schemeClr val="accent1"/>
+          </a:lnRef>
+          <a:fillRef idx="3">
+            <a:schemeClr val="accent1"/>
+          </a:fillRef>
+          <a:effectRef idx="2">
+            <a:schemeClr val="accent1"/>
+          </a:effectRef>
+          <a:fontRef idx="minor">
+            <a:schemeClr val="lt1"/>
+          </a:fontRef>
+        </p:style>
+        <p:txBody>
+          <a:bodyPr rtlCol="0" anchor="ctr" wrap="square" lIns="18288" rIns="18288" tIns="18288" bIns="18288"/>
+          <a:lstStyle/>
+          <a:p>
+            <a:pPr algn="l">
+              <a:spcAft>
+                <a:spcPts val="200"/>
+              </a:spcAft>
+            </a:pPr>
+            <a:r>
+              <a:rPr sz="1000" b="0" u="sng">
+                <a:solidFill>
+                  <a:srgbClr val="000000"/>
+                </a:solidFill>
+                <a:latin typeface="Arial"/>
+                <a:ea typeface="微軟正黑體"/>
+                <a:hlinkClick r:id="rId19"/>
+              </a:rPr>
+              <a:t>保險業作業委外新辦法（2025-12-31 施行）</a:t>
+            </a:r>
+          </a:p>
+          <a:p>
+            <a:pPr algn="l">
+              <a:spcAft>
+                <a:spcPts val="200"/>
+              </a:spcAft>
+            </a:pPr>
+            <a:r>
+              <a:rPr sz="850" b="0">
+                <a:solidFill>
+                  <a:srgbClr val="595959"/>
+                </a:solidFill>
+                <a:latin typeface="Arial"/>
+                <a:ea typeface="微軟正黑體"/>
+              </a:rPr>
+              <a:t>核心與雲端｜理律法律事務所</a:t>
+            </a:r>
+          </a:p>
+        </p:txBody>
+      </p:sp>
+      <p:sp>
+        <p:nvSpPr>
+          <p:cNvPr id="43" name="Rectangle 42"/>
+          <p:cNvSpPr/>
+          <p:nvPr/>
+        </p:nvSpPr>
+        <p:spPr>
+          <a:xfrm>
+            <a:off x="6172200" y="4242816"/>
+            <a:ext cx="411480" cy="384048"/>
+          </a:xfrm>
+          <a:prstGeom prst="rect">
+            <a:avLst/>
+          </a:prstGeom>
+          <a:noFill/>
+          <a:ln>
+            <a:noFill/>
+          </a:ln>
+          <a:effectLst/>
+        </p:spPr>
+        <p:style>
+          <a:lnRef idx="1">
+            <a:schemeClr val="accent1"/>
+          </a:lnRef>
+          <a:fillRef idx="3">
+            <a:schemeClr val="accent1"/>
+          </a:fillRef>
+          <a:effectRef idx="2">
+            <a:schemeClr val="accent1"/>
+          </a:effectRef>
+          <a:fontRef idx="minor">
+            <a:schemeClr val="lt1"/>
+          </a:fontRef>
+        </p:style>
+        <p:txBody>
+          <a:bodyPr rtlCol="0" anchor="ctr" wrap="square" lIns="18288" rIns="18288" tIns="18288" bIns="18288"/>
+          <a:lstStyle/>
+          <a:p>
+            <a:pPr algn="l">
+              <a:spcAft>
+                <a:spcPts val="200"/>
+              </a:spcAft>
+            </a:pPr>
+            <a:r>
+              <a:rPr sz="1000" b="1">
+                <a:solidFill>
+                  <a:srgbClr val="FD5108"/>
+                </a:solidFill>
+                <a:latin typeface="Arial"/>
+                <a:ea typeface="微軟正黑體"/>
+              </a:rPr>
+              <a:t>[19]</a:t>
+            </a:r>
+          </a:p>
+        </p:txBody>
+      </p:sp>
+      <p:sp>
+        <p:nvSpPr>
+          <p:cNvPr id="44" name="Rectangle 43"/>
+          <p:cNvSpPr/>
+          <p:nvPr/>
+        </p:nvSpPr>
+        <p:spPr>
+          <a:xfrm>
+            <a:off x="6583680" y="4242816"/>
+            <a:ext cx="5257800" cy="384048"/>
+          </a:xfrm>
+          <a:prstGeom prst="rect">
+            <a:avLst/>
+          </a:prstGeom>
+          <a:noFill/>
+          <a:ln>
+            <a:noFill/>
+          </a:ln>
+          <a:effectLst/>
+        </p:spPr>
+        <p:style>
+          <a:lnRef idx="1">
+            <a:schemeClr val="accent1"/>
+          </a:lnRef>
+          <a:fillRef idx="3">
+            <a:schemeClr val="accent1"/>
+          </a:fillRef>
+          <a:effectRef idx="2">
+            <a:schemeClr val="accent1"/>
+          </a:effectRef>
+          <a:fontRef idx="minor">
+            <a:schemeClr val="lt1"/>
+          </a:fontRef>
+        </p:style>
+        <p:txBody>
+          <a:bodyPr rtlCol="0" anchor="ctr" wrap="square" lIns="18288" rIns="18288" tIns="18288" bIns="18288"/>
+          <a:lstStyle/>
+          <a:p>
+            <a:pPr algn="l">
+              <a:spcAft>
+                <a:spcPts val="200"/>
+              </a:spcAft>
+            </a:pPr>
+            <a:r>
+              <a:rPr sz="1000" b="0" u="sng">
+                <a:solidFill>
+                  <a:srgbClr val="000000"/>
+                </a:solidFill>
+                <a:latin typeface="Arial"/>
+                <a:ea typeface="微軟正黑體"/>
+                <a:hlinkClick r:id="rId20"/>
+              </a:rPr>
+              <a:t>《保險業作業委外使用雲端服務自律規範》</a:t>
+            </a:r>
+          </a:p>
+          <a:p>
+            <a:pPr algn="l">
+              <a:spcAft>
+                <a:spcPts val="200"/>
+              </a:spcAft>
+            </a:pPr>
+            <a:r>
+              <a:rPr sz="850" b="0">
+                <a:solidFill>
+                  <a:srgbClr val="595959"/>
+                </a:solidFill>
+                <a:latin typeface="Arial"/>
+                <a:ea typeface="微軟正黑體"/>
+              </a:rPr>
+              <a:t>核心與雲端｜壽險／產險公會，2026-06 修正</a:t>
+            </a:r>
+          </a:p>
+        </p:txBody>
+      </p:sp>
+      <p:sp>
+        <p:nvSpPr>
+          <p:cNvPr id="45" name="Rectangle 44"/>
+          <p:cNvSpPr/>
+          <p:nvPr/>
+        </p:nvSpPr>
+        <p:spPr>
+          <a:xfrm>
+            <a:off x="6172200" y="4672583"/>
+            <a:ext cx="411480" cy="384048"/>
+          </a:xfrm>
+          <a:prstGeom prst="rect">
+            <a:avLst/>
+          </a:prstGeom>
+          <a:noFill/>
+          <a:ln>
+            <a:noFill/>
+          </a:ln>
+          <a:effectLst/>
+        </p:spPr>
+        <p:style>
+          <a:lnRef idx="1">
+            <a:schemeClr val="accent1"/>
+          </a:lnRef>
+          <a:fillRef idx="3">
+            <a:schemeClr val="accent1"/>
+          </a:fillRef>
+          <a:effectRef idx="2">
+            <a:schemeClr val="accent1"/>
+          </a:effectRef>
+          <a:fontRef idx="minor">
+            <a:schemeClr val="lt1"/>
+          </a:fontRef>
+        </p:style>
+        <p:txBody>
+          <a:bodyPr rtlCol="0" anchor="ctr" wrap="square" lIns="18288" rIns="18288" tIns="18288" bIns="18288"/>
+          <a:lstStyle/>
+          <a:p>
+            <a:pPr algn="l">
+              <a:spcAft>
+                <a:spcPts val="200"/>
+              </a:spcAft>
+            </a:pPr>
+            <a:r>
+              <a:rPr sz="1000" b="1">
+                <a:solidFill>
+                  <a:srgbClr val="FD5108"/>
+                </a:solidFill>
+                <a:latin typeface="Arial"/>
+                <a:ea typeface="微軟正黑體"/>
+              </a:rPr>
+              <a:t>[20]</a:t>
+            </a:r>
+          </a:p>
+        </p:txBody>
+      </p:sp>
+      <p:sp>
+        <p:nvSpPr>
+          <p:cNvPr id="46" name="Rectangle 45"/>
+          <p:cNvSpPr/>
+          <p:nvPr/>
+        </p:nvSpPr>
+        <p:spPr>
+          <a:xfrm>
+            <a:off x="6583680" y="4672583"/>
+            <a:ext cx="5257800" cy="384048"/>
+          </a:xfrm>
+          <a:prstGeom prst="rect">
+            <a:avLst/>
+          </a:prstGeom>
+          <a:noFill/>
+          <a:ln>
+            <a:noFill/>
+          </a:ln>
+          <a:effectLst/>
+        </p:spPr>
+        <p:style>
+          <a:lnRef idx="1">
+            <a:schemeClr val="accent1"/>
+          </a:lnRef>
+          <a:fillRef idx="3">
+            <a:schemeClr val="accent1"/>
+          </a:fillRef>
+          <a:effectRef idx="2">
+            <a:schemeClr val="accent1"/>
+          </a:effectRef>
+          <a:fontRef idx="minor">
+            <a:schemeClr val="lt1"/>
+          </a:fontRef>
+        </p:style>
+        <p:txBody>
+          <a:bodyPr rtlCol="0" anchor="ctr" wrap="square" lIns="18288" rIns="18288" tIns="18288" bIns="18288"/>
+          <a:lstStyle/>
+          <a:p>
+            <a:pPr algn="l">
+              <a:spcAft>
+                <a:spcPts val="200"/>
+              </a:spcAft>
+            </a:pPr>
+            <a:r>
+              <a:rPr sz="1000" b="0" u="sng">
+                <a:solidFill>
+                  <a:srgbClr val="000000"/>
+                </a:solidFill>
+                <a:latin typeface="Arial"/>
+                <a:ea typeface="微軟正黑體"/>
+                <a:hlinkClick r:id="rId21"/>
+              </a:rPr>
+              <a:t>SONAR 2025：How deepfakes, disinformation and AI amplify insurance fraud</a:t>
+            </a:r>
+          </a:p>
+          <a:p>
+            <a:pPr algn="l">
+              <a:spcAft>
+                <a:spcPts val="200"/>
+              </a:spcAft>
+            </a:pPr>
+            <a:r>
+              <a:rPr sz="850" b="0">
+                <a:solidFill>
+                  <a:srgbClr val="595959"/>
+                </a:solidFill>
+                <a:latin typeface="Arial"/>
+                <a:ea typeface="微軟正黑體"/>
+              </a:rPr>
+              <a:t>深偽反詐欺｜Swiss Re Institute，2025-06</a:t>
+            </a:r>
+          </a:p>
+        </p:txBody>
+      </p:sp>
+      <p:sp>
+        <p:nvSpPr>
+          <p:cNvPr id="47" name="Rectangle 46"/>
+          <p:cNvSpPr/>
+          <p:nvPr/>
+        </p:nvSpPr>
+        <p:spPr>
+          <a:xfrm>
+            <a:off x="6172200" y="5102352"/>
+            <a:ext cx="411480" cy="384048"/>
+          </a:xfrm>
+          <a:prstGeom prst="rect">
+            <a:avLst/>
+          </a:prstGeom>
+          <a:noFill/>
+          <a:ln>
+            <a:noFill/>
+          </a:ln>
+          <a:effectLst/>
+        </p:spPr>
+        <p:style>
+          <a:lnRef idx="1">
+            <a:schemeClr val="accent1"/>
+          </a:lnRef>
+          <a:fillRef idx="3">
+            <a:schemeClr val="accent1"/>
+          </a:fillRef>
+          <a:effectRef idx="2">
+            <a:schemeClr val="accent1"/>
+          </a:effectRef>
+          <a:fontRef idx="minor">
+            <a:schemeClr val="lt1"/>
+          </a:fontRef>
+        </p:style>
+        <p:txBody>
+          <a:bodyPr rtlCol="0" anchor="ctr" wrap="square" lIns="18288" rIns="18288" tIns="18288" bIns="18288"/>
+          <a:lstStyle/>
+          <a:p>
+            <a:pPr algn="l">
+              <a:spcAft>
+                <a:spcPts val="200"/>
+              </a:spcAft>
+            </a:pPr>
+            <a:r>
+              <a:rPr sz="1000" b="1">
+                <a:solidFill>
+                  <a:srgbClr val="FD5108"/>
+                </a:solidFill>
+                <a:latin typeface="Arial"/>
+                <a:ea typeface="微軟正黑體"/>
+              </a:rPr>
+              <a:t>[21]</a:t>
+            </a:r>
+          </a:p>
+        </p:txBody>
+      </p:sp>
+      <p:sp>
+        <p:nvSpPr>
+          <p:cNvPr id="48" name="Rectangle 47"/>
+          <p:cNvSpPr/>
+          <p:nvPr/>
+        </p:nvSpPr>
+        <p:spPr>
+          <a:xfrm>
+            <a:off x="6583680" y="5102352"/>
+            <a:ext cx="5257800" cy="384048"/>
+          </a:xfrm>
+          <a:prstGeom prst="rect">
+            <a:avLst/>
+          </a:prstGeom>
+          <a:noFill/>
+          <a:ln>
+            <a:noFill/>
+          </a:ln>
+          <a:effectLst/>
+        </p:spPr>
+        <p:style>
+          <a:lnRef idx="1">
+            <a:schemeClr val="accent1"/>
+          </a:lnRef>
+          <a:fillRef idx="3">
+            <a:schemeClr val="accent1"/>
+          </a:fillRef>
+          <a:effectRef idx="2">
+            <a:schemeClr val="accent1"/>
+          </a:effectRef>
+          <a:fontRef idx="minor">
+            <a:schemeClr val="lt1"/>
+          </a:fontRef>
+        </p:style>
+        <p:txBody>
+          <a:bodyPr rtlCol="0" anchor="ctr" wrap="square" lIns="18288" rIns="18288" tIns="18288" bIns="18288"/>
+          <a:lstStyle/>
+          <a:p>
+            <a:pPr algn="l">
+              <a:spcAft>
+                <a:spcPts val="200"/>
+              </a:spcAft>
+            </a:pPr>
+            <a:r>
+              <a:rPr sz="1000" b="0" u="sng">
+                <a:solidFill>
+                  <a:srgbClr val="000000"/>
+                </a:solidFill>
+                <a:latin typeface="Arial"/>
+                <a:ea typeface="微軟正黑體"/>
+                <a:hlinkClick r:id="rId22"/>
+              </a:rPr>
+              <a:t>Deepfakes put insurers in deep water</a:t>
+            </a:r>
+          </a:p>
+          <a:p>
+            <a:pPr algn="l">
+              <a:spcAft>
+                <a:spcPts val="200"/>
+              </a:spcAft>
+            </a:pPr>
+            <a:r>
+              <a:rPr sz="850" b="0">
+                <a:solidFill>
+                  <a:srgbClr val="595959"/>
+                </a:solidFill>
+                <a:latin typeface="Arial"/>
+                <a:ea typeface="微軟正黑體"/>
+              </a:rPr>
+              <a:t>深偽反詐欺｜CAS Actuarial Review，2026-05／06</a:t>
+            </a:r>
+          </a:p>
+        </p:txBody>
+      </p:sp>
+      <p:sp>
+        <p:nvSpPr>
+          <p:cNvPr id="49" name="Rectangle 48"/>
+          <p:cNvSpPr/>
+          <p:nvPr/>
+        </p:nvSpPr>
+        <p:spPr>
+          <a:xfrm>
+            <a:off x="6172200" y="5532119"/>
+            <a:ext cx="411480" cy="384048"/>
+          </a:xfrm>
+          <a:prstGeom prst="rect">
+            <a:avLst/>
+          </a:prstGeom>
+          <a:noFill/>
+          <a:ln>
+            <a:noFill/>
+          </a:ln>
+          <a:effectLst/>
+        </p:spPr>
+        <p:style>
+          <a:lnRef idx="1">
+            <a:schemeClr val="accent1"/>
+          </a:lnRef>
+          <a:fillRef idx="3">
+            <a:schemeClr val="accent1"/>
+          </a:fillRef>
+          <a:effectRef idx="2">
+            <a:schemeClr val="accent1"/>
+          </a:effectRef>
+          <a:fontRef idx="minor">
+            <a:schemeClr val="lt1"/>
+          </a:fontRef>
+        </p:style>
+        <p:txBody>
+          <a:bodyPr rtlCol="0" anchor="ctr" wrap="square" lIns="18288" rIns="18288" tIns="18288" bIns="18288"/>
+          <a:lstStyle/>
+          <a:p>
+            <a:pPr algn="l">
+              <a:spcAft>
+                <a:spcPts val="200"/>
+              </a:spcAft>
+            </a:pPr>
+            <a:r>
+              <a:rPr sz="1000" b="1">
+                <a:solidFill>
+                  <a:srgbClr val="FD5108"/>
+                </a:solidFill>
+                <a:latin typeface="Arial"/>
+                <a:ea typeface="微軟正黑體"/>
+              </a:rPr>
+              <a:t>[22]</a:t>
+            </a:r>
+          </a:p>
+        </p:txBody>
+      </p:sp>
+      <p:sp>
+        <p:nvSpPr>
+          <p:cNvPr id="50" name="Rectangle 49"/>
+          <p:cNvSpPr/>
+          <p:nvPr/>
+        </p:nvSpPr>
+        <p:spPr>
+          <a:xfrm>
+            <a:off x="6583680" y="5532119"/>
+            <a:ext cx="5257800" cy="384048"/>
+          </a:xfrm>
+          <a:prstGeom prst="rect">
+            <a:avLst/>
+          </a:prstGeom>
+          <a:noFill/>
+          <a:ln>
+            <a:noFill/>
+          </a:ln>
+          <a:effectLst/>
+        </p:spPr>
+        <p:style>
+          <a:lnRef idx="1">
+            <a:schemeClr val="accent1"/>
+          </a:lnRef>
+          <a:fillRef idx="3">
+            <a:schemeClr val="accent1"/>
+          </a:fillRef>
+          <a:effectRef idx="2">
+            <a:schemeClr val="accent1"/>
+          </a:effectRef>
+          <a:fontRef idx="minor">
+            <a:schemeClr val="lt1"/>
+          </a:fontRef>
+        </p:style>
+        <p:txBody>
+          <a:bodyPr rtlCol="0" anchor="ctr" wrap="square" lIns="18288" rIns="18288" tIns="18288" bIns="18288"/>
+          <a:lstStyle/>
+          <a:p>
+            <a:pPr algn="l">
+              <a:spcAft>
+                <a:spcPts val="200"/>
+              </a:spcAft>
+            </a:pPr>
+            <a:r>
+              <a:rPr sz="1000" b="0" u="sng">
+                <a:solidFill>
+                  <a:srgbClr val="000000"/>
+                </a:solidFill>
+                <a:latin typeface="Arial"/>
+                <a:ea typeface="微軟正黑體"/>
+                <a:hlinkClick r:id="rId23"/>
+              </a:rPr>
+              <a:t>Deepfakes: A growing threat to digital media integrity for insurers</a:t>
+            </a:r>
+          </a:p>
+          <a:p>
+            <a:pPr algn="l">
+              <a:spcAft>
+                <a:spcPts val="200"/>
+              </a:spcAft>
+            </a:pPr>
+            <a:r>
+              <a:rPr sz="850" b="0">
+                <a:solidFill>
+                  <a:srgbClr val="595959"/>
+                </a:solidFill>
+                <a:latin typeface="Arial"/>
+                <a:ea typeface="微軟正黑體"/>
+              </a:rPr>
+              <a:t>深偽反詐欺｜Verisk</a:t>
+            </a:r>
+          </a:p>
+        </p:txBody>
+      </p:sp>
+      <p:sp>
+        <p:nvSpPr>
+          <p:cNvPr id="51" name="Rectangle 50"/>
+          <p:cNvSpPr/>
+          <p:nvPr/>
+        </p:nvSpPr>
+        <p:spPr>
+          <a:xfrm>
+            <a:off x="411480" y="6053328"/>
+            <a:ext cx="11384280" cy="320040"/>
+          </a:xfrm>
+          <a:prstGeom prst="rect">
+            <a:avLst/>
+          </a:prstGeom>
+          <a:noFill/>
+          <a:ln>
+            <a:noFill/>
+          </a:ln>
+          <a:effectLst/>
+        </p:spPr>
+        <p:style>
+          <a:lnRef idx="1">
+            <a:schemeClr val="accent1"/>
+          </a:lnRef>
+          <a:fillRef idx="3">
+            <a:schemeClr val="accent1"/>
+          </a:fillRef>
+          <a:effectRef idx="2">
+            <a:schemeClr val="accent1"/>
+          </a:effectRef>
+          <a:fontRef idx="minor">
+            <a:schemeClr val="lt1"/>
+          </a:fontRef>
+        </p:style>
+        <p:txBody>
+          <a:bodyPr rtlCol="0" anchor="t" wrap="square" lIns="27432" rIns="27432" tIns="27432" bIns="27432"/>
+          <a:lstStyle/>
+          <a:p>
+            <a:pPr algn="l">
+              <a:spcAft>
+                <a:spcPts val="200"/>
+              </a:spcAft>
+            </a:pPr>
+            <a:r>
+              <a:rPr sz="900" b="0">
+                <a:solidFill>
+                  <a:srgbClr val="595959"/>
+                </a:solidFill>
+                <a:latin typeface="Arial"/>
+                <a:ea typeface="微軟正黑體"/>
+              </a:rPr>
+              <a:t>※ 取自原研究連結庫，網路搜尋未能確認確切網址，引用前請點開確認。競爭者官網連結見第 3 頁。</a:t>
             </a:r>
           </a:p>
         </p:txBody>
